--- a/PS08/slides/PS08.pptx
+++ b/PS08/slides/PS08.pptx
@@ -31,6 +31,8 @@
     <p:sldId id="276" r:id="rId29"/>
     <p:sldId id="277" r:id="rId30"/>
     <p:sldId id="278" r:id="rId31"/>
+    <p:sldId id="279" r:id="rId32"/>
+    <p:sldId id="280" r:id="rId33"/>
   </p:sldIdLst>
   <p:sldSz cx="12192000" cy="6858000"/>
   <p:notesSz cx="6858000" cy="9144000"/>
@@ -2300,7 +2302,7 @@
           <a:lstStyle/>
           <a:p>
             <a:r>
-              <a:t>Load-Linked reads a value and starts watching the address. Store-Conditional writes only if nobody wrote that address in between. The lock spins on Load-Linked until the flag is free, then tries to claim it; if the store fails, someone else won and the thread starts over.</a:t>
+              <a:t>Part two: Load-Linked and Store-Conditional, a pair of hardware instructions.</a:t>
             </a:r>
           </a:p>
         </p:txBody>
@@ -2370,7 +2372,7 @@
           <a:lstStyle/>
           <a:p>
             <a:r>
-              <a:t>Two threads may both load-link a zero, but only the first store-conditional succeeds; the second sees that the address changed and fails. We ran the AArch64 build under qemu with 4 threads: nothing was lost in 3 of 3 runs. The disassembly shows the real ldaxr and stxr instructions.</a:t>
+              <a:t>Load-Linked reads a value and starts watching the address. Store-Conditional writes only if nobody wrote that address in between. The lock spins on Load-Linked until the flag is free, then tries to claim it; if the store fails, someone else won and the thread starts over.</a:t>
             </a:r>
           </a:p>
         </p:txBody>
@@ -2440,7 +2442,7 @@
           <a:lstStyle/>
           <a:p>
             <a:r>
-              <a:t>qemu emulates the CPU, so its speed means nothing; we time the x86 build, which runs the same loop with compare-and-swap standing in for the LL/SC pair. It behaves like the test-and-set lock from the lecture: fast alone, slower as threads fight over one cache line.</a:t>
+              <a:t>Two threads may both load-link a zero, but only the first store-conditional succeeds; the second sees that the address changed and fails. We ran the AArch64 build under qemu with 4 threads: nothing was lost in 3 of 3 runs. The disassembly shows the real ldaxr and stxr instructions.</a:t>
             </a:r>
           </a:p>
         </p:txBody>
@@ -2510,7 +2512,7 @@
           <a:lstStyle/>
           <a:p>
             <a:r>
-              <a:t>Nothing orders the waiters: whichever store-conditional lands first wins. With eight threads on one CPU a thread was starved outright. The lock also depends on the hardware, which x86 does not have.</a:t>
+              <a:t>qemu emulates the CPU, so its speed means nothing; we time the x86 build, which runs the same loop with compare-and-swap standing in for the LL/SC pair. It behaves like the test-and-set lock from the lecture: fast alone, slower as threads fight over one cache line.</a:t>
             </a:r>
           </a:p>
         </p:txBody>
@@ -2580,7 +2582,7 @@
           <a:lstStyle/>
           <a:p>
             <a:r>
-              <a:t>Part three, the lock not covered in the lecture: Lamport's bakery algorithm.</a:t>
+              <a:t>Nothing orders the waiters: whichever store-conditional lands first wins. With eight threads on one CPU a thread was starved outright. The lock also depends on the hardware, which x86 does not have.</a:t>
             </a:r>
           </a:p>
         </p:txBody>
@@ -2650,7 +2652,7 @@
           <a:lstStyle/>
           <a:p>
             <a:r>
-              <a:t>The bakery algorithm works like taking a number at a bakery counter. Each thread takes one more than the largest number it sees, and the smallest number is served first. Two threads choosing at the same moment can get the same number, so the lower thread id breaks the tie.</a:t>
+              <a:t>Part three, the lock not covered in the lecture: Lamport's bakery algorithm.</a:t>
             </a:r>
           </a:p>
         </p:txBody>
@@ -2720,7 +2722,7 @@
           <a:lstStyle/>
           <a:p>
             <a:r>
-              <a:t>The pairs of number and thread id are all different, so they put the waiting threads in one order. A thread only enters once every thread ahead of it has left. All 24 bakery runs finished with nothing lost.</a:t>
+              <a:t>The bakery algorithm works like taking a number at a bakery counter. Each thread takes one more than the largest number it sees, and the smallest number is served first. Two threads choosing at the same moment can get the same number, so the lower thread id breaks the tie.</a:t>
             </a:r>
           </a:p>
         </p:txBody>
@@ -2790,7 +2792,7 @@
           <a:lstStyle/>
           <a:p>
             <a:r>
-              <a:t>Every acquisition reads every thread's number and choosing flag, so the cost grows with the number of threads, and each entry is a cache line shared with other cores. On one CPU each handoff waits until the next thread in line is scheduled.</a:t>
+              <a:t>The pairs of number and thread id are all different, so they put the waiting threads in one order. A thread only enters once every thread ahead of it has left. All 24 bakery runs finished with nothing lost.</a:t>
             </a:r>
           </a:p>
         </p:txBody>
@@ -2860,7 +2862,7 @@
           <a:lstStyle/>
           <a:p>
             <a:r>
-              <a:t>Bakery is first-come, first-served, and it was the fairest lock we measured at eight threads. Its costs are linear time and space in the number of threads and ticket numbers that keep growing while threads keep contending.</a:t>
+              <a:t>Every acquisition reads every thread's number and choosing flag, so the cost grows with the number of threads, and each entry is a cache line shared with other cores. On one CPU each handoff waits until the next thread in line is scheduled.</a:t>
             </a:r>
           </a:p>
         </p:txBody>
@@ -2930,7 +2932,7 @@
           <a:lstStyle/>
           <a:p>
             <a:r>
-              <a:t>Last part: the three locks side by side, with two locks from the lecture as references.</a:t>
+              <a:t>Bakery is first-come, first-served, and it was the fairest lock we measured at eight threads. Its costs are linear time and space in the number of threads and ticket numbers that keep growing while threads keep contending.</a:t>
             </a:r>
           </a:p>
         </p:txBody>
@@ -3000,7 +3002,7 @@
           <a:lstStyle/>
           <a:p>
             <a:r>
-              <a:t>Each member presents one lock; the last part compares all three.</a:t>
+              <a:t>There are six of us. One member explains how we measured, three members each present one lock, one compares them, and one concludes.</a:t>
             </a:r>
           </a:p>
         </p:txBody>
@@ -3070,7 +3072,7 @@
           <a:lstStyle/>
           <a:p>
             <a:r>
-              <a:t>On all 8 CPUs, pthread_mutex was fastest at eight threads and Bakery slowest. On one CPU the spinning locks waste time slices, while the mutex puts waiting threads to sleep.</a:t>
+              <a:t>Now the three locks side by side, with two locks from the lecture as references.</a:t>
             </a:r>
           </a:p>
         </p:txBody>
@@ -3140,7 +3142,7 @@
           <a:lstStyle/>
           <a:p>
             <a:r>
-              <a:t>This table puts the three locks and the two references on one page, each at the most threads it supports. Fairness and speed pull in opposite directions: the fair software locks are slow, the fast hardware spin locks are unfair.</a:t>
+              <a:t>On all 8 CPUs, pthread_mutex was fastest at eight threads and Bakery slowest. On one CPU the spinning locks waste time slices, while the mutex puts waiting threads to sleep.</a:t>
             </a:r>
           </a:p>
         </p:txBody>
@@ -3210,7 +3212,7 @@
           <a:lstStyle/>
           <a:p>
             <a:r>
-              <a:t>All three locks provide mutual exclusion and avoid deadlock, but the two software locks only do so on today's CPUs with memory fences. Software locks are fair but slow and limited; the hardware lock is fast but unfair. Real systems combine a hardware atomic with sleeping in the kernel, which is what pthread_mutex does.</a:t>
+              <a:t>This table puts the three locks and the two references on one page, each at the most threads it supports. Fairness and speed pull in opposite directions: the fair software locks are slow, the fast hardware spin locks are unfair.</a:t>
             </a:r>
           </a:p>
         </p:txBody>
@@ -3280,6 +3282,146 @@
           <a:lstStyle/>
           <a:p>
             <a:r>
+              <a:t>Last part: what the measurements tell us, and where the material comes from.</a:t>
+            </a:r>
+          </a:p>
+        </p:txBody>
+      </p:sp>
+      <p:sp>
+        <p:nvSpPr>
+          <p:cNvPr id="4" name="Slide Number Placeholder 3"/>
+          <p:cNvSpPr>
+            <a:spLocks noGrp="1"/>
+          </p:cNvSpPr>
+          <p:nvPr>
+            <p:ph type="sldNum" idx="5" sz="quarter"/>
+          </p:nvPr>
+        </p:nvSpPr>
+        <p:spPr/>
+      </p:sp>
+    </p:spTree>
+  </p:cSld>
+  <p:clrMapOvr>
+    <a:masterClrMapping/>
+  </p:clrMapOvr>
+</p:notes>
+</file>
+
+<file path=ppt/notesSlides/notesSlide24.xml><?xml version="1.0" encoding="utf-8"?>
+<p:notes xmlns:a="http://schemas.openxmlformats.org/drawingml/2006/main" xmlns:p="http://schemas.openxmlformats.org/presentationml/2006/main" xmlns:r="http://schemas.openxmlformats.org/officeDocument/2006/relationships">
+  <p:cSld>
+    <p:spTree>
+      <p:nvGrpSpPr>
+        <p:cNvPr id="1" name=""/>
+        <p:cNvGrpSpPr/>
+        <p:nvPr/>
+      </p:nvGrpSpPr>
+      <p:grpSpPr>
+        <a:xfrm>
+          <a:off x="0" y="0"/>
+          <a:ext cx="0" cy="0"/>
+          <a:chOff x="0" y="0"/>
+          <a:chExt cx="0" cy="0"/>
+        </a:xfrm>
+      </p:grpSpPr>
+      <p:sp>
+        <p:nvSpPr>
+          <p:cNvPr id="2" name="Slide Image Placeholder 1"/>
+          <p:cNvSpPr>
+            <a:spLocks noGrp="1"/>
+          </p:cNvSpPr>
+          <p:nvPr>
+            <p:ph type="sldImg" idx="2"/>
+          </p:nvPr>
+        </p:nvSpPr>
+        <p:spPr/>
+      </p:sp>
+      <p:sp>
+        <p:nvSpPr>
+          <p:cNvPr id="3" name="Notes Placeholder 2"/>
+          <p:cNvSpPr>
+            <a:spLocks noGrp="1"/>
+          </p:cNvSpPr>
+          <p:nvPr>
+            <p:ph type="body" idx="3" sz="quarter"/>
+          </p:nvPr>
+        </p:nvSpPr>
+        <p:spPr/>
+        <p:txBody>
+          <a:bodyPr/>
+          <a:lstStyle/>
+          <a:p>
+            <a:r>
+              <a:t>All three locks provide mutual exclusion and avoid deadlock, but the two software locks only do so on today's CPUs with memory fences. Software locks are fair but slow and limited; the hardware lock is fast but unfair. Real systems combine a hardware atomic with sleeping in the kernel, which is what pthread_mutex does.</a:t>
+            </a:r>
+          </a:p>
+        </p:txBody>
+      </p:sp>
+      <p:sp>
+        <p:nvSpPr>
+          <p:cNvPr id="4" name="Slide Number Placeholder 3"/>
+          <p:cNvSpPr>
+            <a:spLocks noGrp="1"/>
+          </p:cNvSpPr>
+          <p:nvPr>
+            <p:ph type="sldNum" idx="5" sz="quarter"/>
+          </p:nvPr>
+        </p:nvSpPr>
+        <p:spPr/>
+      </p:sp>
+    </p:spTree>
+  </p:cSld>
+  <p:clrMapOvr>
+    <a:masterClrMapping/>
+  </p:clrMapOvr>
+</p:notes>
+</file>
+
+<file path=ppt/notesSlides/notesSlide25.xml><?xml version="1.0" encoding="utf-8"?>
+<p:notes xmlns:a="http://schemas.openxmlformats.org/drawingml/2006/main" xmlns:p="http://schemas.openxmlformats.org/presentationml/2006/main" xmlns:r="http://schemas.openxmlformats.org/officeDocument/2006/relationships">
+  <p:cSld>
+    <p:spTree>
+      <p:nvGrpSpPr>
+        <p:cNvPr id="1" name=""/>
+        <p:cNvGrpSpPr/>
+        <p:nvPr/>
+      </p:nvGrpSpPr>
+      <p:grpSpPr>
+        <a:xfrm>
+          <a:off x="0" y="0"/>
+          <a:ext cx="0" cy="0"/>
+          <a:chOff x="0" y="0"/>
+          <a:chExt cx="0" cy="0"/>
+        </a:xfrm>
+      </p:grpSpPr>
+      <p:sp>
+        <p:nvSpPr>
+          <p:cNvPr id="2" name="Slide Image Placeholder 1"/>
+          <p:cNvSpPr>
+            <a:spLocks noGrp="1"/>
+          </p:cNvSpPr>
+          <p:nvPr>
+            <p:ph type="sldImg" idx="2"/>
+          </p:nvPr>
+        </p:nvSpPr>
+        <p:spPr/>
+      </p:sp>
+      <p:sp>
+        <p:nvSpPr>
+          <p:cNvPr id="3" name="Notes Placeholder 2"/>
+          <p:cNvSpPr>
+            <a:spLocks noGrp="1"/>
+          </p:cNvSpPr>
+          <p:nvPr>
+            <p:ph type="body" idx="3" sz="quarter"/>
+          </p:nvPr>
+        </p:nvSpPr>
+        <p:spPr/>
+        <p:txBody>
+          <a:bodyPr/>
+          <a:lstStyle/>
+          <a:p>
+            <a:r>
               <a:t>These are the sources for the algorithms and the instructions.</a:t>
             </a:r>
           </a:p>
@@ -3350,7 +3492,7 @@
           <a:lstStyle/>
           <a:p>
             <a:r>
-              <a:t>We use the four metrics from Lecture 8. Every lock runs the same loop for 1 second per run: lock, add one to a shared counter, unlock. If the counter ends lower than the number of acquisitions, two threads were inside together. Each setting runs 3 times and we report the median.</a:t>
+              <a:t>Before the locks themselves: the metrics we use and how we measured them.</a:t>
             </a:r>
           </a:p>
         </p:txBody>
@@ -3420,7 +3562,7 @@
           <a:lstStyle/>
           <a:p>
             <a:r>
-              <a:t>Part one: Peterson's algorithm, a lock built from ordinary loads and stores.</a:t>
+              <a:t>We use the four metrics from Lecture 8. Every lock runs the same loop for 1 second per run: lock, add one to a shared counter, unlock. If the counter ends lower than the number of acquisitions, two threads were inside together. Each setting runs 3 times and we report the median.</a:t>
             </a:r>
           </a:p>
         </p:txBody>
@@ -3490,7 +3632,7 @@
           <a:lstStyle/>
           <a:p>
             <a:r>
-              <a:t>Peterson's algorithm needs no special instruction. Each thread raises its flag to say it wants in, then politely gives the turn to the other thread. The thread that wrote turn last is the one that waits.</a:t>
+              <a:t>Part one: Peterson's algorithm, a lock built from ordinary loads and stores.</a:t>
             </a:r>
           </a:p>
         </p:txBody>
@@ -3560,7 +3702,7 @@
           <a:lstStyle/>
           <a:p>
             <a:r>
-              <a:t>On paper Peterson is correct: both threads inside would need turn to hold two values at once. On a real x86 CPU the textbook code fails, because a load may overtake an earlier store. Without the fence we lost updates in 5 of 5 runs; on one CPU, or with the fence, nothing was lost.</a:t>
+              <a:t>Peterson's algorithm needs no special instruction. Each thread raises its flag to say it wants in, then politely gives the turn to the other thread. The thread that wrote turn last is the one that waits.</a:t>
             </a:r>
           </a:p>
         </p:txBody>
@@ -3630,7 +3772,7 @@
           <a:lstStyle/>
           <a:p>
             <a:r>
-              <a:t>With one thread there is no contention and the lock is cheap. With two threads on separate CPUs, flag and turn bounce between the cores' caches. Pinned to one CPU it collapses: a waiting thread spins away its whole time slice, as the lecture warned.</a:t>
+              <a:t>On paper Peterson is correct: both threads inside would need turn to hold two values at once. On a real x86 CPU the textbook code fails, because a load may overtake an earlier store. Without the fence we lost updates in 5 of 5 runs; on one CPU, or with the fence, nothing was lost.</a:t>
             </a:r>
           </a:p>
         </p:txBody>
@@ -3700,7 +3842,7 @@
           <a:lstStyle/>
           <a:p>
             <a:r>
-              <a:t>With both threads on their own CPU, turn hands priority to the other thread, so neither waits for more than one entry of the other; the counts were nearly equal. On one CPU the counts were lopsided because who gets in follows the scheduler. The algorithm also only works for two threads and needs a fence on modern CPUs.</a:t>
+              <a:t>With one thread there is no contention and the lock is cheap. With two threads on separate CPUs, flag and turn bounce between the cores' caches. Pinned to one CPU it collapses: a waiting thread spins away its whole time slice, as the lecture warned.</a:t>
             </a:r>
           </a:p>
         </p:txBody>
@@ -3770,7 +3912,7 @@
           <a:lstStyle/>
           <a:p>
             <a:r>
-              <a:t>Part two: Load-Linked and Store-Conditional, a pair of hardware instructions.</a:t>
+              <a:t>With both threads on their own CPU, turn hands priority to the other thread, so neither waits for more than one entry of the other; the counts were nearly equal. On one CPU the counts were lopsided because who gets in follows the scheduler. The algorithm also only works for two threads and needs a fence on modern CPUs.</a:t>
             </a:r>
           </a:p>
         </p:txBody>
@@ -6739,14 +6881,40 @@
           <a:lstStyle/>
           <a:p>
             <a:r>
-              <a:t>LL/SC: Idea</a:t>
-            </a:r>
-          </a:p>
-        </p:txBody>
-      </p:sp>
-      <p:sp>
-        <p:nvSpPr>
-          <p:cNvPr id="3" name="TextBox 2"/>
+              <a:t>Load-Linked / Store-Conditional</a:t>
+            </a:r>
+          </a:p>
+        </p:txBody>
+      </p:sp>
+      <p:sp>
+        <p:nvSpPr>
+          <p:cNvPr id="3" name="Text Placeholder 2"/>
+          <p:cNvSpPr>
+            <a:spLocks noGrp="1"/>
+          </p:cNvSpPr>
+          <p:nvPr>
+            <p:ph type="body" idx="1"/>
+          </p:nvPr>
+        </p:nvSpPr>
+        <p:spPr/>
+        <p:txBody>
+          <a:bodyPr/>
+          <a:lstStyle/>
+          <a:p>
+            <a:r>
+              <a:t>67070501018</a:t>
+            </a:r>
+          </a:p>
+          <a:p>
+            <a:r>
+              <a:t>Tithinan Sobking</a:t>
+            </a:r>
+          </a:p>
+        </p:txBody>
+      </p:sp>
+      <p:sp>
+        <p:nvSpPr>
+          <p:cNvPr id="4" name="TextBox 3"/>
           <p:cNvSpPr txBox="1"/>
           <p:nvPr/>
         </p:nvSpPr>
@@ -6774,452 +6942,6 @@
                 </a:solidFill>
               </a:rPr>
               <a:t>10</a:t>
-            </a:r>
-          </a:p>
-        </p:txBody>
-      </p:sp>
-      <p:sp>
-        <p:nvSpPr>
-          <p:cNvPr id="4" name="TextBox 3"/>
-          <p:cNvSpPr txBox="1"/>
-          <p:nvPr/>
-        </p:nvSpPr>
-        <p:spPr>
-          <a:xfrm>
-            <a:off x="548640" y="1554480"/>
-            <a:ext cx="4389120" cy="4937760"/>
-          </a:xfrm>
-          <a:prstGeom prst="rect">
-            <a:avLst/>
-          </a:prstGeom>
-          <a:noFill/>
-        </p:spPr>
-        <p:txBody>
-          <a:bodyPr wrap="square">
-            <a:spAutoFit/>
-          </a:bodyPr>
-          <a:lstStyle/>
-          <a:p>
-            <a:pPr>
-              <a:spcAft>
-                <a:spcPts val="800"/>
-              </a:spcAft>
-            </a:pPr>
-            <a:r>
-              <a:rPr sz="1900"/>
-              <a:t>• LoadLinked(p): load *p and watch the address</a:t>
-            </a:r>
-          </a:p>
-          <a:p>
-            <a:pPr>
-              <a:spcAft>
-                <a:spcPts val="800"/>
-              </a:spcAft>
-            </a:pPr>
-            <a:r>
-              <a:rPr sz="1900"/>
-              <a:t>• StoreConditional(p, v): store only if nobody stored to p since the LoadLinked</a:t>
-            </a:r>
-          </a:p>
-          <a:p>
-            <a:pPr>
-              <a:spcAft>
-                <a:spcPts val="800"/>
-              </a:spcAft>
-            </a:pPr>
-            <a:r>
-              <a:rPr sz="1900"/>
-              <a:t>• Lock: spin on LL until 0, then SC 1; if SC fails, start over</a:t>
-            </a:r>
-          </a:p>
-          <a:p>
-            <a:pPr>
-              <a:spcAft>
-                <a:spcPts val="800"/>
-              </a:spcAft>
-            </a:pPr>
-            <a:r>
-              <a:rPr sz="1900"/>
-              <a:t>• MIPS, Alpha, PowerPC, ARM (AArch64: LDXR/STXR)</a:t>
-            </a:r>
-          </a:p>
-          <a:p>
-            <a:pPr>
-              <a:spcAft>
-                <a:spcPts val="800"/>
-              </a:spcAft>
-            </a:pPr>
-            <a:r>
-              <a:rPr sz="1900">
-                <a:solidFill>
-                  <a:srgbClr val="C0392B"/>
-                </a:solidFill>
-              </a:rPr>
-              <a:t>• x86 has no LL/SC — it offers CAS (lock cmpxchg)</a:t>
-            </a:r>
-          </a:p>
-        </p:txBody>
-      </p:sp>
-      <p:sp>
-        <p:nvSpPr>
-          <p:cNvPr id="5" name="TextBox 4"/>
-          <p:cNvSpPr txBox="1"/>
-          <p:nvPr/>
-        </p:nvSpPr>
-        <p:spPr>
-          <a:xfrm>
-            <a:off x="5120640" y="1463040"/>
-            <a:ext cx="6675120" cy="4914900"/>
-          </a:xfrm>
-          <a:prstGeom prst="rect">
-            <a:avLst/>
-          </a:prstGeom>
-          <a:solidFill>
-            <a:srgbClr val="F4F4F4"/>
-          </a:solidFill>
-        </p:spPr>
-        <p:txBody>
-          <a:bodyPr wrap="none">
-            <a:spAutoFit/>
-          </a:bodyPr>
-          <a:lstStyle/>
-          <a:p>
-            <a:pPr>
-              <a:spcAft>
-                <a:spcPts val="0"/>
-              </a:spcAft>
-            </a:pPr>
-            <a:r>
-              <a:rPr sz="1150">
-                <a:latin typeface="Consolas"/>
-              </a:rPr>
-              <a:t>static inline int LoadLinked(volatile int *p)</a:t>
-            </a:r>
-          </a:p>
-          <a:p>
-            <a:pPr>
-              <a:spcAft>
-                <a:spcPts val="0"/>
-              </a:spcAft>
-            </a:pPr>
-            <a:r>
-              <a:rPr sz="1150">
-                <a:latin typeface="Consolas"/>
-              </a:rPr>
-              <a:t>{</a:t>
-            </a:r>
-          </a:p>
-          <a:p>
-            <a:pPr>
-              <a:spcAft>
-                <a:spcPts val="0"/>
-              </a:spcAft>
-            </a:pPr>
-            <a:r>
-              <a:rPr sz="1150">
-                <a:latin typeface="Consolas"/>
-              </a:rPr>
-              <a:t>    int v;</a:t>
-            </a:r>
-          </a:p>
-          <a:p>
-            <a:pPr>
-              <a:spcAft>
-                <a:spcPts val="0"/>
-              </a:spcAft>
-            </a:pPr>
-            <a:r>
-              <a:rPr sz="1150">
-                <a:latin typeface="Consolas"/>
-              </a:rPr>
-              <a:t>    __asm__ volatile("ldaxr %w0, [%1]"</a:t>
-            </a:r>
-          </a:p>
-          <a:p>
-            <a:pPr>
-              <a:spcAft>
-                <a:spcPts val="0"/>
-              </a:spcAft>
-            </a:pPr>
-            <a:r>
-              <a:rPr sz="1150">
-                <a:latin typeface="Consolas"/>
-              </a:rPr>
-              <a:t>                     : "=r"(v) : "r"(p) : "memory");</a:t>
-            </a:r>
-          </a:p>
-          <a:p>
-            <a:pPr>
-              <a:spcAft>
-                <a:spcPts val="0"/>
-              </a:spcAft>
-            </a:pPr>
-            <a:r>
-              <a:rPr sz="1150">
-                <a:latin typeface="Consolas"/>
-              </a:rPr>
-              <a:t>    return v;</a:t>
-            </a:r>
-          </a:p>
-          <a:p>
-            <a:pPr>
-              <a:spcAft>
-                <a:spcPts val="0"/>
-              </a:spcAft>
-            </a:pPr>
-            <a:r>
-              <a:rPr sz="1150">
-                <a:latin typeface="Consolas"/>
-              </a:rPr>
-              <a:t>}</a:t>
-            </a:r>
-          </a:p>
-          <a:p>
-            <a:pPr>
-              <a:spcAft>
-                <a:spcPts val="0"/>
-              </a:spcAft>
-            </a:pPr>
-          </a:p>
-          <a:p>
-            <a:pPr>
-              <a:spcAft>
-                <a:spcPts val="0"/>
-              </a:spcAft>
-            </a:pPr>
-            <a:r>
-              <a:rPr sz="1150">
-                <a:latin typeface="Consolas"/>
-              </a:rPr>
-              <a:t>static inline int StoreConditional(volatile int *p, int v)</a:t>
-            </a:r>
-          </a:p>
-          <a:p>
-            <a:pPr>
-              <a:spcAft>
-                <a:spcPts val="0"/>
-              </a:spcAft>
-            </a:pPr>
-            <a:r>
-              <a:rPr sz="1150">
-                <a:latin typeface="Consolas"/>
-              </a:rPr>
-              <a:t>{</a:t>
-            </a:r>
-          </a:p>
-          <a:p>
-            <a:pPr>
-              <a:spcAft>
-                <a:spcPts val="0"/>
-              </a:spcAft>
-            </a:pPr>
-            <a:r>
-              <a:rPr sz="1150">
-                <a:latin typeface="Consolas"/>
-              </a:rPr>
-              <a:t>    int fail;                  /* stxr: 0 = stored, 1 = failed */</a:t>
-            </a:r>
-          </a:p>
-          <a:p>
-            <a:pPr>
-              <a:spcAft>
-                <a:spcPts val="0"/>
-              </a:spcAft>
-            </a:pPr>
-            <a:r>
-              <a:rPr sz="1150">
-                <a:latin typeface="Consolas"/>
-              </a:rPr>
-              <a:t>    __asm__ volatile("stxr %w0, %w2, [%1]"</a:t>
-            </a:r>
-          </a:p>
-          <a:p>
-            <a:pPr>
-              <a:spcAft>
-                <a:spcPts val="0"/>
-              </a:spcAft>
-            </a:pPr>
-            <a:r>
-              <a:rPr sz="1150">
-                <a:latin typeface="Consolas"/>
-              </a:rPr>
-              <a:t>                     : "=&amp;r"(fail) : "r"(p), "r"(v) : "memory");</a:t>
-            </a:r>
-          </a:p>
-          <a:p>
-            <a:pPr>
-              <a:spcAft>
-                <a:spcPts val="0"/>
-              </a:spcAft>
-            </a:pPr>
-            <a:r>
-              <a:rPr sz="1150">
-                <a:latin typeface="Consolas"/>
-              </a:rPr>
-              <a:t>    return !fail;</a:t>
-            </a:r>
-          </a:p>
-          <a:p>
-            <a:pPr>
-              <a:spcAft>
-                <a:spcPts val="0"/>
-              </a:spcAft>
-            </a:pPr>
-            <a:r>
-              <a:rPr sz="1150">
-                <a:latin typeface="Consolas"/>
-              </a:rPr>
-              <a:t>}</a:t>
-            </a:r>
-          </a:p>
-          <a:p>
-            <a:pPr>
-              <a:spcAft>
-                <a:spcPts val="0"/>
-              </a:spcAft>
-            </a:pPr>
-          </a:p>
-          <a:p>
-            <a:pPr>
-              <a:spcAft>
-                <a:spcPts val="0"/>
-              </a:spcAft>
-            </a:pPr>
-            <a:r>
-              <a:rPr sz="1150">
-                <a:latin typeface="Consolas"/>
-              </a:rPr>
-              <a:t>void lock_acquire(int id)</a:t>
-            </a:r>
-          </a:p>
-          <a:p>
-            <a:pPr>
-              <a:spcAft>
-                <a:spcPts val="0"/>
-              </a:spcAft>
-            </a:pPr>
-            <a:r>
-              <a:rPr sz="1150">
-                <a:latin typeface="Consolas"/>
-              </a:rPr>
-              <a:t>{</a:t>
-            </a:r>
-          </a:p>
-          <a:p>
-            <a:pPr>
-              <a:spcAft>
-                <a:spcPts val="0"/>
-              </a:spcAft>
-            </a:pPr>
-            <a:r>
-              <a:rPr sz="1150">
-                <a:latin typeface="Consolas"/>
-              </a:rPr>
-              <a:t>    (void)id;</a:t>
-            </a:r>
-          </a:p>
-          <a:p>
-            <a:pPr>
-              <a:spcAft>
-                <a:spcPts val="0"/>
-              </a:spcAft>
-            </a:pPr>
-            <a:r>
-              <a:rPr sz="1150">
-                <a:latin typeface="Consolas"/>
-              </a:rPr>
-              <a:t>    while (1) {</a:t>
-            </a:r>
-          </a:p>
-          <a:p>
-            <a:pPr>
-              <a:spcAft>
-                <a:spcPts val="0"/>
-              </a:spcAft>
-            </a:pPr>
-            <a:r>
-              <a:rPr sz="1150">
-                <a:latin typeface="Consolas"/>
-              </a:rPr>
-              <a:t>        while (LoadLinked(&amp;flag))</a:t>
-            </a:r>
-          </a:p>
-          <a:p>
-            <a:pPr>
-              <a:spcAft>
-                <a:spcPts val="0"/>
-              </a:spcAft>
-            </a:pPr>
-            <a:r>
-              <a:rPr sz="1150">
-                <a:latin typeface="Consolas"/>
-              </a:rPr>
-              <a:t>            ;                  /* spin until it is zero */</a:t>
-            </a:r>
-          </a:p>
-          <a:p>
-            <a:pPr>
-              <a:spcAft>
-                <a:spcPts val="0"/>
-              </a:spcAft>
-            </a:pPr>
-            <a:r>
-              <a:rPr sz="1150">
-                <a:latin typeface="Consolas"/>
-              </a:rPr>
-              <a:t>        if (StoreConditional(&amp;flag, 1))</a:t>
-            </a:r>
-          </a:p>
-          <a:p>
-            <a:pPr>
-              <a:spcAft>
-                <a:spcPts val="0"/>
-              </a:spcAft>
-            </a:pPr>
-            <a:r>
-              <a:rPr sz="1150">
-                <a:latin typeface="Consolas"/>
-              </a:rPr>
-              <a:t>            return;            /* no store in between: ours */</a:t>
-            </a:r>
-          </a:p>
-          <a:p>
-            <a:pPr>
-              <a:spcAft>
-                <a:spcPts val="0"/>
-              </a:spcAft>
-            </a:pPr>
-            <a:r>
-              <a:rPr sz="1150">
-                <a:latin typeface="Consolas"/>
-              </a:rPr>
-              <a:t>        /* else another thread won: try again */</a:t>
-            </a:r>
-          </a:p>
-          <a:p>
-            <a:pPr>
-              <a:spcAft>
-                <a:spcPts val="0"/>
-              </a:spcAft>
-            </a:pPr>
-            <a:r>
-              <a:rPr sz="1150">
-                <a:latin typeface="Consolas"/>
-              </a:rPr>
-              <a:t>    }</a:t>
-            </a:r>
-          </a:p>
-          <a:p>
-            <a:pPr>
-              <a:spcAft>
-                <a:spcPts val="0"/>
-              </a:spcAft>
-            </a:pPr>
-            <a:r>
-              <a:rPr sz="1150">
-                <a:latin typeface="Consolas"/>
-              </a:rPr>
-              <a:t>}</a:t>
             </a:r>
           </a:p>
         </p:txBody>
@@ -7258,7 +6980,7 @@
           <a:lstStyle/>
           <a:p>
             <a:r>
-              <a:t>LL/SC: Mutual Exclusion and Deadlock</a:t>
+              <a:t>LL/SC: Idea</a:t>
             </a:r>
           </a:p>
         </p:txBody>
@@ -7305,8 +7027,8 @@
         </p:nvSpPr>
         <p:spPr>
           <a:xfrm>
-            <a:off x="822960" y="1463040"/>
-            <a:ext cx="5760720" cy="5029200"/>
+            <a:off x="548640" y="1554480"/>
+            <a:ext cx="4389120" cy="4937760"/>
           </a:xfrm>
           <a:prstGeom prst="rect">
             <a:avLst/>
@@ -7326,7 +7048,7 @@
             </a:pPr>
             <a:r>
               <a:rPr sz="1900"/>
-              <a:t>• Mutual exclusion: two threads may both LL a 0, but the first SC writes the flag, so the second SC fails</a:t>
+              <a:t>• LoadLinked(p): load *p and watch the address</a:t>
             </a:r>
           </a:p>
           <a:p>
@@ -7337,7 +7059,7 @@
             </a:pPr>
             <a:r>
               <a:rPr sz="1900"/>
-              <a:t>• No deadlock: an SC fails only if another store got in (that thread now holds the lock) or spuriously (e.g. an interrupt) — the loop retries</a:t>
+              <a:t>• StoreConditional(p, v): store only if nobody stored to p since the LoadLinked</a:t>
             </a:r>
           </a:p>
           <a:p>
@@ -7348,7 +7070,33 @@
             </a:pPr>
             <a:r>
               <a:rPr sz="1900"/>
-              <a:t>• AArch64 build under qemu-aarch64 10.2.1, 4 threads: lost = 0 in 3 / 3 runs (5,520,491+ acquisitions each)</a:t>
+              <a:t>• Lock: spin on LL until 0, then SC 1; if SC fails, start over</a:t>
+            </a:r>
+          </a:p>
+          <a:p>
+            <a:pPr>
+              <a:spcAft>
+                <a:spcPts val="800"/>
+              </a:spcAft>
+            </a:pPr>
+            <a:r>
+              <a:rPr sz="1900"/>
+              <a:t>• MIPS, Alpha, PowerPC, ARM (AArch64: LDXR/STXR)</a:t>
+            </a:r>
+          </a:p>
+          <a:p>
+            <a:pPr>
+              <a:spcAft>
+                <a:spcPts val="800"/>
+              </a:spcAft>
+            </a:pPr>
+            <a:r>
+              <a:rPr sz="1900">
+                <a:solidFill>
+                  <a:srgbClr val="C0392B"/>
+                </a:solidFill>
+              </a:rPr>
+              <a:t>• x86 has no LL/SC — it offers CAS (lock cmpxchg)</a:t>
             </a:r>
           </a:p>
         </p:txBody>
@@ -7361,8 +7109,8 @@
         </p:nvSpPr>
         <p:spPr>
           <a:xfrm>
-            <a:off x="6858000" y="1554480"/>
-            <a:ext cx="4937760" cy="2865120"/>
+            <a:off x="5120640" y="1463040"/>
+            <a:ext cx="6675120" cy="4914900"/>
           </a:xfrm>
           <a:prstGeom prst="rect">
             <a:avLst/>
@@ -7383,10 +7131,10 @@
               </a:spcAft>
             </a:pPr>
             <a:r>
-              <a:rPr sz="1600">
+              <a:rPr sz="1150">
                 <a:latin typeface="Consolas"/>
               </a:rPr>
-              <a:t>0000000000400b8c &lt;lock_acquire&gt;:</a:t>
+              <a:t>static inline int LoadLinked(volatile int *p)</a:t>
             </a:r>
           </a:p>
           <a:p>
@@ -7396,10 +7144,10 @@
               </a:spcAft>
             </a:pPr>
             <a:r>
-              <a:rPr sz="1600">
+              <a:rPr sz="1150">
                 <a:latin typeface="Consolas"/>
               </a:rPr>
-              <a:t>adrp x1, 4b1000</a:t>
+              <a:t>{</a:t>
             </a:r>
           </a:p>
           <a:p>
@@ -7409,10 +7157,10 @@
               </a:spcAft>
             </a:pPr>
             <a:r>
-              <a:rPr sz="1600">
+              <a:rPr sz="1150">
                 <a:latin typeface="Consolas"/>
               </a:rPr>
-              <a:t>add x1, x1, #0xb40</a:t>
+              <a:t>    int v;</a:t>
             </a:r>
           </a:p>
           <a:p>
@@ -7422,10 +7170,10 @@
               </a:spcAft>
             </a:pPr>
             <a:r>
-              <a:rPr sz="1600">
+              <a:rPr sz="1150">
                 <a:latin typeface="Consolas"/>
               </a:rPr>
-              <a:t>mov w2, #0x1</a:t>
+              <a:t>    __asm__ volatile("ldaxr %w0, [%1]"</a:t>
             </a:r>
           </a:p>
           <a:p>
@@ -7435,10 +7183,10 @@
               </a:spcAft>
             </a:pPr>
             <a:r>
-              <a:rPr sz="1600">
+              <a:rPr sz="1150">
                 <a:latin typeface="Consolas"/>
               </a:rPr>
-              <a:t>nop</a:t>
+              <a:t>                     : "=r"(v) : "r"(p) : "memory");</a:t>
             </a:r>
           </a:p>
           <a:p>
@@ -7448,10 +7196,10 @@
               </a:spcAft>
             </a:pPr>
             <a:r>
-              <a:rPr sz="1600">
+              <a:rPr sz="1150">
                 <a:latin typeface="Consolas"/>
               </a:rPr>
-              <a:t>nop</a:t>
+              <a:t>    return v;</a:t>
             </a:r>
           </a:p>
           <a:p>
@@ -7461,10 +7209,10 @@
               </a:spcAft>
             </a:pPr>
             <a:r>
-              <a:rPr sz="1600">
+              <a:rPr sz="1150">
                 <a:latin typeface="Consolas"/>
               </a:rPr>
-              <a:t>ldaxr w0, [x1]</a:t>
+              <a:t>}</a:t>
             </a:r>
           </a:p>
           <a:p>
@@ -7473,11 +7221,18 @@
                 <a:spcPts val="0"/>
               </a:spcAft>
             </a:pPr>
-            <a:r>
-              <a:rPr sz="1600">
+          </a:p>
+          <a:p>
+            <a:pPr>
+              <a:spcAft>
+                <a:spcPts val="0"/>
+              </a:spcAft>
+            </a:pPr>
+            <a:r>
+              <a:rPr sz="1150">
                 <a:latin typeface="Consolas"/>
               </a:rPr>
-              <a:t>cbnz w0, 400ba0 &lt;lock_acquire+0x14&gt;</a:t>
+              <a:t>static inline int StoreConditional(volatile int *p, int v)</a:t>
             </a:r>
           </a:p>
           <a:p>
@@ -7487,10 +7242,10 @@
               </a:spcAft>
             </a:pPr>
             <a:r>
-              <a:rPr sz="1600">
+              <a:rPr sz="1150">
                 <a:latin typeface="Consolas"/>
               </a:rPr>
-              <a:t>stxr w0, w2, [x1]</a:t>
+              <a:t>{</a:t>
             </a:r>
           </a:p>
           <a:p>
@@ -7500,10 +7255,10 @@
               </a:spcAft>
             </a:pPr>
             <a:r>
-              <a:rPr sz="1600">
+              <a:rPr sz="1150">
                 <a:latin typeface="Consolas"/>
               </a:rPr>
-              <a:t>cbnz w0, 400ba0 &lt;lock_acquire+0x14&gt;</a:t>
+              <a:t>    int fail;                  /* stxr: 0 = stored, 1 = failed */</a:t>
             </a:r>
           </a:p>
           <a:p>
@@ -7513,48 +7268,199 @@
               </a:spcAft>
             </a:pPr>
             <a:r>
-              <a:rPr sz="1600">
+              <a:rPr sz="1150">
                 <a:latin typeface="Consolas"/>
               </a:rPr>
-              <a:t>ret</a:t>
-            </a:r>
-          </a:p>
-        </p:txBody>
-      </p:sp>
-      <p:sp>
-        <p:nvSpPr>
-          <p:cNvPr id="6" name="TextBox 5"/>
-          <p:cNvSpPr txBox="1"/>
-          <p:nvPr/>
-        </p:nvSpPr>
-        <p:spPr>
-          <a:xfrm>
-            <a:off x="6858000" y="4556760"/>
-            <a:ext cx="4937760" cy="914400"/>
-          </a:xfrm>
-          <a:prstGeom prst="rect">
-            <a:avLst/>
-          </a:prstGeom>
-          <a:noFill/>
-        </p:spPr>
-        <p:txBody>
-          <a:bodyPr wrap="square">
-            <a:spAutoFit/>
-          </a:bodyPr>
-          <a:lstStyle/>
-          <a:p>
-            <a:pPr>
-              <a:spcAft>
-                <a:spcPts val="800"/>
-              </a:spcAft>
-            </a:pPr>
-            <a:r>
-              <a:rPr sz="1500">
-                <a:solidFill>
-                  <a:srgbClr val="C0392B"/>
-                </a:solidFill>
+              <a:t>    __asm__ volatile("stxr %w0, %w2, [%1]"</a:t>
+            </a:r>
+          </a:p>
+          <a:p>
+            <a:pPr>
+              <a:spcAft>
+                <a:spcPts val="0"/>
+              </a:spcAft>
+            </a:pPr>
+            <a:r>
+              <a:rPr sz="1150">
+                <a:latin typeface="Consolas"/>
               </a:rPr>
-              <a:t>ldaxr = Load-Linked, stxr = Store-Conditional (writes 0 to w0 on success)</a:t>
+              <a:t>                     : "=&amp;r"(fail) : "r"(p), "r"(v) : "memory");</a:t>
+            </a:r>
+          </a:p>
+          <a:p>
+            <a:pPr>
+              <a:spcAft>
+                <a:spcPts val="0"/>
+              </a:spcAft>
+            </a:pPr>
+            <a:r>
+              <a:rPr sz="1150">
+                <a:latin typeface="Consolas"/>
+              </a:rPr>
+              <a:t>    return !fail;</a:t>
+            </a:r>
+          </a:p>
+          <a:p>
+            <a:pPr>
+              <a:spcAft>
+                <a:spcPts val="0"/>
+              </a:spcAft>
+            </a:pPr>
+            <a:r>
+              <a:rPr sz="1150">
+                <a:latin typeface="Consolas"/>
+              </a:rPr>
+              <a:t>}</a:t>
+            </a:r>
+          </a:p>
+          <a:p>
+            <a:pPr>
+              <a:spcAft>
+                <a:spcPts val="0"/>
+              </a:spcAft>
+            </a:pPr>
+          </a:p>
+          <a:p>
+            <a:pPr>
+              <a:spcAft>
+                <a:spcPts val="0"/>
+              </a:spcAft>
+            </a:pPr>
+            <a:r>
+              <a:rPr sz="1150">
+                <a:latin typeface="Consolas"/>
+              </a:rPr>
+              <a:t>void lock_acquire(int id)</a:t>
+            </a:r>
+          </a:p>
+          <a:p>
+            <a:pPr>
+              <a:spcAft>
+                <a:spcPts val="0"/>
+              </a:spcAft>
+            </a:pPr>
+            <a:r>
+              <a:rPr sz="1150">
+                <a:latin typeface="Consolas"/>
+              </a:rPr>
+              <a:t>{</a:t>
+            </a:r>
+          </a:p>
+          <a:p>
+            <a:pPr>
+              <a:spcAft>
+                <a:spcPts val="0"/>
+              </a:spcAft>
+            </a:pPr>
+            <a:r>
+              <a:rPr sz="1150">
+                <a:latin typeface="Consolas"/>
+              </a:rPr>
+              <a:t>    (void)id;</a:t>
+            </a:r>
+          </a:p>
+          <a:p>
+            <a:pPr>
+              <a:spcAft>
+                <a:spcPts val="0"/>
+              </a:spcAft>
+            </a:pPr>
+            <a:r>
+              <a:rPr sz="1150">
+                <a:latin typeface="Consolas"/>
+              </a:rPr>
+              <a:t>    while (1) {</a:t>
+            </a:r>
+          </a:p>
+          <a:p>
+            <a:pPr>
+              <a:spcAft>
+                <a:spcPts val="0"/>
+              </a:spcAft>
+            </a:pPr>
+            <a:r>
+              <a:rPr sz="1150">
+                <a:latin typeface="Consolas"/>
+              </a:rPr>
+              <a:t>        while (LoadLinked(&amp;flag))</a:t>
+            </a:r>
+          </a:p>
+          <a:p>
+            <a:pPr>
+              <a:spcAft>
+                <a:spcPts val="0"/>
+              </a:spcAft>
+            </a:pPr>
+            <a:r>
+              <a:rPr sz="1150">
+                <a:latin typeface="Consolas"/>
+              </a:rPr>
+              <a:t>            ;                  /* spin until it is zero */</a:t>
+            </a:r>
+          </a:p>
+          <a:p>
+            <a:pPr>
+              <a:spcAft>
+                <a:spcPts val="0"/>
+              </a:spcAft>
+            </a:pPr>
+            <a:r>
+              <a:rPr sz="1150">
+                <a:latin typeface="Consolas"/>
+              </a:rPr>
+              <a:t>        if (StoreConditional(&amp;flag, 1))</a:t>
+            </a:r>
+          </a:p>
+          <a:p>
+            <a:pPr>
+              <a:spcAft>
+                <a:spcPts val="0"/>
+              </a:spcAft>
+            </a:pPr>
+            <a:r>
+              <a:rPr sz="1150">
+                <a:latin typeface="Consolas"/>
+              </a:rPr>
+              <a:t>            return;            /* no store in between: ours */</a:t>
+            </a:r>
+          </a:p>
+          <a:p>
+            <a:pPr>
+              <a:spcAft>
+                <a:spcPts val="0"/>
+              </a:spcAft>
+            </a:pPr>
+            <a:r>
+              <a:rPr sz="1150">
+                <a:latin typeface="Consolas"/>
+              </a:rPr>
+              <a:t>        /* else another thread won: try again */</a:t>
+            </a:r>
+          </a:p>
+          <a:p>
+            <a:pPr>
+              <a:spcAft>
+                <a:spcPts val="0"/>
+              </a:spcAft>
+            </a:pPr>
+            <a:r>
+              <a:rPr sz="1150">
+                <a:latin typeface="Consolas"/>
+              </a:rPr>
+              <a:t>    }</a:t>
+            </a:r>
+          </a:p>
+          <a:p>
+            <a:pPr>
+              <a:spcAft>
+                <a:spcPts val="0"/>
+              </a:spcAft>
+            </a:pPr>
+            <a:r>
+              <a:rPr sz="1150">
+                <a:latin typeface="Consolas"/>
+              </a:rPr>
+              <a:t>}</a:t>
             </a:r>
           </a:p>
         </p:txBody>
@@ -7593,7 +7499,7 @@
           <a:lstStyle/>
           <a:p>
             <a:r>
-              <a:t>LL/SC: Performance</a:t>
+              <a:t>LL/SC: Mutual Exclusion and Deadlock</a:t>
             </a:r>
           </a:p>
         </p:txBody>
@@ -7628,6 +7534,341 @@
                 </a:solidFill>
               </a:rPr>
               <a:t>12</a:t>
+            </a:r>
+          </a:p>
+        </p:txBody>
+      </p:sp>
+      <p:sp>
+        <p:nvSpPr>
+          <p:cNvPr id="4" name="TextBox 3"/>
+          <p:cNvSpPr txBox="1"/>
+          <p:nvPr/>
+        </p:nvSpPr>
+        <p:spPr>
+          <a:xfrm>
+            <a:off x="822960" y="1463040"/>
+            <a:ext cx="5760720" cy="5029200"/>
+          </a:xfrm>
+          <a:prstGeom prst="rect">
+            <a:avLst/>
+          </a:prstGeom>
+          <a:noFill/>
+        </p:spPr>
+        <p:txBody>
+          <a:bodyPr wrap="square">
+            <a:spAutoFit/>
+          </a:bodyPr>
+          <a:lstStyle/>
+          <a:p>
+            <a:pPr>
+              <a:spcAft>
+                <a:spcPts val="800"/>
+              </a:spcAft>
+            </a:pPr>
+            <a:r>
+              <a:rPr sz="1900"/>
+              <a:t>• Mutual exclusion: two threads may both LL a 0, but the first SC writes the flag, so the second SC fails</a:t>
+            </a:r>
+          </a:p>
+          <a:p>
+            <a:pPr>
+              <a:spcAft>
+                <a:spcPts val="800"/>
+              </a:spcAft>
+            </a:pPr>
+            <a:r>
+              <a:rPr sz="1900"/>
+              <a:t>• No deadlock: an SC fails only if another store got in (that thread now holds the lock) or spuriously (e.g. an interrupt) — the loop retries</a:t>
+            </a:r>
+          </a:p>
+          <a:p>
+            <a:pPr>
+              <a:spcAft>
+                <a:spcPts val="800"/>
+              </a:spcAft>
+            </a:pPr>
+            <a:r>
+              <a:rPr sz="1900"/>
+              <a:t>• AArch64 build under qemu-aarch64 10.2.1, 4 threads: lost = 0 in 3 / 3 runs (5,520,491+ acquisitions each)</a:t>
+            </a:r>
+          </a:p>
+        </p:txBody>
+      </p:sp>
+      <p:sp>
+        <p:nvSpPr>
+          <p:cNvPr id="5" name="TextBox 4"/>
+          <p:cNvSpPr txBox="1"/>
+          <p:nvPr/>
+        </p:nvSpPr>
+        <p:spPr>
+          <a:xfrm>
+            <a:off x="6858000" y="1554480"/>
+            <a:ext cx="4937760" cy="2865120"/>
+          </a:xfrm>
+          <a:prstGeom prst="rect">
+            <a:avLst/>
+          </a:prstGeom>
+          <a:solidFill>
+            <a:srgbClr val="F4F4F4"/>
+          </a:solidFill>
+        </p:spPr>
+        <p:txBody>
+          <a:bodyPr wrap="none">
+            <a:spAutoFit/>
+          </a:bodyPr>
+          <a:lstStyle/>
+          <a:p>
+            <a:pPr>
+              <a:spcAft>
+                <a:spcPts val="0"/>
+              </a:spcAft>
+            </a:pPr>
+            <a:r>
+              <a:rPr sz="1600">
+                <a:latin typeface="Consolas"/>
+              </a:rPr>
+              <a:t>0000000000400b8c &lt;lock_acquire&gt;:</a:t>
+            </a:r>
+          </a:p>
+          <a:p>
+            <a:pPr>
+              <a:spcAft>
+                <a:spcPts val="0"/>
+              </a:spcAft>
+            </a:pPr>
+            <a:r>
+              <a:rPr sz="1600">
+                <a:latin typeface="Consolas"/>
+              </a:rPr>
+              <a:t>adrp x1, 4b1000</a:t>
+            </a:r>
+          </a:p>
+          <a:p>
+            <a:pPr>
+              <a:spcAft>
+                <a:spcPts val="0"/>
+              </a:spcAft>
+            </a:pPr>
+            <a:r>
+              <a:rPr sz="1600">
+                <a:latin typeface="Consolas"/>
+              </a:rPr>
+              <a:t>add x1, x1, #0xb40</a:t>
+            </a:r>
+          </a:p>
+          <a:p>
+            <a:pPr>
+              <a:spcAft>
+                <a:spcPts val="0"/>
+              </a:spcAft>
+            </a:pPr>
+            <a:r>
+              <a:rPr sz="1600">
+                <a:latin typeface="Consolas"/>
+              </a:rPr>
+              <a:t>mov w2, #0x1</a:t>
+            </a:r>
+          </a:p>
+          <a:p>
+            <a:pPr>
+              <a:spcAft>
+                <a:spcPts val="0"/>
+              </a:spcAft>
+            </a:pPr>
+            <a:r>
+              <a:rPr sz="1600">
+                <a:latin typeface="Consolas"/>
+              </a:rPr>
+              <a:t>nop</a:t>
+            </a:r>
+          </a:p>
+          <a:p>
+            <a:pPr>
+              <a:spcAft>
+                <a:spcPts val="0"/>
+              </a:spcAft>
+            </a:pPr>
+            <a:r>
+              <a:rPr sz="1600">
+                <a:latin typeface="Consolas"/>
+              </a:rPr>
+              <a:t>nop</a:t>
+            </a:r>
+          </a:p>
+          <a:p>
+            <a:pPr>
+              <a:spcAft>
+                <a:spcPts val="0"/>
+              </a:spcAft>
+            </a:pPr>
+            <a:r>
+              <a:rPr sz="1600">
+                <a:latin typeface="Consolas"/>
+              </a:rPr>
+              <a:t>ldaxr w0, [x1]</a:t>
+            </a:r>
+          </a:p>
+          <a:p>
+            <a:pPr>
+              <a:spcAft>
+                <a:spcPts val="0"/>
+              </a:spcAft>
+            </a:pPr>
+            <a:r>
+              <a:rPr sz="1600">
+                <a:latin typeface="Consolas"/>
+              </a:rPr>
+              <a:t>cbnz w0, 400ba0 &lt;lock_acquire+0x14&gt;</a:t>
+            </a:r>
+          </a:p>
+          <a:p>
+            <a:pPr>
+              <a:spcAft>
+                <a:spcPts val="0"/>
+              </a:spcAft>
+            </a:pPr>
+            <a:r>
+              <a:rPr sz="1600">
+                <a:latin typeface="Consolas"/>
+              </a:rPr>
+              <a:t>stxr w0, w2, [x1]</a:t>
+            </a:r>
+          </a:p>
+          <a:p>
+            <a:pPr>
+              <a:spcAft>
+                <a:spcPts val="0"/>
+              </a:spcAft>
+            </a:pPr>
+            <a:r>
+              <a:rPr sz="1600">
+                <a:latin typeface="Consolas"/>
+              </a:rPr>
+              <a:t>cbnz w0, 400ba0 &lt;lock_acquire+0x14&gt;</a:t>
+            </a:r>
+          </a:p>
+          <a:p>
+            <a:pPr>
+              <a:spcAft>
+                <a:spcPts val="0"/>
+              </a:spcAft>
+            </a:pPr>
+            <a:r>
+              <a:rPr sz="1600">
+                <a:latin typeface="Consolas"/>
+              </a:rPr>
+              <a:t>ret</a:t>
+            </a:r>
+          </a:p>
+        </p:txBody>
+      </p:sp>
+      <p:sp>
+        <p:nvSpPr>
+          <p:cNvPr id="6" name="TextBox 5"/>
+          <p:cNvSpPr txBox="1"/>
+          <p:nvPr/>
+        </p:nvSpPr>
+        <p:spPr>
+          <a:xfrm>
+            <a:off x="6858000" y="4556760"/>
+            <a:ext cx="4937760" cy="914400"/>
+          </a:xfrm>
+          <a:prstGeom prst="rect">
+            <a:avLst/>
+          </a:prstGeom>
+          <a:noFill/>
+        </p:spPr>
+        <p:txBody>
+          <a:bodyPr wrap="square">
+            <a:spAutoFit/>
+          </a:bodyPr>
+          <a:lstStyle/>
+          <a:p>
+            <a:pPr>
+              <a:spcAft>
+                <a:spcPts val="800"/>
+              </a:spcAft>
+            </a:pPr>
+            <a:r>
+              <a:rPr sz="1500">
+                <a:solidFill>
+                  <a:srgbClr val="C0392B"/>
+                </a:solidFill>
+              </a:rPr>
+              <a:t>ldaxr = Load-Linked, stxr = Store-Conditional (writes 0 to w0 on success)</a:t>
+            </a:r>
+          </a:p>
+        </p:txBody>
+      </p:sp>
+    </p:spTree>
+  </p:cSld>
+  <p:clrMapOvr>
+    <a:masterClrMapping/>
+  </p:clrMapOvr>
+</p:sld>
+</file>
+
+<file path=ppt/slides/slide13.xml><?xml version="1.0" encoding="utf-8"?>
+<p:sld xmlns:a="http://schemas.openxmlformats.org/drawingml/2006/main" xmlns:p="http://schemas.openxmlformats.org/presentationml/2006/main" xmlns:r="http://schemas.openxmlformats.org/officeDocument/2006/relationships">
+  <p:cSld>
+    <p:spTree>
+      <p:nvGrpSpPr>
+        <p:cNvPr id="1" name=""/>
+        <p:cNvGrpSpPr/>
+        <p:nvPr/>
+      </p:nvGrpSpPr>
+      <p:grpSpPr/>
+      <p:sp>
+        <p:nvSpPr>
+          <p:cNvPr id="2" name="Title 1"/>
+          <p:cNvSpPr>
+            <a:spLocks noGrp="1"/>
+          </p:cNvSpPr>
+          <p:nvPr>
+            <p:ph type="title"/>
+          </p:nvPr>
+        </p:nvSpPr>
+        <p:spPr/>
+        <p:txBody>
+          <a:bodyPr/>
+          <a:lstStyle/>
+          <a:p>
+            <a:r>
+              <a:t>LL/SC: Performance</a:t>
+            </a:r>
+          </a:p>
+        </p:txBody>
+      </p:sp>
+      <p:sp>
+        <p:nvSpPr>
+          <p:cNvPr id="3" name="TextBox 2"/>
+          <p:cNvSpPr txBox="1"/>
+          <p:nvPr/>
+        </p:nvSpPr>
+        <p:spPr>
+          <a:xfrm>
+            <a:off x="11247120" y="6400800"/>
+            <a:ext cx="731520" cy="365760"/>
+          </a:xfrm>
+          <a:prstGeom prst="rect">
+            <a:avLst/>
+          </a:prstGeom>
+          <a:noFill/>
+        </p:spPr>
+        <p:txBody>
+          <a:bodyPr wrap="none">
+            <a:spAutoFit/>
+          </a:bodyPr>
+          <a:lstStyle/>
+          <a:p>
+            <a:pPr algn="r"/>
+            <a:r>
+              <a:rPr sz="1200">
+                <a:solidFill>
+                  <a:srgbClr val="808080"/>
+                </a:solidFill>
+              </a:rPr>
+              <a:t>13</a:t>
             </a:r>
           </a:p>
         </p:txBody>
@@ -7729,7 +7970,7 @@
 </p:sld>
 </file>
 
-<file path=ppt/slides/slide13.xml><?xml version="1.0" encoding="utf-8"?>
+<file path=ppt/slides/slide14.xml><?xml version="1.0" encoding="utf-8"?>
 <p:sld xmlns:a="http://schemas.openxmlformats.org/drawingml/2006/main" xmlns:p="http://schemas.openxmlformats.org/presentationml/2006/main" xmlns:r="http://schemas.openxmlformats.org/officeDocument/2006/relationships">
   <p:cSld>
     <p:spTree>
@@ -7789,7 +8030,7 @@
                   <a:srgbClr val="808080"/>
                 </a:solidFill>
               </a:rPr>
-              <a:t>13</a:t>
+              <a:t>14</a:t>
             </a:r>
           </a:p>
         </p:txBody>
@@ -7890,105 +8131,6 @@
             <a:r>
               <a:rPr sz="2000"/>
               <a:t>• Advantage over CAS: SC fails on any store, even one that writes back the same value (no ABA problem)</a:t>
-            </a:r>
-          </a:p>
-        </p:txBody>
-      </p:sp>
-    </p:spTree>
-  </p:cSld>
-  <p:clrMapOvr>
-    <a:masterClrMapping/>
-  </p:clrMapOvr>
-</p:sld>
-</file>
-
-<file path=ppt/slides/slide14.xml><?xml version="1.0" encoding="utf-8"?>
-<p:sld xmlns:a="http://schemas.openxmlformats.org/drawingml/2006/main" xmlns:p="http://schemas.openxmlformats.org/presentationml/2006/main" xmlns:r="http://schemas.openxmlformats.org/officeDocument/2006/relationships">
-  <p:cSld>
-    <p:spTree>
-      <p:nvGrpSpPr>
-        <p:cNvPr id="1" name=""/>
-        <p:cNvGrpSpPr/>
-        <p:nvPr/>
-      </p:nvGrpSpPr>
-      <p:grpSpPr/>
-      <p:sp>
-        <p:nvSpPr>
-          <p:cNvPr id="2" name="Title 1"/>
-          <p:cNvSpPr>
-            <a:spLocks noGrp="1"/>
-          </p:cNvSpPr>
-          <p:nvPr>
-            <p:ph type="title"/>
-          </p:nvPr>
-        </p:nvSpPr>
-        <p:spPr/>
-        <p:txBody>
-          <a:bodyPr/>
-          <a:lstStyle/>
-          <a:p>
-            <a:r>
-              <a:t>Lamport's Bakery Algorithm</a:t>
-            </a:r>
-          </a:p>
-        </p:txBody>
-      </p:sp>
-      <p:sp>
-        <p:nvSpPr>
-          <p:cNvPr id="3" name="Text Placeholder 2"/>
-          <p:cNvSpPr>
-            <a:spLocks noGrp="1"/>
-          </p:cNvSpPr>
-          <p:nvPr>
-            <p:ph type="body" idx="1"/>
-          </p:nvPr>
-        </p:nvSpPr>
-        <p:spPr/>
-        <p:txBody>
-          <a:bodyPr/>
-          <a:lstStyle/>
-          <a:p>
-            <a:r>
-              <a:t>67070501040</a:t>
-            </a:r>
-          </a:p>
-          <a:p>
-            <a:r>
-              <a:t>Worawut Sereethai</a:t>
-            </a:r>
-          </a:p>
-        </p:txBody>
-      </p:sp>
-      <p:sp>
-        <p:nvSpPr>
-          <p:cNvPr id="4" name="TextBox 3"/>
-          <p:cNvSpPr txBox="1"/>
-          <p:nvPr/>
-        </p:nvSpPr>
-        <p:spPr>
-          <a:xfrm>
-            <a:off x="11247120" y="6400800"/>
-            <a:ext cx="731520" cy="365760"/>
-          </a:xfrm>
-          <a:prstGeom prst="rect">
-            <a:avLst/>
-          </a:prstGeom>
-          <a:noFill/>
-        </p:spPr>
-        <p:txBody>
-          <a:bodyPr wrap="none">
-            <a:spAutoFit/>
-          </a:bodyPr>
-          <a:lstStyle/>
-          <a:p>
-            <a:pPr algn="r"/>
-            <a:r>
-              <a:rPr sz="1200">
-                <a:solidFill>
-                  <a:srgbClr val="808080"/>
-                </a:solidFill>
-              </a:rPr>
-              <a:t>14</a:t>
             </a:r>
           </a:p>
         </p:txBody>
@@ -8027,14 +8169,40 @@
           <a:lstStyle/>
           <a:p>
             <a:r>
-              <a:t>Bakery Algorithm: Idea</a:t>
-            </a:r>
-          </a:p>
-        </p:txBody>
-      </p:sp>
-      <p:sp>
-        <p:nvSpPr>
-          <p:cNvPr id="3" name="TextBox 2"/>
+              <a:t>Lamport's Bakery Algorithm</a:t>
+            </a:r>
+          </a:p>
+        </p:txBody>
+      </p:sp>
+      <p:sp>
+        <p:nvSpPr>
+          <p:cNvPr id="3" name="Text Placeholder 2"/>
+          <p:cNvSpPr>
+            <a:spLocks noGrp="1"/>
+          </p:cNvSpPr>
+          <p:nvPr>
+            <p:ph type="body" idx="1"/>
+          </p:nvPr>
+        </p:nvSpPr>
+        <p:spPr/>
+        <p:txBody>
+          <a:bodyPr/>
+          <a:lstStyle/>
+          <a:p>
+            <a:r>
+              <a:t>67070501040</a:t>
+            </a:r>
+          </a:p>
+          <a:p>
+            <a:r>
+              <a:t>Worawut Sereethai</a:t>
+            </a:r>
+          </a:p>
+        </p:txBody>
+      </p:sp>
+      <p:sp>
+        <p:nvSpPr>
+          <p:cNvPr id="4" name="TextBox 3"/>
           <p:cNvSpPr txBox="1"/>
           <p:nvPr/>
         </p:nvSpPr>
@@ -8062,437 +8230,6 @@
                 </a:solidFill>
               </a:rPr>
               <a:t>15</a:t>
-            </a:r>
-          </a:p>
-        </p:txBody>
-      </p:sp>
-      <p:sp>
-        <p:nvSpPr>
-          <p:cNvPr id="4" name="TextBox 3"/>
-          <p:cNvSpPr txBox="1"/>
-          <p:nvPr/>
-        </p:nvSpPr>
-        <p:spPr>
-          <a:xfrm>
-            <a:off x="548640" y="1554480"/>
-            <a:ext cx="4389120" cy="4937760"/>
-          </a:xfrm>
-          <a:prstGeom prst="rect">
-            <a:avLst/>
-          </a:prstGeom>
-          <a:noFill/>
-        </p:spPr>
-        <p:txBody>
-          <a:bodyPr wrap="square">
-            <a:spAutoFit/>
-          </a:bodyPr>
-          <a:lstStyle/>
-          <a:p>
-            <a:pPr>
-              <a:spcAft>
-                <a:spcPts val="800"/>
-              </a:spcAft>
-            </a:pPr>
-            <a:r>
-              <a:rPr sz="2000"/>
-              <a:t>• Take a number: 1 + the largest number in use</a:t>
-            </a:r>
-          </a:p>
-          <a:p>
-            <a:pPr>
-              <a:spcAft>
-                <a:spcPts val="800"/>
-              </a:spcAft>
-            </a:pPr>
-            <a:r>
-              <a:rPr sz="2000"/>
-              <a:t>• Smallest number enters first; equal numbers → lower thread id first</a:t>
-            </a:r>
-          </a:p>
-          <a:p>
-            <a:pPr>
-              <a:spcAft>
-                <a:spcPts val="800"/>
-              </a:spcAft>
-            </a:pPr>
-            <a:r>
-              <a:rPr sz="2000"/>
-              <a:t>• choosing[j]: wait until j has finished picking</a:t>
-            </a:r>
-          </a:p>
-          <a:p>
-            <a:pPr>
-              <a:spcAft>
-                <a:spcPts val="800"/>
-              </a:spcAft>
-            </a:pPr>
-            <a:r>
-              <a:rPr sz="2000"/>
-              <a:t>• N threads, only loads and stores (Lamport, 1974)</a:t>
-            </a:r>
-          </a:p>
-        </p:txBody>
-      </p:sp>
-      <p:sp>
-        <p:nvSpPr>
-          <p:cNvPr id="5" name="TextBox 4"/>
-          <p:cNvSpPr txBox="1"/>
-          <p:nvPr/>
-        </p:nvSpPr>
-        <p:spPr>
-          <a:xfrm>
-            <a:off x="5120640" y="1463040"/>
-            <a:ext cx="6675120" cy="4914900"/>
-          </a:xfrm>
-          <a:prstGeom prst="rect">
-            <a:avLst/>
-          </a:prstGeom>
-          <a:solidFill>
-            <a:srgbClr val="F4F4F4"/>
-          </a:solidFill>
-        </p:spPr>
-        <p:txBody>
-          <a:bodyPr wrap="none">
-            <a:spAutoFit/>
-          </a:bodyPr>
-          <a:lstStyle/>
-          <a:p>
-            <a:pPr>
-              <a:spcAft>
-                <a:spcPts val="0"/>
-              </a:spcAft>
-            </a:pPr>
-            <a:r>
-              <a:rPr sz="1150">
-                <a:latin typeface="Consolas"/>
-              </a:rPr>
-              <a:t>void lock_acquire(int i)</a:t>
-            </a:r>
-          </a:p>
-          <a:p>
-            <a:pPr>
-              <a:spcAft>
-                <a:spcPts val="0"/>
-              </a:spcAft>
-            </a:pPr>
-            <a:r>
-              <a:rPr sz="1150">
-                <a:latin typeface="Consolas"/>
-              </a:rPr>
-              <a:t>{</a:t>
-            </a:r>
-          </a:p>
-          <a:p>
-            <a:pPr>
-              <a:spcAft>
-                <a:spcPts val="0"/>
-              </a:spcAft>
-            </a:pPr>
-            <a:r>
-              <a:rPr sz="1150">
-                <a:latin typeface="Consolas"/>
-              </a:rPr>
-              <a:t>    choosing[i] = 1;</a:t>
-            </a:r>
-          </a:p>
-          <a:p>
-            <a:pPr>
-              <a:spcAft>
-                <a:spcPts val="0"/>
-              </a:spcAft>
-            </a:pPr>
-            <a:r>
-              <a:rPr sz="1150">
-                <a:latin typeface="Consolas"/>
-              </a:rPr>
-              <a:t>    FENCE();</a:t>
-            </a:r>
-          </a:p>
-          <a:p>
-            <a:pPr>
-              <a:spcAft>
-                <a:spcPts val="0"/>
-              </a:spcAft>
-            </a:pPr>
-            <a:r>
-              <a:rPr sz="1150">
-                <a:latin typeface="Consolas"/>
-              </a:rPr>
-              <a:t>    unsigned max = 0;</a:t>
-            </a:r>
-          </a:p>
-          <a:p>
-            <a:pPr>
-              <a:spcAft>
-                <a:spcPts val="0"/>
-              </a:spcAft>
-            </a:pPr>
-            <a:r>
-              <a:rPr sz="1150">
-                <a:latin typeface="Consolas"/>
-              </a:rPr>
-              <a:t>    for (int j = 0; j &lt; n; j++)</a:t>
-            </a:r>
-          </a:p>
-          <a:p>
-            <a:pPr>
-              <a:spcAft>
-                <a:spcPts val="0"/>
-              </a:spcAft>
-            </a:pPr>
-            <a:r>
-              <a:rPr sz="1150">
-                <a:latin typeface="Consolas"/>
-              </a:rPr>
-              <a:t>        if (number[j] &gt; max) max = number[j];</a:t>
-            </a:r>
-          </a:p>
-          <a:p>
-            <a:pPr>
-              <a:spcAft>
-                <a:spcPts val="0"/>
-              </a:spcAft>
-            </a:pPr>
-            <a:r>
-              <a:rPr sz="1150">
-                <a:latin typeface="Consolas"/>
-              </a:rPr>
-              <a:t>    number[i] = max + 1;        /* take the next number */</a:t>
-            </a:r>
-          </a:p>
-          <a:p>
-            <a:pPr>
-              <a:spcAft>
-                <a:spcPts val="0"/>
-              </a:spcAft>
-            </a:pPr>
-            <a:r>
-              <a:rPr sz="1150">
-                <a:latin typeface="Consolas"/>
-              </a:rPr>
-              <a:t>    FENCE();</a:t>
-            </a:r>
-          </a:p>
-          <a:p>
-            <a:pPr>
-              <a:spcAft>
-                <a:spcPts val="0"/>
-              </a:spcAft>
-            </a:pPr>
-            <a:r>
-              <a:rPr sz="1150">
-                <a:latin typeface="Consolas"/>
-              </a:rPr>
-              <a:t>    choosing[i] = 0;</a:t>
-            </a:r>
-          </a:p>
-          <a:p>
-            <a:pPr>
-              <a:spcAft>
-                <a:spcPts val="0"/>
-              </a:spcAft>
-            </a:pPr>
-            <a:r>
-              <a:rPr sz="1150">
-                <a:latin typeface="Consolas"/>
-              </a:rPr>
-              <a:t>    FENCE();</a:t>
-            </a:r>
-          </a:p>
-          <a:p>
-            <a:pPr>
-              <a:spcAft>
-                <a:spcPts val="0"/>
-              </a:spcAft>
-            </a:pPr>
-          </a:p>
-          <a:p>
-            <a:pPr>
-              <a:spcAft>
-                <a:spcPts val="0"/>
-              </a:spcAft>
-            </a:pPr>
-            <a:r>
-              <a:rPr sz="1150">
-                <a:latin typeface="Consolas"/>
-              </a:rPr>
-              <a:t>    for (int j = 0; j &lt; n; j++) {</a:t>
-            </a:r>
-          </a:p>
-          <a:p>
-            <a:pPr>
-              <a:spcAft>
-                <a:spcPts val="0"/>
-              </a:spcAft>
-            </a:pPr>
-            <a:r>
-              <a:rPr sz="1150">
-                <a:latin typeface="Consolas"/>
-              </a:rPr>
-              <a:t>        while (choosing[j])</a:t>
-            </a:r>
-          </a:p>
-          <a:p>
-            <a:pPr>
-              <a:spcAft>
-                <a:spcPts val="0"/>
-              </a:spcAft>
-            </a:pPr>
-            <a:r>
-              <a:rPr sz="1150">
-                <a:latin typeface="Consolas"/>
-              </a:rPr>
-              <a:t>            ;                   /* j is still picking */</a:t>
-            </a:r>
-          </a:p>
-          <a:p>
-            <a:pPr>
-              <a:spcAft>
-                <a:spcPts val="0"/>
-              </a:spcAft>
-            </a:pPr>
-            <a:r>
-              <a:rPr sz="1150">
-                <a:latin typeface="Consolas"/>
-              </a:rPr>
-              <a:t>        while (number[j] != 0 &amp;&amp;</a:t>
-            </a:r>
-          </a:p>
-          <a:p>
-            <a:pPr>
-              <a:spcAft>
-                <a:spcPts val="0"/>
-              </a:spcAft>
-            </a:pPr>
-            <a:r>
-              <a:rPr sz="1150">
-                <a:latin typeface="Consolas"/>
-              </a:rPr>
-              <a:t>               (number[j] &lt; number[i] ||</a:t>
-            </a:r>
-          </a:p>
-          <a:p>
-            <a:pPr>
-              <a:spcAft>
-                <a:spcPts val="0"/>
-              </a:spcAft>
-            </a:pPr>
-            <a:r>
-              <a:rPr sz="1150">
-                <a:latin typeface="Consolas"/>
-              </a:rPr>
-              <a:t>                (number[j] == number[i] &amp;&amp; j &lt; i)))</a:t>
-            </a:r>
-          </a:p>
-          <a:p>
-            <a:pPr>
-              <a:spcAft>
-                <a:spcPts val="0"/>
-              </a:spcAft>
-            </a:pPr>
-            <a:r>
-              <a:rPr sz="1150">
-                <a:latin typeface="Consolas"/>
-              </a:rPr>
-              <a:t>            ;                   /* j is ahead of me */</a:t>
-            </a:r>
-          </a:p>
-          <a:p>
-            <a:pPr>
-              <a:spcAft>
-                <a:spcPts val="0"/>
-              </a:spcAft>
-            </a:pPr>
-            <a:r>
-              <a:rPr sz="1150">
-                <a:latin typeface="Consolas"/>
-              </a:rPr>
-              <a:t>    }</a:t>
-            </a:r>
-          </a:p>
-          <a:p>
-            <a:pPr>
-              <a:spcAft>
-                <a:spcPts val="0"/>
-              </a:spcAft>
-            </a:pPr>
-            <a:r>
-              <a:rPr sz="1150">
-                <a:latin typeface="Consolas"/>
-              </a:rPr>
-              <a:t>}</a:t>
-            </a:r>
-          </a:p>
-          <a:p>
-            <a:pPr>
-              <a:spcAft>
-                <a:spcPts val="0"/>
-              </a:spcAft>
-            </a:pPr>
-          </a:p>
-          <a:p>
-            <a:pPr>
-              <a:spcAft>
-                <a:spcPts val="0"/>
-              </a:spcAft>
-            </a:pPr>
-            <a:r>
-              <a:rPr sz="1150">
-                <a:latin typeface="Consolas"/>
-              </a:rPr>
-              <a:t>void lock_release(int i)</a:t>
-            </a:r>
-          </a:p>
-          <a:p>
-            <a:pPr>
-              <a:spcAft>
-                <a:spcPts val="0"/>
-              </a:spcAft>
-            </a:pPr>
-            <a:r>
-              <a:rPr sz="1150">
-                <a:latin typeface="Consolas"/>
-              </a:rPr>
-              <a:t>{</a:t>
-            </a:r>
-          </a:p>
-          <a:p>
-            <a:pPr>
-              <a:spcAft>
-                <a:spcPts val="0"/>
-              </a:spcAft>
-            </a:pPr>
-            <a:r>
-              <a:rPr sz="1150">
-                <a:latin typeface="Consolas"/>
-              </a:rPr>
-              <a:t>    FENCE();</a:t>
-            </a:r>
-          </a:p>
-          <a:p>
-            <a:pPr>
-              <a:spcAft>
-                <a:spcPts val="0"/>
-              </a:spcAft>
-            </a:pPr>
-            <a:r>
-              <a:rPr sz="1150">
-                <a:latin typeface="Consolas"/>
-              </a:rPr>
-              <a:t>    number[i] = 0;</a:t>
-            </a:r>
-          </a:p>
-          <a:p>
-            <a:pPr>
-              <a:spcAft>
-                <a:spcPts val="0"/>
-              </a:spcAft>
-            </a:pPr>
-            <a:r>
-              <a:rPr sz="1150">
-                <a:latin typeface="Consolas"/>
-              </a:rPr>
-              <a:t>}</a:t>
             </a:r>
           </a:p>
         </p:txBody>
@@ -8531,7 +8268,7 @@
           <a:lstStyle/>
           <a:p>
             <a:r>
-              <a:t>Bakery: Mutual Exclusion and Deadlock</a:t>
+              <a:t>Bakery Algorithm: Idea</a:t>
             </a:r>
           </a:p>
         </p:txBody>
@@ -8578,8 +8315,8 @@
         </p:nvSpPr>
         <p:spPr>
           <a:xfrm>
-            <a:off x="822960" y="1554480"/>
-            <a:ext cx="10789920" cy="4937760"/>
+            <a:off x="548640" y="1554480"/>
+            <a:ext cx="4389120" cy="4937760"/>
           </a:xfrm>
           <a:prstGeom prst="rect">
             <a:avLst/>
@@ -8599,7 +8336,7 @@
             </a:pPr>
             <a:r>
               <a:rPr sz="2000"/>
-              <a:t>• Mutual exclusion: (number, id) pairs are unique and ordered; a thread enters only after every thread with a smaller pair has left</a:t>
+              <a:t>• Take a number: 1 + the largest number in use</a:t>
             </a:r>
           </a:p>
           <a:p>
@@ -8610,7 +8347,7 @@
             </a:pPr>
             <a:r>
               <a:rPr sz="2000"/>
-              <a:t>• choosing[] closes the race where j has read the maximum but not yet written its number</a:t>
+              <a:t>• Smallest number enters first; equal numbers → lower thread id first</a:t>
             </a:r>
           </a:p>
           <a:p>
@@ -8621,7 +8358,7 @@
             </a:pPr>
             <a:r>
               <a:rPr sz="2000"/>
-              <a:t>• No deadlock: the waiting thread with the smallest pair waits for nobody, so it enters</a:t>
+              <a:t>• choosing[j]: wait until j has finished picking</a:t>
             </a:r>
           </a:p>
           <a:p>
@@ -8632,18 +8369,371 @@
             </a:pPr>
             <a:r>
               <a:rPr sz="2000"/>
-              <a:t>• Like Peterson, it needs memory fences on x86 (FENCE() in the code)</a:t>
-            </a:r>
-          </a:p>
-          <a:p>
-            <a:pPr>
-              <a:spcAft>
-                <a:spcPts val="800"/>
-              </a:spcAft>
-            </a:pPr>
-            <a:r>
-              <a:rPr sz="2000"/>
-              <a:t>• Measured: all 24 runs (1–8 threads, all CPUs and one CPU) finished with lost = 0</a:t>
+              <a:t>• N threads, only loads and stores (Lamport, 1974)</a:t>
+            </a:r>
+          </a:p>
+        </p:txBody>
+      </p:sp>
+      <p:sp>
+        <p:nvSpPr>
+          <p:cNvPr id="5" name="TextBox 4"/>
+          <p:cNvSpPr txBox="1"/>
+          <p:nvPr/>
+        </p:nvSpPr>
+        <p:spPr>
+          <a:xfrm>
+            <a:off x="5120640" y="1463040"/>
+            <a:ext cx="6675120" cy="4914900"/>
+          </a:xfrm>
+          <a:prstGeom prst="rect">
+            <a:avLst/>
+          </a:prstGeom>
+          <a:solidFill>
+            <a:srgbClr val="F4F4F4"/>
+          </a:solidFill>
+        </p:spPr>
+        <p:txBody>
+          <a:bodyPr wrap="none">
+            <a:spAutoFit/>
+          </a:bodyPr>
+          <a:lstStyle/>
+          <a:p>
+            <a:pPr>
+              <a:spcAft>
+                <a:spcPts val="0"/>
+              </a:spcAft>
+            </a:pPr>
+            <a:r>
+              <a:rPr sz="1150">
+                <a:latin typeface="Consolas"/>
+              </a:rPr>
+              <a:t>void lock_acquire(int i)</a:t>
+            </a:r>
+          </a:p>
+          <a:p>
+            <a:pPr>
+              <a:spcAft>
+                <a:spcPts val="0"/>
+              </a:spcAft>
+            </a:pPr>
+            <a:r>
+              <a:rPr sz="1150">
+                <a:latin typeface="Consolas"/>
+              </a:rPr>
+              <a:t>{</a:t>
+            </a:r>
+          </a:p>
+          <a:p>
+            <a:pPr>
+              <a:spcAft>
+                <a:spcPts val="0"/>
+              </a:spcAft>
+            </a:pPr>
+            <a:r>
+              <a:rPr sz="1150">
+                <a:latin typeface="Consolas"/>
+              </a:rPr>
+              <a:t>    choosing[i] = 1;</a:t>
+            </a:r>
+          </a:p>
+          <a:p>
+            <a:pPr>
+              <a:spcAft>
+                <a:spcPts val="0"/>
+              </a:spcAft>
+            </a:pPr>
+            <a:r>
+              <a:rPr sz="1150">
+                <a:latin typeface="Consolas"/>
+              </a:rPr>
+              <a:t>    FENCE();</a:t>
+            </a:r>
+          </a:p>
+          <a:p>
+            <a:pPr>
+              <a:spcAft>
+                <a:spcPts val="0"/>
+              </a:spcAft>
+            </a:pPr>
+            <a:r>
+              <a:rPr sz="1150">
+                <a:latin typeface="Consolas"/>
+              </a:rPr>
+              <a:t>    unsigned max = 0;</a:t>
+            </a:r>
+          </a:p>
+          <a:p>
+            <a:pPr>
+              <a:spcAft>
+                <a:spcPts val="0"/>
+              </a:spcAft>
+            </a:pPr>
+            <a:r>
+              <a:rPr sz="1150">
+                <a:latin typeface="Consolas"/>
+              </a:rPr>
+              <a:t>    for (int j = 0; j &lt; n; j++)</a:t>
+            </a:r>
+          </a:p>
+          <a:p>
+            <a:pPr>
+              <a:spcAft>
+                <a:spcPts val="0"/>
+              </a:spcAft>
+            </a:pPr>
+            <a:r>
+              <a:rPr sz="1150">
+                <a:latin typeface="Consolas"/>
+              </a:rPr>
+              <a:t>        if (number[j] &gt; max) max = number[j];</a:t>
+            </a:r>
+          </a:p>
+          <a:p>
+            <a:pPr>
+              <a:spcAft>
+                <a:spcPts val="0"/>
+              </a:spcAft>
+            </a:pPr>
+            <a:r>
+              <a:rPr sz="1150">
+                <a:latin typeface="Consolas"/>
+              </a:rPr>
+              <a:t>    number[i] = max + 1;        /* take the next number */</a:t>
+            </a:r>
+          </a:p>
+          <a:p>
+            <a:pPr>
+              <a:spcAft>
+                <a:spcPts val="0"/>
+              </a:spcAft>
+            </a:pPr>
+            <a:r>
+              <a:rPr sz="1150">
+                <a:latin typeface="Consolas"/>
+              </a:rPr>
+              <a:t>    FENCE();</a:t>
+            </a:r>
+          </a:p>
+          <a:p>
+            <a:pPr>
+              <a:spcAft>
+                <a:spcPts val="0"/>
+              </a:spcAft>
+            </a:pPr>
+            <a:r>
+              <a:rPr sz="1150">
+                <a:latin typeface="Consolas"/>
+              </a:rPr>
+              <a:t>    choosing[i] = 0;</a:t>
+            </a:r>
+          </a:p>
+          <a:p>
+            <a:pPr>
+              <a:spcAft>
+                <a:spcPts val="0"/>
+              </a:spcAft>
+            </a:pPr>
+            <a:r>
+              <a:rPr sz="1150">
+                <a:latin typeface="Consolas"/>
+              </a:rPr>
+              <a:t>    FENCE();</a:t>
+            </a:r>
+          </a:p>
+          <a:p>
+            <a:pPr>
+              <a:spcAft>
+                <a:spcPts val="0"/>
+              </a:spcAft>
+            </a:pPr>
+          </a:p>
+          <a:p>
+            <a:pPr>
+              <a:spcAft>
+                <a:spcPts val="0"/>
+              </a:spcAft>
+            </a:pPr>
+            <a:r>
+              <a:rPr sz="1150">
+                <a:latin typeface="Consolas"/>
+              </a:rPr>
+              <a:t>    for (int j = 0; j &lt; n; j++) {</a:t>
+            </a:r>
+          </a:p>
+          <a:p>
+            <a:pPr>
+              <a:spcAft>
+                <a:spcPts val="0"/>
+              </a:spcAft>
+            </a:pPr>
+            <a:r>
+              <a:rPr sz="1150">
+                <a:latin typeface="Consolas"/>
+              </a:rPr>
+              <a:t>        while (choosing[j])</a:t>
+            </a:r>
+          </a:p>
+          <a:p>
+            <a:pPr>
+              <a:spcAft>
+                <a:spcPts val="0"/>
+              </a:spcAft>
+            </a:pPr>
+            <a:r>
+              <a:rPr sz="1150">
+                <a:latin typeface="Consolas"/>
+              </a:rPr>
+              <a:t>            ;                   /* j is still picking */</a:t>
+            </a:r>
+          </a:p>
+          <a:p>
+            <a:pPr>
+              <a:spcAft>
+                <a:spcPts val="0"/>
+              </a:spcAft>
+            </a:pPr>
+            <a:r>
+              <a:rPr sz="1150">
+                <a:latin typeface="Consolas"/>
+              </a:rPr>
+              <a:t>        while (number[j] != 0 &amp;&amp;</a:t>
+            </a:r>
+          </a:p>
+          <a:p>
+            <a:pPr>
+              <a:spcAft>
+                <a:spcPts val="0"/>
+              </a:spcAft>
+            </a:pPr>
+            <a:r>
+              <a:rPr sz="1150">
+                <a:latin typeface="Consolas"/>
+              </a:rPr>
+              <a:t>               (number[j] &lt; number[i] ||</a:t>
+            </a:r>
+          </a:p>
+          <a:p>
+            <a:pPr>
+              <a:spcAft>
+                <a:spcPts val="0"/>
+              </a:spcAft>
+            </a:pPr>
+            <a:r>
+              <a:rPr sz="1150">
+                <a:latin typeface="Consolas"/>
+              </a:rPr>
+              <a:t>                (number[j] == number[i] &amp;&amp; j &lt; i)))</a:t>
+            </a:r>
+          </a:p>
+          <a:p>
+            <a:pPr>
+              <a:spcAft>
+                <a:spcPts val="0"/>
+              </a:spcAft>
+            </a:pPr>
+            <a:r>
+              <a:rPr sz="1150">
+                <a:latin typeface="Consolas"/>
+              </a:rPr>
+              <a:t>            ;                   /* j is ahead of me */</a:t>
+            </a:r>
+          </a:p>
+          <a:p>
+            <a:pPr>
+              <a:spcAft>
+                <a:spcPts val="0"/>
+              </a:spcAft>
+            </a:pPr>
+            <a:r>
+              <a:rPr sz="1150">
+                <a:latin typeface="Consolas"/>
+              </a:rPr>
+              <a:t>    }</a:t>
+            </a:r>
+          </a:p>
+          <a:p>
+            <a:pPr>
+              <a:spcAft>
+                <a:spcPts val="0"/>
+              </a:spcAft>
+            </a:pPr>
+            <a:r>
+              <a:rPr sz="1150">
+                <a:latin typeface="Consolas"/>
+              </a:rPr>
+              <a:t>}</a:t>
+            </a:r>
+          </a:p>
+          <a:p>
+            <a:pPr>
+              <a:spcAft>
+                <a:spcPts val="0"/>
+              </a:spcAft>
+            </a:pPr>
+          </a:p>
+          <a:p>
+            <a:pPr>
+              <a:spcAft>
+                <a:spcPts val="0"/>
+              </a:spcAft>
+            </a:pPr>
+            <a:r>
+              <a:rPr sz="1150">
+                <a:latin typeface="Consolas"/>
+              </a:rPr>
+              <a:t>void lock_release(int i)</a:t>
+            </a:r>
+          </a:p>
+          <a:p>
+            <a:pPr>
+              <a:spcAft>
+                <a:spcPts val="0"/>
+              </a:spcAft>
+            </a:pPr>
+            <a:r>
+              <a:rPr sz="1150">
+                <a:latin typeface="Consolas"/>
+              </a:rPr>
+              <a:t>{</a:t>
+            </a:r>
+          </a:p>
+          <a:p>
+            <a:pPr>
+              <a:spcAft>
+                <a:spcPts val="0"/>
+              </a:spcAft>
+            </a:pPr>
+            <a:r>
+              <a:rPr sz="1150">
+                <a:latin typeface="Consolas"/>
+              </a:rPr>
+              <a:t>    FENCE();</a:t>
+            </a:r>
+          </a:p>
+          <a:p>
+            <a:pPr>
+              <a:spcAft>
+                <a:spcPts val="0"/>
+              </a:spcAft>
+            </a:pPr>
+            <a:r>
+              <a:rPr sz="1150">
+                <a:latin typeface="Consolas"/>
+              </a:rPr>
+              <a:t>    number[i] = 0;</a:t>
+            </a:r>
+          </a:p>
+          <a:p>
+            <a:pPr>
+              <a:spcAft>
+                <a:spcPts val="0"/>
+              </a:spcAft>
+            </a:pPr>
+            <a:r>
+              <a:rPr sz="1150">
+                <a:latin typeface="Consolas"/>
+              </a:rPr>
+              <a:t>}</a:t>
             </a:r>
           </a:p>
         </p:txBody>
@@ -8682,7 +8772,7 @@
           <a:lstStyle/>
           <a:p>
             <a:r>
-              <a:t>Bakery: Performance</a:t>
+              <a:t>Bakery: Mutual Exclusion and Deadlock</a:t>
             </a:r>
           </a:p>
         </p:txBody>
@@ -8717,6 +8807,157 @@
                 </a:solidFill>
               </a:rPr>
               <a:t>17</a:t>
+            </a:r>
+          </a:p>
+        </p:txBody>
+      </p:sp>
+      <p:sp>
+        <p:nvSpPr>
+          <p:cNvPr id="4" name="TextBox 3"/>
+          <p:cNvSpPr txBox="1"/>
+          <p:nvPr/>
+        </p:nvSpPr>
+        <p:spPr>
+          <a:xfrm>
+            <a:off x="822960" y="1554480"/>
+            <a:ext cx="10789920" cy="4937760"/>
+          </a:xfrm>
+          <a:prstGeom prst="rect">
+            <a:avLst/>
+          </a:prstGeom>
+          <a:noFill/>
+        </p:spPr>
+        <p:txBody>
+          <a:bodyPr wrap="square">
+            <a:spAutoFit/>
+          </a:bodyPr>
+          <a:lstStyle/>
+          <a:p>
+            <a:pPr>
+              <a:spcAft>
+                <a:spcPts val="800"/>
+              </a:spcAft>
+            </a:pPr>
+            <a:r>
+              <a:rPr sz="2000"/>
+              <a:t>• Mutual exclusion: (number, id) pairs are unique and ordered; a thread enters only after every thread with a smaller pair has left</a:t>
+            </a:r>
+          </a:p>
+          <a:p>
+            <a:pPr>
+              <a:spcAft>
+                <a:spcPts val="800"/>
+              </a:spcAft>
+            </a:pPr>
+            <a:r>
+              <a:rPr sz="2000"/>
+              <a:t>• choosing[] closes the race where j has read the maximum but not yet written its number</a:t>
+            </a:r>
+          </a:p>
+          <a:p>
+            <a:pPr>
+              <a:spcAft>
+                <a:spcPts val="800"/>
+              </a:spcAft>
+            </a:pPr>
+            <a:r>
+              <a:rPr sz="2000"/>
+              <a:t>• No deadlock: the waiting thread with the smallest pair waits for nobody, so it enters</a:t>
+            </a:r>
+          </a:p>
+          <a:p>
+            <a:pPr>
+              <a:spcAft>
+                <a:spcPts val="800"/>
+              </a:spcAft>
+            </a:pPr>
+            <a:r>
+              <a:rPr sz="2000"/>
+              <a:t>• Like Peterson, it needs memory fences on x86 (FENCE() in the code)</a:t>
+            </a:r>
+          </a:p>
+          <a:p>
+            <a:pPr>
+              <a:spcAft>
+                <a:spcPts val="800"/>
+              </a:spcAft>
+            </a:pPr>
+            <a:r>
+              <a:rPr sz="2000"/>
+              <a:t>• Measured: all 24 runs (1–8 threads, all CPUs and one CPU) finished with lost = 0</a:t>
+            </a:r>
+          </a:p>
+        </p:txBody>
+      </p:sp>
+    </p:spTree>
+  </p:cSld>
+  <p:clrMapOvr>
+    <a:masterClrMapping/>
+  </p:clrMapOvr>
+</p:sld>
+</file>
+
+<file path=ppt/slides/slide18.xml><?xml version="1.0" encoding="utf-8"?>
+<p:sld xmlns:a="http://schemas.openxmlformats.org/drawingml/2006/main" xmlns:p="http://schemas.openxmlformats.org/presentationml/2006/main" xmlns:r="http://schemas.openxmlformats.org/officeDocument/2006/relationships">
+  <p:cSld>
+    <p:spTree>
+      <p:nvGrpSpPr>
+        <p:cNvPr id="1" name=""/>
+        <p:cNvGrpSpPr/>
+        <p:nvPr/>
+      </p:nvGrpSpPr>
+      <p:grpSpPr/>
+      <p:sp>
+        <p:nvSpPr>
+          <p:cNvPr id="2" name="Title 1"/>
+          <p:cNvSpPr>
+            <a:spLocks noGrp="1"/>
+          </p:cNvSpPr>
+          <p:nvPr>
+            <p:ph type="title"/>
+          </p:nvPr>
+        </p:nvSpPr>
+        <p:spPr/>
+        <p:txBody>
+          <a:bodyPr/>
+          <a:lstStyle/>
+          <a:p>
+            <a:r>
+              <a:t>Bakery: Performance</a:t>
+            </a:r>
+          </a:p>
+        </p:txBody>
+      </p:sp>
+      <p:sp>
+        <p:nvSpPr>
+          <p:cNvPr id="3" name="TextBox 2"/>
+          <p:cNvSpPr txBox="1"/>
+          <p:nvPr/>
+        </p:nvSpPr>
+        <p:spPr>
+          <a:xfrm>
+            <a:off x="11247120" y="6400800"/>
+            <a:ext cx="731520" cy="365760"/>
+          </a:xfrm>
+          <a:prstGeom prst="rect">
+            <a:avLst/>
+          </a:prstGeom>
+          <a:noFill/>
+        </p:spPr>
+        <p:txBody>
+          <a:bodyPr wrap="none">
+            <a:spAutoFit/>
+          </a:bodyPr>
+          <a:lstStyle/>
+          <a:p>
+            <a:pPr algn="r"/>
+            <a:r>
+              <a:rPr sz="1200">
+                <a:solidFill>
+                  <a:srgbClr val="808080"/>
+                </a:solidFill>
+              </a:rPr>
+              <a:t>18</a:t>
             </a:r>
           </a:p>
         </p:txBody>
@@ -8807,7 +9048,7 @@
 </p:sld>
 </file>
 
-<file path=ppt/slides/slide18.xml><?xml version="1.0" encoding="utf-8"?>
+<file path=ppt/slides/slide19.xml><?xml version="1.0" encoding="utf-8"?>
 <p:sld xmlns:a="http://schemas.openxmlformats.org/drawingml/2006/main" xmlns:p="http://schemas.openxmlformats.org/presentationml/2006/main" xmlns:r="http://schemas.openxmlformats.org/officeDocument/2006/relationships">
   <p:cSld>
     <p:spTree>
@@ -8867,7 +9108,7 @@
                   <a:srgbClr val="808080"/>
                 </a:solidFill>
               </a:rPr>
-              <a:t>18</a:t>
+              <a:t>19</a:t>
             </a:r>
           </a:p>
         </p:txBody>
@@ -8957,105 +9198,6 @@
             <a:r>
               <a:rPr sz="1800"/>
               <a:t>– Collapses on one CPU: 90 k acq/s at 8 threads</a:t>
-            </a:r>
-          </a:p>
-        </p:txBody>
-      </p:sp>
-    </p:spTree>
-  </p:cSld>
-  <p:clrMapOvr>
-    <a:masterClrMapping/>
-  </p:clrMapOvr>
-</p:sld>
-</file>
-
-<file path=ppt/slides/slide19.xml><?xml version="1.0" encoding="utf-8"?>
-<p:sld xmlns:a="http://schemas.openxmlformats.org/drawingml/2006/main" xmlns:p="http://schemas.openxmlformats.org/presentationml/2006/main" xmlns:r="http://schemas.openxmlformats.org/officeDocument/2006/relationships">
-  <p:cSld>
-    <p:spTree>
-      <p:nvGrpSpPr>
-        <p:cNvPr id="1" name=""/>
-        <p:cNvGrpSpPr/>
-        <p:nvPr/>
-      </p:nvGrpSpPr>
-      <p:grpSpPr/>
-      <p:sp>
-        <p:nvSpPr>
-          <p:cNvPr id="2" name="Title 1"/>
-          <p:cNvSpPr>
-            <a:spLocks noGrp="1"/>
-          </p:cNvSpPr>
-          <p:nvPr>
-            <p:ph type="title"/>
-          </p:nvPr>
-        </p:nvSpPr>
-        <p:spPr/>
-        <p:txBody>
-          <a:bodyPr/>
-          <a:lstStyle/>
-          <a:p>
-            <a:r>
-              <a:t>Comparison</a:t>
-            </a:r>
-          </a:p>
-        </p:txBody>
-      </p:sp>
-      <p:sp>
-        <p:nvSpPr>
-          <p:cNvPr id="3" name="Text Placeholder 2"/>
-          <p:cNvSpPr>
-            <a:spLocks noGrp="1"/>
-          </p:cNvSpPr>
-          <p:nvPr>
-            <p:ph type="body" idx="1"/>
-          </p:nvPr>
-        </p:nvSpPr>
-        <p:spPr/>
-        <p:txBody>
-          <a:bodyPr/>
-          <a:lstStyle/>
-          <a:p>
-            <a:r>
-              <a:t>67070501058</a:t>
-            </a:r>
-          </a:p>
-          <a:p>
-            <a:r>
-              <a:t>Chanya Poolketkij</a:t>
-            </a:r>
-          </a:p>
-        </p:txBody>
-      </p:sp>
-      <p:sp>
-        <p:nvSpPr>
-          <p:cNvPr id="4" name="TextBox 3"/>
-          <p:cNvSpPr txBox="1"/>
-          <p:nvPr/>
-        </p:nvSpPr>
-        <p:spPr>
-          <a:xfrm>
-            <a:off x="11247120" y="6400800"/>
-            <a:ext cx="731520" cy="365760"/>
-          </a:xfrm>
-          <a:prstGeom prst="rect">
-            <a:avLst/>
-          </a:prstGeom>
-          <a:noFill/>
-        </p:spPr>
-        <p:txBody>
-          <a:bodyPr wrap="none">
-            <a:spAutoFit/>
-          </a:bodyPr>
-          <a:lstStyle/>
-          <a:p>
-            <a:pPr algn="r"/>
-            <a:r>
-              <a:rPr sz="1200">
-                <a:solidFill>
-                  <a:srgbClr val="808080"/>
-                </a:solidFill>
-              </a:rPr>
-              <a:t>19</a:t>
             </a:r>
           </a:p>
         </p:txBody>
@@ -9141,8 +9283,8 @@
         </p:nvSpPr>
         <p:spPr>
           <a:xfrm>
-            <a:off x="1097280" y="1828800"/>
-            <a:ext cx="4754880" cy="1828800"/>
+            <a:off x="457200" y="1737360"/>
+            <a:ext cx="3657600" cy="2011680"/>
           </a:xfrm>
           <a:prstGeom prst="rect">
             <a:avLst/>
@@ -9161,8 +9303,8 @@
               </a:spcAft>
             </a:pPr>
             <a:r>
-              <a:rPr sz="2200"/>
-              <a:t>67070501005</a:t>
+              <a:rPr sz="2000"/>
+              <a:t>67070501021</a:t>
             </a:r>
           </a:p>
           <a:p>
@@ -9172,8 +9314,8 @@
               </a:spcAft>
             </a:pPr>
             <a:r>
-              <a:rPr sz="2200"/>
-              <a:t>Kiatisak Markmeeshap</a:t>
+              <a:rPr sz="2000"/>
+              <a:t>Thanaboon Tikaew</a:t>
             </a:r>
           </a:p>
           <a:p>
@@ -9190,12 +9332,12 @@
               </a:spcAft>
             </a:pPr>
             <a:r>
-              <a:rPr sz="2200">
+              <a:rPr sz="2000">
                 <a:solidFill>
                   <a:srgbClr val="C0392B"/>
                 </a:solidFill>
               </a:rPr>
-              <a:t>Peterson's Algorithm</a:t>
+              <a:t>How We Evaluate</a:t>
             </a:r>
           </a:p>
         </p:txBody>
@@ -9208,8 +9350,8 @@
         </p:nvSpPr>
         <p:spPr>
           <a:xfrm>
-            <a:off x="6309360" y="1828800"/>
-            <a:ext cx="4754880" cy="1828800"/>
+            <a:off x="4251960" y="1737360"/>
+            <a:ext cx="3657600" cy="2011680"/>
           </a:xfrm>
           <a:prstGeom prst="rect">
             <a:avLst/>
@@ -9228,8 +9370,8 @@
               </a:spcAft>
             </a:pPr>
             <a:r>
-              <a:rPr sz="2200"/>
-              <a:t>67070501018</a:t>
+              <a:rPr sz="2000"/>
+              <a:t>67070501005</a:t>
             </a:r>
           </a:p>
           <a:p>
@@ -9239,8 +9381,8 @@
               </a:spcAft>
             </a:pPr>
             <a:r>
-              <a:rPr sz="2200"/>
-              <a:t>Tithinan Sobking</a:t>
+              <a:rPr sz="2000"/>
+              <a:t>Kiatisak Markmeeshap</a:t>
             </a:r>
           </a:p>
           <a:p>
@@ -9257,12 +9399,12 @@
               </a:spcAft>
             </a:pPr>
             <a:r>
-              <a:rPr sz="2200">
+              <a:rPr sz="2000">
                 <a:solidFill>
                   <a:srgbClr val="C0392B"/>
                 </a:solidFill>
               </a:rPr>
-              <a:t>Load-Linked / Store-Conditional</a:t>
+              <a:t>Peterson's Algorithm</a:t>
             </a:r>
           </a:p>
         </p:txBody>
@@ -9275,8 +9417,8 @@
         </p:nvSpPr>
         <p:spPr>
           <a:xfrm>
-            <a:off x="1097280" y="3931920"/>
-            <a:ext cx="4754880" cy="1828800"/>
+            <a:off x="8046720" y="1737360"/>
+            <a:ext cx="3657600" cy="2011680"/>
           </a:xfrm>
           <a:prstGeom prst="rect">
             <a:avLst/>
@@ -9295,8 +9437,8 @@
               </a:spcAft>
             </a:pPr>
             <a:r>
-              <a:rPr sz="2200"/>
-              <a:t>67070501040</a:t>
+              <a:rPr sz="2000"/>
+              <a:t>67070501018</a:t>
             </a:r>
           </a:p>
           <a:p>
@@ -9306,8 +9448,8 @@
               </a:spcAft>
             </a:pPr>
             <a:r>
-              <a:rPr sz="2200"/>
-              <a:t>Worawut Sereethai</a:t>
+              <a:rPr sz="2000"/>
+              <a:t>Tithinan Sobking</a:t>
             </a:r>
           </a:p>
           <a:p>
@@ -9324,12 +9466,12 @@
               </a:spcAft>
             </a:pPr>
             <a:r>
-              <a:rPr sz="2200">
+              <a:rPr sz="2000">
                 <a:solidFill>
                   <a:srgbClr val="C0392B"/>
                 </a:solidFill>
               </a:rPr>
-              <a:t>Lamport's Bakery Algorithm</a:t>
+              <a:t>Load-Linked / Store-Conditional</a:t>
             </a:r>
           </a:p>
         </p:txBody>
@@ -9342,8 +9484,8 @@
         </p:nvSpPr>
         <p:spPr>
           <a:xfrm>
-            <a:off x="6309360" y="3931920"/>
-            <a:ext cx="4754880" cy="1828800"/>
+            <a:off x="457200" y="4023360"/>
+            <a:ext cx="3657600" cy="2011680"/>
           </a:xfrm>
           <a:prstGeom prst="rect">
             <a:avLst/>
@@ -9362,8 +9504,8 @@
               </a:spcAft>
             </a:pPr>
             <a:r>
-              <a:rPr sz="2200"/>
-              <a:t>67070501058</a:t>
+              <a:rPr sz="2000"/>
+              <a:t>67070501040</a:t>
             </a:r>
           </a:p>
           <a:p>
@@ -9373,8 +9515,8 @@
               </a:spcAft>
             </a:pPr>
             <a:r>
-              <a:rPr sz="2200"/>
-              <a:t>Chanya Poolketkij</a:t>
+              <a:rPr sz="2000"/>
+              <a:t>Worawut Sereethai</a:t>
             </a:r>
           </a:p>
           <a:p>
@@ -9391,12 +9533,146 @@
               </a:spcAft>
             </a:pPr>
             <a:r>
-              <a:rPr sz="2200">
+              <a:rPr sz="2000">
                 <a:solidFill>
                   <a:srgbClr val="C0392B"/>
                 </a:solidFill>
               </a:rPr>
-              <a:t>Comparison and Conclusion</a:t>
+              <a:t>Lamport's Bakery Algorithm</a:t>
+            </a:r>
+          </a:p>
+        </p:txBody>
+      </p:sp>
+      <p:sp>
+        <p:nvSpPr>
+          <p:cNvPr id="8" name="TextBox 7"/>
+          <p:cNvSpPr txBox="1"/>
+          <p:nvPr/>
+        </p:nvSpPr>
+        <p:spPr>
+          <a:xfrm>
+            <a:off x="4251960" y="4023360"/>
+            <a:ext cx="3657600" cy="2011680"/>
+          </a:xfrm>
+          <a:prstGeom prst="rect">
+            <a:avLst/>
+          </a:prstGeom>
+          <a:noFill/>
+        </p:spPr>
+        <p:txBody>
+          <a:bodyPr wrap="square">
+            <a:spAutoFit/>
+          </a:bodyPr>
+          <a:lstStyle/>
+          <a:p>
+            <a:pPr algn="ctr">
+              <a:spcAft>
+                <a:spcPts val="0"/>
+              </a:spcAft>
+            </a:pPr>
+            <a:r>
+              <a:rPr sz="2000"/>
+              <a:t>67070501059</a:t>
+            </a:r>
+          </a:p>
+          <a:p>
+            <a:pPr algn="ctr">
+              <a:spcAft>
+                <a:spcPts val="0"/>
+              </a:spcAft>
+            </a:pPr>
+            <a:r>
+              <a:rPr sz="2000"/>
+              <a:t>Chanon Lhumsa-ard</a:t>
+            </a:r>
+          </a:p>
+          <a:p>
+            <a:pPr algn="ctr">
+              <a:spcAft>
+                <a:spcPts val="0"/>
+              </a:spcAft>
+            </a:pPr>
+          </a:p>
+          <a:p>
+            <a:pPr algn="ctr">
+              <a:spcAft>
+                <a:spcPts val="0"/>
+              </a:spcAft>
+            </a:pPr>
+            <a:r>
+              <a:rPr sz="2000">
+                <a:solidFill>
+                  <a:srgbClr val="C0392B"/>
+                </a:solidFill>
+              </a:rPr>
+              <a:t>Comparison</a:t>
+            </a:r>
+          </a:p>
+        </p:txBody>
+      </p:sp>
+      <p:sp>
+        <p:nvSpPr>
+          <p:cNvPr id="9" name="TextBox 8"/>
+          <p:cNvSpPr txBox="1"/>
+          <p:nvPr/>
+        </p:nvSpPr>
+        <p:spPr>
+          <a:xfrm>
+            <a:off x="8046720" y="4023360"/>
+            <a:ext cx="3657600" cy="2011680"/>
+          </a:xfrm>
+          <a:prstGeom prst="rect">
+            <a:avLst/>
+          </a:prstGeom>
+          <a:noFill/>
+        </p:spPr>
+        <p:txBody>
+          <a:bodyPr wrap="square">
+            <a:spAutoFit/>
+          </a:bodyPr>
+          <a:lstStyle/>
+          <a:p>
+            <a:pPr algn="ctr">
+              <a:spcAft>
+                <a:spcPts val="0"/>
+              </a:spcAft>
+            </a:pPr>
+            <a:r>
+              <a:rPr sz="2000"/>
+              <a:t>67070501075</a:t>
+            </a:r>
+          </a:p>
+          <a:p>
+            <a:pPr algn="ctr">
+              <a:spcAft>
+                <a:spcPts val="0"/>
+              </a:spcAft>
+            </a:pPr>
+            <a:r>
+              <a:rPr sz="2000"/>
+              <a:t>Siriwan Yindeephot</a:t>
+            </a:r>
+          </a:p>
+          <a:p>
+            <a:pPr algn="ctr">
+              <a:spcAft>
+                <a:spcPts val="0"/>
+              </a:spcAft>
+            </a:pPr>
+          </a:p>
+          <a:p>
+            <a:pPr algn="ctr">
+              <a:spcAft>
+                <a:spcPts val="0"/>
+              </a:spcAft>
+            </a:pPr>
+            <a:r>
+              <a:rPr sz="2000">
+                <a:solidFill>
+                  <a:srgbClr val="C0392B"/>
+                </a:solidFill>
+              </a:rPr>
+              <a:t>Conclusion</a:t>
             </a:r>
           </a:p>
         </p:txBody>
@@ -9435,14 +9711,40 @@
           <a:lstStyle/>
           <a:p>
             <a:r>
-              <a:t>Throughput: All CPUs vs One CPU</a:t>
-            </a:r>
-          </a:p>
-        </p:txBody>
-      </p:sp>
-      <p:sp>
-        <p:nvSpPr>
-          <p:cNvPr id="3" name="TextBox 2"/>
+              <a:t>Comparison</a:t>
+            </a:r>
+          </a:p>
+        </p:txBody>
+      </p:sp>
+      <p:sp>
+        <p:nvSpPr>
+          <p:cNvPr id="3" name="Text Placeholder 2"/>
+          <p:cNvSpPr>
+            <a:spLocks noGrp="1"/>
+          </p:cNvSpPr>
+          <p:nvPr>
+            <p:ph type="body" idx="1"/>
+          </p:nvPr>
+        </p:nvSpPr>
+        <p:spPr/>
+        <p:txBody>
+          <a:bodyPr/>
+          <a:lstStyle/>
+          <a:p>
+            <a:r>
+              <a:t>67070501059</a:t>
+            </a:r>
+          </a:p>
+          <a:p>
+            <a:r>
+              <a:t>Chanon Lhumsa-ard</a:t>
+            </a:r>
+          </a:p>
+        </p:txBody>
+      </p:sp>
+      <p:sp>
+        <p:nvSpPr>
+          <p:cNvPr id="4" name="TextBox 3"/>
           <p:cNvSpPr txBox="1"/>
           <p:nvPr/>
         </p:nvSpPr>
@@ -9470,6 +9772,79 @@
                 </a:solidFill>
               </a:rPr>
               <a:t>20</a:t>
+            </a:r>
+          </a:p>
+        </p:txBody>
+      </p:sp>
+    </p:spTree>
+  </p:cSld>
+  <p:clrMapOvr>
+    <a:masterClrMapping/>
+  </p:clrMapOvr>
+</p:sld>
+</file>
+
+<file path=ppt/slides/slide21.xml><?xml version="1.0" encoding="utf-8"?>
+<p:sld xmlns:a="http://schemas.openxmlformats.org/drawingml/2006/main" xmlns:p="http://schemas.openxmlformats.org/presentationml/2006/main" xmlns:r="http://schemas.openxmlformats.org/officeDocument/2006/relationships">
+  <p:cSld>
+    <p:spTree>
+      <p:nvGrpSpPr>
+        <p:cNvPr id="1" name=""/>
+        <p:cNvGrpSpPr/>
+        <p:nvPr/>
+      </p:nvGrpSpPr>
+      <p:grpSpPr/>
+      <p:sp>
+        <p:nvSpPr>
+          <p:cNvPr id="2" name="Title 1"/>
+          <p:cNvSpPr>
+            <a:spLocks noGrp="1"/>
+          </p:cNvSpPr>
+          <p:nvPr>
+            <p:ph type="title"/>
+          </p:nvPr>
+        </p:nvSpPr>
+        <p:spPr/>
+        <p:txBody>
+          <a:bodyPr/>
+          <a:lstStyle/>
+          <a:p>
+            <a:r>
+              <a:t>Throughput: All CPUs vs One CPU</a:t>
+            </a:r>
+          </a:p>
+        </p:txBody>
+      </p:sp>
+      <p:sp>
+        <p:nvSpPr>
+          <p:cNvPr id="3" name="TextBox 2"/>
+          <p:cNvSpPr txBox="1"/>
+          <p:nvPr/>
+        </p:nvSpPr>
+        <p:spPr>
+          <a:xfrm>
+            <a:off x="11247120" y="6400800"/>
+            <a:ext cx="731520" cy="365760"/>
+          </a:xfrm>
+          <a:prstGeom prst="rect">
+            <a:avLst/>
+          </a:prstGeom>
+          <a:noFill/>
+        </p:spPr>
+        <p:txBody>
+          <a:bodyPr wrap="none">
+            <a:spAutoFit/>
+          </a:bodyPr>
+          <a:lstStyle/>
+          <a:p>
+            <a:pPr algn="r"/>
+            <a:r>
+              <a:rPr sz="1200">
+                <a:solidFill>
+                  <a:srgbClr val="808080"/>
+                </a:solidFill>
+              </a:rPr>
+              <a:t>21</a:t>
             </a:r>
           </a:p>
         </p:txBody>
@@ -9518,7 +9893,7 @@
 </p:sld>
 </file>
 
-<file path=ppt/slides/slide21.xml><?xml version="1.0" encoding="utf-8"?>
+<file path=ppt/slides/slide22.xml><?xml version="1.0" encoding="utf-8"?>
 <p:sld xmlns:a="http://schemas.openxmlformats.org/drawingml/2006/main" xmlns:p="http://schemas.openxmlformats.org/presentationml/2006/main" xmlns:r="http://schemas.openxmlformats.org/officeDocument/2006/relationships">
   <p:cSld>
     <p:spTree>
@@ -9578,7 +9953,7 @@
                   <a:srgbClr val="808080"/>
                 </a:solidFill>
               </a:rPr>
-              <a:t>21</a:t>
+              <a:t>22</a:t>
             </a:r>
           </a:p>
         </p:txBody>
@@ -10229,7 +10604,7 @@
 </p:sld>
 </file>
 
-<file path=ppt/slides/slide22.xml><?xml version="1.0" encoding="utf-8"?>
+<file path=ppt/slides/slide23.xml><?xml version="1.0" encoding="utf-8"?>
 <p:sld xmlns:a="http://schemas.openxmlformats.org/drawingml/2006/main" xmlns:p="http://schemas.openxmlformats.org/presentationml/2006/main" xmlns:r="http://schemas.openxmlformats.org/officeDocument/2006/relationships">
   <p:cSld>
     <p:spTree>
@@ -10262,7 +10637,33 @@
       </p:sp>
       <p:sp>
         <p:nvSpPr>
-          <p:cNvPr id="3" name="TextBox 2"/>
+          <p:cNvPr id="3" name="Text Placeholder 2"/>
+          <p:cNvSpPr>
+            <a:spLocks noGrp="1"/>
+          </p:cNvSpPr>
+          <p:nvPr>
+            <p:ph type="body" idx="1"/>
+          </p:nvPr>
+        </p:nvSpPr>
+        <p:spPr/>
+        <p:txBody>
+          <a:bodyPr/>
+          <a:lstStyle/>
+          <a:p>
+            <a:r>
+              <a:t>67070501075</a:t>
+            </a:r>
+          </a:p>
+          <a:p>
+            <a:r>
+              <a:t>Siriwan Yindeephot</a:t>
+            </a:r>
+          </a:p>
+        </p:txBody>
+      </p:sp>
+      <p:sp>
+        <p:nvSpPr>
+          <p:cNvPr id="4" name="TextBox 3"/>
           <p:cNvSpPr txBox="1"/>
           <p:nvPr/>
         </p:nvSpPr>
@@ -10289,7 +10690,80 @@
                   <a:srgbClr val="808080"/>
                 </a:solidFill>
               </a:rPr>
-              <a:t>22</a:t>
+              <a:t>23</a:t>
+            </a:r>
+          </a:p>
+        </p:txBody>
+      </p:sp>
+    </p:spTree>
+  </p:cSld>
+  <p:clrMapOvr>
+    <a:masterClrMapping/>
+  </p:clrMapOvr>
+</p:sld>
+</file>
+
+<file path=ppt/slides/slide24.xml><?xml version="1.0" encoding="utf-8"?>
+<p:sld xmlns:a="http://schemas.openxmlformats.org/drawingml/2006/main" xmlns:p="http://schemas.openxmlformats.org/presentationml/2006/main" xmlns:r="http://schemas.openxmlformats.org/officeDocument/2006/relationships">
+  <p:cSld>
+    <p:spTree>
+      <p:nvGrpSpPr>
+        <p:cNvPr id="1" name=""/>
+        <p:cNvGrpSpPr/>
+        <p:nvPr/>
+      </p:nvGrpSpPr>
+      <p:grpSpPr/>
+      <p:sp>
+        <p:nvSpPr>
+          <p:cNvPr id="2" name="Title 1"/>
+          <p:cNvSpPr>
+            <a:spLocks noGrp="1"/>
+          </p:cNvSpPr>
+          <p:nvPr>
+            <p:ph type="title"/>
+          </p:nvPr>
+        </p:nvSpPr>
+        <p:spPr/>
+        <p:txBody>
+          <a:bodyPr/>
+          <a:lstStyle/>
+          <a:p>
+            <a:r>
+              <a:t>Conclusion</a:t>
+            </a:r>
+          </a:p>
+        </p:txBody>
+      </p:sp>
+      <p:sp>
+        <p:nvSpPr>
+          <p:cNvPr id="3" name="TextBox 2"/>
+          <p:cNvSpPr txBox="1"/>
+          <p:nvPr/>
+        </p:nvSpPr>
+        <p:spPr>
+          <a:xfrm>
+            <a:off x="11247120" y="6400800"/>
+            <a:ext cx="731520" cy="365760"/>
+          </a:xfrm>
+          <a:prstGeom prst="rect">
+            <a:avLst/>
+          </a:prstGeom>
+          <a:noFill/>
+        </p:spPr>
+        <p:txBody>
+          <a:bodyPr wrap="none">
+            <a:spAutoFit/>
+          </a:bodyPr>
+          <a:lstStyle/>
+          <a:p>
+            <a:pPr algn="r"/>
+            <a:r>
+              <a:rPr sz="1200">
+                <a:solidFill>
+                  <a:srgbClr val="808080"/>
+                </a:solidFill>
+              </a:rPr>
+              <a:t>24</a:t>
             </a:r>
           </a:p>
         </p:txBody>
@@ -10369,7 +10843,7 @@
 </p:sld>
 </file>
 
-<file path=ppt/slides/slide23.xml><?xml version="1.0" encoding="utf-8"?>
+<file path=ppt/slides/slide25.xml><?xml version="1.0" encoding="utf-8"?>
 <p:sld xmlns:a="http://schemas.openxmlformats.org/drawingml/2006/main" xmlns:p="http://schemas.openxmlformats.org/presentationml/2006/main" xmlns:r="http://schemas.openxmlformats.org/officeDocument/2006/relationships">
   <p:cSld>
     <p:spTree>
@@ -10429,7 +10903,7 @@
                   <a:srgbClr val="808080"/>
                 </a:solidFill>
               </a:rPr>
-              <a:t>23</a:t>
+              <a:t>25</a:t>
             </a:r>
           </a:p>
         </p:txBody>
@@ -10557,14 +11031,40 @@
           <a:lstStyle/>
           <a:p>
             <a:r>
-              <a:t>How We Evaluate Each Lock</a:t>
-            </a:r>
-          </a:p>
-        </p:txBody>
-      </p:sp>
-      <p:sp>
-        <p:nvSpPr>
-          <p:cNvPr id="3" name="TextBox 2"/>
+              <a:t>How We Evaluate</a:t>
+            </a:r>
+          </a:p>
+        </p:txBody>
+      </p:sp>
+      <p:sp>
+        <p:nvSpPr>
+          <p:cNvPr id="3" name="Text Placeholder 2"/>
+          <p:cNvSpPr>
+            <a:spLocks noGrp="1"/>
+          </p:cNvSpPr>
+          <p:nvPr>
+            <p:ph type="body" idx="1"/>
+          </p:nvPr>
+        </p:nvSpPr>
+        <p:spPr/>
+        <p:txBody>
+          <a:bodyPr/>
+          <a:lstStyle/>
+          <a:p>
+            <a:r>
+              <a:t>67070501021</a:t>
+            </a:r>
+          </a:p>
+          <a:p>
+            <a:r>
+              <a:t>Thanaboon Tikaew</a:t>
+            </a:r>
+          </a:p>
+        </p:txBody>
+      </p:sp>
+      <p:sp>
+        <p:nvSpPr>
+          <p:cNvPr id="4" name="TextBox 3"/>
           <p:cNvSpPr txBox="1"/>
           <p:nvPr/>
         </p:nvSpPr>
@@ -10592,220 +11092,6 @@
                 </a:solidFill>
               </a:rPr>
               <a:t>3</a:t>
-            </a:r>
-          </a:p>
-        </p:txBody>
-      </p:sp>
-      <p:sp>
-        <p:nvSpPr>
-          <p:cNvPr id="4" name="TextBox 3"/>
-          <p:cNvSpPr txBox="1"/>
-          <p:nvPr/>
-        </p:nvSpPr>
-        <p:spPr>
-          <a:xfrm>
-            <a:off x="822960" y="1554480"/>
-            <a:ext cx="6035040" cy="4937760"/>
-          </a:xfrm>
-          <a:prstGeom prst="rect">
-            <a:avLst/>
-          </a:prstGeom>
-          <a:noFill/>
-        </p:spPr>
-        <p:txBody>
-          <a:bodyPr wrap="square">
-            <a:spAutoFit/>
-          </a:bodyPr>
-          <a:lstStyle/>
-          <a:p>
-            <a:pPr>
-              <a:spcAft>
-                <a:spcPts val="800"/>
-              </a:spcAft>
-            </a:pPr>
-            <a:r>
-              <a:rPr sz="2000"/>
-              <a:t>• Metrics from Lecture 8:</a:t>
-            </a:r>
-          </a:p>
-          <a:p>
-            <a:pPr lvl="1">
-              <a:spcAft>
-                <a:spcPts val="800"/>
-              </a:spcAft>
-            </a:pPr>
-            <a:r>
-              <a:rPr sz="1800"/>
-              <a:t>– Mutual exclusion: counter must equal total acquisitions (lost = total − counter)</a:t>
-            </a:r>
-          </a:p>
-          <a:p>
-            <a:pPr lvl="1">
-              <a:spcAft>
-                <a:spcPts val="800"/>
-              </a:spcAft>
-            </a:pPr>
-            <a:r>
-              <a:rPr sz="1800"/>
-              <a:t>– Absence of deadlock: every run must finish</a:t>
-            </a:r>
-          </a:p>
-          <a:p>
-            <a:pPr lvl="1">
-              <a:spcAft>
-                <a:spcPts val="800"/>
-              </a:spcAft>
-            </a:pPr>
-            <a:r>
-              <a:rPr sz="1800"/>
-              <a:t>– Fairness: fewest ÷ most acquisitions per thread (1.0 = equal)</a:t>
-            </a:r>
-          </a:p>
-          <a:p>
-            <a:pPr lvl="1">
-              <a:spcAft>
-                <a:spcPts val="800"/>
-              </a:spcAft>
-            </a:pPr>
-            <a:r>
-              <a:rPr sz="1800"/>
-              <a:t>– Performance: acquisitions per second</a:t>
-            </a:r>
-          </a:p>
-          <a:p>
-            <a:pPr>
-              <a:spcAft>
-                <a:spcPts val="800"/>
-              </a:spcAft>
-            </a:pPr>
-            <a:r>
-              <a:rPr sz="2000"/>
-              <a:t>• 1 s per run, median of 3 runs, 1/2/4/8 threads, on all 8 CPUs and on one CPU (taskset -c 0)</a:t>
-            </a:r>
-          </a:p>
-          <a:p>
-            <a:pPr>
-              <a:spcAft>
-                <a:spcPts val="800"/>
-              </a:spcAft>
-            </a:pPr>
-            <a:r>
-              <a:rPr sz="2000"/>
-              <a:t>• WSL2 Ubuntu, 8 CPUs, gcc 15.2.0 -O2</a:t>
-            </a:r>
-          </a:p>
-          <a:p>
-            <a:pPr>
-              <a:spcAft>
-                <a:spcPts val="800"/>
-              </a:spcAft>
-            </a:pPr>
-            <a:r>
-              <a:rPr sz="2000"/>
-              <a:t>• Reference locks from the lecture: TAS spin lock, pthread_mutex</a:t>
-            </a:r>
-          </a:p>
-        </p:txBody>
-      </p:sp>
-      <p:sp>
-        <p:nvSpPr>
-          <p:cNvPr id="5" name="TextBox 4"/>
-          <p:cNvSpPr txBox="1"/>
-          <p:nvPr/>
-        </p:nvSpPr>
-        <p:spPr>
-          <a:xfrm>
-            <a:off x="7132320" y="1828800"/>
-            <a:ext cx="4663440" cy="1142999"/>
-          </a:xfrm>
-          <a:prstGeom prst="rect">
-            <a:avLst/>
-          </a:prstGeom>
-          <a:solidFill>
-            <a:srgbClr val="F4F4F4"/>
-          </a:solidFill>
-        </p:spPr>
-        <p:txBody>
-          <a:bodyPr wrap="none">
-            <a:spAutoFit/>
-          </a:bodyPr>
-          <a:lstStyle/>
-          <a:p>
-            <a:pPr>
-              <a:spcAft>
-                <a:spcPts val="0"/>
-              </a:spcAft>
-            </a:pPr>
-            <a:r>
-              <a:rPr sz="1050">
-                <a:latin typeface="Consolas"/>
-              </a:rPr>
-              <a:t>while (!stop) {</a:t>
-            </a:r>
-          </a:p>
-          <a:p>
-            <a:pPr>
-              <a:spcAft>
-                <a:spcPts val="0"/>
-              </a:spcAft>
-            </a:pPr>
-            <a:r>
-              <a:rPr sz="1050">
-                <a:latin typeface="Consolas"/>
-              </a:rPr>
-              <a:t>    lock_acquire(id);</a:t>
-            </a:r>
-          </a:p>
-          <a:p>
-            <a:pPr>
-              <a:spcAft>
-                <a:spcPts val="0"/>
-              </a:spcAft>
-            </a:pPr>
-            <a:r>
-              <a:rPr sz="1050">
-                <a:latin typeface="Consolas"/>
-              </a:rPr>
-              <a:t>    counter = counter + 1;          /* critical section */</a:t>
-            </a:r>
-          </a:p>
-          <a:p>
-            <a:pPr>
-              <a:spcAft>
-                <a:spcPts val="0"/>
-              </a:spcAft>
-            </a:pPr>
-            <a:r>
-              <a:rPr sz="1050">
-                <a:latin typeface="Consolas"/>
-              </a:rPr>
-              <a:t>    lock_release(id);</a:t>
-            </a:r>
-          </a:p>
-          <a:p>
-            <a:pPr>
-              <a:spcAft>
-                <a:spcPts val="0"/>
-              </a:spcAft>
-            </a:pPr>
-            <a:r>
-              <a:rPr sz="1050">
-                <a:latin typeface="Consolas"/>
-              </a:rPr>
-              <a:t>    n++;</a:t>
-            </a:r>
-          </a:p>
-          <a:p>
-            <a:pPr>
-              <a:spcAft>
-                <a:spcPts val="0"/>
-              </a:spcAft>
-            </a:pPr>
-            <a:r>
-              <a:rPr sz="1050">
-                <a:latin typeface="Consolas"/>
-              </a:rPr>
-              <a:t>}</a:t>
             </a:r>
           </a:p>
         </p:txBody>
@@ -10844,40 +11130,14 @@
           <a:lstStyle/>
           <a:p>
             <a:r>
-              <a:t>Peterson's Algorithm</a:t>
-            </a:r>
-          </a:p>
-        </p:txBody>
-      </p:sp>
-      <p:sp>
-        <p:nvSpPr>
-          <p:cNvPr id="3" name="Text Placeholder 2"/>
-          <p:cNvSpPr>
-            <a:spLocks noGrp="1"/>
-          </p:cNvSpPr>
-          <p:nvPr>
-            <p:ph type="body" idx="1"/>
-          </p:nvPr>
-        </p:nvSpPr>
-        <p:spPr/>
-        <p:txBody>
-          <a:bodyPr/>
-          <a:lstStyle/>
-          <a:p>
-            <a:r>
-              <a:t>67070501005</a:t>
-            </a:r>
-          </a:p>
-          <a:p>
-            <a:r>
-              <a:t>Kiatisak Markmeeshap</a:t>
-            </a:r>
-          </a:p>
-        </p:txBody>
-      </p:sp>
-      <p:sp>
-        <p:nvSpPr>
-          <p:cNvPr id="4" name="TextBox 3"/>
+              <a:t>How We Evaluate Each Lock</a:t>
+            </a:r>
+          </a:p>
+        </p:txBody>
+      </p:sp>
+      <p:sp>
+        <p:nvSpPr>
+          <p:cNvPr id="3" name="TextBox 2"/>
           <p:cNvSpPr txBox="1"/>
           <p:nvPr/>
         </p:nvSpPr>
@@ -10905,6 +11165,220 @@
                 </a:solidFill>
               </a:rPr>
               <a:t>4</a:t>
+            </a:r>
+          </a:p>
+        </p:txBody>
+      </p:sp>
+      <p:sp>
+        <p:nvSpPr>
+          <p:cNvPr id="4" name="TextBox 3"/>
+          <p:cNvSpPr txBox="1"/>
+          <p:nvPr/>
+        </p:nvSpPr>
+        <p:spPr>
+          <a:xfrm>
+            <a:off x="822960" y="1554480"/>
+            <a:ext cx="6035040" cy="4937760"/>
+          </a:xfrm>
+          <a:prstGeom prst="rect">
+            <a:avLst/>
+          </a:prstGeom>
+          <a:noFill/>
+        </p:spPr>
+        <p:txBody>
+          <a:bodyPr wrap="square">
+            <a:spAutoFit/>
+          </a:bodyPr>
+          <a:lstStyle/>
+          <a:p>
+            <a:pPr>
+              <a:spcAft>
+                <a:spcPts val="800"/>
+              </a:spcAft>
+            </a:pPr>
+            <a:r>
+              <a:rPr sz="2000"/>
+              <a:t>• Metrics from Lecture 8:</a:t>
+            </a:r>
+          </a:p>
+          <a:p>
+            <a:pPr lvl="1">
+              <a:spcAft>
+                <a:spcPts val="800"/>
+              </a:spcAft>
+            </a:pPr>
+            <a:r>
+              <a:rPr sz="1800"/>
+              <a:t>– Mutual exclusion: counter must equal total acquisitions (lost = total − counter)</a:t>
+            </a:r>
+          </a:p>
+          <a:p>
+            <a:pPr lvl="1">
+              <a:spcAft>
+                <a:spcPts val="800"/>
+              </a:spcAft>
+            </a:pPr>
+            <a:r>
+              <a:rPr sz="1800"/>
+              <a:t>– Absence of deadlock: every run must finish</a:t>
+            </a:r>
+          </a:p>
+          <a:p>
+            <a:pPr lvl="1">
+              <a:spcAft>
+                <a:spcPts val="800"/>
+              </a:spcAft>
+            </a:pPr>
+            <a:r>
+              <a:rPr sz="1800"/>
+              <a:t>– Fairness: fewest ÷ most acquisitions per thread (1.0 = equal)</a:t>
+            </a:r>
+          </a:p>
+          <a:p>
+            <a:pPr lvl="1">
+              <a:spcAft>
+                <a:spcPts val="800"/>
+              </a:spcAft>
+            </a:pPr>
+            <a:r>
+              <a:rPr sz="1800"/>
+              <a:t>– Performance: acquisitions per second</a:t>
+            </a:r>
+          </a:p>
+          <a:p>
+            <a:pPr>
+              <a:spcAft>
+                <a:spcPts val="800"/>
+              </a:spcAft>
+            </a:pPr>
+            <a:r>
+              <a:rPr sz="2000"/>
+              <a:t>• 1 s per run, median of 3 runs, 1/2/4/8 threads, on all 8 CPUs and on one CPU (taskset -c 0)</a:t>
+            </a:r>
+          </a:p>
+          <a:p>
+            <a:pPr>
+              <a:spcAft>
+                <a:spcPts val="800"/>
+              </a:spcAft>
+            </a:pPr>
+            <a:r>
+              <a:rPr sz="2000"/>
+              <a:t>• WSL2 Ubuntu, 8 CPUs, gcc 15.2.0 -O2</a:t>
+            </a:r>
+          </a:p>
+          <a:p>
+            <a:pPr>
+              <a:spcAft>
+                <a:spcPts val="800"/>
+              </a:spcAft>
+            </a:pPr>
+            <a:r>
+              <a:rPr sz="2000"/>
+              <a:t>• Reference locks from the lecture: TAS spin lock, pthread_mutex</a:t>
+            </a:r>
+          </a:p>
+        </p:txBody>
+      </p:sp>
+      <p:sp>
+        <p:nvSpPr>
+          <p:cNvPr id="5" name="TextBox 4"/>
+          <p:cNvSpPr txBox="1"/>
+          <p:nvPr/>
+        </p:nvSpPr>
+        <p:spPr>
+          <a:xfrm>
+            <a:off x="7132320" y="1828800"/>
+            <a:ext cx="4663440" cy="1142999"/>
+          </a:xfrm>
+          <a:prstGeom prst="rect">
+            <a:avLst/>
+          </a:prstGeom>
+          <a:solidFill>
+            <a:srgbClr val="F4F4F4"/>
+          </a:solidFill>
+        </p:spPr>
+        <p:txBody>
+          <a:bodyPr wrap="none">
+            <a:spAutoFit/>
+          </a:bodyPr>
+          <a:lstStyle/>
+          <a:p>
+            <a:pPr>
+              <a:spcAft>
+                <a:spcPts val="0"/>
+              </a:spcAft>
+            </a:pPr>
+            <a:r>
+              <a:rPr sz="1050">
+                <a:latin typeface="Consolas"/>
+              </a:rPr>
+              <a:t>while (!stop) {</a:t>
+            </a:r>
+          </a:p>
+          <a:p>
+            <a:pPr>
+              <a:spcAft>
+                <a:spcPts val="0"/>
+              </a:spcAft>
+            </a:pPr>
+            <a:r>
+              <a:rPr sz="1050">
+                <a:latin typeface="Consolas"/>
+              </a:rPr>
+              <a:t>    lock_acquire(id);</a:t>
+            </a:r>
+          </a:p>
+          <a:p>
+            <a:pPr>
+              <a:spcAft>
+                <a:spcPts val="0"/>
+              </a:spcAft>
+            </a:pPr>
+            <a:r>
+              <a:rPr sz="1050">
+                <a:latin typeface="Consolas"/>
+              </a:rPr>
+              <a:t>    counter = counter + 1;          /* critical section */</a:t>
+            </a:r>
+          </a:p>
+          <a:p>
+            <a:pPr>
+              <a:spcAft>
+                <a:spcPts val="0"/>
+              </a:spcAft>
+            </a:pPr>
+            <a:r>
+              <a:rPr sz="1050">
+                <a:latin typeface="Consolas"/>
+              </a:rPr>
+              <a:t>    lock_release(id);</a:t>
+            </a:r>
+          </a:p>
+          <a:p>
+            <a:pPr>
+              <a:spcAft>
+                <a:spcPts val="0"/>
+              </a:spcAft>
+            </a:pPr>
+            <a:r>
+              <a:rPr sz="1050">
+                <a:latin typeface="Consolas"/>
+              </a:rPr>
+              <a:t>    n++;</a:t>
+            </a:r>
+          </a:p>
+          <a:p>
+            <a:pPr>
+              <a:spcAft>
+                <a:spcPts val="0"/>
+              </a:spcAft>
+            </a:pPr>
+            <a:r>
+              <a:rPr sz="1050">
+                <a:latin typeface="Consolas"/>
+              </a:rPr>
+              <a:t>}</a:t>
             </a:r>
           </a:p>
         </p:txBody>
@@ -10943,14 +11417,40 @@
           <a:lstStyle/>
           <a:p>
             <a:r>
-              <a:t>Peterson's Algorithm: Idea</a:t>
-            </a:r>
-          </a:p>
-        </p:txBody>
-      </p:sp>
-      <p:sp>
-        <p:nvSpPr>
-          <p:cNvPr id="3" name="TextBox 2"/>
+              <a:t>Peterson's Algorithm</a:t>
+            </a:r>
+          </a:p>
+        </p:txBody>
+      </p:sp>
+      <p:sp>
+        <p:nvSpPr>
+          <p:cNvPr id="3" name="Text Placeholder 2"/>
+          <p:cNvSpPr>
+            <a:spLocks noGrp="1"/>
+          </p:cNvSpPr>
+          <p:nvPr>
+            <p:ph type="body" idx="1"/>
+          </p:nvPr>
+        </p:nvSpPr>
+        <p:spPr/>
+        <p:txBody>
+          <a:bodyPr/>
+          <a:lstStyle/>
+          <a:p>
+            <a:r>
+              <a:t>67070501005</a:t>
+            </a:r>
+          </a:p>
+          <a:p>
+            <a:r>
+              <a:t>Kiatisak Markmeeshap</a:t>
+            </a:r>
+          </a:p>
+        </p:txBody>
+      </p:sp>
+      <p:sp>
+        <p:nvSpPr>
+          <p:cNvPr id="4" name="TextBox 3"/>
           <p:cNvSpPr txBox="1"/>
           <p:nvPr/>
         </p:nvSpPr>
@@ -10978,331 +11478,6 @@
                 </a:solidFill>
               </a:rPr>
               <a:t>5</a:t>
-            </a:r>
-          </a:p>
-        </p:txBody>
-      </p:sp>
-      <p:sp>
-        <p:nvSpPr>
-          <p:cNvPr id="4" name="TextBox 3"/>
-          <p:cNvSpPr txBox="1"/>
-          <p:nvPr/>
-        </p:nvSpPr>
-        <p:spPr>
-          <a:xfrm>
-            <a:off x="548640" y="1554480"/>
-            <a:ext cx="4389120" cy="4937760"/>
-          </a:xfrm>
-          <a:prstGeom prst="rect">
-            <a:avLst/>
-          </a:prstGeom>
-          <a:noFill/>
-        </p:spPr>
-        <p:txBody>
-          <a:bodyPr wrap="square">
-            <a:spAutoFit/>
-          </a:bodyPr>
-          <a:lstStyle/>
-          <a:p>
-            <a:pPr>
-              <a:spcAft>
-                <a:spcPts val="800"/>
-              </a:spcAft>
-            </a:pPr>
-            <a:r>
-              <a:rPr sz="2000"/>
-              <a:t>• Pure software lock for two threads: only loads and stores</a:t>
-            </a:r>
-          </a:p>
-          <a:p>
-            <a:pPr>
-              <a:spcAft>
-                <a:spcPts val="800"/>
-              </a:spcAft>
-            </a:pPr>
-            <a:r>
-              <a:rPr sz="2000"/>
-              <a:t>• flag[i] = 1 — “thread i wants to enter”</a:t>
-            </a:r>
-          </a:p>
-          <a:p>
-            <a:pPr>
-              <a:spcAft>
-                <a:spcPts val="800"/>
-              </a:spcAft>
-            </a:pPr>
-            <a:r>
-              <a:rPr sz="2000"/>
-              <a:t>• turn = other — “you go first”</a:t>
-            </a:r>
-          </a:p>
-          <a:p>
-            <a:pPr>
-              <a:spcAft>
-                <a:spcPts val="800"/>
-              </a:spcAft>
-            </a:pPr>
-            <a:r>
-              <a:rPr sz="2000"/>
-              <a:t>• Wait while the other wants in and it is the other's turn</a:t>
-            </a:r>
-          </a:p>
-          <a:p>
-            <a:pPr>
-              <a:spcAft>
-                <a:spcPts val="800"/>
-              </a:spcAft>
-            </a:pPr>
-            <a:r>
-              <a:rPr sz="2000"/>
-              <a:t>• The thread that wrote turn last waits</a:t>
-            </a:r>
-          </a:p>
-        </p:txBody>
-      </p:sp>
-      <p:sp>
-        <p:nvSpPr>
-          <p:cNvPr id="5" name="TextBox 4"/>
-          <p:cNvSpPr txBox="1"/>
-          <p:nvPr/>
-        </p:nvSpPr>
-        <p:spPr>
-          <a:xfrm>
-            <a:off x="5120640" y="1463040"/>
-            <a:ext cx="6675120" cy="3886200"/>
-          </a:xfrm>
-          <a:prstGeom prst="rect">
-            <a:avLst/>
-          </a:prstGeom>
-          <a:solidFill>
-            <a:srgbClr val="F4F4F4"/>
-          </a:solidFill>
-        </p:spPr>
-        <p:txBody>
-          <a:bodyPr wrap="none">
-            <a:spAutoFit/>
-          </a:bodyPr>
-          <a:lstStyle/>
-          <a:p>
-            <a:pPr>
-              <a:spcAft>
-                <a:spcPts val="0"/>
-              </a:spcAft>
-            </a:pPr>
-            <a:r>
-              <a:rPr sz="1350">
-                <a:latin typeface="Consolas"/>
-              </a:rPr>
-              <a:t>static volatile int flag[2];   /* flag[i] = 1: thread i wants in */</a:t>
-            </a:r>
-          </a:p>
-          <a:p>
-            <a:pPr>
-              <a:spcAft>
-                <a:spcPts val="0"/>
-              </a:spcAft>
-            </a:pPr>
-            <a:r>
-              <a:rPr sz="1350">
-                <a:latin typeface="Consolas"/>
-              </a:rPr>
-              <a:t>static volatile int turn;      /* whose turn it is to wait */</a:t>
-            </a:r>
-          </a:p>
-          <a:p>
-            <a:pPr>
-              <a:spcAft>
-                <a:spcPts val="0"/>
-              </a:spcAft>
-            </a:pPr>
-          </a:p>
-          <a:p>
-            <a:pPr>
-              <a:spcAft>
-                <a:spcPts val="0"/>
-              </a:spcAft>
-            </a:pPr>
-            <a:r>
-              <a:rPr sz="1350">
-                <a:latin typeface="Consolas"/>
-              </a:rPr>
-              <a:t>void lock_acquire(int self)</a:t>
-            </a:r>
-          </a:p>
-          <a:p>
-            <a:pPr>
-              <a:spcAft>
-                <a:spcPts val="0"/>
-              </a:spcAft>
-            </a:pPr>
-            <a:r>
-              <a:rPr sz="1350">
-                <a:latin typeface="Consolas"/>
-              </a:rPr>
-              <a:t>{</a:t>
-            </a:r>
-          </a:p>
-          <a:p>
-            <a:pPr>
-              <a:spcAft>
-                <a:spcPts val="0"/>
-              </a:spcAft>
-            </a:pPr>
-            <a:r>
-              <a:rPr sz="1350">
-                <a:latin typeface="Consolas"/>
-              </a:rPr>
-              <a:t>    int other = 1 - self;</a:t>
-            </a:r>
-          </a:p>
-          <a:p>
-            <a:pPr>
-              <a:spcAft>
-                <a:spcPts val="0"/>
-              </a:spcAft>
-            </a:pPr>
-            <a:r>
-              <a:rPr sz="1350">
-                <a:latin typeface="Consolas"/>
-              </a:rPr>
-              <a:t>    flag[self] = 1;            /* I want to enter ...        */</a:t>
-            </a:r>
-          </a:p>
-          <a:p>
-            <a:pPr>
-              <a:spcAft>
-                <a:spcPts val="0"/>
-              </a:spcAft>
-            </a:pPr>
-            <a:r>
-              <a:rPr sz="1350">
-                <a:latin typeface="Consolas"/>
-              </a:rPr>
-              <a:t>    turn = other;              /* ... but you go first       */</a:t>
-            </a:r>
-          </a:p>
-          <a:p>
-            <a:pPr>
-              <a:spcAft>
-                <a:spcPts val="0"/>
-              </a:spcAft>
-            </a:pPr>
-            <a:r>
-              <a:rPr sz="1350">
-                <a:latin typeface="Consolas"/>
-              </a:rPr>
-              <a:t>    FENCE();                   /* stores done before the loads */</a:t>
-            </a:r>
-          </a:p>
-          <a:p>
-            <a:pPr>
-              <a:spcAft>
-                <a:spcPts val="0"/>
-              </a:spcAft>
-            </a:pPr>
-            <a:r>
-              <a:rPr sz="1350">
-                <a:latin typeface="Consolas"/>
-              </a:rPr>
-              <a:t>    while (flag[other] == 1 &amp;&amp; turn == other)</a:t>
-            </a:r>
-          </a:p>
-          <a:p>
-            <a:pPr>
-              <a:spcAft>
-                <a:spcPts val="0"/>
-              </a:spcAft>
-            </a:pPr>
-            <a:r>
-              <a:rPr sz="1350">
-                <a:latin typeface="Consolas"/>
-              </a:rPr>
-              <a:t>        ;                      /* spin: you want in, your turn */</a:t>
-            </a:r>
-          </a:p>
-          <a:p>
-            <a:pPr>
-              <a:spcAft>
-                <a:spcPts val="0"/>
-              </a:spcAft>
-            </a:pPr>
-            <a:r>
-              <a:rPr sz="1350">
-                <a:latin typeface="Consolas"/>
-              </a:rPr>
-              <a:t>}</a:t>
-            </a:r>
-          </a:p>
-          <a:p>
-            <a:pPr>
-              <a:spcAft>
-                <a:spcPts val="0"/>
-              </a:spcAft>
-            </a:pPr>
-          </a:p>
-          <a:p>
-            <a:pPr>
-              <a:spcAft>
-                <a:spcPts val="0"/>
-              </a:spcAft>
-            </a:pPr>
-            <a:r>
-              <a:rPr sz="1350">
-                <a:latin typeface="Consolas"/>
-              </a:rPr>
-              <a:t>void lock_release(int self)</a:t>
-            </a:r>
-          </a:p>
-          <a:p>
-            <a:pPr>
-              <a:spcAft>
-                <a:spcPts val="0"/>
-              </a:spcAft>
-            </a:pPr>
-            <a:r>
-              <a:rPr sz="1350">
-                <a:latin typeface="Consolas"/>
-              </a:rPr>
-              <a:t>{</a:t>
-            </a:r>
-          </a:p>
-          <a:p>
-            <a:pPr>
-              <a:spcAft>
-                <a:spcPts val="0"/>
-              </a:spcAft>
-            </a:pPr>
-            <a:r>
-              <a:rPr sz="1350">
-                <a:latin typeface="Consolas"/>
-              </a:rPr>
-              <a:t>    FENCE();</a:t>
-            </a:r>
-          </a:p>
-          <a:p>
-            <a:pPr>
-              <a:spcAft>
-                <a:spcPts val="0"/>
-              </a:spcAft>
-            </a:pPr>
-            <a:r>
-              <a:rPr sz="1350">
-                <a:latin typeface="Consolas"/>
-              </a:rPr>
-              <a:t>    flag[self] = 0;</a:t>
-            </a:r>
-          </a:p>
-          <a:p>
-            <a:pPr>
-              <a:spcAft>
-                <a:spcPts val="0"/>
-              </a:spcAft>
-            </a:pPr>
-            <a:r>
-              <a:rPr sz="1350">
-                <a:latin typeface="Consolas"/>
-              </a:rPr>
-              <a:t>}</a:t>
             </a:r>
           </a:p>
         </p:txBody>
@@ -11341,7 +11516,7 @@
           <a:lstStyle/>
           <a:p>
             <a:r>
-              <a:t>Peterson: Mutual Exclusion and Deadlock</a:t>
+              <a:t>Peterson's Algorithm: Idea</a:t>
             </a:r>
           </a:p>
         </p:txBody>
@@ -11376,6 +11551,404 @@
                 </a:solidFill>
               </a:rPr>
               <a:t>6</a:t>
+            </a:r>
+          </a:p>
+        </p:txBody>
+      </p:sp>
+      <p:sp>
+        <p:nvSpPr>
+          <p:cNvPr id="4" name="TextBox 3"/>
+          <p:cNvSpPr txBox="1"/>
+          <p:nvPr/>
+        </p:nvSpPr>
+        <p:spPr>
+          <a:xfrm>
+            <a:off x="548640" y="1554480"/>
+            <a:ext cx="4389120" cy="4937760"/>
+          </a:xfrm>
+          <a:prstGeom prst="rect">
+            <a:avLst/>
+          </a:prstGeom>
+          <a:noFill/>
+        </p:spPr>
+        <p:txBody>
+          <a:bodyPr wrap="square">
+            <a:spAutoFit/>
+          </a:bodyPr>
+          <a:lstStyle/>
+          <a:p>
+            <a:pPr>
+              <a:spcAft>
+                <a:spcPts val="800"/>
+              </a:spcAft>
+            </a:pPr>
+            <a:r>
+              <a:rPr sz="2000"/>
+              <a:t>• Pure software lock for two threads: only loads and stores</a:t>
+            </a:r>
+          </a:p>
+          <a:p>
+            <a:pPr>
+              <a:spcAft>
+                <a:spcPts val="800"/>
+              </a:spcAft>
+            </a:pPr>
+            <a:r>
+              <a:rPr sz="2000"/>
+              <a:t>• flag[i] = 1 — “thread i wants to enter”</a:t>
+            </a:r>
+          </a:p>
+          <a:p>
+            <a:pPr>
+              <a:spcAft>
+                <a:spcPts val="800"/>
+              </a:spcAft>
+            </a:pPr>
+            <a:r>
+              <a:rPr sz="2000"/>
+              <a:t>• turn = other — “you go first”</a:t>
+            </a:r>
+          </a:p>
+          <a:p>
+            <a:pPr>
+              <a:spcAft>
+                <a:spcPts val="800"/>
+              </a:spcAft>
+            </a:pPr>
+            <a:r>
+              <a:rPr sz="2000"/>
+              <a:t>• Wait while the other wants in and it is the other's turn</a:t>
+            </a:r>
+          </a:p>
+          <a:p>
+            <a:pPr>
+              <a:spcAft>
+                <a:spcPts val="800"/>
+              </a:spcAft>
+            </a:pPr>
+            <a:r>
+              <a:rPr sz="2000"/>
+              <a:t>• The thread that wrote turn last waits</a:t>
+            </a:r>
+          </a:p>
+        </p:txBody>
+      </p:sp>
+      <p:sp>
+        <p:nvSpPr>
+          <p:cNvPr id="5" name="TextBox 4"/>
+          <p:cNvSpPr txBox="1"/>
+          <p:nvPr/>
+        </p:nvSpPr>
+        <p:spPr>
+          <a:xfrm>
+            <a:off x="5120640" y="1463040"/>
+            <a:ext cx="6675120" cy="3886200"/>
+          </a:xfrm>
+          <a:prstGeom prst="rect">
+            <a:avLst/>
+          </a:prstGeom>
+          <a:solidFill>
+            <a:srgbClr val="F4F4F4"/>
+          </a:solidFill>
+        </p:spPr>
+        <p:txBody>
+          <a:bodyPr wrap="none">
+            <a:spAutoFit/>
+          </a:bodyPr>
+          <a:lstStyle/>
+          <a:p>
+            <a:pPr>
+              <a:spcAft>
+                <a:spcPts val="0"/>
+              </a:spcAft>
+            </a:pPr>
+            <a:r>
+              <a:rPr sz="1350">
+                <a:latin typeface="Consolas"/>
+              </a:rPr>
+              <a:t>static volatile int flag[2];   /* flag[i] = 1: thread i wants in */</a:t>
+            </a:r>
+          </a:p>
+          <a:p>
+            <a:pPr>
+              <a:spcAft>
+                <a:spcPts val="0"/>
+              </a:spcAft>
+            </a:pPr>
+            <a:r>
+              <a:rPr sz="1350">
+                <a:latin typeface="Consolas"/>
+              </a:rPr>
+              <a:t>static volatile int turn;      /* whose turn it is to wait */</a:t>
+            </a:r>
+          </a:p>
+          <a:p>
+            <a:pPr>
+              <a:spcAft>
+                <a:spcPts val="0"/>
+              </a:spcAft>
+            </a:pPr>
+          </a:p>
+          <a:p>
+            <a:pPr>
+              <a:spcAft>
+                <a:spcPts val="0"/>
+              </a:spcAft>
+            </a:pPr>
+            <a:r>
+              <a:rPr sz="1350">
+                <a:latin typeface="Consolas"/>
+              </a:rPr>
+              <a:t>void lock_acquire(int self)</a:t>
+            </a:r>
+          </a:p>
+          <a:p>
+            <a:pPr>
+              <a:spcAft>
+                <a:spcPts val="0"/>
+              </a:spcAft>
+            </a:pPr>
+            <a:r>
+              <a:rPr sz="1350">
+                <a:latin typeface="Consolas"/>
+              </a:rPr>
+              <a:t>{</a:t>
+            </a:r>
+          </a:p>
+          <a:p>
+            <a:pPr>
+              <a:spcAft>
+                <a:spcPts val="0"/>
+              </a:spcAft>
+            </a:pPr>
+            <a:r>
+              <a:rPr sz="1350">
+                <a:latin typeface="Consolas"/>
+              </a:rPr>
+              <a:t>    int other = 1 - self;</a:t>
+            </a:r>
+          </a:p>
+          <a:p>
+            <a:pPr>
+              <a:spcAft>
+                <a:spcPts val="0"/>
+              </a:spcAft>
+            </a:pPr>
+            <a:r>
+              <a:rPr sz="1350">
+                <a:latin typeface="Consolas"/>
+              </a:rPr>
+              <a:t>    flag[self] = 1;            /* I want to enter ...        */</a:t>
+            </a:r>
+          </a:p>
+          <a:p>
+            <a:pPr>
+              <a:spcAft>
+                <a:spcPts val="0"/>
+              </a:spcAft>
+            </a:pPr>
+            <a:r>
+              <a:rPr sz="1350">
+                <a:latin typeface="Consolas"/>
+              </a:rPr>
+              <a:t>    turn = other;              /* ... but you go first       */</a:t>
+            </a:r>
+          </a:p>
+          <a:p>
+            <a:pPr>
+              <a:spcAft>
+                <a:spcPts val="0"/>
+              </a:spcAft>
+            </a:pPr>
+            <a:r>
+              <a:rPr sz="1350">
+                <a:latin typeface="Consolas"/>
+              </a:rPr>
+              <a:t>    FENCE();                   /* stores done before the loads */</a:t>
+            </a:r>
+          </a:p>
+          <a:p>
+            <a:pPr>
+              <a:spcAft>
+                <a:spcPts val="0"/>
+              </a:spcAft>
+            </a:pPr>
+            <a:r>
+              <a:rPr sz="1350">
+                <a:latin typeface="Consolas"/>
+              </a:rPr>
+              <a:t>    while (flag[other] == 1 &amp;&amp; turn == other)</a:t>
+            </a:r>
+          </a:p>
+          <a:p>
+            <a:pPr>
+              <a:spcAft>
+                <a:spcPts val="0"/>
+              </a:spcAft>
+            </a:pPr>
+            <a:r>
+              <a:rPr sz="1350">
+                <a:latin typeface="Consolas"/>
+              </a:rPr>
+              <a:t>        ;                      /* spin: you want in, your turn */</a:t>
+            </a:r>
+          </a:p>
+          <a:p>
+            <a:pPr>
+              <a:spcAft>
+                <a:spcPts val="0"/>
+              </a:spcAft>
+            </a:pPr>
+            <a:r>
+              <a:rPr sz="1350">
+                <a:latin typeface="Consolas"/>
+              </a:rPr>
+              <a:t>}</a:t>
+            </a:r>
+          </a:p>
+          <a:p>
+            <a:pPr>
+              <a:spcAft>
+                <a:spcPts val="0"/>
+              </a:spcAft>
+            </a:pPr>
+          </a:p>
+          <a:p>
+            <a:pPr>
+              <a:spcAft>
+                <a:spcPts val="0"/>
+              </a:spcAft>
+            </a:pPr>
+            <a:r>
+              <a:rPr sz="1350">
+                <a:latin typeface="Consolas"/>
+              </a:rPr>
+              <a:t>void lock_release(int self)</a:t>
+            </a:r>
+          </a:p>
+          <a:p>
+            <a:pPr>
+              <a:spcAft>
+                <a:spcPts val="0"/>
+              </a:spcAft>
+            </a:pPr>
+            <a:r>
+              <a:rPr sz="1350">
+                <a:latin typeface="Consolas"/>
+              </a:rPr>
+              <a:t>{</a:t>
+            </a:r>
+          </a:p>
+          <a:p>
+            <a:pPr>
+              <a:spcAft>
+                <a:spcPts val="0"/>
+              </a:spcAft>
+            </a:pPr>
+            <a:r>
+              <a:rPr sz="1350">
+                <a:latin typeface="Consolas"/>
+              </a:rPr>
+              <a:t>    FENCE();</a:t>
+            </a:r>
+          </a:p>
+          <a:p>
+            <a:pPr>
+              <a:spcAft>
+                <a:spcPts val="0"/>
+              </a:spcAft>
+            </a:pPr>
+            <a:r>
+              <a:rPr sz="1350">
+                <a:latin typeface="Consolas"/>
+              </a:rPr>
+              <a:t>    flag[self] = 0;</a:t>
+            </a:r>
+          </a:p>
+          <a:p>
+            <a:pPr>
+              <a:spcAft>
+                <a:spcPts val="0"/>
+              </a:spcAft>
+            </a:pPr>
+            <a:r>
+              <a:rPr sz="1350">
+                <a:latin typeface="Consolas"/>
+              </a:rPr>
+              <a:t>}</a:t>
+            </a:r>
+          </a:p>
+        </p:txBody>
+      </p:sp>
+    </p:spTree>
+  </p:cSld>
+  <p:clrMapOvr>
+    <a:masterClrMapping/>
+  </p:clrMapOvr>
+</p:sld>
+</file>
+
+<file path=ppt/slides/slide7.xml><?xml version="1.0" encoding="utf-8"?>
+<p:sld xmlns:a="http://schemas.openxmlformats.org/drawingml/2006/main" xmlns:p="http://schemas.openxmlformats.org/presentationml/2006/main" xmlns:r="http://schemas.openxmlformats.org/officeDocument/2006/relationships">
+  <p:cSld>
+    <p:spTree>
+      <p:nvGrpSpPr>
+        <p:cNvPr id="1" name=""/>
+        <p:cNvGrpSpPr/>
+        <p:nvPr/>
+      </p:nvGrpSpPr>
+      <p:grpSpPr/>
+      <p:sp>
+        <p:nvSpPr>
+          <p:cNvPr id="2" name="Title 1"/>
+          <p:cNvSpPr>
+            <a:spLocks noGrp="1"/>
+          </p:cNvSpPr>
+          <p:nvPr>
+            <p:ph type="title"/>
+          </p:nvPr>
+        </p:nvSpPr>
+        <p:spPr/>
+        <p:txBody>
+          <a:bodyPr/>
+          <a:lstStyle/>
+          <a:p>
+            <a:r>
+              <a:t>Peterson: Mutual Exclusion and Deadlock</a:t>
+            </a:r>
+          </a:p>
+        </p:txBody>
+      </p:sp>
+      <p:sp>
+        <p:nvSpPr>
+          <p:cNvPr id="3" name="TextBox 2"/>
+          <p:cNvSpPr txBox="1"/>
+          <p:nvPr/>
+        </p:nvSpPr>
+        <p:spPr>
+          <a:xfrm>
+            <a:off x="11247120" y="6400800"/>
+            <a:ext cx="731520" cy="365760"/>
+          </a:xfrm>
+          <a:prstGeom prst="rect">
+            <a:avLst/>
+          </a:prstGeom>
+          <a:noFill/>
+        </p:spPr>
+        <p:txBody>
+          <a:bodyPr wrap="none">
+            <a:spAutoFit/>
+          </a:bodyPr>
+          <a:lstStyle/>
+          <a:p>
+            <a:pPr algn="r"/>
+            <a:r>
+              <a:rPr sz="1200">
+                <a:solidFill>
+                  <a:srgbClr val="808080"/>
+                </a:solidFill>
+              </a:rPr>
+              <a:t>7</a:t>
             </a:r>
           </a:p>
         </p:txBody>
@@ -11726,7 +12299,7 @@
 </p:sld>
 </file>
 
-<file path=ppt/slides/slide7.xml><?xml version="1.0" encoding="utf-8"?>
+<file path=ppt/slides/slide8.xml><?xml version="1.0" encoding="utf-8"?>
 <p:sld xmlns:a="http://schemas.openxmlformats.org/drawingml/2006/main" xmlns:p="http://schemas.openxmlformats.org/presentationml/2006/main" xmlns:r="http://schemas.openxmlformats.org/officeDocument/2006/relationships">
   <p:cSld>
     <p:spTree>
@@ -11786,7 +12359,7 @@
                   <a:srgbClr val="808080"/>
                 </a:solidFill>
               </a:rPr>
-              <a:t>7</a:t>
+              <a:t>8</a:t>
             </a:r>
           </a:p>
         </p:txBody>
@@ -11888,7 +12461,7 @@
 </p:sld>
 </file>
 
-<file path=ppt/slides/slide8.xml><?xml version="1.0" encoding="utf-8"?>
+<file path=ppt/slides/slide9.xml><?xml version="1.0" encoding="utf-8"?>
 <p:sld xmlns:a="http://schemas.openxmlformats.org/drawingml/2006/main" xmlns:p="http://schemas.openxmlformats.org/presentationml/2006/main" xmlns:r="http://schemas.openxmlformats.org/officeDocument/2006/relationships">
   <p:cSld>
     <p:spTree>
@@ -11948,7 +12521,7 @@
                   <a:srgbClr val="808080"/>
                 </a:solidFill>
               </a:rPr>
-              <a:t>8</a:t>
+              <a:t>9</a:t>
             </a:r>
           </a:p>
         </p:txBody>
@@ -12038,105 +12611,6 @@
             <a:r>
               <a:rPr sz="1800"/>
               <a:t>– Spins instead of sleeping</a:t>
-            </a:r>
-          </a:p>
-        </p:txBody>
-      </p:sp>
-    </p:spTree>
-  </p:cSld>
-  <p:clrMapOvr>
-    <a:masterClrMapping/>
-  </p:clrMapOvr>
-</p:sld>
-</file>
-
-<file path=ppt/slides/slide9.xml><?xml version="1.0" encoding="utf-8"?>
-<p:sld xmlns:a="http://schemas.openxmlformats.org/drawingml/2006/main" xmlns:p="http://schemas.openxmlformats.org/presentationml/2006/main" xmlns:r="http://schemas.openxmlformats.org/officeDocument/2006/relationships">
-  <p:cSld>
-    <p:spTree>
-      <p:nvGrpSpPr>
-        <p:cNvPr id="1" name=""/>
-        <p:cNvGrpSpPr/>
-        <p:nvPr/>
-      </p:nvGrpSpPr>
-      <p:grpSpPr/>
-      <p:sp>
-        <p:nvSpPr>
-          <p:cNvPr id="2" name="Title 1"/>
-          <p:cNvSpPr>
-            <a:spLocks noGrp="1"/>
-          </p:cNvSpPr>
-          <p:nvPr>
-            <p:ph type="title"/>
-          </p:nvPr>
-        </p:nvSpPr>
-        <p:spPr/>
-        <p:txBody>
-          <a:bodyPr/>
-          <a:lstStyle/>
-          <a:p>
-            <a:r>
-              <a:t>Load-Linked / Store-Conditional</a:t>
-            </a:r>
-          </a:p>
-        </p:txBody>
-      </p:sp>
-      <p:sp>
-        <p:nvSpPr>
-          <p:cNvPr id="3" name="Text Placeholder 2"/>
-          <p:cNvSpPr>
-            <a:spLocks noGrp="1"/>
-          </p:cNvSpPr>
-          <p:nvPr>
-            <p:ph type="body" idx="1"/>
-          </p:nvPr>
-        </p:nvSpPr>
-        <p:spPr/>
-        <p:txBody>
-          <a:bodyPr/>
-          <a:lstStyle/>
-          <a:p>
-            <a:r>
-              <a:t>67070501018</a:t>
-            </a:r>
-          </a:p>
-          <a:p>
-            <a:r>
-              <a:t>Tithinan Sobking</a:t>
-            </a:r>
-          </a:p>
-        </p:txBody>
-      </p:sp>
-      <p:sp>
-        <p:nvSpPr>
-          <p:cNvPr id="4" name="TextBox 3"/>
-          <p:cNvSpPr txBox="1"/>
-          <p:nvPr/>
-        </p:nvSpPr>
-        <p:spPr>
-          <a:xfrm>
-            <a:off x="11247120" y="6400800"/>
-            <a:ext cx="731520" cy="365760"/>
-          </a:xfrm>
-          <a:prstGeom prst="rect">
-            <a:avLst/>
-          </a:prstGeom>
-          <a:noFill/>
-        </p:spPr>
-        <p:txBody>
-          <a:bodyPr wrap="none">
-            <a:spAutoFit/>
-          </a:bodyPr>
-          <a:lstStyle/>
-          <a:p>
-            <a:pPr algn="r"/>
-            <a:r>
-              <a:rPr sz="1200">
-                <a:solidFill>
-                  <a:srgbClr val="808080"/>
-                </a:solidFill>
-              </a:rPr>
-              <a:t>9</a:t>
             </a:r>
           </a:p>
         </p:txBody>

--- a/PS08/slides/PS08.pptx
+++ b/PS08/slides/PS08.pptx
@@ -33,6 +33,7 @@
     <p:sldId id="278" r:id="rId31"/>
     <p:sldId id="279" r:id="rId32"/>
     <p:sldId id="280" r:id="rId33"/>
+    <p:sldId id="281" r:id="rId34"/>
   </p:sldIdLst>
   <p:sldSz cx="12192000" cy="6858000"/>
   <p:notesSz cx="6858000" cy="9144000"/>
@@ -220,10 +221,10 @@
                 <c:formatCode>General</c:formatCode>
                 <c:ptCount val="2"/>
                 <c:pt idx="0">
-                  <c:v>67.920163</c:v>
+                  <c:v>63.452307</c:v>
                 </c:pt>
                 <c:pt idx="1">
-                  <c:v>18.05578</c:v>
+                  <c:v>15.021417</c:v>
                 </c:pt>
               </c:numCache>
             </c:numRef>
@@ -264,10 +265,10 @@
                 <c:formatCode>General</c:formatCode>
                 <c:ptCount val="2"/>
                 <c:pt idx="0">
-                  <c:v>68.207781</c:v>
+                  <c:v>64.294579</c:v>
                 </c:pt>
                 <c:pt idx="1">
-                  <c:v>0.191643</c:v>
+                  <c:v>0.164672</c:v>
                 </c:pt>
               </c:numCache>
             </c:numRef>
@@ -443,16 +444,16 @@
                 <c:formatCode>General</c:formatCode>
                 <c:ptCount val="4"/>
                 <c:pt idx="0">
-                  <c:v>115.001974</c:v>
+                  <c:v>107.301199</c:v>
                 </c:pt>
                 <c:pt idx="1">
-                  <c:v>18.227358</c:v>
+                  <c:v>17.253647</c:v>
                 </c:pt>
                 <c:pt idx="2">
-                  <c:v>8.781207</c:v>
+                  <c:v>8.673039</c:v>
                 </c:pt>
                 <c:pt idx="3">
-                  <c:v>6.382294</c:v>
+                  <c:v>6.147459</c:v>
                 </c:pt>
               </c:numCache>
             </c:numRef>
@@ -500,16 +501,16 @@
                 <c:formatCode>General</c:formatCode>
                 <c:ptCount val="4"/>
                 <c:pt idx="0">
-                  <c:v>114.820807</c:v>
+                  <c:v>108.946595</c:v>
                 </c:pt>
                 <c:pt idx="1">
-                  <c:v>60.079975</c:v>
+                  <c:v>55.604984</c:v>
                 </c:pt>
                 <c:pt idx="2">
-                  <c:v>28.918768</c:v>
+                  <c:v>28.822359</c:v>
                 </c:pt>
                 <c:pt idx="3">
-                  <c:v>14.103501</c:v>
+                  <c:v>14.007492</c:v>
                 </c:pt>
               </c:numCache>
             </c:numRef>
@@ -557,16 +558,16 @@
                 <c:formatCode>General</c:formatCode>
                 <c:ptCount val="4"/>
                 <c:pt idx="0">
-                  <c:v>109.738311</c:v>
+                  <c:v>101.477403</c:v>
                 </c:pt>
                 <c:pt idx="1">
-                  <c:v>23.410838</c:v>
+                  <c:v>23.167569</c:v>
                 </c:pt>
                 <c:pt idx="2">
-                  <c:v>9.574425</c:v>
+                  <c:v>9.528568</c:v>
                 </c:pt>
                 <c:pt idx="3">
-                  <c:v>5.794615</c:v>
+                  <c:v>5.674698</c:v>
                 </c:pt>
               </c:numCache>
             </c:numRef>
@@ -614,16 +615,16 @@
                 <c:formatCode>General</c:formatCode>
                 <c:ptCount val="4"/>
                 <c:pt idx="0">
-                  <c:v>109.840924</c:v>
+                  <c:v>107.731984</c:v>
                 </c:pt>
                 <c:pt idx="1">
-                  <c:v>56.040178</c:v>
+                  <c:v>53.259232</c:v>
                 </c:pt>
                 <c:pt idx="2">
-                  <c:v>28.76698</c:v>
+                  <c:v>27.371293</c:v>
                 </c:pt>
                 <c:pt idx="3">
-                  <c:v>13.962459</c:v>
+                  <c:v>13.652423</c:v>
                 </c:pt>
               </c:numCache>
             </c:numRef>
@@ -753,7 +754,7 @@
               <c:strCache>
                 <c:ptCount val="1"/>
                 <c:pt idx="0">
-                  <c:v>Bakery, all 8 CPUs</c:v>
+                  <c:v>MCS, all 8 CPUs</c:v>
                 </c:pt>
               </c:strCache>
             </c:strRef>
@@ -785,16 +786,16 @@
                 <c:formatCode>General</c:formatCode>
                 <c:ptCount val="4"/>
                 <c:pt idx="0">
-                  <c:v>34.104665</c:v>
+                  <c:v>53.380392</c:v>
                 </c:pt>
                 <c:pt idx="1">
-                  <c:v>8.401917</c:v>
+                  <c:v>14.774002</c:v>
                 </c:pt>
                 <c:pt idx="2">
-                  <c:v>4.809303</c:v>
+                  <c:v>10.203251</c:v>
                 </c:pt>
                 <c:pt idx="3">
-                  <c:v>2.999472</c:v>
+                  <c:v>6.876554</c:v>
                 </c:pt>
               </c:numCache>
             </c:numRef>
@@ -810,7 +811,7 @@
               <c:strCache>
                 <c:ptCount val="1"/>
                 <c:pt idx="0">
-                  <c:v>Bakery, one CPU</c:v>
+                  <c:v>MCS, one CPU</c:v>
                 </c:pt>
               </c:strCache>
             </c:strRef>
@@ -842,16 +843,16 @@
                 <c:formatCode>General</c:formatCode>
                 <c:ptCount val="4"/>
                 <c:pt idx="0">
-                  <c:v>34.453691</c:v>
+                  <c:v>53.122737</c:v>
                 </c:pt>
                 <c:pt idx="1">
-                  <c:v>0.05582</c:v>
+                  <c:v>0.615147</c:v>
                 </c:pt>
                 <c:pt idx="2">
-                  <c:v>0.169242</c:v>
+                  <c:v>0.400297</c:v>
                 </c:pt>
                 <c:pt idx="3">
-                  <c:v>0.090003</c:v>
+                  <c:v>0.511094</c:v>
                 </c:pt>
               </c:numCache>
             </c:numRef>
@@ -867,7 +868,7 @@
               <c:strCache>
                 <c:ptCount val="1"/>
                 <c:pt idx="0">
-                  <c:v>pthread_mutex, all 8 CPUs</c:v>
+                  <c:v>TAS, all 8 CPUs</c:v>
                 </c:pt>
               </c:strCache>
             </c:strRef>
@@ -899,16 +900,73 @@
                 <c:formatCode>General</c:formatCode>
                 <c:ptCount val="4"/>
                 <c:pt idx="0">
-                  <c:v>54.932697</c:v>
+                  <c:v>101.477403</c:v>
                 </c:pt>
                 <c:pt idx="1">
-                  <c:v>15.722737</c:v>
+                  <c:v>23.167569</c:v>
                 </c:pt>
                 <c:pt idx="2">
-                  <c:v>19.072451</c:v>
+                  <c:v>9.528568</c:v>
                 </c:pt>
                 <c:pt idx="3">
-                  <c:v>19.599804</c:v>
+                  <c:v>5.674698</c:v>
+                </c:pt>
+              </c:numCache>
+            </c:numRef>
+          </c:val>
+          <c:smooth val="0"/>
+        </c:ser>
+        <c:ser>
+          <c:idx val="3"/>
+          <c:order val="3"/>
+          <c:tx>
+            <c:strRef>
+              <c:f>Sheet1!$E$1</c:f>
+              <c:strCache>
+                <c:ptCount val="1"/>
+                <c:pt idx="0">
+                  <c:v>TAS, one CPU</c:v>
+                </c:pt>
+              </c:strCache>
+            </c:strRef>
+          </c:tx>
+          <c:cat>
+            <c:strRef>
+              <c:f>Sheet1!$A$2:$A$5</c:f>
+              <c:strCache>
+                <c:ptCount val="4"/>
+                <c:pt idx="0">
+                  <c:v>1</c:v>
+                </c:pt>
+                <c:pt idx="1">
+                  <c:v>2</c:v>
+                </c:pt>
+                <c:pt idx="2">
+                  <c:v>4</c:v>
+                </c:pt>
+                <c:pt idx="3">
+                  <c:v>8</c:v>
+                </c:pt>
+              </c:strCache>
+            </c:strRef>
+          </c:cat>
+          <c:val>
+            <c:numRef>
+              <c:f>Sheet1!$E$2:$E$5</c:f>
+              <c:numCache>
+                <c:formatCode>General</c:formatCode>
+                <c:ptCount val="4"/>
+                <c:pt idx="0">
+                  <c:v>107.731984</c:v>
+                </c:pt>
+                <c:pt idx="1">
+                  <c:v>53.259232</c:v>
+                </c:pt>
+                <c:pt idx="2">
+                  <c:v>27.371293</c:v>
+                </c:pt>
+                <c:pt idx="3">
+                  <c:v>13.652423</c:v>
                 </c:pt>
               </c:numCache>
             </c:numRef>
@@ -957,8 +1015,8 @@
         <c:axId val="2140495176"/>
         <c:scaling>
           <c:logBase val="10"/>
-          <c:max val="100.0"/>
-          <c:min val="0.01"/>
+          <c:max val="1000.0"/>
+          <c:min val="0.1"/>
         </c:scaling>
         <c:delete val="0"/>
         <c:axPos val="l"/>
@@ -1086,10 +1144,10 @@
                 <c:formatCode>General</c:formatCode>
                 <c:ptCount val="4"/>
                 <c:pt idx="0">
-                  <c:v>67.920163</c:v>
+                  <c:v>63.452307</c:v>
                 </c:pt>
                 <c:pt idx="1">
-                  <c:v>18.05578</c:v>
+                  <c:v>15.021417</c:v>
                 </c:pt>
               </c:numCache>
             </c:numRef>
@@ -1137,16 +1195,16 @@
                 <c:formatCode>General</c:formatCode>
                 <c:ptCount val="4"/>
                 <c:pt idx="0">
-                  <c:v>115.001974</c:v>
+                  <c:v>107.301199</c:v>
                 </c:pt>
                 <c:pt idx="1">
-                  <c:v>18.227358</c:v>
+                  <c:v>17.253647</c:v>
                 </c:pt>
                 <c:pt idx="2">
-                  <c:v>8.781207</c:v>
+                  <c:v>8.673039</c:v>
                 </c:pt>
                 <c:pt idx="3">
-                  <c:v>6.382294</c:v>
+                  <c:v>6.147459</c:v>
                 </c:pt>
               </c:numCache>
             </c:numRef>
@@ -1162,7 +1220,7 @@
               <c:strCache>
                 <c:ptCount val="1"/>
                 <c:pt idx="0">
-                  <c:v>Bakery</c:v>
+                  <c:v>MCS</c:v>
                 </c:pt>
               </c:strCache>
             </c:strRef>
@@ -1194,16 +1252,16 @@
                 <c:formatCode>General</c:formatCode>
                 <c:ptCount val="4"/>
                 <c:pt idx="0">
-                  <c:v>34.104665</c:v>
+                  <c:v>53.380392</c:v>
                 </c:pt>
                 <c:pt idx="1">
-                  <c:v>8.401917</c:v>
+                  <c:v>14.774002</c:v>
                 </c:pt>
                 <c:pt idx="2">
-                  <c:v>4.809303</c:v>
+                  <c:v>10.203251</c:v>
                 </c:pt>
                 <c:pt idx="3">
-                  <c:v>2.999472</c:v>
+                  <c:v>6.876554</c:v>
                 </c:pt>
               </c:numCache>
             </c:numRef>
@@ -1251,16 +1309,16 @@
                 <c:formatCode>General</c:formatCode>
                 <c:ptCount val="4"/>
                 <c:pt idx="0">
-                  <c:v>109.738311</c:v>
+                  <c:v>101.477403</c:v>
                 </c:pt>
                 <c:pt idx="1">
-                  <c:v>23.410838</c:v>
+                  <c:v>23.167569</c:v>
                 </c:pt>
                 <c:pt idx="2">
-                  <c:v>9.574425</c:v>
+                  <c:v>9.528568</c:v>
                 </c:pt>
                 <c:pt idx="3">
-                  <c:v>5.794615</c:v>
+                  <c:v>5.674698</c:v>
                 </c:pt>
               </c:numCache>
             </c:numRef>
@@ -1308,16 +1366,16 @@
                 <c:formatCode>General</c:formatCode>
                 <c:ptCount val="4"/>
                 <c:pt idx="0">
-                  <c:v>54.932697</c:v>
+                  <c:v>52.567284</c:v>
                 </c:pt>
                 <c:pt idx="1">
-                  <c:v>15.722737</c:v>
+                  <c:v>15.116433</c:v>
                 </c:pt>
                 <c:pt idx="2">
-                  <c:v>19.072451</c:v>
+                  <c:v>19.356313</c:v>
                 </c:pt>
                 <c:pt idx="3">
-                  <c:v>19.599804</c:v>
+                  <c:v>20.296315</c:v>
                 </c:pt>
               </c:numCache>
             </c:numRef>
@@ -1495,10 +1553,10 @@
                 <c:formatCode>General</c:formatCode>
                 <c:ptCount val="4"/>
                 <c:pt idx="0">
-                  <c:v>68.207781</c:v>
+                  <c:v>64.294579</c:v>
                 </c:pt>
                 <c:pt idx="1">
-                  <c:v>0.191643</c:v>
+                  <c:v>0.164672</c:v>
                 </c:pt>
               </c:numCache>
             </c:numRef>
@@ -1546,16 +1604,16 @@
                 <c:formatCode>General</c:formatCode>
                 <c:ptCount val="4"/>
                 <c:pt idx="0">
-                  <c:v>114.820807</c:v>
+                  <c:v>108.946595</c:v>
                 </c:pt>
                 <c:pt idx="1">
-                  <c:v>60.079975</c:v>
+                  <c:v>55.604984</c:v>
                 </c:pt>
                 <c:pt idx="2">
-                  <c:v>28.918768</c:v>
+                  <c:v>28.822359</c:v>
                 </c:pt>
                 <c:pt idx="3">
-                  <c:v>14.103501</c:v>
+                  <c:v>14.007492</c:v>
                 </c:pt>
               </c:numCache>
             </c:numRef>
@@ -1571,7 +1629,7 @@
               <c:strCache>
                 <c:ptCount val="1"/>
                 <c:pt idx="0">
-                  <c:v>Bakery</c:v>
+                  <c:v>MCS</c:v>
                 </c:pt>
               </c:strCache>
             </c:strRef>
@@ -1603,16 +1661,16 @@
                 <c:formatCode>General</c:formatCode>
                 <c:ptCount val="4"/>
                 <c:pt idx="0">
-                  <c:v>34.453691</c:v>
+                  <c:v>53.122737</c:v>
                 </c:pt>
                 <c:pt idx="1">
-                  <c:v>0.05582</c:v>
+                  <c:v>0.615147</c:v>
                 </c:pt>
                 <c:pt idx="2">
-                  <c:v>0.169242</c:v>
+                  <c:v>0.400297</c:v>
                 </c:pt>
                 <c:pt idx="3">
-                  <c:v>0.090003</c:v>
+                  <c:v>0.511094</c:v>
                 </c:pt>
               </c:numCache>
             </c:numRef>
@@ -1660,16 +1718,16 @@
                 <c:formatCode>General</c:formatCode>
                 <c:ptCount val="4"/>
                 <c:pt idx="0">
-                  <c:v>109.840924</c:v>
+                  <c:v>107.731984</c:v>
                 </c:pt>
                 <c:pt idx="1">
-                  <c:v>56.040178</c:v>
+                  <c:v>53.259232</c:v>
                 </c:pt>
                 <c:pt idx="2">
-                  <c:v>28.76698</c:v>
+                  <c:v>27.371293</c:v>
                 </c:pt>
                 <c:pt idx="3">
-                  <c:v>13.962459</c:v>
+                  <c:v>13.652423</c:v>
                 </c:pt>
               </c:numCache>
             </c:numRef>
@@ -1717,16 +1775,16 @@
                 <c:formatCode>General</c:formatCode>
                 <c:ptCount val="4"/>
                 <c:pt idx="0">
-                  <c:v>53.707997</c:v>
+                  <c:v>52.968008</c:v>
                 </c:pt>
                 <c:pt idx="1">
-                  <c:v>54.947375</c:v>
+                  <c:v>53.803712</c:v>
                 </c:pt>
                 <c:pt idx="2">
-                  <c:v>55.530698</c:v>
+                  <c:v>52.472641</c:v>
                 </c:pt>
                 <c:pt idx="3">
-                  <c:v>56.086632</c:v>
+                  <c:v>54.235798</c:v>
                 </c:pt>
               </c:numCache>
             </c:numRef>
@@ -1776,7 +1834,7 @@
         <c:scaling>
           <c:logBase val="10"/>
           <c:max val="1000.0"/>
-          <c:min val="0.01"/>
+          <c:min val="0.1"/>
         </c:scaling>
         <c:delete val="0"/>
         <c:axPos val="l"/>
@@ -2232,7 +2290,7 @@
           <a:lstStyle/>
           <a:p>
             <a:r>
-              <a:t>We are group OS InW. This deck studies three locks that were not covered in Lecture 8: Peterson's algorithm, Load-Linked/Store-Conditional, and Lamport's bakery algorithm. Each lock is judged on correctness and performance with the metrics from the lecture.</a:t>
+              <a:t>We are group OS InW. This deck studies three locks that were not covered in Lecture 8: Peterson's algorithm, Load-Linked/Store-Conditional, and the MCS queue lock. Each lock is judged on correctness and performance with the metrics from the lecture.</a:t>
             </a:r>
           </a:p>
         </p:txBody>
@@ -2652,7 +2710,7 @@
           <a:lstStyle/>
           <a:p>
             <a:r>
-              <a:t>Part three, the lock not covered in the lecture: Lamport's bakery algorithm.</a:t>
+              <a:t>Part three, the lock not covered in the lecture: the MCS queue lock.</a:t>
             </a:r>
           </a:p>
         </p:txBody>
@@ -2722,7 +2780,7 @@
           <a:lstStyle/>
           <a:p>
             <a:r>
-              <a:t>The bakery algorithm works like taking a number at a bakery counter. Each thread takes one more than the largest number it sees, and the smallest number is served first. Two threads choosing at the same moment can get the same number, so the lower thread id breaks the tie.</a:t>
+              <a:t>The MCS lock, by Mellor-Crummey and Scott, won the Dijkstra Prize in 2006. Waiting threads form a queue, a linked list. Each thread spins on a flag in its own node, and the thread ahead of it clears that flag when it is done. Linux's spinlock today, the qspinlock, is built on this idea.</a:t>
             </a:r>
           </a:p>
         </p:txBody>
@@ -2792,7 +2850,7 @@
           <a:lstStyle/>
           <a:p>
             <a:r>
-              <a:t>The pairs of number and thread id are all different, so they put the waiting threads in one order. A thread only enters once every thread ahead of it has left. All 24 bakery runs finished with nothing lost.</a:t>
+              <a:t>The atomic exchange puts every thread in one queue, and only the head of that queue may enter. A thread leaves by handing the lock to the node behind it, or by resetting tail if nobody is waiting. All 24 runs finished with nothing lost.</a:t>
             </a:r>
           </a:p>
         </p:txBody>
@@ -2862,7 +2920,7 @@
           <a:lstStyle/>
           <a:p>
             <a:r>
-              <a:t>Every acquisition reads every thread's number and choosing flag, so the cost grows with the number of threads, and each entry is a cache line shared with other cores. On one CPU each handoff waits until the next thread in line is scheduled.</a:t>
+              <a:t>Every waiter spins on its own cache line, so a handover touches one line instead of making every core fight over the same flag. On one CPU it collapses: the queue hands the lock to a thread that is not running. The Linux kernel avoids that by disabling preemption while a spinlock is held or awaited.</a:t>
             </a:r>
           </a:p>
         </p:txBody>
@@ -2932,7 +2990,7 @@
           <a:lstStyle/>
           <a:p>
             <a:r>
-              <a:t>Bakery is first-come, first-served, and it was the fairest lock we measured at eight threads. Its costs are linear time and space in the number of threads and ticket numbers that keep growing while threads keep contending.</a:t>
+              <a:t>The queue makes MCS first-come, first-served: it was the fairest lock we measured at eight threads. It needs a node per waiting thread and an atomic exchange, and like every spin lock it suffers when the next thread in line is not running.</a:t>
             </a:r>
           </a:p>
         </p:txBody>
@@ -3002,7 +3060,7 @@
           <a:lstStyle/>
           <a:p>
             <a:r>
-              <a:t>There are six of us. One member explains how we measured, three members each present one lock, one compares them, and one concludes.</a:t>
+              <a:t>There are six of us. Three members each present one lock, and one of them also explains how we measured; two compare the locks and one concludes.</a:t>
             </a:r>
           </a:p>
         </p:txBody>
@@ -3142,7 +3200,7 @@
           <a:lstStyle/>
           <a:p>
             <a:r>
-              <a:t>On all 8 CPUs, pthread_mutex was fastest at eight threads and Bakery slowest. On one CPU the spinning locks waste time slices, while the mutex puts waiting threads to sleep.</a:t>
+              <a:t>On all 8 CPUs, pthread_mutex was the fastest lock at eight threads. On one CPU the spinning locks waste time slices, while the mutex puts waiting threads to sleep.</a:t>
             </a:r>
           </a:p>
         </p:txBody>
@@ -3212,7 +3270,7 @@
           <a:lstStyle/>
           <a:p>
             <a:r>
-              <a:t>This table puts the three locks and the two references on one page, each at the most threads it supports. Fairness and speed pull in opposite directions: the fair software locks are slow, the fast hardware spin locks are unfair.</a:t>
+              <a:t>Next, the same results as one table.</a:t>
             </a:r>
           </a:p>
         </p:txBody>
@@ -3282,7 +3340,7 @@
           <a:lstStyle/>
           <a:p>
             <a:r>
-              <a:t>Last part: what the measurements tell us, and where the material comes from.</a:t>
+              <a:t>This table puts the three locks and the two references on one page, each at the most threads it supports. Peterson is fair but limited to two threads, the simple hardware spin locks are unfair, and the MCS queue is fair at every thread count we ran.</a:t>
             </a:r>
           </a:p>
         </p:txBody>
@@ -3352,7 +3410,7 @@
           <a:lstStyle/>
           <a:p>
             <a:r>
-              <a:t>All three locks provide mutual exclusion and avoid deadlock, but the two software locks only do so on today's CPUs with memory fences. Software locks are fair but slow and limited; the hardware lock is fast but unfair. Real systems combine a hardware atomic with sleeping in the kernel, which is what pthread_mutex does.</a:t>
+              <a:t>Last part: what the measurements tell us, and where the material comes from.</a:t>
             </a:r>
           </a:p>
         </p:txBody>
@@ -3378,6 +3436,76 @@
 </file>
 
 <file path=ppt/notesSlides/notesSlide25.xml><?xml version="1.0" encoding="utf-8"?>
+<p:notes xmlns:a="http://schemas.openxmlformats.org/drawingml/2006/main" xmlns:p="http://schemas.openxmlformats.org/presentationml/2006/main" xmlns:r="http://schemas.openxmlformats.org/officeDocument/2006/relationships">
+  <p:cSld>
+    <p:spTree>
+      <p:nvGrpSpPr>
+        <p:cNvPr id="1" name=""/>
+        <p:cNvGrpSpPr/>
+        <p:nvPr/>
+      </p:nvGrpSpPr>
+      <p:grpSpPr>
+        <a:xfrm>
+          <a:off x="0" y="0"/>
+          <a:ext cx="0" cy="0"/>
+          <a:chOff x="0" y="0"/>
+          <a:chExt cx="0" cy="0"/>
+        </a:xfrm>
+      </p:grpSpPr>
+      <p:sp>
+        <p:nvSpPr>
+          <p:cNvPr id="2" name="Slide Image Placeholder 1"/>
+          <p:cNvSpPr>
+            <a:spLocks noGrp="1"/>
+          </p:cNvSpPr>
+          <p:nvPr>
+            <p:ph type="sldImg" idx="2"/>
+          </p:nvPr>
+        </p:nvSpPr>
+        <p:spPr/>
+      </p:sp>
+      <p:sp>
+        <p:nvSpPr>
+          <p:cNvPr id="3" name="Notes Placeholder 2"/>
+          <p:cNvSpPr>
+            <a:spLocks noGrp="1"/>
+          </p:cNvSpPr>
+          <p:nvPr>
+            <p:ph type="body" idx="3" sz="quarter"/>
+          </p:nvPr>
+        </p:nvSpPr>
+        <p:spPr/>
+        <p:txBody>
+          <a:bodyPr/>
+          <a:lstStyle/>
+          <a:p>
+            <a:r>
+              <a:t>All three locks provide mutual exclusion and avoid deadlock, but Peterson only does so on today's CPUs with a memory fence. Peterson is fair but limited to two threads; LL/SC is short and fast but unfair; the MCS queue is fair for any number of threads and is what Linux builds its spinlock on. When threads can be preempted, sleeping locks such as pthread_mutex win.</a:t>
+            </a:r>
+          </a:p>
+        </p:txBody>
+      </p:sp>
+      <p:sp>
+        <p:nvSpPr>
+          <p:cNvPr id="4" name="Slide Number Placeholder 3"/>
+          <p:cNvSpPr>
+            <a:spLocks noGrp="1"/>
+          </p:cNvSpPr>
+          <p:nvPr>
+            <p:ph type="sldNum" idx="5" sz="quarter"/>
+          </p:nvPr>
+        </p:nvSpPr>
+        <p:spPr/>
+      </p:sp>
+    </p:spTree>
+  </p:cSld>
+  <p:clrMapOvr>
+    <a:masterClrMapping/>
+  </p:clrMapOvr>
+</p:notes>
+</file>
+
+<file path=ppt/notesSlides/notesSlide26.xml><?xml version="1.0" encoding="utf-8"?>
 <p:notes xmlns:a="http://schemas.openxmlformats.org/drawingml/2006/main" xmlns:p="http://schemas.openxmlformats.org/presentationml/2006/main" xmlns:r="http://schemas.openxmlformats.org/officeDocument/2006/relationships">
   <p:cSld>
     <p:spTree>
@@ -6803,7 +6931,7 @@
           <a:lstStyle/>
           <a:p>
             <a:r>
-              <a:t>Peterson's Algorithm · LL/SC · Lamport's Bakery</a:t>
+              <a:t>Peterson's Algorithm · LL/SC · MCS Lock</a:t>
             </a:r>
           </a:p>
           <a:p>
@@ -7589,7 +7717,7 @@
             </a:pPr>
             <a:r>
               <a:rPr sz="1900"/>
-              <a:t>• AArch64 build under qemu-aarch64 10.2.1, 4 threads: lost = 0 in 3 / 3 runs (5,520,491+ acquisitions each)</a:t>
+              <a:t>• AArch64 build under qemu-aarch64 10.2.1, 4 threads: lost = 0 in 3 / 3 runs (5,252,862+ acquisitions each)</a:t>
             </a:r>
           </a:p>
         </p:txBody>
@@ -7935,7 +8063,7 @@
             </a:pPr>
             <a:r>
               <a:rPr sz="1800"/>
-              <a:t>• All CPUs: 115 M acq/s with 1 thread → 6.4 M with 8 — every try pulls the flag's cache line</a:t>
+              <a:t>• All CPUs: 107 M acq/s with 1 thread → 6.1 M with 8 — every try pulls the flag's cache line</a:t>
             </a:r>
           </a:p>
           <a:p>
@@ -8064,7 +8192,7 @@
             </a:pPr>
             <a:r>
               <a:rPr sz="2000"/>
-              <a:t>• No queue: the first SC to land wins — fairness at 8 threads 0.45 (all CPUs), 0.00 (one CPU; run 1: the unluckiest thread got 1 of 14,215,110)</a:t>
+              <a:t>• No queue: the first SC to land wins — fairness at 8 threads 0.75 (all CPUs), 0.00 (one CPU; run 1: the unluckiest thread got 1 of 14,638,997)</a:t>
             </a:r>
           </a:p>
           <a:p>
@@ -8169,7 +8297,7 @@
           <a:lstStyle/>
           <a:p>
             <a:r>
-              <a:t>Lamport's Bakery Algorithm</a:t>
+              <a:t>MCS Lock</a:t>
             </a:r>
           </a:p>
         </p:txBody>
@@ -8190,12 +8318,12 @@
           <a:lstStyle/>
           <a:p>
             <a:r>
-              <a:t>67070501040</a:t>
-            </a:r>
-          </a:p>
-          <a:p>
-            <a:r>
-              <a:t>Worawut Sereethai</a:t>
+              <a:t>67070501021</a:t>
+            </a:r>
+          </a:p>
+          <a:p>
+            <a:r>
+              <a:t>Thanaboon Tikaew</a:t>
             </a:r>
           </a:p>
         </p:txBody>
@@ -8268,7 +8396,7 @@
           <a:lstStyle/>
           <a:p>
             <a:r>
-              <a:t>Bakery Algorithm: Idea</a:t>
+              <a:t>MCS Lock: Idea</a:t>
             </a:r>
           </a:p>
         </p:txBody>
@@ -8335,8 +8463,8 @@
               </a:spcAft>
             </a:pPr>
             <a:r>
-              <a:rPr sz="2000"/>
-              <a:t>• Take a number: 1 + the largest number in use</a:t>
+              <a:rPr sz="1800"/>
+              <a:t>• Mellor-Crummey and Scott, 1991; Dijkstra Prize 2006</a:t>
             </a:r>
           </a:p>
           <a:p>
@@ -8346,8 +8474,8 @@
               </a:spcAft>
             </a:pPr>
             <a:r>
-              <a:rPr sz="2000"/>
-              <a:t>• Smallest number enters first; equal numbers → lower thread id first</a:t>
+              <a:rPr sz="1800"/>
+              <a:t>• Waiters form a queue: a linked list of nodes, tail points to the last</a:t>
             </a:r>
           </a:p>
           <a:p>
@@ -8357,8 +8485,8 @@
               </a:spcAft>
             </a:pPr>
             <a:r>
-              <a:rPr sz="2000"/>
-              <a:t>• choosing[j]: wait until j has finished picking</a:t>
+              <a:rPr sz="1800"/>
+              <a:t>• Join: one atomic exchange on tail, then link in behind the previous node</a:t>
             </a:r>
           </a:p>
           <a:p>
@@ -8368,8 +8496,23 @@
               </a:spcAft>
             </a:pPr>
             <a:r>
-              <a:rPr sz="2000"/>
-              <a:t>• N threads, only loads and stores (Lamport, 1974)</a:t>
+              <a:rPr sz="1800"/>
+              <a:t>• Each thread spins on its OWN node; the one ahead clears it on release</a:t>
+            </a:r>
+          </a:p>
+          <a:p>
+            <a:pPr>
+              <a:spcAft>
+                <a:spcPts val="800"/>
+              </a:spcAft>
+            </a:pPr>
+            <a:r>
+              <a:rPr sz="1800">
+                <a:solidFill>
+                  <a:srgbClr val="C0392B"/>
+                </a:solidFill>
+              </a:rPr>
+              <a:t>• Linux's spinlock (qspinlock, since v4.2) is built on MCS</a:t>
             </a:r>
           </a:p>
         </p:txBody>
@@ -8383,7 +8526,7 @@
         <p:spPr>
           <a:xfrm>
             <a:off x="5120640" y="1463040"/>
-            <a:ext cx="6675120" cy="4914900"/>
+            <a:ext cx="6675120" cy="3291840"/>
           </a:xfrm>
           <a:prstGeom prst="rect">
             <a:avLst/>
@@ -8404,10 +8547,10 @@
               </a:spcAft>
             </a:pPr>
             <a:r>
-              <a:rPr sz="1150">
+              <a:rPr sz="1200">
                 <a:latin typeface="Consolas"/>
               </a:rPr>
-              <a:t>void lock_acquire(int i)</a:t>
+              <a:t>struct node {</a:t>
             </a:r>
           </a:p>
           <a:p>
@@ -8417,7 +8560,66 @@
               </a:spcAft>
             </a:pPr>
             <a:r>
-              <a:rPr sz="1150">
+              <a:rPr sz="1200">
+                <a:latin typeface="Consolas"/>
+              </a:rPr>
+              <a:t>    struct node *next;          /* the thread queued behind me */</a:t>
+            </a:r>
+          </a:p>
+          <a:p>
+            <a:pPr>
+              <a:spcAft>
+                <a:spcPts val="0"/>
+              </a:spcAft>
+            </a:pPr>
+            <a:r>
+              <a:rPr sz="1200">
+                <a:latin typeface="Consolas"/>
+              </a:rPr>
+              <a:t>    int locked;                 /* 1 = keep waiting */</a:t>
+            </a:r>
+          </a:p>
+          <a:p>
+            <a:pPr>
+              <a:spcAft>
+                <a:spcPts val="0"/>
+              </a:spcAft>
+            </a:pPr>
+            <a:r>
+              <a:rPr sz="1200">
+                <a:latin typeface="Consolas"/>
+              </a:rPr>
+              <a:t>} __attribute__((aligned(64)));  /* one cache line per node */</a:t>
+            </a:r>
+          </a:p>
+          <a:p>
+            <a:pPr>
+              <a:spcAft>
+                <a:spcPts val="0"/>
+              </a:spcAft>
+            </a:pPr>
+          </a:p>
+          <a:p>
+            <a:pPr>
+              <a:spcAft>
+                <a:spcPts val="0"/>
+              </a:spcAft>
+            </a:pPr>
+            <a:r>
+              <a:rPr sz="1200">
+                <a:latin typeface="Consolas"/>
+              </a:rPr>
+              <a:t>void lock_acquire(int id)</a:t>
+            </a:r>
+          </a:p>
+          <a:p>
+            <a:pPr>
+              <a:spcAft>
+                <a:spcPts val="0"/>
+              </a:spcAft>
+            </a:pPr>
+            <a:r>
+              <a:rPr sz="1200">
                 <a:latin typeface="Consolas"/>
               </a:rPr>
               <a:t>{</a:t>
@@ -8430,10 +8632,10 @@
               </a:spcAft>
             </a:pPr>
             <a:r>
-              <a:rPr sz="1150">
+              <a:rPr sz="1200">
                 <a:latin typeface="Consolas"/>
               </a:rPr>
-              <a:t>    choosing[i] = 1;</a:t>
+              <a:t>    struct node *me = &amp;qnode[id];</a:t>
             </a:r>
           </a:p>
           <a:p>
@@ -8443,10 +8645,10 @@
               </a:spcAft>
             </a:pPr>
             <a:r>
-              <a:rPr sz="1150">
+              <a:rPr sz="1200">
                 <a:latin typeface="Consolas"/>
               </a:rPr>
-              <a:t>    FENCE();</a:t>
+              <a:t>    me-&gt;next = NULL;</a:t>
             </a:r>
           </a:p>
           <a:p>
@@ -8456,10 +8658,10 @@
               </a:spcAft>
             </a:pPr>
             <a:r>
-              <a:rPr sz="1150">
+              <a:rPr sz="1200">
                 <a:latin typeface="Consolas"/>
               </a:rPr>
-              <a:t>    unsigned max = 0;</a:t>
+              <a:t>    me-&gt;locked = 1;</a:t>
             </a:r>
           </a:p>
           <a:p>
@@ -8469,10 +8671,10 @@
               </a:spcAft>
             </a:pPr>
             <a:r>
-              <a:rPr sz="1150">
+              <a:rPr sz="1200">
                 <a:latin typeface="Consolas"/>
               </a:rPr>
-              <a:t>    for (int j = 0; j &lt; n; j++)</a:t>
+              <a:t>    struct node *prev = __atomic_exchange_n(&amp;tail, me, __ATOMIC_ACQ_REL);</a:t>
             </a:r>
           </a:p>
           <a:p>
@@ -8482,10 +8684,10 @@
               </a:spcAft>
             </a:pPr>
             <a:r>
-              <a:rPr sz="1150">
+              <a:rPr sz="1200">
                 <a:latin typeface="Consolas"/>
               </a:rPr>
-              <a:t>        if (number[j] &gt; max) max = number[j];</a:t>
+              <a:t>    if (prev != NULL) {         /* queue not empty: */</a:t>
             </a:r>
           </a:p>
           <a:p>
@@ -8495,10 +8697,10 @@
               </a:spcAft>
             </a:pPr>
             <a:r>
-              <a:rPr sz="1150">
+              <a:rPr sz="1200">
                 <a:latin typeface="Consolas"/>
               </a:rPr>
-              <a:t>    number[i] = max + 1;        /* take the next number */</a:t>
+              <a:t>        STORE(&amp;prev-&gt;next, me); /* link in behind prev */</a:t>
             </a:r>
           </a:p>
           <a:p>
@@ -8508,10 +8710,10 @@
               </a:spcAft>
             </a:pPr>
             <a:r>
-              <a:rPr sz="1150">
+              <a:rPr sz="1200">
                 <a:latin typeface="Consolas"/>
               </a:rPr>
-              <a:t>    FENCE();</a:t>
+              <a:t>        while (LOAD(&amp;me-&gt;locked))</a:t>
             </a:r>
           </a:p>
           <a:p>
@@ -8521,10 +8723,10 @@
               </a:spcAft>
             </a:pPr>
             <a:r>
-              <a:rPr sz="1150">
+              <a:rPr sz="1200">
                 <a:latin typeface="Consolas"/>
               </a:rPr>
-              <a:t>    choosing[i] = 0;</a:t>
+              <a:t>            ;                   /* spin on MY node only */</a:t>
             </a:r>
           </a:p>
           <a:p>
@@ -8534,118 +8736,7 @@
               </a:spcAft>
             </a:pPr>
             <a:r>
-              <a:rPr sz="1150">
-                <a:latin typeface="Consolas"/>
-              </a:rPr>
-              <a:t>    FENCE();</a:t>
-            </a:r>
-          </a:p>
-          <a:p>
-            <a:pPr>
-              <a:spcAft>
-                <a:spcPts val="0"/>
-              </a:spcAft>
-            </a:pPr>
-          </a:p>
-          <a:p>
-            <a:pPr>
-              <a:spcAft>
-                <a:spcPts val="0"/>
-              </a:spcAft>
-            </a:pPr>
-            <a:r>
-              <a:rPr sz="1150">
-                <a:latin typeface="Consolas"/>
-              </a:rPr>
-              <a:t>    for (int j = 0; j &lt; n; j++) {</a:t>
-            </a:r>
-          </a:p>
-          <a:p>
-            <a:pPr>
-              <a:spcAft>
-                <a:spcPts val="0"/>
-              </a:spcAft>
-            </a:pPr>
-            <a:r>
-              <a:rPr sz="1150">
-                <a:latin typeface="Consolas"/>
-              </a:rPr>
-              <a:t>        while (choosing[j])</a:t>
-            </a:r>
-          </a:p>
-          <a:p>
-            <a:pPr>
-              <a:spcAft>
-                <a:spcPts val="0"/>
-              </a:spcAft>
-            </a:pPr>
-            <a:r>
-              <a:rPr sz="1150">
-                <a:latin typeface="Consolas"/>
-              </a:rPr>
-              <a:t>            ;                   /* j is still picking */</a:t>
-            </a:r>
-          </a:p>
-          <a:p>
-            <a:pPr>
-              <a:spcAft>
-                <a:spcPts val="0"/>
-              </a:spcAft>
-            </a:pPr>
-            <a:r>
-              <a:rPr sz="1150">
-                <a:latin typeface="Consolas"/>
-              </a:rPr>
-              <a:t>        while (number[j] != 0 &amp;&amp;</a:t>
-            </a:r>
-          </a:p>
-          <a:p>
-            <a:pPr>
-              <a:spcAft>
-                <a:spcPts val="0"/>
-              </a:spcAft>
-            </a:pPr>
-            <a:r>
-              <a:rPr sz="1150">
-                <a:latin typeface="Consolas"/>
-              </a:rPr>
-              <a:t>               (number[j] &lt; number[i] ||</a:t>
-            </a:r>
-          </a:p>
-          <a:p>
-            <a:pPr>
-              <a:spcAft>
-                <a:spcPts val="0"/>
-              </a:spcAft>
-            </a:pPr>
-            <a:r>
-              <a:rPr sz="1150">
-                <a:latin typeface="Consolas"/>
-              </a:rPr>
-              <a:t>                (number[j] == number[i] &amp;&amp; j &lt; i)))</a:t>
-            </a:r>
-          </a:p>
-          <a:p>
-            <a:pPr>
-              <a:spcAft>
-                <a:spcPts val="0"/>
-              </a:spcAft>
-            </a:pPr>
-            <a:r>
-              <a:rPr sz="1150">
-                <a:latin typeface="Consolas"/>
-              </a:rPr>
-              <a:t>            ;                   /* j is ahead of me */</a:t>
-            </a:r>
-          </a:p>
-          <a:p>
-            <a:pPr>
-              <a:spcAft>
-                <a:spcPts val="0"/>
-              </a:spcAft>
-            </a:pPr>
-            <a:r>
-              <a:rPr sz="1150">
+              <a:rPr sz="1200">
                 <a:latin typeface="Consolas"/>
               </a:rPr>
               <a:t>    }</a:t>
@@ -8658,79 +8749,7 @@
               </a:spcAft>
             </a:pPr>
             <a:r>
-              <a:rPr sz="1150">
-                <a:latin typeface="Consolas"/>
-              </a:rPr>
-              <a:t>}</a:t>
-            </a:r>
-          </a:p>
-          <a:p>
-            <a:pPr>
-              <a:spcAft>
-                <a:spcPts val="0"/>
-              </a:spcAft>
-            </a:pPr>
-          </a:p>
-          <a:p>
-            <a:pPr>
-              <a:spcAft>
-                <a:spcPts val="0"/>
-              </a:spcAft>
-            </a:pPr>
-            <a:r>
-              <a:rPr sz="1150">
-                <a:latin typeface="Consolas"/>
-              </a:rPr>
-              <a:t>void lock_release(int i)</a:t>
-            </a:r>
-          </a:p>
-          <a:p>
-            <a:pPr>
-              <a:spcAft>
-                <a:spcPts val="0"/>
-              </a:spcAft>
-            </a:pPr>
-            <a:r>
-              <a:rPr sz="1150">
-                <a:latin typeface="Consolas"/>
-              </a:rPr>
-              <a:t>{</a:t>
-            </a:r>
-          </a:p>
-          <a:p>
-            <a:pPr>
-              <a:spcAft>
-                <a:spcPts val="0"/>
-              </a:spcAft>
-            </a:pPr>
-            <a:r>
-              <a:rPr sz="1150">
-                <a:latin typeface="Consolas"/>
-              </a:rPr>
-              <a:t>    FENCE();</a:t>
-            </a:r>
-          </a:p>
-          <a:p>
-            <a:pPr>
-              <a:spcAft>
-                <a:spcPts val="0"/>
-              </a:spcAft>
-            </a:pPr>
-            <a:r>
-              <a:rPr sz="1150">
-                <a:latin typeface="Consolas"/>
-              </a:rPr>
-              <a:t>    number[i] = 0;</a:t>
-            </a:r>
-          </a:p>
-          <a:p>
-            <a:pPr>
-              <a:spcAft>
-                <a:spcPts val="0"/>
-              </a:spcAft>
-            </a:pPr>
-            <a:r>
-              <a:rPr sz="1150">
+              <a:rPr sz="1200">
                 <a:latin typeface="Consolas"/>
               </a:rPr>
               <a:t>}</a:t>
@@ -8772,7 +8791,7 @@
           <a:lstStyle/>
           <a:p>
             <a:r>
-              <a:t>Bakery: Mutual Exclusion and Deadlock</a:t>
+              <a:t>MCS: Mutual Exclusion and Deadlock</a:t>
             </a:r>
           </a:p>
         </p:txBody>
@@ -8819,8 +8838,8 @@
         </p:nvSpPr>
         <p:spPr>
           <a:xfrm>
-            <a:off x="822960" y="1554480"/>
-            <a:ext cx="10789920" cy="4937760"/>
+            <a:off x="548640" y="1554480"/>
+            <a:ext cx="4389120" cy="4937760"/>
           </a:xfrm>
           <a:prstGeom prst="rect">
             <a:avLst/>
@@ -8839,8 +8858,8 @@
               </a:spcAft>
             </a:pPr>
             <a:r>
-              <a:rPr sz="2000"/>
-              <a:t>• Mutual exclusion: (number, id) pairs are unique and ordered; a thread enters only after every thread with a smaller pair has left</a:t>
+              <a:rPr sz="1700"/>
+              <a:t>• Mutual exclusion: the exchange gives every thread one place in one queue; only the head is inside, and it wakes exactly one node</a:t>
             </a:r>
           </a:p>
           <a:p>
@@ -8850,8 +8869,8 @@
               </a:spcAft>
             </a:pPr>
             <a:r>
-              <a:rPr sz="2000"/>
-              <a:t>• choosing[] closes the race where j has read the maximum but not yet written its number</a:t>
+              <a:rPr sz="1700"/>
+              <a:t>• No deadlock: the holder always hands over — to the next node, or resets tail when nobody waits</a:t>
             </a:r>
           </a:p>
           <a:p>
@@ -8861,8 +8880,8 @@
               </a:spcAft>
             </a:pPr>
             <a:r>
-              <a:rPr sz="2000"/>
-              <a:t>• No deadlock: the waiting thread with the smallest pair waits for nobody, so it enters</a:t>
+              <a:rPr sz="1700"/>
+              <a:t>• release() waits for a waiter that has swapped tail but not linked in yet</a:t>
             </a:r>
           </a:p>
           <a:p>
@@ -8872,19 +8891,215 @@
               </a:spcAft>
             </a:pPr>
             <a:r>
-              <a:rPr sz="2000"/>
-              <a:t>• Like Peterson, it needs memory fences on x86 (FENCE() in the code)</a:t>
-            </a:r>
-          </a:p>
-          <a:p>
-            <a:pPr>
-              <a:spcAft>
-                <a:spcPts val="800"/>
-              </a:spcAft>
-            </a:pPr>
-            <a:r>
-              <a:rPr sz="2000"/>
+              <a:rPr sz="1700"/>
               <a:t>• Measured: all 24 runs (1–8 threads, all CPUs and one CPU) finished with lost = 0</a:t>
+            </a:r>
+          </a:p>
+        </p:txBody>
+      </p:sp>
+      <p:sp>
+        <p:nvSpPr>
+          <p:cNvPr id="5" name="TextBox 4"/>
+          <p:cNvSpPr txBox="1"/>
+          <p:nvPr/>
+        </p:nvSpPr>
+        <p:spPr>
+          <a:xfrm>
+            <a:off x="5120640" y="1463040"/>
+            <a:ext cx="6675120" cy="2636520"/>
+          </a:xfrm>
+          <a:prstGeom prst="rect">
+            <a:avLst/>
+          </a:prstGeom>
+          <a:solidFill>
+            <a:srgbClr val="F4F4F4"/>
+          </a:solidFill>
+        </p:spPr>
+        <p:txBody>
+          <a:bodyPr wrap="none">
+            <a:spAutoFit/>
+          </a:bodyPr>
+          <a:lstStyle/>
+          <a:p>
+            <a:pPr>
+              <a:spcAft>
+                <a:spcPts val="0"/>
+              </a:spcAft>
+            </a:pPr>
+            <a:r>
+              <a:rPr sz="1150">
+                <a:latin typeface="Consolas"/>
+              </a:rPr>
+              <a:t>void lock_release(int id)</a:t>
+            </a:r>
+          </a:p>
+          <a:p>
+            <a:pPr>
+              <a:spcAft>
+                <a:spcPts val="0"/>
+              </a:spcAft>
+            </a:pPr>
+            <a:r>
+              <a:rPr sz="1150">
+                <a:latin typeface="Consolas"/>
+              </a:rPr>
+              <a:t>{</a:t>
+            </a:r>
+          </a:p>
+          <a:p>
+            <a:pPr>
+              <a:spcAft>
+                <a:spcPts val="0"/>
+              </a:spcAft>
+            </a:pPr>
+            <a:r>
+              <a:rPr sz="1150">
+                <a:latin typeface="Consolas"/>
+              </a:rPr>
+              <a:t>    struct node *me = &amp;qnode[id];</a:t>
+            </a:r>
+          </a:p>
+          <a:p>
+            <a:pPr>
+              <a:spcAft>
+                <a:spcPts val="0"/>
+              </a:spcAft>
+            </a:pPr>
+            <a:r>
+              <a:rPr sz="1150">
+                <a:latin typeface="Consolas"/>
+              </a:rPr>
+              <a:t>    struct node *next = LOAD(&amp;me-&gt;next);</a:t>
+            </a:r>
+          </a:p>
+          <a:p>
+            <a:pPr>
+              <a:spcAft>
+                <a:spcPts val="0"/>
+              </a:spcAft>
+            </a:pPr>
+            <a:r>
+              <a:rPr sz="1150">
+                <a:latin typeface="Consolas"/>
+              </a:rPr>
+              <a:t>    if (next == NULL) {</a:t>
+            </a:r>
+          </a:p>
+          <a:p>
+            <a:pPr>
+              <a:spcAft>
+                <a:spcPts val="0"/>
+              </a:spcAft>
+            </a:pPr>
+            <a:r>
+              <a:rPr sz="1150">
+                <a:latin typeface="Consolas"/>
+              </a:rPr>
+              <a:t>        struct node *expect = me;</a:t>
+            </a:r>
+          </a:p>
+          <a:p>
+            <a:pPr>
+              <a:spcAft>
+                <a:spcPts val="0"/>
+              </a:spcAft>
+            </a:pPr>
+            <a:r>
+              <a:rPr sz="1150">
+                <a:latin typeface="Consolas"/>
+              </a:rPr>
+              <a:t>        if (__atomic_compare_exchange_n(&amp;tail, &amp;expect, NULL, 0,</a:t>
+            </a:r>
+          </a:p>
+          <a:p>
+            <a:pPr>
+              <a:spcAft>
+                <a:spcPts val="0"/>
+              </a:spcAft>
+            </a:pPr>
+            <a:r>
+              <a:rPr sz="1150">
+                <a:latin typeface="Consolas"/>
+              </a:rPr>
+              <a:t>                                        __ATOMIC_RELEASE, __ATOMIC_RELAXED))</a:t>
+            </a:r>
+          </a:p>
+          <a:p>
+            <a:pPr>
+              <a:spcAft>
+                <a:spcPts val="0"/>
+              </a:spcAft>
+            </a:pPr>
+            <a:r>
+              <a:rPr sz="1150">
+                <a:latin typeface="Consolas"/>
+              </a:rPr>
+              <a:t>            return;             /* nobody waiting: lock is free */</a:t>
+            </a:r>
+          </a:p>
+          <a:p>
+            <a:pPr>
+              <a:spcAft>
+                <a:spcPts val="0"/>
+              </a:spcAft>
+            </a:pPr>
+            <a:r>
+              <a:rPr sz="1150">
+                <a:latin typeface="Consolas"/>
+              </a:rPr>
+              <a:t>        while ((next = LOAD(&amp;me-&gt;next)) == NULL)</a:t>
+            </a:r>
+          </a:p>
+          <a:p>
+            <a:pPr>
+              <a:spcAft>
+                <a:spcPts val="0"/>
+              </a:spcAft>
+            </a:pPr>
+            <a:r>
+              <a:rPr sz="1150">
+                <a:latin typeface="Consolas"/>
+              </a:rPr>
+              <a:t>            ;                   /* a waiter is still linking in */</a:t>
+            </a:r>
+          </a:p>
+          <a:p>
+            <a:pPr>
+              <a:spcAft>
+                <a:spcPts val="0"/>
+              </a:spcAft>
+            </a:pPr>
+            <a:r>
+              <a:rPr sz="1150">
+                <a:latin typeface="Consolas"/>
+              </a:rPr>
+              <a:t>    }</a:t>
+            </a:r>
+          </a:p>
+          <a:p>
+            <a:pPr>
+              <a:spcAft>
+                <a:spcPts val="0"/>
+              </a:spcAft>
+            </a:pPr>
+            <a:r>
+              <a:rPr sz="1150">
+                <a:latin typeface="Consolas"/>
+              </a:rPr>
+              <a:t>    STORE(&amp;next-&gt;locked, 0);    /* hand the lock to the next thread */</a:t>
+            </a:r>
+          </a:p>
+          <a:p>
+            <a:pPr>
+              <a:spcAft>
+                <a:spcPts val="0"/>
+              </a:spcAft>
+            </a:pPr>
+            <a:r>
+              <a:rPr sz="1150">
+                <a:latin typeface="Consolas"/>
+              </a:rPr>
+              <a:t>}</a:t>
             </a:r>
           </a:p>
         </p:txBody>
@@ -8923,7 +9138,7 @@
           <a:lstStyle/>
           <a:p>
             <a:r>
-              <a:t>Bakery: Performance</a:t>
+              <a:t>MCS: Performance</a:t>
             </a:r>
           </a:p>
         </p:txBody>
@@ -9008,8 +9223,8 @@
               </a:spcAft>
             </a:pPr>
             <a:r>
-              <a:rPr sz="1900"/>
-              <a:t>• lock() scans all N threads twice: O(N) per acquisition</a:t>
+              <a:rPr sz="1800"/>
+              <a:t>• Each waiter spins on its own cache line; a handover touches one line</a:t>
             </a:r>
           </a:p>
           <a:p>
@@ -9019,8 +9234,8 @@
               </a:spcAft>
             </a:pPr>
             <a:r>
-              <a:rPr sz="1900"/>
-              <a:t>• All CPUs: 8.4 M → 4.8 M → 3.0 M acq/s at 2/4/8 threads</a:t>
+              <a:rPr sz="1800"/>
+              <a:t>• All CPUs, 8 threads: 6.9 M acq/s (TAS: 5.7 M)</a:t>
             </a:r>
           </a:p>
           <a:p>
@@ -9030,12 +9245,23 @@
               </a:spcAft>
             </a:pPr>
             <a:r>
-              <a:rPr sz="1900">
+              <a:rPr sz="1800">
                 <a:solidFill>
                   <a:srgbClr val="C0392B"/>
                 </a:solidFill>
               </a:rPr>
-              <a:t>• One CPU, 8 threads: 90 k acq/s — the next in line must be scheduled first</a:t>
+              <a:t>• One CPU, 8 threads: 511 k acq/s — the next in the queue is not running</a:t>
+            </a:r>
+          </a:p>
+          <a:p>
+            <a:pPr>
+              <a:spcAft>
+                <a:spcPts val="800"/>
+              </a:spcAft>
+            </a:pPr>
+            <a:r>
+              <a:rPr sz="1800"/>
+              <a:t>• In the kernel, spinlocks run with preemption disabled, so a queued waiter is never descheduled</a:t>
             </a:r>
           </a:p>
         </p:txBody>
@@ -9074,7 +9300,7 @@
           <a:lstStyle/>
           <a:p>
             <a:r>
-              <a:t>Bakery: Fairness and Limitations</a:t>
+              <a:t>MCS: Fairness and Limitations</a:t>
             </a:r>
           </a:p>
         </p:txBody>
@@ -9142,7 +9368,7 @@
             </a:pPr>
             <a:r>
               <a:rPr sz="2000"/>
-              <a:t>• First-come, first-served: fairness 1.00 / 0.93 / 0.97 at 2/4/8 threads (all CPUs) — the fairest lock at 8 threads</a:t>
+              <a:t>• First-come, first-served through the queue: fairness 1.00 / 1.00 / 1.00 at 2/4/8 threads (all CPUs) — the fairest lock at 8 threads</a:t>
             </a:r>
           </a:p>
           <a:p>
@@ -9164,7 +9390,7 @@
             </a:pPr>
             <a:r>
               <a:rPr sz="1800"/>
-              <a:t>– O(N) time and O(N) memory per lock</a:t>
+              <a:t>– Needs an atomic exchange (and CAS for release) from the hardware</a:t>
             </a:r>
           </a:p>
           <a:p>
@@ -9175,7 +9401,7 @@
             </a:pPr>
             <a:r>
               <a:rPr sz="1800"/>
-              <a:t>– Numbers grow without bound while threads keep contending (overflow)</a:t>
+              <a:t>– One queue node per waiting thread, passed in or kept per thread</a:t>
             </a:r>
           </a:p>
           <a:p>
@@ -9186,7 +9412,7 @@
             </a:pPr>
             <a:r>
               <a:rPr sz="1800"/>
-              <a:t>– Needs memory fences on modern CPUs; spins instead of sleeping</a:t>
+              <a:t>– A preempted waiter stalls everyone behind it — the kernel disables preemption</a:t>
             </a:r>
           </a:p>
           <a:p>
@@ -9197,7 +9423,7 @@
             </a:pPr>
             <a:r>
               <a:rPr sz="1800"/>
-              <a:t>– Collapses on one CPU: 90 k acq/s at 8 threads</a:t>
+              <a:t>– On one CPU here: 511 k acq/s at 8 threads, fairness 0.00</a:t>
             </a:r>
           </a:p>
         </p:txBody>
@@ -9340,6 +9566,21 @@
               <a:t>How We Evaluate</a:t>
             </a:r>
           </a:p>
+          <a:p>
+            <a:pPr algn="ctr">
+              <a:spcAft>
+                <a:spcPts val="0"/>
+              </a:spcAft>
+            </a:pPr>
+            <a:r>
+              <a:rPr sz="2000">
+                <a:solidFill>
+                  <a:srgbClr val="C0392B"/>
+                </a:solidFill>
+              </a:rPr>
+              <a:t>MCS Lock</a:t>
+            </a:r>
+          </a:p>
         </p:txBody>
       </p:sp>
       <p:sp>
@@ -9538,7 +9779,7 @@
                   <a:srgbClr val="C0392B"/>
                 </a:solidFill>
               </a:rPr>
-              <a:t>Lamport's Bakery Algorithm</a:t>
+              <a:t>Comparison: Throughput</a:t>
             </a:r>
           </a:p>
         </p:txBody>
@@ -9605,7 +9846,7 @@
                   <a:srgbClr val="C0392B"/>
                 </a:solidFill>
               </a:rPr>
-              <a:t>Comparison</a:t>
+              <a:t>Comparison: Summary</a:t>
             </a:r>
           </a:p>
         </p:txBody>
@@ -9711,7 +9952,7 @@
           <a:lstStyle/>
           <a:p>
             <a:r>
-              <a:t>Comparison</a:t>
+              <a:t>Comparison: Throughput</a:t>
             </a:r>
           </a:p>
         </p:txBody>
@@ -9732,12 +9973,12 @@
           <a:lstStyle/>
           <a:p>
             <a:r>
-              <a:t>67070501059</a:t>
-            </a:r>
-          </a:p>
-          <a:p>
-            <a:r>
-              <a:t>Chanon Lhumsa-ard</a:t>
+              <a:t>67070501040</a:t>
+            </a:r>
+          </a:p>
+          <a:p>
+            <a:r>
+              <a:t>Worawut Sereethai</a:t>
             </a:r>
           </a:p>
         </p:txBody>
@@ -9919,14 +10160,40 @@
           <a:lstStyle/>
           <a:p>
             <a:r>
-              <a:t>Summary</a:t>
-            </a:r>
-          </a:p>
-        </p:txBody>
-      </p:sp>
-      <p:sp>
-        <p:nvSpPr>
-          <p:cNvPr id="3" name="TextBox 2"/>
+              <a:t>Comparison: Summary</a:t>
+            </a:r>
+          </a:p>
+        </p:txBody>
+      </p:sp>
+      <p:sp>
+        <p:nvSpPr>
+          <p:cNvPr id="3" name="Text Placeholder 2"/>
+          <p:cNvSpPr>
+            <a:spLocks noGrp="1"/>
+          </p:cNvSpPr>
+          <p:nvPr>
+            <p:ph type="body" idx="1"/>
+          </p:nvPr>
+        </p:nvSpPr>
+        <p:spPr/>
+        <p:txBody>
+          <a:bodyPr/>
+          <a:lstStyle/>
+          <a:p>
+            <a:r>
+              <a:t>67070501059</a:t>
+            </a:r>
+          </a:p>
+          <a:p>
+            <a:r>
+              <a:t>Chanon Lhumsa-ard</a:t>
+            </a:r>
+          </a:p>
+        </p:txBody>
+      </p:sp>
+      <p:sp>
+        <p:nvSpPr>
+          <p:cNvPr id="4" name="TextBox 3"/>
           <p:cNvSpPr txBox="1"/>
           <p:nvPr/>
         </p:nvSpPr>
@@ -9958,6 +10225,79 @@
           </a:p>
         </p:txBody>
       </p:sp>
+    </p:spTree>
+  </p:cSld>
+  <p:clrMapOvr>
+    <a:masterClrMapping/>
+  </p:clrMapOvr>
+</p:sld>
+</file>
+
+<file path=ppt/slides/slide23.xml><?xml version="1.0" encoding="utf-8"?>
+<p:sld xmlns:a="http://schemas.openxmlformats.org/drawingml/2006/main" xmlns:p="http://schemas.openxmlformats.org/presentationml/2006/main" xmlns:r="http://schemas.openxmlformats.org/officeDocument/2006/relationships">
+  <p:cSld>
+    <p:spTree>
+      <p:nvGrpSpPr>
+        <p:cNvPr id="1" name=""/>
+        <p:cNvGrpSpPr/>
+        <p:nvPr/>
+      </p:nvGrpSpPr>
+      <p:grpSpPr/>
+      <p:sp>
+        <p:nvSpPr>
+          <p:cNvPr id="2" name="Title 1"/>
+          <p:cNvSpPr>
+            <a:spLocks noGrp="1"/>
+          </p:cNvSpPr>
+          <p:nvPr>
+            <p:ph type="title"/>
+          </p:nvPr>
+        </p:nvSpPr>
+        <p:spPr/>
+        <p:txBody>
+          <a:bodyPr/>
+          <a:lstStyle/>
+          <a:p>
+            <a:r>
+              <a:t>Summary</a:t>
+            </a:r>
+          </a:p>
+        </p:txBody>
+      </p:sp>
+      <p:sp>
+        <p:nvSpPr>
+          <p:cNvPr id="3" name="TextBox 2"/>
+          <p:cNvSpPr txBox="1"/>
+          <p:nvPr/>
+        </p:nvSpPr>
+        <p:spPr>
+          <a:xfrm>
+            <a:off x="11247120" y="6400800"/>
+            <a:ext cx="731520" cy="365760"/>
+          </a:xfrm>
+          <a:prstGeom prst="rect">
+            <a:avLst/>
+          </a:prstGeom>
+          <a:noFill/>
+        </p:spPr>
+        <p:txBody>
+          <a:bodyPr wrap="none">
+            <a:spAutoFit/>
+          </a:bodyPr>
+          <a:lstStyle/>
+          <a:p>
+            <a:pPr algn="r"/>
+            <a:r>
+              <a:rPr sz="1200">
+                <a:solidFill>
+                  <a:srgbClr val="808080"/>
+                </a:solidFill>
+              </a:rPr>
+              <a:t>23</a:t>
+            </a:r>
+          </a:p>
+        </p:txBody>
+      </p:sp>
       <p:graphicFrame>
         <p:nvGraphicFramePr>
           <p:cNvPr id="4" name="Table 3"/>
@@ -9967,8 +10307,8 @@
           <p:nvPr/>
         </p:nvGraphicFramePr>
         <p:xfrm>
-          <a:off x="457200" y="1554480"/>
-          <a:ext cx="11247120" cy="2743200"/>
+          <a:off x="457200" y="1463040"/>
+          <a:ext cx="11247120" cy="2468880"/>
         </p:xfrm>
         <a:graphic>
           <a:graphicData uri="http://schemas.openxmlformats.org/drawingml/2006/table">
@@ -9985,7 +10325,7 @@
                 <a:gridCol w="1463040"/>
                 <a:gridCol w="1280160"/>
               </a:tblGrid>
-              <a:tr h="457200">
+              <a:tr h="411480">
                 <a:tc>
                   <a:txBody>
                     <a:bodyPr/>
@@ -10078,7 +10418,7 @@
                   <a:tcPr/>
                 </a:tc>
               </a:tr>
-              <a:tr h="457200">
+              <a:tr h="411480">
                 <a:tc>
                   <a:txBody>
                     <a:bodyPr/>
@@ -10151,7 +10491,7 @@
                     <a:p>
                       <a:r>
                         <a:rPr sz="1400"/>
-                        <a:t>18 M</a:t>
+                        <a:t>15 M</a:t>
                       </a:r>
                     </a:p>
                   </a:txBody>
@@ -10164,14 +10504,14 @@
                     <a:p>
                       <a:r>
                         <a:rPr sz="1400"/>
-                        <a:t>192 k</a:t>
+                        <a:t>165 k</a:t>
                       </a:r>
                     </a:p>
                   </a:txBody>
                   <a:tcPr/>
                 </a:tc>
               </a:tr>
-              <a:tr h="457200">
+              <a:tr h="411480">
                 <a:tc>
                   <a:txBody>
                     <a:bodyPr/>
@@ -10231,7 +10571,7 @@
                     <a:p>
                       <a:r>
                         <a:rPr sz="1400"/>
-                        <a:t>0.45</a:t>
+                        <a:t>0.75</a:t>
                       </a:r>
                     </a:p>
                   </a:txBody>
@@ -10244,7 +10584,7 @@
                     <a:p>
                       <a:r>
                         <a:rPr sz="1400"/>
-                        <a:t>6.4 M</a:t>
+                        <a:t>6.1 M</a:t>
                       </a:r>
                     </a:p>
                   </a:txBody>
@@ -10264,7 +10604,7 @@
                   <a:tcPr/>
                 </a:tc>
               </a:tr>
-              <a:tr h="457200">
+              <a:tr h="411480">
                 <a:tc>
                   <a:txBody>
                     <a:bodyPr/>
@@ -10272,7 +10612,7 @@
                     <a:p>
                       <a:r>
                         <a:rPr sz="1400"/>
-                        <a:t>Bakery (8 thr)</a:t>
+                        <a:t>MCS (8 thr)</a:t>
                       </a:r>
                     </a:p>
                   </a:txBody>
@@ -10285,7 +10625,7 @@
                     <a:p>
                       <a:r>
                         <a:rPr sz="1400"/>
-                        <a:t>loads/stores + fence</a:t>
+                        <a:t>atomic exchange + CAS</a:t>
                       </a:r>
                     </a:p>
                   </a:txBody>
@@ -10324,7 +10664,7 @@
                     <a:p>
                       <a:r>
                         <a:rPr sz="1400"/>
-                        <a:t>0.97</a:t>
+                        <a:t>1.00</a:t>
                       </a:r>
                     </a:p>
                   </a:txBody>
@@ -10337,7 +10677,7 @@
                     <a:p>
                       <a:r>
                         <a:rPr sz="1400"/>
-                        <a:t>3.0 M</a:t>
+                        <a:t>6.9 M</a:t>
                       </a:r>
                     </a:p>
                   </a:txBody>
@@ -10350,14 +10690,14 @@
                     <a:p>
                       <a:r>
                         <a:rPr sz="1400"/>
-                        <a:t>90 k</a:t>
+                        <a:t>511 k</a:t>
                       </a:r>
                     </a:p>
                   </a:txBody>
                   <a:tcPr/>
                 </a:tc>
               </a:tr>
-              <a:tr h="457200">
+              <a:tr h="411480">
                 <a:tc>
                   <a:txBody>
                     <a:bodyPr/>
@@ -10417,7 +10757,7 @@
                     <a:p>
                       <a:r>
                         <a:rPr sz="1400"/>
-                        <a:t>0.83</a:t>
+                        <a:t>0.82</a:t>
                       </a:r>
                     </a:p>
                   </a:txBody>
@@ -10430,7 +10770,7 @@
                     <a:p>
                       <a:r>
                         <a:rPr sz="1400"/>
-                        <a:t>5.8 M</a:t>
+                        <a:t>5.7 M</a:t>
                       </a:r>
                     </a:p>
                   </a:txBody>
@@ -10450,7 +10790,7 @@
                   <a:tcPr/>
                 </a:tc>
               </a:tr>
-              <a:tr h="457200">
+              <a:tr h="411480">
                 <a:tc>
                   <a:txBody>
                     <a:bodyPr/>
@@ -10510,7 +10850,7 @@
                     <a:p>
                       <a:r>
                         <a:rPr sz="1400"/>
-                        <a:t>0.89</a:t>
+                        <a:t>0.86</a:t>
                       </a:r>
                     </a:p>
                   </a:txBody>
@@ -10536,7 +10876,7 @@
                     <a:p>
                       <a:r>
                         <a:rPr sz="1400"/>
-                        <a:t>56 M</a:t>
+                        <a:t>54 M</a:t>
                       </a:r>
                     </a:p>
                   </a:txBody>
@@ -10555,8 +10895,8 @@
         </p:nvSpPr>
         <p:spPr>
           <a:xfrm>
-            <a:off x="457200" y="4663440"/>
-            <a:ext cx="11247120" cy="1828800"/>
+            <a:off x="457200" y="4297680"/>
+            <a:ext cx="11247120" cy="1371600"/>
           </a:xfrm>
           <a:prstGeom prst="rect">
             <a:avLst/>
@@ -10591,106 +10931,7 @@
                   <a:srgbClr val="C0392B"/>
                 </a:solidFill>
               </a:rPr>
-              <a:t>• Peterson and Bakery give mutual exclusion on x86 only with the fence</a:t>
-            </a:r>
-          </a:p>
-        </p:txBody>
-      </p:sp>
-    </p:spTree>
-  </p:cSld>
-  <p:clrMapOvr>
-    <a:masterClrMapping/>
-  </p:clrMapOvr>
-</p:sld>
-</file>
-
-<file path=ppt/slides/slide23.xml><?xml version="1.0" encoding="utf-8"?>
-<p:sld xmlns:a="http://schemas.openxmlformats.org/drawingml/2006/main" xmlns:p="http://schemas.openxmlformats.org/presentationml/2006/main" xmlns:r="http://schemas.openxmlformats.org/officeDocument/2006/relationships">
-  <p:cSld>
-    <p:spTree>
-      <p:nvGrpSpPr>
-        <p:cNvPr id="1" name=""/>
-        <p:cNvGrpSpPr/>
-        <p:nvPr/>
-      </p:nvGrpSpPr>
-      <p:grpSpPr/>
-      <p:sp>
-        <p:nvSpPr>
-          <p:cNvPr id="2" name="Title 1"/>
-          <p:cNvSpPr>
-            <a:spLocks noGrp="1"/>
-          </p:cNvSpPr>
-          <p:nvPr>
-            <p:ph type="title"/>
-          </p:nvPr>
-        </p:nvSpPr>
-        <p:spPr/>
-        <p:txBody>
-          <a:bodyPr/>
-          <a:lstStyle/>
-          <a:p>
-            <a:r>
-              <a:t>Conclusion</a:t>
-            </a:r>
-          </a:p>
-        </p:txBody>
-      </p:sp>
-      <p:sp>
-        <p:nvSpPr>
-          <p:cNvPr id="3" name="Text Placeholder 2"/>
-          <p:cNvSpPr>
-            <a:spLocks noGrp="1"/>
-          </p:cNvSpPr>
-          <p:nvPr>
-            <p:ph type="body" idx="1"/>
-          </p:nvPr>
-        </p:nvSpPr>
-        <p:spPr/>
-        <p:txBody>
-          <a:bodyPr/>
-          <a:lstStyle/>
-          <a:p>
-            <a:r>
-              <a:t>67070501075</a:t>
-            </a:r>
-          </a:p>
-          <a:p>
-            <a:r>
-              <a:t>Siriwan Yindeephot</a:t>
-            </a:r>
-          </a:p>
-        </p:txBody>
-      </p:sp>
-      <p:sp>
-        <p:nvSpPr>
-          <p:cNvPr id="4" name="TextBox 3"/>
-          <p:cNvSpPr txBox="1"/>
-          <p:nvPr/>
-        </p:nvSpPr>
-        <p:spPr>
-          <a:xfrm>
-            <a:off x="11247120" y="6400800"/>
-            <a:ext cx="731520" cy="365760"/>
-          </a:xfrm>
-          <a:prstGeom prst="rect">
-            <a:avLst/>
-          </a:prstGeom>
-          <a:noFill/>
-        </p:spPr>
-        <p:txBody>
-          <a:bodyPr wrap="none">
-            <a:spAutoFit/>
-          </a:bodyPr>
-          <a:lstStyle/>
-          <a:p>
-            <a:pPr algn="r"/>
-            <a:r>
-              <a:rPr sz="1200">
-                <a:solidFill>
-                  <a:srgbClr val="808080"/>
-                </a:solidFill>
-              </a:rPr>
-              <a:t>23</a:t>
+              <a:t>• Peterson gives mutual exclusion on x86 only with the fence</a:t>
             </a:r>
           </a:p>
         </p:txBody>
@@ -10736,7 +10977,33 @@
       </p:sp>
       <p:sp>
         <p:nvSpPr>
-          <p:cNvPr id="3" name="TextBox 2"/>
+          <p:cNvPr id="3" name="Text Placeholder 2"/>
+          <p:cNvSpPr>
+            <a:spLocks noGrp="1"/>
+          </p:cNvSpPr>
+          <p:nvPr>
+            <p:ph type="body" idx="1"/>
+          </p:nvPr>
+        </p:nvSpPr>
+        <p:spPr/>
+        <p:txBody>
+          <a:bodyPr/>
+          <a:lstStyle/>
+          <a:p>
+            <a:r>
+              <a:t>67070501075</a:t>
+            </a:r>
+          </a:p>
+          <a:p>
+            <a:r>
+              <a:t>Siriwan Yindeephot</a:t>
+            </a:r>
+          </a:p>
+        </p:txBody>
+      </p:sp>
+      <p:sp>
+        <p:nvSpPr>
+          <p:cNvPr id="4" name="TextBox 3"/>
           <p:cNvSpPr txBox="1"/>
           <p:nvPr/>
         </p:nvSpPr>
@@ -10764,73 +11031,6 @@
                 </a:solidFill>
               </a:rPr>
               <a:t>24</a:t>
-            </a:r>
-          </a:p>
-        </p:txBody>
-      </p:sp>
-      <p:sp>
-        <p:nvSpPr>
-          <p:cNvPr id="4" name="TextBox 3"/>
-          <p:cNvSpPr txBox="1"/>
-          <p:nvPr/>
-        </p:nvSpPr>
-        <p:spPr>
-          <a:xfrm>
-            <a:off x="822960" y="1554480"/>
-            <a:ext cx="10789920" cy="4937760"/>
-          </a:xfrm>
-          <a:prstGeom prst="rect">
-            <a:avLst/>
-          </a:prstGeom>
-          <a:noFill/>
-        </p:spPr>
-        <p:txBody>
-          <a:bodyPr wrap="square">
-            <a:spAutoFit/>
-          </a:bodyPr>
-          <a:lstStyle/>
-          <a:p>
-            <a:pPr>
-              <a:spcAft>
-                <a:spcPts val="800"/>
-              </a:spcAft>
-            </a:pPr>
-            <a:r>
-              <a:rPr sz="2100"/>
-              <a:t>• All three give mutual exclusion and no deadlock — Peterson and Bakery only with fences on modern CPUs</a:t>
-            </a:r>
-          </a:p>
-          <a:p>
-            <a:pPr>
-              <a:spcAft>
-                <a:spcPts val="800"/>
-              </a:spcAft>
-            </a:pPr>
-            <a:r>
-              <a:rPr sz="2100"/>
-              <a:t>• Software locks (Peterson, Bakery): fair (bounded waiting), but slow and limited (2 threads / O(N))</a:t>
-            </a:r>
-          </a:p>
-          <a:p>
-            <a:pPr>
-              <a:spcAft>
-                <a:spcPts val="800"/>
-              </a:spcAft>
-            </a:pPr>
-            <a:r>
-              <a:rPr sz="2100"/>
-              <a:t>• Hardware LL/SC: one short loop, fast, but no fairness and not on x86</a:t>
-            </a:r>
-          </a:p>
-          <a:p>
-            <a:pPr>
-              <a:spcAft>
-                <a:spcPts val="800"/>
-              </a:spcAft>
-            </a:pPr>
-            <a:r>
-              <a:rPr sz="2100"/>
-              <a:t>• Spinning on one CPU wastes time slices; sleeping locks (futex, pthread_mutex) avoid it</a:t>
             </a:r>
           </a:p>
         </p:txBody>
@@ -10869,7 +11069,7 @@
           <a:lstStyle/>
           <a:p>
             <a:r>
-              <a:t>References</a:t>
+              <a:t>Conclusion</a:t>
             </a:r>
           </a:p>
         </p:txBody>
@@ -10936,6 +11136,157 @@
               </a:spcAft>
             </a:pPr>
             <a:r>
+              <a:rPr sz="2000"/>
+              <a:t>• All three give mutual exclusion and no deadlock — Peterson only with a fence on modern CPUs</a:t>
+            </a:r>
+          </a:p>
+          <a:p>
+            <a:pPr>
+              <a:spcAft>
+                <a:spcPts val="800"/>
+              </a:spcAft>
+            </a:pPr>
+            <a:r>
+              <a:rPr sz="2000"/>
+              <a:t>• Peterson: software only and fair (bounded waiting), but two threads only</a:t>
+            </a:r>
+          </a:p>
+          <a:p>
+            <a:pPr>
+              <a:spcAft>
+                <a:spcPts val="800"/>
+              </a:spcAft>
+            </a:pPr>
+            <a:r>
+              <a:rPr sz="2000"/>
+              <a:t>• Hardware LL/SC: one short loop, fast, but no fairness and not on x86</a:t>
+            </a:r>
+          </a:p>
+          <a:p>
+            <a:pPr>
+              <a:spcAft>
+                <a:spcPts val="800"/>
+              </a:spcAft>
+            </a:pPr>
+            <a:r>
+              <a:rPr sz="2000"/>
+              <a:t>• MCS: a queue gives first-come, first-served for any number of threads; Linux builds on it</a:t>
+            </a:r>
+          </a:p>
+          <a:p>
+            <a:pPr>
+              <a:spcAft>
+                <a:spcPts val="800"/>
+              </a:spcAft>
+            </a:pPr>
+            <a:r>
+              <a:rPr sz="2000"/>
+              <a:t>• Spinning on one CPU wastes time slices; sleeping locks (futex, pthread_mutex) avoid it</a:t>
+            </a:r>
+          </a:p>
+        </p:txBody>
+      </p:sp>
+    </p:spTree>
+  </p:cSld>
+  <p:clrMapOvr>
+    <a:masterClrMapping/>
+  </p:clrMapOvr>
+</p:sld>
+</file>
+
+<file path=ppt/slides/slide26.xml><?xml version="1.0" encoding="utf-8"?>
+<p:sld xmlns:a="http://schemas.openxmlformats.org/drawingml/2006/main" xmlns:p="http://schemas.openxmlformats.org/presentationml/2006/main" xmlns:r="http://schemas.openxmlformats.org/officeDocument/2006/relationships">
+  <p:cSld>
+    <p:spTree>
+      <p:nvGrpSpPr>
+        <p:cNvPr id="1" name=""/>
+        <p:cNvGrpSpPr/>
+        <p:nvPr/>
+      </p:nvGrpSpPr>
+      <p:grpSpPr/>
+      <p:sp>
+        <p:nvSpPr>
+          <p:cNvPr id="2" name="Title 1"/>
+          <p:cNvSpPr>
+            <a:spLocks noGrp="1"/>
+          </p:cNvSpPr>
+          <p:nvPr>
+            <p:ph type="title"/>
+          </p:nvPr>
+        </p:nvSpPr>
+        <p:spPr/>
+        <p:txBody>
+          <a:bodyPr/>
+          <a:lstStyle/>
+          <a:p>
+            <a:r>
+              <a:t>References</a:t>
+            </a:r>
+          </a:p>
+        </p:txBody>
+      </p:sp>
+      <p:sp>
+        <p:nvSpPr>
+          <p:cNvPr id="3" name="TextBox 2"/>
+          <p:cNvSpPr txBox="1"/>
+          <p:nvPr/>
+        </p:nvSpPr>
+        <p:spPr>
+          <a:xfrm>
+            <a:off x="11247120" y="6400800"/>
+            <a:ext cx="731520" cy="365760"/>
+          </a:xfrm>
+          <a:prstGeom prst="rect">
+            <a:avLst/>
+          </a:prstGeom>
+          <a:noFill/>
+        </p:spPr>
+        <p:txBody>
+          <a:bodyPr wrap="none">
+            <a:spAutoFit/>
+          </a:bodyPr>
+          <a:lstStyle/>
+          <a:p>
+            <a:pPr algn="r"/>
+            <a:r>
+              <a:rPr sz="1200">
+                <a:solidFill>
+                  <a:srgbClr val="808080"/>
+                </a:solidFill>
+              </a:rPr>
+              <a:t>26</a:t>
+            </a:r>
+          </a:p>
+        </p:txBody>
+      </p:sp>
+      <p:sp>
+        <p:nvSpPr>
+          <p:cNvPr id="4" name="TextBox 3"/>
+          <p:cNvSpPr txBox="1"/>
+          <p:nvPr/>
+        </p:nvSpPr>
+        <p:spPr>
+          <a:xfrm>
+            <a:off x="822960" y="1554480"/>
+            <a:ext cx="10789920" cy="4937760"/>
+          </a:xfrm>
+          <a:prstGeom prst="rect">
+            <a:avLst/>
+          </a:prstGeom>
+          <a:noFill/>
+        </p:spPr>
+        <p:txBody>
+          <a:bodyPr wrap="square">
+            <a:spAutoFit/>
+          </a:bodyPr>
+          <a:lstStyle/>
+          <a:p>
+            <a:pPr>
+              <a:spcAft>
+                <a:spcPts val="800"/>
+              </a:spcAft>
+            </a:pPr>
+            <a:r>
               <a:rPr sz="1800"/>
               <a:t>• R. H. Arpaci-Dusseau, A. C. Arpaci-Dusseau, Operating Systems: Three Easy Pieces, ch. 28 “Locks”</a:t>
             </a:r>
@@ -10970,7 +11321,18 @@
             </a:pPr>
             <a:r>
               <a:rPr sz="1800"/>
-              <a:t>• L. Lamport, “A New Solution of Dijkstra's Concurrent Programming Problem”, CACM 17(8), 1974</a:t>
+              <a:t>• J. M. Mellor-Crummey, M. L. Scott, “Algorithms for Scalable Synchronization on Shared-Memory Multiprocessors”, ACM TOCS 9(1), 1991</a:t>
+            </a:r>
+          </a:p>
+          <a:p>
+            <a:pPr>
+              <a:spcAft>
+                <a:spcPts val="800"/>
+              </a:spcAft>
+            </a:pPr>
+            <a:r>
+              <a:rPr sz="1800"/>
+              <a:t>• Linux kernel source: kernel/locking/qspinlock.c</a:t>
             </a:r>
           </a:p>
           <a:p>
@@ -12138,7 +12500,7 @@
                     <a:p>
                       <a:r>
                         <a:rPr sz="1600"/>
-                        <a:t>163,764 – 916,884</a:t>
+                        <a:t>233,108 – 813,401</a:t>
                       </a:r>
                     </a:p>
                   </a:txBody>
@@ -12411,7 +12773,7 @@
             </a:pPr>
             <a:r>
               <a:rPr sz="1900"/>
-              <a:t>• 1 thread: 68 M acq/s — no contention</a:t>
+              <a:t>• 1 thread: 63 M acq/s — no contention</a:t>
             </a:r>
           </a:p>
           <a:p>
@@ -12422,7 +12784,7 @@
             </a:pPr>
             <a:r>
               <a:rPr sz="1900"/>
-              <a:t>• 2 threads, all CPUs: 18 M acq/s — flag and turn move between cores</a:t>
+              <a:t>• 2 threads, all CPUs: 15 M acq/s — flag and turn move between cores</a:t>
             </a:r>
           </a:p>
           <a:p>
@@ -12437,7 +12799,7 @@
                   <a:srgbClr val="C0392B"/>
                 </a:solidFill>
               </a:rPr>
-              <a:t>• 2 threads, one CPU: 192 k acq/s — the waiter spins until the scheduler switches</a:t>
+              <a:t>• 2 threads, one CPU: 165 k acq/s — the waiter spins until the scheduler switches</a:t>
             </a:r>
           </a:p>
           <a:p>
@@ -12566,7 +12928,7 @@
             </a:pPr>
             <a:r>
               <a:rPr sz="2000"/>
-              <a:t>• One CPU, 2 threads: fairness 0.001 (run 1: 126 vs 192,299) — with spinning, the scheduler decides</a:t>
+              <a:t>• One CPU, 2 threads: fairness 0.001 (run 1: 126 vs 93,264) — with spinning, the scheduler decides</a:t>
             </a:r>
           </a:p>
           <a:p>

--- a/PS08/slides/PS08.pptx
+++ b/PS08/slides/PS08.pptx
@@ -3060,7 +3060,7 @@
           <a:lstStyle/>
           <a:p>
             <a:r>
-              <a:t>There are six of us. Three members each present one lock, and one of them also explains how we measured; two compare the locks and one concludes.</a:t>
+              <a:t>There are six of us. Three members each present one lock and two compare them; one member explains how we measured and draws the conclusion.</a:t>
             </a:r>
           </a:p>
         </p:txBody>
@@ -7030,12 +7030,12 @@
           <a:lstStyle/>
           <a:p>
             <a:r>
-              <a:t>67070501018</a:t>
-            </a:r>
-          </a:p>
-          <a:p>
-            <a:r>
-              <a:t>Tithinan Sobking</a:t>
+              <a:t>67070501005</a:t>
+            </a:r>
+          </a:p>
+          <a:p>
+            <a:r>
+              <a:t>Kiatisak Markmeeshap</a:t>
             </a:r>
           </a:p>
         </p:txBody>
@@ -9530,7 +9530,7 @@
             </a:pPr>
             <a:r>
               <a:rPr sz="2000"/>
-              <a:t>67070501021</a:t>
+              <a:t>67070501075</a:t>
             </a:r>
           </a:p>
           <a:p>
@@ -9541,7 +9541,7 @@
             </a:pPr>
             <a:r>
               <a:rPr sz="2000"/>
-              <a:t>Thanaboon Tikaew</a:t>
+              <a:t>Siriwan Yindeephot</a:t>
             </a:r>
           </a:p>
           <a:p>
@@ -9578,7 +9578,7 @@
                   <a:srgbClr val="C0392B"/>
                 </a:solidFill>
               </a:rPr>
-              <a:t>MCS Lock</a:t>
+              <a:t>Conclusion</a:t>
             </a:r>
           </a:p>
         </p:txBody>
@@ -9612,7 +9612,7 @@
             </a:pPr>
             <a:r>
               <a:rPr sz="2000"/>
-              <a:t>67070501005</a:t>
+              <a:t>67070501018</a:t>
             </a:r>
           </a:p>
           <a:p>
@@ -9623,7 +9623,7 @@
             </a:pPr>
             <a:r>
               <a:rPr sz="2000"/>
-              <a:t>Kiatisak Markmeeshap</a:t>
+              <a:t>Tithinan Sobking</a:t>
             </a:r>
           </a:p>
           <a:p>
@@ -9679,7 +9679,7 @@
             </a:pPr>
             <a:r>
               <a:rPr sz="2000"/>
-              <a:t>67070501018</a:t>
+              <a:t>67070501005</a:t>
             </a:r>
           </a:p>
           <a:p>
@@ -9690,7 +9690,7 @@
             </a:pPr>
             <a:r>
               <a:rPr sz="2000"/>
-              <a:t>Tithinan Sobking</a:t>
+              <a:t>Kiatisak Markmeeshap</a:t>
             </a:r>
           </a:p>
           <a:p>
@@ -9746,7 +9746,7 @@
             </a:pPr>
             <a:r>
               <a:rPr sz="2000"/>
-              <a:t>67070501040</a:t>
+              <a:t>67070501021</a:t>
             </a:r>
           </a:p>
           <a:p>
@@ -9757,7 +9757,7 @@
             </a:pPr>
             <a:r>
               <a:rPr sz="2000"/>
-              <a:t>Worawut Sereethai</a:t>
+              <a:t>Thanaboon Tikaew</a:t>
             </a:r>
           </a:p>
           <a:p>
@@ -9779,7 +9779,7 @@
                   <a:srgbClr val="C0392B"/>
                 </a:solidFill>
               </a:rPr>
-              <a:t>Comparison: Throughput</a:t>
+              <a:t>MCS Lock</a:t>
             </a:r>
           </a:p>
         </p:txBody>
@@ -9813,7 +9813,7 @@
             </a:pPr>
             <a:r>
               <a:rPr sz="2000"/>
-              <a:t>67070501059</a:t>
+              <a:t>67070501040</a:t>
             </a:r>
           </a:p>
           <a:p>
@@ -9824,7 +9824,7 @@
             </a:pPr>
             <a:r>
               <a:rPr sz="2000"/>
-              <a:t>Chanon Lhumsa-ard</a:t>
+              <a:t>Worawut Sereethai</a:t>
             </a:r>
           </a:p>
           <a:p>
@@ -9846,7 +9846,7 @@
                   <a:srgbClr val="C0392B"/>
                 </a:solidFill>
               </a:rPr>
-              <a:t>Comparison: Summary</a:t>
+              <a:t>Comparison: Throughput</a:t>
             </a:r>
           </a:p>
         </p:txBody>
@@ -9880,7 +9880,7 @@
             </a:pPr>
             <a:r>
               <a:rPr sz="2000"/>
-              <a:t>67070501075</a:t>
+              <a:t>67070501059</a:t>
             </a:r>
           </a:p>
           <a:p>
@@ -9891,7 +9891,7 @@
             </a:pPr>
             <a:r>
               <a:rPr sz="2000"/>
-              <a:t>Siriwan Yindeephot</a:t>
+              <a:t>Chanon Lhumsa-ard</a:t>
             </a:r>
           </a:p>
           <a:p>
@@ -9913,7 +9913,7 @@
                   <a:srgbClr val="C0392B"/>
                 </a:solidFill>
               </a:rPr>
-              <a:t>Conclusion</a:t>
+              <a:t>Comparison: Summary</a:t>
             </a:r>
           </a:p>
         </p:txBody>
@@ -11414,12 +11414,12 @@
           <a:lstStyle/>
           <a:p>
             <a:r>
-              <a:t>67070501021</a:t>
-            </a:r>
-          </a:p>
-          <a:p>
-            <a:r>
-              <a:t>Thanaboon Tikaew</a:t>
+              <a:t>67070501075</a:t>
+            </a:r>
+          </a:p>
+          <a:p>
+            <a:r>
+              <a:t>Siriwan Yindeephot</a:t>
             </a:r>
           </a:p>
         </p:txBody>
@@ -11800,12 +11800,12 @@
           <a:lstStyle/>
           <a:p>
             <a:r>
-              <a:t>67070501005</a:t>
-            </a:r>
-          </a:p>
-          <a:p>
-            <a:r>
-              <a:t>Kiatisak Markmeeshap</a:t>
+              <a:t>67070501018</a:t>
+            </a:r>
+          </a:p>
+          <a:p>
+            <a:r>
+              <a:t>Tithinan Sobking</a:t>
             </a:r>
           </a:p>
         </p:txBody>

--- a/PS08/slides/PS08.pptx
+++ b/PS08/slides/PS08.pptx
@@ -34,6 +34,12 @@
     <p:sldId id="279" r:id="rId32"/>
     <p:sldId id="280" r:id="rId33"/>
     <p:sldId id="281" r:id="rId34"/>
+    <p:sldId id="282" r:id="rId35"/>
+    <p:sldId id="283" r:id="rId36"/>
+    <p:sldId id="284" r:id="rId37"/>
+    <p:sldId id="285" r:id="rId38"/>
+    <p:sldId id="286" r:id="rId39"/>
+    <p:sldId id="287" r:id="rId40"/>
   </p:sldIdLst>
   <p:sldSz cx="12192000" cy="6858000"/>
   <p:notesSz cx="6858000" cy="9144000"/>
@@ -1082,22 +1088,6 @@
 <c:chartSpace xmlns:c="http://schemas.openxmlformats.org/drawingml/2006/chart" xmlns:a="http://schemas.openxmlformats.org/drawingml/2006/main" xmlns:r="http://schemas.openxmlformats.org/officeDocument/2006/relationships">
   <c:date1904 val="0"/>
   <c:chart>
-    <c:title>
-      <c:tx>
-        <c:rich>
-          <a:bodyPr/>
-          <a:lstStyle/>
-          <a:p>
-            <a:r>
-              <a:rPr sz="1400"/>
-              <a:t>All 8 CPUs</a:t>
-            </a:r>
-          </a:p>
-        </c:rich>
-      </c:tx>
-      <c:layout/>
-      <c:overlay val="0"/>
-    </c:title>
     <c:autoTitleDeleted val="0"/>
     <c:plotArea>
       <c:lineChart>
@@ -1401,7 +1391,7 @@
               <a:lstStyle/>
               <a:p>
                 <a:r>
-                  <a:rPr sz="1100"/>
+                  <a:rPr sz="1200"/>
                   <a:t>threads</a:t>
                 </a:r>
               </a:p>
@@ -1445,7 +1435,7 @@
               <a:lstStyle/>
               <a:p>
                 <a:r>
-                  <a:rPr sz="1100"/>
+                  <a:rPr sz="1200"/>
                   <a:t>million acquisitions / s (log)</a:t>
                 </a:r>
               </a:p>
@@ -1476,7 +1466,7 @@
     <a:lstStyle/>
     <a:p>
       <a:pPr>
-        <a:defRPr sz="1100"/>
+        <a:defRPr sz="1200"/>
       </a:pPr>
       <a:endParaRPr lang="en-US"/>
     </a:p>
@@ -1491,22 +1481,6 @@
 <c:chartSpace xmlns:c="http://schemas.openxmlformats.org/drawingml/2006/chart" xmlns:a="http://schemas.openxmlformats.org/drawingml/2006/main" xmlns:r="http://schemas.openxmlformats.org/officeDocument/2006/relationships">
   <c:date1904 val="0"/>
   <c:chart>
-    <c:title>
-      <c:tx>
-        <c:rich>
-          <a:bodyPr/>
-          <a:lstStyle/>
-          <a:p>
-            <a:r>
-              <a:rPr sz="1400"/>
-              <a:t>One CPU</a:t>
-            </a:r>
-          </a:p>
-        </c:rich>
-      </c:tx>
-      <c:layout/>
-      <c:overlay val="0"/>
-    </c:title>
     <c:autoTitleDeleted val="0"/>
     <c:plotArea>
       <c:lineChart>
@@ -1810,7 +1784,7 @@
               <a:lstStyle/>
               <a:p>
                 <a:r>
-                  <a:rPr sz="1100"/>
+                  <a:rPr sz="1200"/>
                   <a:t>threads</a:t>
                 </a:r>
               </a:p>
@@ -1854,7 +1828,7 @@
               <a:lstStyle/>
               <a:p>
                 <a:r>
-                  <a:rPr sz="1100"/>
+                  <a:rPr sz="1200"/>
                   <a:t>million acquisitions / s (log)</a:t>
                 </a:r>
               </a:p>
@@ -1885,7 +1859,259 @@
     <a:lstStyle/>
     <a:p>
       <a:pPr>
-        <a:defRPr sz="1100"/>
+        <a:defRPr sz="1200"/>
+      </a:pPr>
+      <a:endParaRPr lang="en-US"/>
+    </a:p>
+  </c:txPr>
+  <c:externalData r:id="rId1">
+    <c:autoUpdate val="0"/>
+  </c:externalData>
+</c:chartSpace>
+</file>
+
+<file path=ppt/charts/chart6.xml><?xml version="1.0" encoding="utf-8"?>
+<c:chartSpace xmlns:c="http://schemas.openxmlformats.org/drawingml/2006/chart" xmlns:a="http://schemas.openxmlformats.org/drawingml/2006/main" xmlns:r="http://schemas.openxmlformats.org/officeDocument/2006/relationships">
+  <c:date1904 val="0"/>
+  <c:chart>
+    <c:autoTitleDeleted val="0"/>
+    <c:plotArea>
+      <c:barChart>
+        <c:barDir val="col"/>
+        <c:grouping val="clustered"/>
+        <c:ser>
+          <c:idx val="0"/>
+          <c:order val="0"/>
+          <c:tx>
+            <c:strRef>
+              <c:f>Sheet1!$B$1</c:f>
+              <c:strCache>
+                <c:ptCount val="1"/>
+                <c:pt idx="0">
+                  <c:v>all 8 CPUs</c:v>
+                </c:pt>
+              </c:strCache>
+            </c:strRef>
+          </c:tx>
+          <c:cat>
+            <c:strRef>
+              <c:f>Sheet1!$A$2:$A$6</c:f>
+              <c:strCache>
+                <c:ptCount val="5"/>
+                <c:pt idx="0">
+                  <c:v>Peterson (2 thr)</c:v>
+                </c:pt>
+                <c:pt idx="1">
+                  <c:v>LL/SC (8 thr)</c:v>
+                </c:pt>
+                <c:pt idx="2">
+                  <c:v>MCS (8 thr)</c:v>
+                </c:pt>
+                <c:pt idx="3">
+                  <c:v>TAS (8 thr)</c:v>
+                </c:pt>
+                <c:pt idx="4">
+                  <c:v>pthread_mutex (8 thr)</c:v>
+                </c:pt>
+              </c:strCache>
+            </c:strRef>
+          </c:cat>
+          <c:val>
+            <c:numRef>
+              <c:f>Sheet1!$B$2:$B$6</c:f>
+              <c:numCache>
+                <c:formatCode>General</c:formatCode>
+                <c:ptCount val="5"/>
+                <c:pt idx="0">
+                  <c:v>0.99</c:v>
+                </c:pt>
+                <c:pt idx="1">
+                  <c:v>0.75</c:v>
+                </c:pt>
+                <c:pt idx="2">
+                  <c:v>1.0</c:v>
+                </c:pt>
+                <c:pt idx="3">
+                  <c:v>0.82</c:v>
+                </c:pt>
+                <c:pt idx="4">
+                  <c:v>0.86</c:v>
+                </c:pt>
+              </c:numCache>
+            </c:numRef>
+          </c:val>
+        </c:ser>
+        <c:ser>
+          <c:idx val="1"/>
+          <c:order val="1"/>
+          <c:tx>
+            <c:strRef>
+              <c:f>Sheet1!$C$1</c:f>
+              <c:strCache>
+                <c:ptCount val="1"/>
+                <c:pt idx="0">
+                  <c:v>one CPU</c:v>
+                </c:pt>
+              </c:strCache>
+            </c:strRef>
+          </c:tx>
+          <c:cat>
+            <c:strRef>
+              <c:f>Sheet1!$A$2:$A$6</c:f>
+              <c:strCache>
+                <c:ptCount val="5"/>
+                <c:pt idx="0">
+                  <c:v>Peterson (2 thr)</c:v>
+                </c:pt>
+                <c:pt idx="1">
+                  <c:v>LL/SC (8 thr)</c:v>
+                </c:pt>
+                <c:pt idx="2">
+                  <c:v>MCS (8 thr)</c:v>
+                </c:pt>
+                <c:pt idx="3">
+                  <c:v>TAS (8 thr)</c:v>
+                </c:pt>
+                <c:pt idx="4">
+                  <c:v>pthread_mutex (8 thr)</c:v>
+                </c:pt>
+              </c:strCache>
+            </c:strRef>
+          </c:cat>
+          <c:val>
+            <c:numRef>
+              <c:f>Sheet1!$C$2:$C$6</c:f>
+              <c:numCache>
+                <c:formatCode>General</c:formatCode>
+                <c:ptCount val="5"/>
+                <c:pt idx="0">
+                  <c:v>0.0</c:v>
+                </c:pt>
+                <c:pt idx="1">
+                  <c:v>0.0</c:v>
+                </c:pt>
+                <c:pt idx="2">
+                  <c:v>0.0</c:v>
+                </c:pt>
+                <c:pt idx="3">
+                  <c:v>0.0</c:v>
+                </c:pt>
+                <c:pt idx="4">
+                  <c:v>0.78</c:v>
+                </c:pt>
+              </c:numCache>
+            </c:numRef>
+          </c:val>
+        </c:ser>
+        <c:dLbls>
+          <c:numFmt formatCode="0.00" sourceLinked="0"/>
+          <c:txPr>
+            <a:bodyPr/>
+            <a:lstStyle/>
+            <a:p>
+              <a:pPr>
+                <a:defRPr sz="1200"/>
+              </a:pPr>
+            </a:p>
+          </c:txPr>
+          <c:dLblPos val="outEnd"/>
+          <c:showLegendKey val="0"/>
+          <c:showVal val="1"/>
+          <c:showCatName val="0"/>
+          <c:showSerName val="0"/>
+          <c:showPercent val="0"/>
+          <c:showBubbleSize val="0"/>
+          <c:showLeaderLines val="1"/>
+        </c:dLbls>
+        <c:axId val="-2068027336"/>
+        <c:axId val="-2113994440"/>
+      </c:barChart>
+      <c:catAx>
+        <c:axId val="-2068027336"/>
+        <c:scaling>
+          <c:orientation val="minMax"/>
+        </c:scaling>
+        <c:delete val="0"/>
+        <c:axPos val="b"/>
+        <c:title>
+          <c:tx>
+            <c:rich>
+              <a:bodyPr/>
+              <a:lstStyle/>
+              <a:p>
+                <a:r>
+                  <a:rPr sz="1200"/>
+                  <a:t>lock (most threads it ran)</a:t>
+                </a:r>
+              </a:p>
+            </c:rich>
+          </c:tx>
+          <c:layout/>
+          <c:overlay val="0"/>
+        </c:title>
+        <c:majorTickMark val="out"/>
+        <c:minorTickMark val="none"/>
+        <c:tickLblPos val="nextTo"/>
+        <c:crossAx val="-2113994440"/>
+        <c:crosses val="autoZero"/>
+        <c:auto val="1"/>
+        <c:lblAlgn val="ctr"/>
+        <c:lblOffset val="100"/>
+        <c:noMultiLvlLbl val="0"/>
+      </c:catAx>
+      <c:valAx>
+        <c:axId val="-2113994440"/>
+        <c:scaling>
+          <c:max val="1.0"/>
+          <c:min val="0.0"/>
+        </c:scaling>
+        <c:delete val="0"/>
+        <c:axPos val="l"/>
+        <c:majorGridlines>
+          <c:spPr>
+            <a:ln>
+              <a:solidFill>
+                <a:srgbClr val="D0D0D0"/>
+              </a:solidFill>
+            </a:ln>
+          </c:spPr>
+        </c:majorGridlines>
+        <c:title>
+          <c:tx>
+            <c:rich>
+              <a:bodyPr/>
+              <a:lstStyle/>
+              <a:p>
+                <a:r>
+                  <a:rPr sz="1200"/>
+                  <a:t>fairness (fewest ÷ most)</a:t>
+                </a:r>
+              </a:p>
+            </c:rich>
+          </c:tx>
+          <c:layout/>
+          <c:overlay val="0"/>
+        </c:title>
+        <c:numFmt formatCode="General" sourceLinked="0"/>
+        <c:majorTickMark val="out"/>
+        <c:minorTickMark val="none"/>
+        <c:tickLblPos val="nextTo"/>
+        <c:crossAx val="-2068027336"/>
+        <c:crosses val="autoZero"/>
+      </c:valAx>
+    </c:plotArea>
+    <c:legend>
+      <c:legendPos val="b"/>
+      <c:overlay val="0"/>
+    </c:legend>
+    <c:dispBlanksAs val="gap"/>
+  </c:chart>
+  <c:txPr>
+    <a:bodyPr/>
+    <a:lstStyle/>
+    <a:p>
+      <a:pPr>
+        <a:defRPr sz="1200"/>
       </a:pPr>
       <a:endParaRPr lang="en-US"/>
     </a:p>
@@ -2360,7 +2586,7 @@
           <a:lstStyle/>
           <a:p>
             <a:r>
-              <a:t>Part two: Load-Linked and Store-Conditional, a pair of hardware instructions.</a:t>
+              <a:t>On paper Peterson is correct: both threads inside would need turn to hold two values at once. On a real x86 CPU the textbook code fails, because a load may overtake an earlier store. Without the fence we lost updates in 5 of 5 runs; on one CPU, or with the fence, nothing was lost.</a:t>
             </a:r>
           </a:p>
         </p:txBody>
@@ -2430,7 +2656,7 @@
           <a:lstStyle/>
           <a:p>
             <a:r>
-              <a:t>Load-Linked reads a value and starts watching the address. Store-Conditional writes only if nobody wrote that address in between. The lock spins on Load-Linked until the flag is free, then tries to claim it; if the store fails, someone else won and the thread starts over.</a:t>
+              <a:t>With one thread there is no contention and the lock is cheap. With two threads on separate CPUs, flag and turn bounce between the cores' caches. Pinned to one CPU it collapses: a waiting thread spins away its whole time slice, as the lecture warned.</a:t>
             </a:r>
           </a:p>
         </p:txBody>
@@ -2500,7 +2726,7 @@
           <a:lstStyle/>
           <a:p>
             <a:r>
-              <a:t>Two threads may both load-link a zero, but only the first store-conditional succeeds; the second sees that the address changed and fails. We ran the AArch64 build under qemu with 4 threads: nothing was lost in 3 of 3 runs. The disassembly shows the real ldaxr and stxr instructions.</a:t>
+              <a:t>With both threads on their own CPU, turn hands priority to the other thread, so neither waits for more than one entry of the other; the counts were nearly equal. On one CPU the counts were lopsided because who gets in follows the scheduler. The algorithm also only works for two threads and needs a fence on modern CPUs.</a:t>
             </a:r>
           </a:p>
         </p:txBody>
@@ -2570,7 +2796,7 @@
           <a:lstStyle/>
           <a:p>
             <a:r>
-              <a:t>qemu emulates the CPU, so its speed means nothing; we time the x86 build, which runs the same loop with compare-and-swap standing in for the LL/SC pair. It behaves like the test-and-set lock from the lecture: fast alone, slower as threads fight over one cache line.</a:t>
+              <a:t>Part two: Load-Linked and Store-Conditional, a pair of hardware instructions.</a:t>
             </a:r>
           </a:p>
         </p:txBody>
@@ -2640,7 +2866,7 @@
           <a:lstStyle/>
           <a:p>
             <a:r>
-              <a:t>Nothing orders the waiters: whichever store-conditional lands first wins. With eight threads on one CPU a thread was starved outright. The lock also depends on the hardware, which x86 does not have.</a:t>
+              <a:t>Load-Linked reads a value and starts watching the address. Store-Conditional writes only if nobody wrote that address in between. The lock spins on Load-Linked until the flag is free, then tries to claim it; if the store fails, someone else won and the thread starts over.</a:t>
             </a:r>
           </a:p>
         </p:txBody>
@@ -2710,7 +2936,7 @@
           <a:lstStyle/>
           <a:p>
             <a:r>
-              <a:t>Part three, the lock not covered in the lecture: the MCS queue lock.</a:t>
+              <a:t>Two threads may both load-link a zero, but only the first store-conditional succeeds; the second sees that the address changed and fails. We ran the AArch64 build under qemu with 4 threads: nothing was lost in 3 of 3 runs. The disassembly shows the real ldaxr and stxr instructions.</a:t>
             </a:r>
           </a:p>
         </p:txBody>
@@ -2780,7 +3006,7 @@
           <a:lstStyle/>
           <a:p>
             <a:r>
-              <a:t>The MCS lock, by Mellor-Crummey and Scott, won the Dijkstra Prize in 2006. Waiting threads form a queue, a linked list. Each thread spins on a flag in its own node, and the thread ahead of it clears that flag when it is done. Linux's spinlock today, the qspinlock, is built on this idea.</a:t>
+              <a:t>qemu emulates the CPU, so its speed means nothing; we time the x86 build, which runs the same loop with compare-and-swap standing in for the LL/SC pair. It behaves like the test-and-set lock from the lecture: fast alone, slower as threads fight over one cache line.</a:t>
             </a:r>
           </a:p>
         </p:txBody>
@@ -2850,7 +3076,7 @@
           <a:lstStyle/>
           <a:p>
             <a:r>
-              <a:t>The atomic exchange puts every thread in one queue, and only the head of that queue may enter. A thread leaves by handing the lock to the node behind it, or by resetting tail if nobody is waiting. All 24 runs finished with nothing lost.</a:t>
+              <a:t>Nothing orders the waiters: whichever store-conditional lands first wins. With eight threads on one CPU a thread was starved outright. The lock also depends on the hardware, which x86 does not have.</a:t>
             </a:r>
           </a:p>
         </p:txBody>
@@ -2920,7 +3146,7 @@
           <a:lstStyle/>
           <a:p>
             <a:r>
-              <a:t>Every waiter spins on its own cache line, so a handover touches one line instead of making every core fight over the same flag. On one CPU it collapses: the queue hands the lock to a thread that is not running. The Linux kernel avoids that by disabling preemption while a spinlock is held or awaited.</a:t>
+              <a:t>Part three, the lock not covered in the lecture: the MCS queue lock.</a:t>
             </a:r>
           </a:p>
         </p:txBody>
@@ -2990,7 +3216,7 @@
           <a:lstStyle/>
           <a:p>
             <a:r>
-              <a:t>The queue makes MCS first-come, first-served: it was the fairest lock we measured at eight threads. It needs a node per waiting thread and an atomic exchange, and like every spin lock it suffers when the next thread in line is not running.</a:t>
+              <a:t>The MCS lock, by Mellor-Crummey and Scott, won the Dijkstra Prize in 2006. Waiting threads form a queue, a linked list. Each thread spins on a flag in its own node, and the thread ahead of it clears that flag when it is done. Linux's spinlock today, the qspinlock, is built on this idea.</a:t>
             </a:r>
           </a:p>
         </p:txBody>
@@ -3130,7 +3356,7 @@
           <a:lstStyle/>
           <a:p>
             <a:r>
-              <a:t>Now the three locks side by side, with two locks from the lecture as references.</a:t>
+              <a:t>The atomic exchange puts every thread in one queue, and only the head of that queue may enter. A thread leaves by handing the lock to the node behind it, or by resetting tail if nobody is waiting. All 24 runs finished with nothing lost.</a:t>
             </a:r>
           </a:p>
         </p:txBody>
@@ -3200,7 +3426,7 @@
           <a:lstStyle/>
           <a:p>
             <a:r>
-              <a:t>On all 8 CPUs, pthread_mutex was the fastest lock at eight threads. On one CPU the spinning locks waste time slices, while the mutex puts waiting threads to sleep.</a:t>
+              <a:t>Every waiter spins on its own cache line, so a handover touches one line instead of making every core fight over the same flag. On one CPU it collapses: the queue hands the lock to a thread that is not running. The Linux kernel avoids that by disabling preemption while a spinlock is held or awaited.</a:t>
             </a:r>
           </a:p>
         </p:txBody>
@@ -3270,7 +3496,7 @@
           <a:lstStyle/>
           <a:p>
             <a:r>
-              <a:t>Next, the same results as one table.</a:t>
+              <a:t>The queue makes MCS first-come, first-served: it was the fairest lock we measured at eight threads. It needs a node per waiting thread and an atomic exchange, and like every spin lock it suffers when the next thread in line is not running.</a:t>
             </a:r>
           </a:p>
         </p:txBody>
@@ -3340,7 +3566,7 @@
           <a:lstStyle/>
           <a:p>
             <a:r>
-              <a:t>This table puts the three locks and the two references on one page, each at the most threads it supports. Peterson is fair but limited to two threads, the simple hardware spin locks are unfair, and the MCS queue is fair at every thread count we ran.</a:t>
+              <a:t>Now the three locks side by side, with two locks from the lecture as references.</a:t>
             </a:r>
           </a:p>
         </p:txBody>
@@ -3410,7 +3636,7 @@
           <a:lstStyle/>
           <a:p>
             <a:r>
-              <a:t>Last part: what the measurements tell us, and where the material comes from.</a:t>
+              <a:t>With one thread nobody waits, so the simplest locks, test-and-set and LL/SC, are fastest. As threads are added every spin lock slows down, because the threads fight over shared cache lines. pthread_mutex was the fastest lock at eight threads.</a:t>
             </a:r>
           </a:p>
         </p:txBody>
@@ -3480,7 +3706,7 @@
           <a:lstStyle/>
           <a:p>
             <a:r>
-              <a:t>All three locks provide mutual exclusion and avoid deadlock, but Peterson only does so on today's CPUs with a memory fence. Peterson is fair but limited to two threads; LL/SC is short and fast but unfair; the MCS queue is fair for any number of threads and is what Linux builds its spinlock on. When threads can be preempted, sleeping locks such as pthread_mutex win.</a:t>
+              <a:t>Pinned to one CPU, the picture changes. Test-and-set and LL/SC stay fast only because one thread keeps the lock for its whole time slice while the others starve. Peterson and MCS hand the lock to a thread that is not running, so they collapse. The mutex puts waiters to sleep and keeps its speed.</a:t>
             </a:r>
           </a:p>
         </p:txBody>
@@ -3550,7 +3776,217 @@
           <a:lstStyle/>
           <a:p>
             <a:r>
-              <a:t>These are the sources for the algorithms and the instructions.</a:t>
+              <a:t>Next, correctness and fairness for every lock, and then everything in one table.</a:t>
+            </a:r>
+          </a:p>
+        </p:txBody>
+      </p:sp>
+      <p:sp>
+        <p:nvSpPr>
+          <p:cNvPr id="4" name="Slide Number Placeholder 3"/>
+          <p:cNvSpPr>
+            <a:spLocks noGrp="1"/>
+          </p:cNvSpPr>
+          <p:nvPr>
+            <p:ph type="sldNum" idx="5" sz="quarter"/>
+          </p:nvPr>
+        </p:nvSpPr>
+        <p:spPr/>
+      </p:sp>
+    </p:spTree>
+  </p:cSld>
+  <p:clrMapOvr>
+    <a:masterClrMapping/>
+  </p:clrMapOvr>
+</p:notes>
+</file>
+
+<file path=ppt/notesSlides/notesSlide27.xml><?xml version="1.0" encoding="utf-8"?>
+<p:notes xmlns:a="http://schemas.openxmlformats.org/drawingml/2006/main" xmlns:p="http://schemas.openxmlformats.org/presentationml/2006/main" xmlns:r="http://schemas.openxmlformats.org/officeDocument/2006/relationships">
+  <p:cSld>
+    <p:spTree>
+      <p:nvGrpSpPr>
+        <p:cNvPr id="1" name=""/>
+        <p:cNvGrpSpPr/>
+        <p:nvPr/>
+      </p:nvGrpSpPr>
+      <p:grpSpPr>
+        <a:xfrm>
+          <a:off x="0" y="0"/>
+          <a:ext cx="0" cy="0"/>
+          <a:chOff x="0" y="0"/>
+          <a:chExt cx="0" cy="0"/>
+        </a:xfrm>
+      </p:grpSpPr>
+      <p:sp>
+        <p:nvSpPr>
+          <p:cNvPr id="2" name="Slide Image Placeholder 1"/>
+          <p:cNvSpPr>
+            <a:spLocks noGrp="1"/>
+          </p:cNvSpPr>
+          <p:nvPr>
+            <p:ph type="sldImg" idx="2"/>
+          </p:nvPr>
+        </p:nvSpPr>
+        <p:spPr/>
+      </p:sp>
+      <p:sp>
+        <p:nvSpPr>
+          <p:cNvPr id="3" name="Notes Placeholder 2"/>
+          <p:cNvSpPr>
+            <a:spLocks noGrp="1"/>
+          </p:cNvSpPr>
+          <p:nvPr>
+            <p:ph type="body" idx="3" sz="quarter"/>
+          </p:nvPr>
+        </p:nvSpPr>
+        <p:spPr/>
+        <p:txBody>
+          <a:bodyPr/>
+          <a:lstStyle/>
+          <a:p>
+            <a:r>
+              <a:t>Every lock passed both correctness metrics in every run: no update was lost, and every run finished. The one exception is the deliberate one, Peterson without its memory fence, which lost updates on every multi-CPU run.</a:t>
+            </a:r>
+          </a:p>
+        </p:txBody>
+      </p:sp>
+      <p:sp>
+        <p:nvSpPr>
+          <p:cNvPr id="4" name="Slide Number Placeholder 3"/>
+          <p:cNvSpPr>
+            <a:spLocks noGrp="1"/>
+          </p:cNvSpPr>
+          <p:nvPr>
+            <p:ph type="sldNum" idx="5" sz="quarter"/>
+          </p:nvPr>
+        </p:nvSpPr>
+        <p:spPr/>
+      </p:sp>
+    </p:spTree>
+  </p:cSld>
+  <p:clrMapOvr>
+    <a:masterClrMapping/>
+  </p:clrMapOvr>
+</p:notes>
+</file>
+
+<file path=ppt/notesSlides/notesSlide28.xml><?xml version="1.0" encoding="utf-8"?>
+<p:notes xmlns:a="http://schemas.openxmlformats.org/drawingml/2006/main" xmlns:p="http://schemas.openxmlformats.org/presentationml/2006/main" xmlns:r="http://schemas.openxmlformats.org/officeDocument/2006/relationships">
+  <p:cSld>
+    <p:spTree>
+      <p:nvGrpSpPr>
+        <p:cNvPr id="1" name=""/>
+        <p:cNvGrpSpPr/>
+        <p:nvPr/>
+      </p:nvGrpSpPr>
+      <p:grpSpPr>
+        <a:xfrm>
+          <a:off x="0" y="0"/>
+          <a:ext cx="0" cy="0"/>
+          <a:chOff x="0" y="0"/>
+          <a:chExt cx="0" cy="0"/>
+        </a:xfrm>
+      </p:grpSpPr>
+      <p:sp>
+        <p:nvSpPr>
+          <p:cNvPr id="2" name="Slide Image Placeholder 1"/>
+          <p:cNvSpPr>
+            <a:spLocks noGrp="1"/>
+          </p:cNvSpPr>
+          <p:nvPr>
+            <p:ph type="sldImg" idx="2"/>
+          </p:nvPr>
+        </p:nvSpPr>
+        <p:spPr/>
+      </p:sp>
+      <p:sp>
+        <p:nvSpPr>
+          <p:cNvPr id="3" name="Notes Placeholder 2"/>
+          <p:cNvSpPr>
+            <a:spLocks noGrp="1"/>
+          </p:cNvSpPr>
+          <p:nvPr>
+            <p:ph type="body" idx="3" sz="quarter"/>
+          </p:nvPr>
+        </p:nvSpPr>
+        <p:spPr/>
+        <p:txBody>
+          <a:bodyPr/>
+          <a:lstStyle/>
+          <a:p>
+            <a:r>
+              <a:t>Fairness is the fewest acquisitions of any thread divided by the most. On all CPUs the MCS queue was the fairest lock at eight threads. On one CPU every spin lock let some thread starve, even the fair ones, because who gets in follows the scheduler. Only the mutex stayed fair.</a:t>
+            </a:r>
+          </a:p>
+        </p:txBody>
+      </p:sp>
+      <p:sp>
+        <p:nvSpPr>
+          <p:cNvPr id="4" name="Slide Number Placeholder 3"/>
+          <p:cNvSpPr>
+            <a:spLocks noGrp="1"/>
+          </p:cNvSpPr>
+          <p:nvPr>
+            <p:ph type="sldNum" idx="5" sz="quarter"/>
+          </p:nvPr>
+        </p:nvSpPr>
+        <p:spPr/>
+      </p:sp>
+    </p:spTree>
+  </p:cSld>
+  <p:clrMapOvr>
+    <a:masterClrMapping/>
+  </p:clrMapOvr>
+</p:notes>
+</file>
+
+<file path=ppt/notesSlides/notesSlide29.xml><?xml version="1.0" encoding="utf-8"?>
+<p:notes xmlns:a="http://schemas.openxmlformats.org/drawingml/2006/main" xmlns:p="http://schemas.openxmlformats.org/presentationml/2006/main" xmlns:r="http://schemas.openxmlformats.org/officeDocument/2006/relationships">
+  <p:cSld>
+    <p:spTree>
+      <p:nvGrpSpPr>
+        <p:cNvPr id="1" name=""/>
+        <p:cNvGrpSpPr/>
+        <p:nvPr/>
+      </p:nvGrpSpPr>
+      <p:grpSpPr>
+        <a:xfrm>
+          <a:off x="0" y="0"/>
+          <a:ext cx="0" cy="0"/>
+          <a:chOff x="0" y="0"/>
+          <a:chExt cx="0" cy="0"/>
+        </a:xfrm>
+      </p:grpSpPr>
+      <p:sp>
+        <p:nvSpPr>
+          <p:cNvPr id="2" name="Slide Image Placeholder 1"/>
+          <p:cNvSpPr>
+            <a:spLocks noGrp="1"/>
+          </p:cNvSpPr>
+          <p:nvPr>
+            <p:ph type="sldImg" idx="2"/>
+          </p:nvPr>
+        </p:nvSpPr>
+        <p:spPr/>
+      </p:sp>
+      <p:sp>
+        <p:nvSpPr>
+          <p:cNvPr id="3" name="Notes Placeholder 2"/>
+          <p:cNvSpPr>
+            <a:spLocks noGrp="1"/>
+          </p:cNvSpPr>
+          <p:nvPr>
+            <p:ph type="body" idx="3" sz="quarter"/>
+          </p:nvPr>
+        </p:nvSpPr>
+        <p:spPr/>
+        <p:txBody>
+          <a:bodyPr/>
+          <a:lstStyle/>
+          <a:p>
+            <a:r>
+              <a:t>This table puts the three locks and the two references on one page, each at the most threads it supports. Peterson is fair but limited to two threads, the simple hardware spin locks are unfair, and the MCS queue is fair at every thread count we ran.</a:t>
             </a:r>
           </a:p>
         </p:txBody>
@@ -3645,6 +4081,216 @@
 </p:notes>
 </file>
 
+<file path=ppt/notesSlides/notesSlide30.xml><?xml version="1.0" encoding="utf-8"?>
+<p:notes xmlns:a="http://schemas.openxmlformats.org/drawingml/2006/main" xmlns:p="http://schemas.openxmlformats.org/presentationml/2006/main" xmlns:r="http://schemas.openxmlformats.org/officeDocument/2006/relationships">
+  <p:cSld>
+    <p:spTree>
+      <p:nvGrpSpPr>
+        <p:cNvPr id="1" name=""/>
+        <p:cNvGrpSpPr/>
+        <p:nvPr/>
+      </p:nvGrpSpPr>
+      <p:grpSpPr>
+        <a:xfrm>
+          <a:off x="0" y="0"/>
+          <a:ext cx="0" cy="0"/>
+          <a:chOff x="0" y="0"/>
+          <a:chExt cx="0" cy="0"/>
+        </a:xfrm>
+      </p:grpSpPr>
+      <p:sp>
+        <p:nvSpPr>
+          <p:cNvPr id="2" name="Slide Image Placeholder 1"/>
+          <p:cNvSpPr>
+            <a:spLocks noGrp="1"/>
+          </p:cNvSpPr>
+          <p:nvPr>
+            <p:ph type="sldImg" idx="2"/>
+          </p:nvPr>
+        </p:nvSpPr>
+        <p:spPr/>
+      </p:sp>
+      <p:sp>
+        <p:nvSpPr>
+          <p:cNvPr id="3" name="Notes Placeholder 2"/>
+          <p:cNvSpPr>
+            <a:spLocks noGrp="1"/>
+          </p:cNvSpPr>
+          <p:nvPr>
+            <p:ph type="body" idx="3" sz="quarter"/>
+          </p:nvPr>
+        </p:nvSpPr>
+        <p:spPr/>
+        <p:txBody>
+          <a:bodyPr/>
+          <a:lstStyle/>
+          <a:p>
+            <a:r>
+              <a:t>Last part: what the measurements tell us, and where the material comes from.</a:t>
+            </a:r>
+          </a:p>
+        </p:txBody>
+      </p:sp>
+      <p:sp>
+        <p:nvSpPr>
+          <p:cNvPr id="4" name="Slide Number Placeholder 3"/>
+          <p:cNvSpPr>
+            <a:spLocks noGrp="1"/>
+          </p:cNvSpPr>
+          <p:nvPr>
+            <p:ph type="sldNum" idx="5" sz="quarter"/>
+          </p:nvPr>
+        </p:nvSpPr>
+        <p:spPr/>
+      </p:sp>
+    </p:spTree>
+  </p:cSld>
+  <p:clrMapOvr>
+    <a:masterClrMapping/>
+  </p:clrMapOvr>
+</p:notes>
+</file>
+
+<file path=ppt/notesSlides/notesSlide31.xml><?xml version="1.0" encoding="utf-8"?>
+<p:notes xmlns:a="http://schemas.openxmlformats.org/drawingml/2006/main" xmlns:p="http://schemas.openxmlformats.org/presentationml/2006/main" xmlns:r="http://schemas.openxmlformats.org/officeDocument/2006/relationships">
+  <p:cSld>
+    <p:spTree>
+      <p:nvGrpSpPr>
+        <p:cNvPr id="1" name=""/>
+        <p:cNvGrpSpPr/>
+        <p:nvPr/>
+      </p:nvGrpSpPr>
+      <p:grpSpPr>
+        <a:xfrm>
+          <a:off x="0" y="0"/>
+          <a:ext cx="0" cy="0"/>
+          <a:chOff x="0" y="0"/>
+          <a:chExt cx="0" cy="0"/>
+        </a:xfrm>
+      </p:grpSpPr>
+      <p:sp>
+        <p:nvSpPr>
+          <p:cNvPr id="2" name="Slide Image Placeholder 1"/>
+          <p:cNvSpPr>
+            <a:spLocks noGrp="1"/>
+          </p:cNvSpPr>
+          <p:nvPr>
+            <p:ph type="sldImg" idx="2"/>
+          </p:nvPr>
+        </p:nvSpPr>
+        <p:spPr/>
+      </p:sp>
+      <p:sp>
+        <p:nvSpPr>
+          <p:cNvPr id="3" name="Notes Placeholder 2"/>
+          <p:cNvSpPr>
+            <a:spLocks noGrp="1"/>
+          </p:cNvSpPr>
+          <p:nvPr>
+            <p:ph type="body" idx="3" sz="quarter"/>
+          </p:nvPr>
+        </p:nvSpPr>
+        <p:spPr/>
+        <p:txBody>
+          <a:bodyPr/>
+          <a:lstStyle/>
+          <a:p>
+            <a:r>
+              <a:t>All three locks provide mutual exclusion and avoid deadlock, but Peterson only does so on today's CPUs with a memory fence. Peterson is fair but limited to two threads; LL/SC is short and fast but unfair; the MCS queue is fair for any number of threads and is what Linux builds its spinlock on. When threads can be preempted, sleeping locks such as pthread_mutex win.</a:t>
+            </a:r>
+          </a:p>
+        </p:txBody>
+      </p:sp>
+      <p:sp>
+        <p:nvSpPr>
+          <p:cNvPr id="4" name="Slide Number Placeholder 3"/>
+          <p:cNvSpPr>
+            <a:spLocks noGrp="1"/>
+          </p:cNvSpPr>
+          <p:nvPr>
+            <p:ph type="sldNum" idx="5" sz="quarter"/>
+          </p:nvPr>
+        </p:nvSpPr>
+        <p:spPr/>
+      </p:sp>
+    </p:spTree>
+  </p:cSld>
+  <p:clrMapOvr>
+    <a:masterClrMapping/>
+  </p:clrMapOvr>
+</p:notes>
+</file>
+
+<file path=ppt/notesSlides/notesSlide32.xml><?xml version="1.0" encoding="utf-8"?>
+<p:notes xmlns:a="http://schemas.openxmlformats.org/drawingml/2006/main" xmlns:p="http://schemas.openxmlformats.org/presentationml/2006/main" xmlns:r="http://schemas.openxmlformats.org/officeDocument/2006/relationships">
+  <p:cSld>
+    <p:spTree>
+      <p:nvGrpSpPr>
+        <p:cNvPr id="1" name=""/>
+        <p:cNvGrpSpPr/>
+        <p:nvPr/>
+      </p:nvGrpSpPr>
+      <p:grpSpPr>
+        <a:xfrm>
+          <a:off x="0" y="0"/>
+          <a:ext cx="0" cy="0"/>
+          <a:chOff x="0" y="0"/>
+          <a:chExt cx="0" cy="0"/>
+        </a:xfrm>
+      </p:grpSpPr>
+      <p:sp>
+        <p:nvSpPr>
+          <p:cNvPr id="2" name="Slide Image Placeholder 1"/>
+          <p:cNvSpPr>
+            <a:spLocks noGrp="1"/>
+          </p:cNvSpPr>
+          <p:nvPr>
+            <p:ph type="sldImg" idx="2"/>
+          </p:nvPr>
+        </p:nvSpPr>
+        <p:spPr/>
+      </p:sp>
+      <p:sp>
+        <p:nvSpPr>
+          <p:cNvPr id="3" name="Notes Placeholder 2"/>
+          <p:cNvSpPr>
+            <a:spLocks noGrp="1"/>
+          </p:cNvSpPr>
+          <p:nvPr>
+            <p:ph type="body" idx="3" sz="quarter"/>
+          </p:nvPr>
+        </p:nvSpPr>
+        <p:spPr/>
+        <p:txBody>
+          <a:bodyPr/>
+          <a:lstStyle/>
+          <a:p>
+            <a:r>
+              <a:t>These are the sources for the algorithms and the instructions.</a:t>
+            </a:r>
+          </a:p>
+        </p:txBody>
+      </p:sp>
+      <p:sp>
+        <p:nvSpPr>
+          <p:cNvPr id="4" name="Slide Number Placeholder 3"/>
+          <p:cNvSpPr>
+            <a:spLocks noGrp="1"/>
+          </p:cNvSpPr>
+          <p:nvPr>
+            <p:ph type="sldNum" idx="5" sz="quarter"/>
+          </p:nvPr>
+        </p:nvSpPr>
+        <p:spPr/>
+      </p:sp>
+    </p:spTree>
+  </p:cSld>
+  <p:clrMapOvr>
+    <a:masterClrMapping/>
+  </p:clrMapOvr>
+</p:notes>
+</file>
+
 <file path=ppt/notesSlides/notesSlide4.xml><?xml version="1.0" encoding="utf-8"?>
 <p:notes xmlns:a="http://schemas.openxmlformats.org/drawingml/2006/main" xmlns:p="http://schemas.openxmlformats.org/presentationml/2006/main" xmlns:r="http://schemas.openxmlformats.org/officeDocument/2006/relationships">
   <p:cSld>
@@ -3690,7 +4336,7 @@
           <a:lstStyle/>
           <a:p>
             <a:r>
-              <a:t>We use the four metrics from Lecture 8. Every lock runs the same loop for 1 second per run: lock, add one to a shared counter, unlock. If the counter ends lower than the number of acquisitions, two threads were inside together. Each setting runs 3 times and we report the median.</a:t>
+              <a:t>Lecture 8 judges a lock on four things: mutual exclusion, absence of deadlock, fairness, and performance. We turn each one into something a program can measure, so every lock is judged the same way.</a:t>
             </a:r>
           </a:p>
         </p:txBody>
@@ -3760,7 +4406,7 @@
           <a:lstStyle/>
           <a:p>
             <a:r>
-              <a:t>Part one: Peterson's algorithm, a lock built from ordinary loads and stores.</a:t>
+              <a:t>Every lock runs this same loop. All threads start together at a barrier and loop until the main thread raises stop after 1 second. The counter is a plain variable, not an atomic one, so if two threads are ever inside together, one of their updates is lost and the counter ends short.</a:t>
             </a:r>
           </a:p>
         </p:txBody>
@@ -3830,7 +4476,7 @@
           <a:lstStyle/>
           <a:p>
             <a:r>
-              <a:t>Peterson's algorithm needs no special instruction. Each thread raises its flag to say it wants in, then politely gives the turn to the other thread. The thread that wrote turn last is the one that waits.</a:t>
+              <a:t>This is one real run: the test-and-set lock from the lecture with four threads. Each thread reports how many times it got the lock. The total matches the counter, so nothing was lost. Fairness is the smallest count divided by the largest, and performance is the total divided by the time.</a:t>
             </a:r>
           </a:p>
         </p:txBody>
@@ -3900,7 +4546,7 @@
           <a:lstStyle/>
           <a:p>
             <a:r>
-              <a:t>On paper Peterson is correct: both threads inside would need turn to hold two values at once. On a real x86 CPU the textbook code fails, because a load may overtake an earlier store. Without the fence we lost updates in 5 of 5 runs; on one CPU, or with the fence, nothing was lost.</a:t>
+              <a:t>Each lock runs with 1, 2, 4 and 8 threads, first on all 8 CPUs and then pinned to one CPU with taskset, to see what spinning costs when the lock holder cannot run. Every setting runs 3 times and the slides show the median. Two locks from the lecture, test-and-set and pthread_mutex, run as references.</a:t>
             </a:r>
           </a:p>
         </p:txBody>
@@ -3970,7 +4616,7 @@
           <a:lstStyle/>
           <a:p>
             <a:r>
-              <a:t>With one thread there is no contention and the lock is cheap. With two threads on separate CPUs, flag and turn bounce between the cores' caches. Pinned to one CPU it collapses: a waiting thread spins away its whole time slice, as the lecture warned.</a:t>
+              <a:t>Part one: Peterson's algorithm, a lock built from ordinary loads and stores.</a:t>
             </a:r>
           </a:p>
         </p:txBody>
@@ -4040,7 +4686,7 @@
           <a:lstStyle/>
           <a:p>
             <a:r>
-              <a:t>With both threads on their own CPU, turn hands priority to the other thread, so neither waits for more than one entry of the other; the counts were nearly equal. On one CPU the counts were lopsided because who gets in follows the scheduler. The algorithm also only works for two threads and needs a fence on modern CPUs.</a:t>
+              <a:t>Peterson's algorithm needs no special instruction. Each thread raises its flag to say it wants in, then politely gives the turn to the other thread. The thread that wrote turn last is the one that waits.</a:t>
             </a:r>
           </a:p>
         </p:txBody>
@@ -7009,40 +7655,14 @@
           <a:lstStyle/>
           <a:p>
             <a:r>
-              <a:t>Load-Linked / Store-Conditional</a:t>
-            </a:r>
-          </a:p>
-        </p:txBody>
-      </p:sp>
-      <p:sp>
-        <p:nvSpPr>
-          <p:cNvPr id="3" name="Text Placeholder 2"/>
-          <p:cNvSpPr>
-            <a:spLocks noGrp="1"/>
-          </p:cNvSpPr>
-          <p:nvPr>
-            <p:ph type="body" idx="1"/>
-          </p:nvPr>
-        </p:nvSpPr>
-        <p:spPr/>
-        <p:txBody>
-          <a:bodyPr/>
-          <a:lstStyle/>
-          <a:p>
-            <a:r>
-              <a:t>67070501005</a:t>
-            </a:r>
-          </a:p>
-          <a:p>
-            <a:r>
-              <a:t>Kiatisak Markmeeshap</a:t>
-            </a:r>
-          </a:p>
-        </p:txBody>
-      </p:sp>
-      <p:sp>
-        <p:nvSpPr>
-          <p:cNvPr id="4" name="TextBox 3"/>
+              <a:t>Peterson: Mutual Exclusion and Deadlock</a:t>
+            </a:r>
+          </a:p>
+        </p:txBody>
+      </p:sp>
+      <p:sp>
+        <p:nvSpPr>
+          <p:cNvPr id="3" name="TextBox 2"/>
           <p:cNvSpPr txBox="1"/>
           <p:nvPr/>
         </p:nvSpPr>
@@ -7070,6 +7690,344 @@
                 </a:solidFill>
               </a:rPr>
               <a:t>10</a:t>
+            </a:r>
+          </a:p>
+        </p:txBody>
+      </p:sp>
+      <p:sp>
+        <p:nvSpPr>
+          <p:cNvPr id="4" name="TextBox 3"/>
+          <p:cNvSpPr txBox="1"/>
+          <p:nvPr/>
+        </p:nvSpPr>
+        <p:spPr>
+          <a:xfrm>
+            <a:off x="822960" y="1463040"/>
+            <a:ext cx="10789920" cy="2103120"/>
+          </a:xfrm>
+          <a:prstGeom prst="rect">
+            <a:avLst/>
+          </a:prstGeom>
+          <a:noFill/>
+        </p:spPr>
+        <p:txBody>
+          <a:bodyPr wrap="square">
+            <a:spAutoFit/>
+          </a:bodyPr>
+          <a:lstStyle/>
+          <a:p>
+            <a:pPr>
+              <a:spcAft>
+                <a:spcPts val="800"/>
+              </a:spcAft>
+            </a:pPr>
+            <a:r>
+              <a:rPr sz="1900"/>
+              <a:t>• Mutual exclusion: if both were inside, each saw turn == itself — impossible, turn holds one value</a:t>
+            </a:r>
+          </a:p>
+          <a:p>
+            <a:pPr>
+              <a:spcAft>
+                <a:spcPts val="800"/>
+              </a:spcAft>
+            </a:pPr>
+            <a:r>
+              <a:rPr sz="1900"/>
+              <a:t>• No deadlock: turn is 0 or 1, so one waiting thread always passes</a:t>
+            </a:r>
+          </a:p>
+          <a:p>
+            <a:pPr>
+              <a:spcAft>
+                <a:spcPts val="800"/>
+              </a:spcAft>
+            </a:pPr>
+            <a:r>
+              <a:rPr sz="1900">
+                <a:solidFill>
+                  <a:srgbClr val="C0392B"/>
+                </a:solidFill>
+              </a:rPr>
+              <a:t>• But x86 lets a load pass an earlier store (store buffer): both read flag[other] == 0 and both enter</a:t>
+            </a:r>
+          </a:p>
+        </p:txBody>
+      </p:sp>
+      <p:graphicFrame>
+        <p:nvGraphicFramePr>
+          <p:cNvPr id="5" name="Table 4"/>
+          <p:cNvGraphicFramePr>
+            <a:graphicFrameLocks noGrp="1"/>
+          </p:cNvGraphicFramePr>
+          <p:nvPr/>
+        </p:nvGraphicFramePr>
+        <p:xfrm>
+          <a:off x="822960" y="3566160"/>
+          <a:ext cx="10515600" cy="1463040"/>
+        </p:xfrm>
+        <a:graphic>
+          <a:graphicData uri="http://schemas.openxmlformats.org/drawingml/2006/table">
+            <a:tbl>
+              <a:tblPr firstRow="1" bandRow="1">
+                <a:tableStyleId>{5C22544A-7EE6-4342-B048-85BDC9FD1C3A}</a:tableStyleId>
+              </a:tblPr>
+              <a:tblGrid>
+                <a:gridCol w="2926080"/>
+                <a:gridCol w="1463040"/>
+                <a:gridCol w="2926080"/>
+                <a:gridCol w="3200400"/>
+              </a:tblGrid>
+              <a:tr h="365760">
+                <a:tc>
+                  <a:txBody>
+                    <a:bodyPr/>
+                    <a:lstStyle/>
+                    <a:p>
+                      <a:r>
+                        <a:rPr sz="1600"/>
+                        <a:t>Build (2 threads)</a:t>
+                      </a:r>
+                    </a:p>
+                  </a:txBody>
+                  <a:tcPr/>
+                </a:tc>
+                <a:tc>
+                  <a:txBody>
+                    <a:bodyPr/>
+                    <a:lstStyle/>
+                    <a:p>
+                      <a:r>
+                        <a:rPr sz="1600"/>
+                        <a:t>CPUs</a:t>
+                      </a:r>
+                    </a:p>
+                  </a:txBody>
+                  <a:tcPr/>
+                </a:tc>
+                <a:tc>
+                  <a:txBody>
+                    <a:bodyPr/>
+                    <a:lstStyle/>
+                    <a:p>
+                      <a:r>
+                        <a:rPr sz="1600"/>
+                        <a:t>Runs with lost updates</a:t>
+                      </a:r>
+                    </a:p>
+                  </a:txBody>
+                  <a:tcPr/>
+                </a:tc>
+                <a:tc>
+                  <a:txBody>
+                    <a:bodyPr/>
+                    <a:lstStyle/>
+                    <a:p>
+                      <a:r>
+                        <a:rPr sz="1600"/>
+                        <a:t>Lost updates per run</a:t>
+                      </a:r>
+                    </a:p>
+                  </a:txBody>
+                  <a:tcPr/>
+                </a:tc>
+              </a:tr>
+              <a:tr h="365760">
+                <a:tc>
+                  <a:txBody>
+                    <a:bodyPr/>
+                    <a:lstStyle/>
+                    <a:p>
+                      <a:r>
+                        <a:rPr sz="1600"/>
+                        <a:t>no fence</a:t>
+                      </a:r>
+                    </a:p>
+                  </a:txBody>
+                  <a:tcPr/>
+                </a:tc>
+                <a:tc>
+                  <a:txBody>
+                    <a:bodyPr/>
+                    <a:lstStyle/>
+                    <a:p>
+                      <a:r>
+                        <a:rPr sz="1600"/>
+                        <a:t>all 8</a:t>
+                      </a:r>
+                    </a:p>
+                  </a:txBody>
+                  <a:tcPr/>
+                </a:tc>
+                <a:tc>
+                  <a:txBody>
+                    <a:bodyPr/>
+                    <a:lstStyle/>
+                    <a:p>
+                      <a:r>
+                        <a:rPr sz="1600"/>
+                        <a:t>5 / 5</a:t>
+                      </a:r>
+                    </a:p>
+                  </a:txBody>
+                  <a:tcPr/>
+                </a:tc>
+                <a:tc>
+                  <a:txBody>
+                    <a:bodyPr/>
+                    <a:lstStyle/>
+                    <a:p>
+                      <a:r>
+                        <a:rPr sz="1600"/>
+                        <a:t>233,108 – 813,401</a:t>
+                      </a:r>
+                    </a:p>
+                  </a:txBody>
+                  <a:tcPr/>
+                </a:tc>
+              </a:tr>
+              <a:tr h="365760">
+                <a:tc>
+                  <a:txBody>
+                    <a:bodyPr/>
+                    <a:lstStyle/>
+                    <a:p>
+                      <a:r>
+                        <a:rPr sz="1600"/>
+                        <a:t>no fence</a:t>
+                      </a:r>
+                    </a:p>
+                  </a:txBody>
+                  <a:tcPr/>
+                </a:tc>
+                <a:tc>
+                  <a:txBody>
+                    <a:bodyPr/>
+                    <a:lstStyle/>
+                    <a:p>
+                      <a:r>
+                        <a:rPr sz="1600"/>
+                        <a:t>one</a:t>
+                      </a:r>
+                    </a:p>
+                  </a:txBody>
+                  <a:tcPr/>
+                </a:tc>
+                <a:tc>
+                  <a:txBody>
+                    <a:bodyPr/>
+                    <a:lstStyle/>
+                    <a:p>
+                      <a:r>
+                        <a:rPr sz="1600"/>
+                        <a:t>0 / 3</a:t>
+                      </a:r>
+                    </a:p>
+                  </a:txBody>
+                  <a:tcPr/>
+                </a:tc>
+                <a:tc>
+                  <a:txBody>
+                    <a:bodyPr/>
+                    <a:lstStyle/>
+                    <a:p>
+                      <a:r>
+                        <a:rPr sz="1600"/>
+                        <a:t>0</a:t>
+                      </a:r>
+                    </a:p>
+                  </a:txBody>
+                  <a:tcPr/>
+                </a:tc>
+              </a:tr>
+              <a:tr h="365760">
+                <a:tc>
+                  <a:txBody>
+                    <a:bodyPr/>
+                    <a:lstStyle/>
+                    <a:p>
+                      <a:r>
+                        <a:rPr sz="1600"/>
+                        <a:t>with FENCE()</a:t>
+                      </a:r>
+                    </a:p>
+                  </a:txBody>
+                  <a:tcPr/>
+                </a:tc>
+                <a:tc>
+                  <a:txBody>
+                    <a:bodyPr/>
+                    <a:lstStyle/>
+                    <a:p>
+                      <a:r>
+                        <a:rPr sz="1600"/>
+                        <a:t>all 8</a:t>
+                      </a:r>
+                    </a:p>
+                  </a:txBody>
+                  <a:tcPr/>
+                </a:tc>
+                <a:tc>
+                  <a:txBody>
+                    <a:bodyPr/>
+                    <a:lstStyle/>
+                    <a:p>
+                      <a:r>
+                        <a:rPr sz="1600"/>
+                        <a:t>0 / 5</a:t>
+                      </a:r>
+                    </a:p>
+                  </a:txBody>
+                  <a:tcPr/>
+                </a:tc>
+                <a:tc>
+                  <a:txBody>
+                    <a:bodyPr/>
+                    <a:lstStyle/>
+                    <a:p>
+                      <a:r>
+                        <a:rPr sz="1600"/>
+                        <a:t>0</a:t>
+                      </a:r>
+                    </a:p>
+                  </a:txBody>
+                  <a:tcPr/>
+                </a:tc>
+              </a:tr>
+            </a:tbl>
+          </a:graphicData>
+        </a:graphic>
+      </p:graphicFrame>
+      <p:sp>
+        <p:nvSpPr>
+          <p:cNvPr id="6" name="TextBox 5"/>
+          <p:cNvSpPr txBox="1"/>
+          <p:nvPr/>
+        </p:nvSpPr>
+        <p:spPr>
+          <a:xfrm>
+            <a:off x="822960" y="5394960"/>
+            <a:ext cx="10789920" cy="914400"/>
+          </a:xfrm>
+          <a:prstGeom prst="rect">
+            <a:avLst/>
+          </a:prstGeom>
+          <a:noFill/>
+        </p:spPr>
+        <p:txBody>
+          <a:bodyPr wrap="square">
+            <a:spAutoFit/>
+          </a:bodyPr>
+          <a:lstStyle/>
+          <a:p>
+            <a:pPr>
+              <a:spcAft>
+                <a:spcPts val="800"/>
+              </a:spcAft>
+            </a:pPr>
+            <a:r>
+              <a:rPr sz="1700"/>
+              <a:t>• FENCE() compiles to  lock orq $0x0,(%rsp)  — a full barrier: the stores drain before the loads</a:t>
             </a:r>
           </a:p>
         </p:txBody>
@@ -7108,7 +8066,7 @@
           <a:lstStyle/>
           <a:p>
             <a:r>
-              <a:t>LL/SC: Idea</a:t>
+              <a:t>Peterson: Performance</a:t>
             </a:r>
           </a:p>
         </p:txBody>
@@ -7147,16 +8105,34 @@
           </a:p>
         </p:txBody>
       </p:sp>
-      <p:sp>
-        <p:nvSpPr>
-          <p:cNvPr id="4" name="TextBox 3"/>
+      <p:graphicFrame>
+        <p:nvGraphicFramePr>
+          <p:cNvPr id="4" name="Chart 3"/>
+          <p:cNvGraphicFramePr>
+            <a:graphicFrameLocks noGrp="1"/>
+          </p:cNvGraphicFramePr>
+          <p:nvPr/>
+        </p:nvGraphicFramePr>
+        <p:xfrm>
+          <a:off x="548640" y="1463040"/>
+          <a:ext cx="6035040" cy="4937760"/>
+        </p:xfrm>
+        <a:graphic>
+          <a:graphicData uri="http://schemas.openxmlformats.org/drawingml/2006/chart">
+            <c:chart xmlns:c="http://schemas.openxmlformats.org/drawingml/2006/chart" r:id="rId3"/>
+          </a:graphicData>
+        </a:graphic>
+      </p:graphicFrame>
+      <p:sp>
+        <p:nvSpPr>
+          <p:cNvPr id="5" name="TextBox 4"/>
           <p:cNvSpPr txBox="1"/>
           <p:nvPr/>
         </p:nvSpPr>
         <p:spPr>
           <a:xfrm>
-            <a:off x="548640" y="1554480"/>
-            <a:ext cx="4389120" cy="4937760"/>
+            <a:off x="6858000" y="1645920"/>
+            <a:ext cx="4937760" cy="4572000"/>
           </a:xfrm>
           <a:prstGeom prst="rect">
             <a:avLst/>
@@ -7176,7 +8152,7 @@
             </a:pPr>
             <a:r>
               <a:rPr sz="1900"/>
-              <a:t>• LoadLinked(p): load *p and watch the address</a:t>
+              <a:t>• 1 thread: 63 M acq/s — no contention</a:t>
             </a:r>
           </a:p>
           <a:p>
@@ -7187,29 +8163,7 @@
             </a:pPr>
             <a:r>
               <a:rPr sz="1900"/>
-              <a:t>• StoreConditional(p, v): store only if nobody stored to p since the LoadLinked</a:t>
-            </a:r>
-          </a:p>
-          <a:p>
-            <a:pPr>
-              <a:spcAft>
-                <a:spcPts val="800"/>
-              </a:spcAft>
-            </a:pPr>
-            <a:r>
-              <a:rPr sz="1900"/>
-              <a:t>• Lock: spin on LL until 0, then SC 1; if SC fails, start over</a:t>
-            </a:r>
-          </a:p>
-          <a:p>
-            <a:pPr>
-              <a:spcAft>
-                <a:spcPts val="800"/>
-              </a:spcAft>
-            </a:pPr>
-            <a:r>
-              <a:rPr sz="1900"/>
-              <a:t>• MIPS, Alpha, PowerPC, ARM (AArch64: LDXR/STXR)</a:t>
+              <a:t>• 2 threads, all CPUs: 15 M acq/s — flag and turn move between cores</a:t>
             </a:r>
           </a:p>
           <a:p>
@@ -7224,371 +8178,18 @@
                   <a:srgbClr val="C0392B"/>
                 </a:solidFill>
               </a:rPr>
-              <a:t>• x86 has no LL/SC — it offers CAS (lock cmpxchg)</a:t>
-            </a:r>
-          </a:p>
-        </p:txBody>
-      </p:sp>
-      <p:sp>
-        <p:nvSpPr>
-          <p:cNvPr id="5" name="TextBox 4"/>
-          <p:cNvSpPr txBox="1"/>
-          <p:nvPr/>
-        </p:nvSpPr>
-        <p:spPr>
-          <a:xfrm>
-            <a:off x="5120640" y="1463040"/>
-            <a:ext cx="6675120" cy="4914900"/>
-          </a:xfrm>
-          <a:prstGeom prst="rect">
-            <a:avLst/>
-          </a:prstGeom>
-          <a:solidFill>
-            <a:srgbClr val="F4F4F4"/>
-          </a:solidFill>
-        </p:spPr>
-        <p:txBody>
-          <a:bodyPr wrap="none">
-            <a:spAutoFit/>
-          </a:bodyPr>
-          <a:lstStyle/>
-          <a:p>
-            <a:pPr>
-              <a:spcAft>
-                <a:spcPts val="0"/>
-              </a:spcAft>
-            </a:pPr>
-            <a:r>
-              <a:rPr sz="1150">
-                <a:latin typeface="Consolas"/>
-              </a:rPr>
-              <a:t>static inline int LoadLinked(volatile int *p)</a:t>
-            </a:r>
-          </a:p>
-          <a:p>
-            <a:pPr>
-              <a:spcAft>
-                <a:spcPts val="0"/>
-              </a:spcAft>
-            </a:pPr>
-            <a:r>
-              <a:rPr sz="1150">
-                <a:latin typeface="Consolas"/>
-              </a:rPr>
-              <a:t>{</a:t>
-            </a:r>
-          </a:p>
-          <a:p>
-            <a:pPr>
-              <a:spcAft>
-                <a:spcPts val="0"/>
-              </a:spcAft>
-            </a:pPr>
-            <a:r>
-              <a:rPr sz="1150">
-                <a:latin typeface="Consolas"/>
-              </a:rPr>
-              <a:t>    int v;</a:t>
-            </a:r>
-          </a:p>
-          <a:p>
-            <a:pPr>
-              <a:spcAft>
-                <a:spcPts val="0"/>
-              </a:spcAft>
-            </a:pPr>
-            <a:r>
-              <a:rPr sz="1150">
-                <a:latin typeface="Consolas"/>
-              </a:rPr>
-              <a:t>    __asm__ volatile("ldaxr %w0, [%1]"</a:t>
-            </a:r>
-          </a:p>
-          <a:p>
-            <a:pPr>
-              <a:spcAft>
-                <a:spcPts val="0"/>
-              </a:spcAft>
-            </a:pPr>
-            <a:r>
-              <a:rPr sz="1150">
-                <a:latin typeface="Consolas"/>
-              </a:rPr>
-              <a:t>                     : "=r"(v) : "r"(p) : "memory");</a:t>
-            </a:r>
-          </a:p>
-          <a:p>
-            <a:pPr>
-              <a:spcAft>
-                <a:spcPts val="0"/>
-              </a:spcAft>
-            </a:pPr>
-            <a:r>
-              <a:rPr sz="1150">
-                <a:latin typeface="Consolas"/>
-              </a:rPr>
-              <a:t>    return v;</a:t>
-            </a:r>
-          </a:p>
-          <a:p>
-            <a:pPr>
-              <a:spcAft>
-                <a:spcPts val="0"/>
-              </a:spcAft>
-            </a:pPr>
-            <a:r>
-              <a:rPr sz="1150">
-                <a:latin typeface="Consolas"/>
-              </a:rPr>
-              <a:t>}</a:t>
-            </a:r>
-          </a:p>
-          <a:p>
-            <a:pPr>
-              <a:spcAft>
-                <a:spcPts val="0"/>
-              </a:spcAft>
-            </a:pPr>
-          </a:p>
-          <a:p>
-            <a:pPr>
-              <a:spcAft>
-                <a:spcPts val="0"/>
-              </a:spcAft>
-            </a:pPr>
-            <a:r>
-              <a:rPr sz="1150">
-                <a:latin typeface="Consolas"/>
-              </a:rPr>
-              <a:t>static inline int StoreConditional(volatile int *p, int v)</a:t>
-            </a:r>
-          </a:p>
-          <a:p>
-            <a:pPr>
-              <a:spcAft>
-                <a:spcPts val="0"/>
-              </a:spcAft>
-            </a:pPr>
-            <a:r>
-              <a:rPr sz="1150">
-                <a:latin typeface="Consolas"/>
-              </a:rPr>
-              <a:t>{</a:t>
-            </a:r>
-          </a:p>
-          <a:p>
-            <a:pPr>
-              <a:spcAft>
-                <a:spcPts val="0"/>
-              </a:spcAft>
-            </a:pPr>
-            <a:r>
-              <a:rPr sz="1150">
-                <a:latin typeface="Consolas"/>
-              </a:rPr>
-              <a:t>    int fail;                  /* stxr: 0 = stored, 1 = failed */</a:t>
-            </a:r>
-          </a:p>
-          <a:p>
-            <a:pPr>
-              <a:spcAft>
-                <a:spcPts val="0"/>
-              </a:spcAft>
-            </a:pPr>
-            <a:r>
-              <a:rPr sz="1150">
-                <a:latin typeface="Consolas"/>
-              </a:rPr>
-              <a:t>    __asm__ volatile("stxr %w0, %w2, [%1]"</a:t>
-            </a:r>
-          </a:p>
-          <a:p>
-            <a:pPr>
-              <a:spcAft>
-                <a:spcPts val="0"/>
-              </a:spcAft>
-            </a:pPr>
-            <a:r>
-              <a:rPr sz="1150">
-                <a:latin typeface="Consolas"/>
-              </a:rPr>
-              <a:t>                     : "=&amp;r"(fail) : "r"(p), "r"(v) : "memory");</a:t>
-            </a:r>
-          </a:p>
-          <a:p>
-            <a:pPr>
-              <a:spcAft>
-                <a:spcPts val="0"/>
-              </a:spcAft>
-            </a:pPr>
-            <a:r>
-              <a:rPr sz="1150">
-                <a:latin typeface="Consolas"/>
-              </a:rPr>
-              <a:t>    return !fail;</a:t>
-            </a:r>
-          </a:p>
-          <a:p>
-            <a:pPr>
-              <a:spcAft>
-                <a:spcPts val="0"/>
-              </a:spcAft>
-            </a:pPr>
-            <a:r>
-              <a:rPr sz="1150">
-                <a:latin typeface="Consolas"/>
-              </a:rPr>
-              <a:t>}</a:t>
-            </a:r>
-          </a:p>
-          <a:p>
-            <a:pPr>
-              <a:spcAft>
-                <a:spcPts val="0"/>
-              </a:spcAft>
-            </a:pPr>
-          </a:p>
-          <a:p>
-            <a:pPr>
-              <a:spcAft>
-                <a:spcPts val="0"/>
-              </a:spcAft>
-            </a:pPr>
-            <a:r>
-              <a:rPr sz="1150">
-                <a:latin typeface="Consolas"/>
-              </a:rPr>
-              <a:t>void lock_acquire(int id)</a:t>
-            </a:r>
-          </a:p>
-          <a:p>
-            <a:pPr>
-              <a:spcAft>
-                <a:spcPts val="0"/>
-              </a:spcAft>
-            </a:pPr>
-            <a:r>
-              <a:rPr sz="1150">
-                <a:latin typeface="Consolas"/>
-              </a:rPr>
-              <a:t>{</a:t>
-            </a:r>
-          </a:p>
-          <a:p>
-            <a:pPr>
-              <a:spcAft>
-                <a:spcPts val="0"/>
-              </a:spcAft>
-            </a:pPr>
-            <a:r>
-              <a:rPr sz="1150">
-                <a:latin typeface="Consolas"/>
-              </a:rPr>
-              <a:t>    (void)id;</a:t>
-            </a:r>
-          </a:p>
-          <a:p>
-            <a:pPr>
-              <a:spcAft>
-                <a:spcPts val="0"/>
-              </a:spcAft>
-            </a:pPr>
-            <a:r>
-              <a:rPr sz="1150">
-                <a:latin typeface="Consolas"/>
-              </a:rPr>
-              <a:t>    while (1) {</a:t>
-            </a:r>
-          </a:p>
-          <a:p>
-            <a:pPr>
-              <a:spcAft>
-                <a:spcPts val="0"/>
-              </a:spcAft>
-            </a:pPr>
-            <a:r>
-              <a:rPr sz="1150">
-                <a:latin typeface="Consolas"/>
-              </a:rPr>
-              <a:t>        while (LoadLinked(&amp;flag))</a:t>
-            </a:r>
-          </a:p>
-          <a:p>
-            <a:pPr>
-              <a:spcAft>
-                <a:spcPts val="0"/>
-              </a:spcAft>
-            </a:pPr>
-            <a:r>
-              <a:rPr sz="1150">
-                <a:latin typeface="Consolas"/>
-              </a:rPr>
-              <a:t>            ;                  /* spin until it is zero */</a:t>
-            </a:r>
-          </a:p>
-          <a:p>
-            <a:pPr>
-              <a:spcAft>
-                <a:spcPts val="0"/>
-              </a:spcAft>
-            </a:pPr>
-            <a:r>
-              <a:rPr sz="1150">
-                <a:latin typeface="Consolas"/>
-              </a:rPr>
-              <a:t>        if (StoreConditional(&amp;flag, 1))</a:t>
-            </a:r>
-          </a:p>
-          <a:p>
-            <a:pPr>
-              <a:spcAft>
-                <a:spcPts val="0"/>
-              </a:spcAft>
-            </a:pPr>
-            <a:r>
-              <a:rPr sz="1150">
-                <a:latin typeface="Consolas"/>
-              </a:rPr>
-              <a:t>            return;            /* no store in between: ours */</a:t>
-            </a:r>
-          </a:p>
-          <a:p>
-            <a:pPr>
-              <a:spcAft>
-                <a:spcPts val="0"/>
-              </a:spcAft>
-            </a:pPr>
-            <a:r>
-              <a:rPr sz="1150">
-                <a:latin typeface="Consolas"/>
-              </a:rPr>
-              <a:t>        /* else another thread won: try again */</a:t>
-            </a:r>
-          </a:p>
-          <a:p>
-            <a:pPr>
-              <a:spcAft>
-                <a:spcPts val="0"/>
-              </a:spcAft>
-            </a:pPr>
-            <a:r>
-              <a:rPr sz="1150">
-                <a:latin typeface="Consolas"/>
-              </a:rPr>
-              <a:t>    }</a:t>
-            </a:r>
-          </a:p>
-          <a:p>
-            <a:pPr>
-              <a:spcAft>
-                <a:spcPts val="0"/>
-              </a:spcAft>
-            </a:pPr>
-            <a:r>
-              <a:rPr sz="1150">
-                <a:latin typeface="Consolas"/>
-              </a:rPr>
-              <a:t>}</a:t>
+              <a:t>• 2 threads, one CPU: 165 k acq/s — the waiter spins until the scheduler switches</a:t>
+            </a:r>
+          </a:p>
+          <a:p>
+            <a:pPr>
+              <a:spcAft>
+                <a:spcPts val="800"/>
+              </a:spcAft>
+            </a:pPr>
+            <a:r>
+              <a:rPr sz="1900"/>
+              <a:t>• Busy-waiting costs a whole time slice when the other thread is not running</a:t>
             </a:r>
           </a:p>
         </p:txBody>
@@ -7627,7 +8228,7 @@
           <a:lstStyle/>
           <a:p>
             <a:r>
-              <a:t>LL/SC: Mutual Exclusion and Deadlock</a:t>
+              <a:t>Peterson: Fairness and Limitations</a:t>
             </a:r>
           </a:p>
         </p:txBody>
@@ -7674,8 +8275,8 @@
         </p:nvSpPr>
         <p:spPr>
           <a:xfrm>
-            <a:off x="822960" y="1463040"/>
-            <a:ext cx="5760720" cy="5029200"/>
+            <a:off x="822960" y="1554480"/>
+            <a:ext cx="10789920" cy="4937760"/>
           </a:xfrm>
           <a:prstGeom prst="rect">
             <a:avLst/>
@@ -7694,8 +8295,8 @@
               </a:spcAft>
             </a:pPr>
             <a:r>
-              <a:rPr sz="1900"/>
-              <a:t>• Mutual exclusion: two threads may both LL a 0, but the first SC writes the flag, so the second SC fails</a:t>
+              <a:rPr sz="2000"/>
+              <a:t>• All CPUs, 2 threads: fairness 0.99 — turn gives way to the other thread, so a waiter enters after at most one entry by the other (bounded waiting)</a:t>
             </a:r>
           </a:p>
           <a:p>
@@ -7705,8 +8306,8 @@
               </a:spcAft>
             </a:pPr>
             <a:r>
-              <a:rPr sz="1900"/>
-              <a:t>• No deadlock: an SC fails only if another store got in (that thread now holds the lock) or spuriously (e.g. an interrupt) — the loop retries</a:t>
+              <a:rPr sz="2000"/>
+              <a:t>• One CPU, 2 threads: fairness 0.001 (run 1: 126 vs 93,264) — with spinning, the scheduler decides</a:t>
             </a:r>
           </a:p>
           <a:p>
@@ -7716,214 +8317,41 @@
               </a:spcAft>
             </a:pPr>
             <a:r>
-              <a:rPr sz="1900"/>
-              <a:t>• AArch64 build under qemu-aarch64 10.2.1, 4 threads: lost = 0 in 3 / 3 runs (5,252,862+ acquisitions each)</a:t>
-            </a:r>
-          </a:p>
-        </p:txBody>
-      </p:sp>
-      <p:sp>
-        <p:nvSpPr>
-          <p:cNvPr id="5" name="TextBox 4"/>
-          <p:cNvSpPr txBox="1"/>
-          <p:nvPr/>
-        </p:nvSpPr>
-        <p:spPr>
-          <a:xfrm>
-            <a:off x="6858000" y="1554480"/>
-            <a:ext cx="4937760" cy="2865120"/>
-          </a:xfrm>
-          <a:prstGeom prst="rect">
-            <a:avLst/>
-          </a:prstGeom>
-          <a:solidFill>
-            <a:srgbClr val="F4F4F4"/>
-          </a:solidFill>
-        </p:spPr>
-        <p:txBody>
-          <a:bodyPr wrap="none">
-            <a:spAutoFit/>
-          </a:bodyPr>
-          <a:lstStyle/>
-          <a:p>
-            <a:pPr>
-              <a:spcAft>
-                <a:spcPts val="0"/>
-              </a:spcAft>
-            </a:pPr>
-            <a:r>
-              <a:rPr sz="1600">
-                <a:latin typeface="Consolas"/>
-              </a:rPr>
-              <a:t>0000000000400b8c &lt;lock_acquire&gt;:</a:t>
-            </a:r>
-          </a:p>
-          <a:p>
-            <a:pPr>
-              <a:spcAft>
-                <a:spcPts val="0"/>
-              </a:spcAft>
-            </a:pPr>
-            <a:r>
-              <a:rPr sz="1600">
-                <a:latin typeface="Consolas"/>
-              </a:rPr>
-              <a:t>adrp x1, 4b1000</a:t>
-            </a:r>
-          </a:p>
-          <a:p>
-            <a:pPr>
-              <a:spcAft>
-                <a:spcPts val="0"/>
-              </a:spcAft>
-            </a:pPr>
-            <a:r>
-              <a:rPr sz="1600">
-                <a:latin typeface="Consolas"/>
-              </a:rPr>
-              <a:t>add x1, x1, #0xb40</a:t>
-            </a:r>
-          </a:p>
-          <a:p>
-            <a:pPr>
-              <a:spcAft>
-                <a:spcPts val="0"/>
-              </a:spcAft>
-            </a:pPr>
-            <a:r>
-              <a:rPr sz="1600">
-                <a:latin typeface="Consolas"/>
-              </a:rPr>
-              <a:t>mov w2, #0x1</a:t>
-            </a:r>
-          </a:p>
-          <a:p>
-            <a:pPr>
-              <a:spcAft>
-                <a:spcPts val="0"/>
-              </a:spcAft>
-            </a:pPr>
-            <a:r>
-              <a:rPr sz="1600">
-                <a:latin typeface="Consolas"/>
-              </a:rPr>
-              <a:t>nop</a:t>
-            </a:r>
-          </a:p>
-          <a:p>
-            <a:pPr>
-              <a:spcAft>
-                <a:spcPts val="0"/>
-              </a:spcAft>
-            </a:pPr>
-            <a:r>
-              <a:rPr sz="1600">
-                <a:latin typeface="Consolas"/>
-              </a:rPr>
-              <a:t>nop</a:t>
-            </a:r>
-          </a:p>
-          <a:p>
-            <a:pPr>
-              <a:spcAft>
-                <a:spcPts val="0"/>
-              </a:spcAft>
-            </a:pPr>
-            <a:r>
-              <a:rPr sz="1600">
-                <a:latin typeface="Consolas"/>
-              </a:rPr>
-              <a:t>ldaxr w0, [x1]</a:t>
-            </a:r>
-          </a:p>
-          <a:p>
-            <a:pPr>
-              <a:spcAft>
-                <a:spcPts val="0"/>
-              </a:spcAft>
-            </a:pPr>
-            <a:r>
-              <a:rPr sz="1600">
-                <a:latin typeface="Consolas"/>
-              </a:rPr>
-              <a:t>cbnz w0, 400ba0 &lt;lock_acquire+0x14&gt;</a:t>
-            </a:r>
-          </a:p>
-          <a:p>
-            <a:pPr>
-              <a:spcAft>
-                <a:spcPts val="0"/>
-              </a:spcAft>
-            </a:pPr>
-            <a:r>
-              <a:rPr sz="1600">
-                <a:latin typeface="Consolas"/>
-              </a:rPr>
-              <a:t>stxr w0, w2, [x1]</a:t>
-            </a:r>
-          </a:p>
-          <a:p>
-            <a:pPr>
-              <a:spcAft>
-                <a:spcPts val="0"/>
-              </a:spcAft>
-            </a:pPr>
-            <a:r>
-              <a:rPr sz="1600">
-                <a:latin typeface="Consolas"/>
-              </a:rPr>
-              <a:t>cbnz w0, 400ba0 &lt;lock_acquire+0x14&gt;</a:t>
-            </a:r>
-          </a:p>
-          <a:p>
-            <a:pPr>
-              <a:spcAft>
-                <a:spcPts val="0"/>
-              </a:spcAft>
-            </a:pPr>
-            <a:r>
-              <a:rPr sz="1600">
-                <a:latin typeface="Consolas"/>
-              </a:rPr>
-              <a:t>ret</a:t>
-            </a:r>
-          </a:p>
-        </p:txBody>
-      </p:sp>
-      <p:sp>
-        <p:nvSpPr>
-          <p:cNvPr id="6" name="TextBox 5"/>
-          <p:cNvSpPr txBox="1"/>
-          <p:nvPr/>
-        </p:nvSpPr>
-        <p:spPr>
-          <a:xfrm>
-            <a:off x="6858000" y="4556760"/>
-            <a:ext cx="4937760" cy="914400"/>
-          </a:xfrm>
-          <a:prstGeom prst="rect">
-            <a:avLst/>
-          </a:prstGeom>
-          <a:noFill/>
-        </p:spPr>
-        <p:txBody>
-          <a:bodyPr wrap="square">
-            <a:spAutoFit/>
-          </a:bodyPr>
-          <a:lstStyle/>
-          <a:p>
-            <a:pPr>
+              <a:rPr sz="2000"/>
+              <a:t>• Limitations:</a:t>
+            </a:r>
+          </a:p>
+          <a:p>
+            <a:pPr lvl="1">
               <a:spcAft>
                 <a:spcPts val="800"/>
               </a:spcAft>
             </a:pPr>
             <a:r>
-              <a:rPr sz="1500">
-                <a:solidFill>
-                  <a:srgbClr val="C0392B"/>
-                </a:solidFill>
-              </a:rPr>
-              <a:t>ldaxr = Load-Linked, stxr = Store-Conditional (writes 0 to w0 on success)</a:t>
+              <a:rPr sz="1800"/>
+              <a:t>– Two threads only (N threads need a tournament of Peterson locks or the filter lock)</a:t>
+            </a:r>
+          </a:p>
+          <a:p>
+            <a:pPr lvl="1">
+              <a:spcAft>
+                <a:spcPts val="800"/>
+              </a:spcAft>
+            </a:pPr>
+            <a:r>
+              <a:rPr sz="1800"/>
+              <a:t>– Needs a memory fence on modern CPUs — the textbook version is broken on x86</a:t>
+            </a:r>
+          </a:p>
+          <a:p>
+            <a:pPr lvl="1">
+              <a:spcAft>
+                <a:spcPts val="800"/>
+              </a:spcAft>
+            </a:pPr>
+            <a:r>
+              <a:rPr sz="1800"/>
+              <a:t>– Spins instead of sleeping</a:t>
             </a:r>
           </a:p>
         </p:txBody>
@@ -7962,14 +8390,40 @@
           <a:lstStyle/>
           <a:p>
             <a:r>
-              <a:t>LL/SC: Performance</a:t>
-            </a:r>
-          </a:p>
-        </p:txBody>
-      </p:sp>
-      <p:sp>
-        <p:nvSpPr>
-          <p:cNvPr id="3" name="TextBox 2"/>
+              <a:t>Load-Linked / Store-Conditional</a:t>
+            </a:r>
+          </a:p>
+        </p:txBody>
+      </p:sp>
+      <p:sp>
+        <p:nvSpPr>
+          <p:cNvPr id="3" name="Text Placeholder 2"/>
+          <p:cNvSpPr>
+            <a:spLocks noGrp="1"/>
+          </p:cNvSpPr>
+          <p:nvPr>
+            <p:ph type="body" idx="1"/>
+          </p:nvPr>
+        </p:nvSpPr>
+        <p:spPr/>
+        <p:txBody>
+          <a:bodyPr/>
+          <a:lstStyle/>
+          <a:p>
+            <a:r>
+              <a:t>67070501005</a:t>
+            </a:r>
+          </a:p>
+          <a:p>
+            <a:r>
+              <a:t>Kiatisak Markmeeshap</a:t>
+            </a:r>
+          </a:p>
+        </p:txBody>
+      </p:sp>
+      <p:sp>
+        <p:nvSpPr>
+          <p:cNvPr id="4" name="TextBox 3"/>
           <p:cNvSpPr txBox="1"/>
           <p:nvPr/>
         </p:nvSpPr>
@@ -7997,6 +8451,933 @@
                 </a:solidFill>
               </a:rPr>
               <a:t>13</a:t>
+            </a:r>
+          </a:p>
+        </p:txBody>
+      </p:sp>
+    </p:spTree>
+  </p:cSld>
+  <p:clrMapOvr>
+    <a:masterClrMapping/>
+  </p:clrMapOvr>
+</p:sld>
+</file>
+
+<file path=ppt/slides/slide14.xml><?xml version="1.0" encoding="utf-8"?>
+<p:sld xmlns:a="http://schemas.openxmlformats.org/drawingml/2006/main" xmlns:p="http://schemas.openxmlformats.org/presentationml/2006/main" xmlns:r="http://schemas.openxmlformats.org/officeDocument/2006/relationships">
+  <p:cSld>
+    <p:spTree>
+      <p:nvGrpSpPr>
+        <p:cNvPr id="1" name=""/>
+        <p:cNvGrpSpPr/>
+        <p:nvPr/>
+      </p:nvGrpSpPr>
+      <p:grpSpPr/>
+      <p:sp>
+        <p:nvSpPr>
+          <p:cNvPr id="2" name="Title 1"/>
+          <p:cNvSpPr>
+            <a:spLocks noGrp="1"/>
+          </p:cNvSpPr>
+          <p:nvPr>
+            <p:ph type="title"/>
+          </p:nvPr>
+        </p:nvSpPr>
+        <p:spPr/>
+        <p:txBody>
+          <a:bodyPr/>
+          <a:lstStyle/>
+          <a:p>
+            <a:r>
+              <a:t>LL/SC: Idea</a:t>
+            </a:r>
+          </a:p>
+        </p:txBody>
+      </p:sp>
+      <p:sp>
+        <p:nvSpPr>
+          <p:cNvPr id="3" name="TextBox 2"/>
+          <p:cNvSpPr txBox="1"/>
+          <p:nvPr/>
+        </p:nvSpPr>
+        <p:spPr>
+          <a:xfrm>
+            <a:off x="11247120" y="6400800"/>
+            <a:ext cx="731520" cy="365760"/>
+          </a:xfrm>
+          <a:prstGeom prst="rect">
+            <a:avLst/>
+          </a:prstGeom>
+          <a:noFill/>
+        </p:spPr>
+        <p:txBody>
+          <a:bodyPr wrap="none">
+            <a:spAutoFit/>
+          </a:bodyPr>
+          <a:lstStyle/>
+          <a:p>
+            <a:pPr algn="r"/>
+            <a:r>
+              <a:rPr sz="1200">
+                <a:solidFill>
+                  <a:srgbClr val="808080"/>
+                </a:solidFill>
+              </a:rPr>
+              <a:t>14</a:t>
+            </a:r>
+          </a:p>
+        </p:txBody>
+      </p:sp>
+      <p:sp>
+        <p:nvSpPr>
+          <p:cNvPr id="4" name="TextBox 3"/>
+          <p:cNvSpPr txBox="1"/>
+          <p:nvPr/>
+        </p:nvSpPr>
+        <p:spPr>
+          <a:xfrm>
+            <a:off x="548640" y="1554480"/>
+            <a:ext cx="4389120" cy="4937760"/>
+          </a:xfrm>
+          <a:prstGeom prst="rect">
+            <a:avLst/>
+          </a:prstGeom>
+          <a:noFill/>
+        </p:spPr>
+        <p:txBody>
+          <a:bodyPr wrap="square">
+            <a:spAutoFit/>
+          </a:bodyPr>
+          <a:lstStyle/>
+          <a:p>
+            <a:pPr>
+              <a:spcAft>
+                <a:spcPts val="800"/>
+              </a:spcAft>
+            </a:pPr>
+            <a:r>
+              <a:rPr sz="1900"/>
+              <a:t>• LoadLinked(p): load *p and watch the address</a:t>
+            </a:r>
+          </a:p>
+          <a:p>
+            <a:pPr>
+              <a:spcAft>
+                <a:spcPts val="800"/>
+              </a:spcAft>
+            </a:pPr>
+            <a:r>
+              <a:rPr sz="1900"/>
+              <a:t>• StoreConditional(p, v): store only if nobody stored to p since the LoadLinked</a:t>
+            </a:r>
+          </a:p>
+          <a:p>
+            <a:pPr>
+              <a:spcAft>
+                <a:spcPts val="800"/>
+              </a:spcAft>
+            </a:pPr>
+            <a:r>
+              <a:rPr sz="1900"/>
+              <a:t>• Lock: spin on LL until 0, then SC 1; if SC fails, start over</a:t>
+            </a:r>
+          </a:p>
+          <a:p>
+            <a:pPr>
+              <a:spcAft>
+                <a:spcPts val="800"/>
+              </a:spcAft>
+            </a:pPr>
+            <a:r>
+              <a:rPr sz="1900"/>
+              <a:t>• MIPS, Alpha, PowerPC, ARM (AArch64: LDXR/STXR)</a:t>
+            </a:r>
+          </a:p>
+          <a:p>
+            <a:pPr>
+              <a:spcAft>
+                <a:spcPts val="800"/>
+              </a:spcAft>
+            </a:pPr>
+            <a:r>
+              <a:rPr sz="1900">
+                <a:solidFill>
+                  <a:srgbClr val="C0392B"/>
+                </a:solidFill>
+              </a:rPr>
+              <a:t>• x86 has no LL/SC — it offers CAS (lock cmpxchg)</a:t>
+            </a:r>
+          </a:p>
+        </p:txBody>
+      </p:sp>
+      <p:sp>
+        <p:nvSpPr>
+          <p:cNvPr id="5" name="TextBox 4"/>
+          <p:cNvSpPr txBox="1"/>
+          <p:nvPr/>
+        </p:nvSpPr>
+        <p:spPr>
+          <a:xfrm>
+            <a:off x="5120640" y="1463040"/>
+            <a:ext cx="6675120" cy="4914900"/>
+          </a:xfrm>
+          <a:prstGeom prst="rect">
+            <a:avLst/>
+          </a:prstGeom>
+          <a:solidFill>
+            <a:srgbClr val="F4F4F4"/>
+          </a:solidFill>
+        </p:spPr>
+        <p:txBody>
+          <a:bodyPr wrap="none">
+            <a:spAutoFit/>
+          </a:bodyPr>
+          <a:lstStyle/>
+          <a:p>
+            <a:pPr>
+              <a:spcAft>
+                <a:spcPts val="0"/>
+              </a:spcAft>
+            </a:pPr>
+            <a:r>
+              <a:rPr sz="1150">
+                <a:latin typeface="Consolas"/>
+              </a:rPr>
+              <a:t>static inline int LoadLinked(volatile int *p)</a:t>
+            </a:r>
+          </a:p>
+          <a:p>
+            <a:pPr>
+              <a:spcAft>
+                <a:spcPts val="0"/>
+              </a:spcAft>
+            </a:pPr>
+            <a:r>
+              <a:rPr sz="1150">
+                <a:latin typeface="Consolas"/>
+              </a:rPr>
+              <a:t>{</a:t>
+            </a:r>
+          </a:p>
+          <a:p>
+            <a:pPr>
+              <a:spcAft>
+                <a:spcPts val="0"/>
+              </a:spcAft>
+            </a:pPr>
+            <a:r>
+              <a:rPr sz="1150">
+                <a:latin typeface="Consolas"/>
+              </a:rPr>
+              <a:t>    int v;</a:t>
+            </a:r>
+          </a:p>
+          <a:p>
+            <a:pPr>
+              <a:spcAft>
+                <a:spcPts val="0"/>
+              </a:spcAft>
+            </a:pPr>
+            <a:r>
+              <a:rPr sz="1150">
+                <a:latin typeface="Consolas"/>
+              </a:rPr>
+              <a:t>    __asm__ volatile("ldaxr %w0, [%1]"</a:t>
+            </a:r>
+          </a:p>
+          <a:p>
+            <a:pPr>
+              <a:spcAft>
+                <a:spcPts val="0"/>
+              </a:spcAft>
+            </a:pPr>
+            <a:r>
+              <a:rPr sz="1150">
+                <a:latin typeface="Consolas"/>
+              </a:rPr>
+              <a:t>                     : "=r"(v) : "r"(p) : "memory");</a:t>
+            </a:r>
+          </a:p>
+          <a:p>
+            <a:pPr>
+              <a:spcAft>
+                <a:spcPts val="0"/>
+              </a:spcAft>
+            </a:pPr>
+            <a:r>
+              <a:rPr sz="1150">
+                <a:latin typeface="Consolas"/>
+              </a:rPr>
+              <a:t>    return v;</a:t>
+            </a:r>
+          </a:p>
+          <a:p>
+            <a:pPr>
+              <a:spcAft>
+                <a:spcPts val="0"/>
+              </a:spcAft>
+            </a:pPr>
+            <a:r>
+              <a:rPr sz="1150">
+                <a:latin typeface="Consolas"/>
+              </a:rPr>
+              <a:t>}</a:t>
+            </a:r>
+          </a:p>
+          <a:p>
+            <a:pPr>
+              <a:spcAft>
+                <a:spcPts val="0"/>
+              </a:spcAft>
+            </a:pPr>
+          </a:p>
+          <a:p>
+            <a:pPr>
+              <a:spcAft>
+                <a:spcPts val="0"/>
+              </a:spcAft>
+            </a:pPr>
+            <a:r>
+              <a:rPr sz="1150">
+                <a:latin typeface="Consolas"/>
+              </a:rPr>
+              <a:t>static inline int StoreConditional(volatile int *p, int v)</a:t>
+            </a:r>
+          </a:p>
+          <a:p>
+            <a:pPr>
+              <a:spcAft>
+                <a:spcPts val="0"/>
+              </a:spcAft>
+            </a:pPr>
+            <a:r>
+              <a:rPr sz="1150">
+                <a:latin typeface="Consolas"/>
+              </a:rPr>
+              <a:t>{</a:t>
+            </a:r>
+          </a:p>
+          <a:p>
+            <a:pPr>
+              <a:spcAft>
+                <a:spcPts val="0"/>
+              </a:spcAft>
+            </a:pPr>
+            <a:r>
+              <a:rPr sz="1150">
+                <a:latin typeface="Consolas"/>
+              </a:rPr>
+              <a:t>    int fail;                  /* stxr: 0 = stored, 1 = failed */</a:t>
+            </a:r>
+          </a:p>
+          <a:p>
+            <a:pPr>
+              <a:spcAft>
+                <a:spcPts val="0"/>
+              </a:spcAft>
+            </a:pPr>
+            <a:r>
+              <a:rPr sz="1150">
+                <a:latin typeface="Consolas"/>
+              </a:rPr>
+              <a:t>    __asm__ volatile("stxr %w0, %w2, [%1]"</a:t>
+            </a:r>
+          </a:p>
+          <a:p>
+            <a:pPr>
+              <a:spcAft>
+                <a:spcPts val="0"/>
+              </a:spcAft>
+            </a:pPr>
+            <a:r>
+              <a:rPr sz="1150">
+                <a:latin typeface="Consolas"/>
+              </a:rPr>
+              <a:t>                     : "=&amp;r"(fail) : "r"(p), "r"(v) : "memory");</a:t>
+            </a:r>
+          </a:p>
+          <a:p>
+            <a:pPr>
+              <a:spcAft>
+                <a:spcPts val="0"/>
+              </a:spcAft>
+            </a:pPr>
+            <a:r>
+              <a:rPr sz="1150">
+                <a:latin typeface="Consolas"/>
+              </a:rPr>
+              <a:t>    return !fail;</a:t>
+            </a:r>
+          </a:p>
+          <a:p>
+            <a:pPr>
+              <a:spcAft>
+                <a:spcPts val="0"/>
+              </a:spcAft>
+            </a:pPr>
+            <a:r>
+              <a:rPr sz="1150">
+                <a:latin typeface="Consolas"/>
+              </a:rPr>
+              <a:t>}</a:t>
+            </a:r>
+          </a:p>
+          <a:p>
+            <a:pPr>
+              <a:spcAft>
+                <a:spcPts val="0"/>
+              </a:spcAft>
+            </a:pPr>
+          </a:p>
+          <a:p>
+            <a:pPr>
+              <a:spcAft>
+                <a:spcPts val="0"/>
+              </a:spcAft>
+            </a:pPr>
+            <a:r>
+              <a:rPr sz="1150">
+                <a:latin typeface="Consolas"/>
+              </a:rPr>
+              <a:t>void lock_acquire(int id)</a:t>
+            </a:r>
+          </a:p>
+          <a:p>
+            <a:pPr>
+              <a:spcAft>
+                <a:spcPts val="0"/>
+              </a:spcAft>
+            </a:pPr>
+            <a:r>
+              <a:rPr sz="1150">
+                <a:latin typeface="Consolas"/>
+              </a:rPr>
+              <a:t>{</a:t>
+            </a:r>
+          </a:p>
+          <a:p>
+            <a:pPr>
+              <a:spcAft>
+                <a:spcPts val="0"/>
+              </a:spcAft>
+            </a:pPr>
+            <a:r>
+              <a:rPr sz="1150">
+                <a:latin typeface="Consolas"/>
+              </a:rPr>
+              <a:t>    (void)id;</a:t>
+            </a:r>
+          </a:p>
+          <a:p>
+            <a:pPr>
+              <a:spcAft>
+                <a:spcPts val="0"/>
+              </a:spcAft>
+            </a:pPr>
+            <a:r>
+              <a:rPr sz="1150">
+                <a:latin typeface="Consolas"/>
+              </a:rPr>
+              <a:t>    while (1) {</a:t>
+            </a:r>
+          </a:p>
+          <a:p>
+            <a:pPr>
+              <a:spcAft>
+                <a:spcPts val="0"/>
+              </a:spcAft>
+            </a:pPr>
+            <a:r>
+              <a:rPr sz="1150">
+                <a:latin typeface="Consolas"/>
+              </a:rPr>
+              <a:t>        while (LoadLinked(&amp;flag))</a:t>
+            </a:r>
+          </a:p>
+          <a:p>
+            <a:pPr>
+              <a:spcAft>
+                <a:spcPts val="0"/>
+              </a:spcAft>
+            </a:pPr>
+            <a:r>
+              <a:rPr sz="1150">
+                <a:latin typeface="Consolas"/>
+              </a:rPr>
+              <a:t>            ;                  /* spin until it is zero */</a:t>
+            </a:r>
+          </a:p>
+          <a:p>
+            <a:pPr>
+              <a:spcAft>
+                <a:spcPts val="0"/>
+              </a:spcAft>
+            </a:pPr>
+            <a:r>
+              <a:rPr sz="1150">
+                <a:latin typeface="Consolas"/>
+              </a:rPr>
+              <a:t>        if (StoreConditional(&amp;flag, 1))</a:t>
+            </a:r>
+          </a:p>
+          <a:p>
+            <a:pPr>
+              <a:spcAft>
+                <a:spcPts val="0"/>
+              </a:spcAft>
+            </a:pPr>
+            <a:r>
+              <a:rPr sz="1150">
+                <a:latin typeface="Consolas"/>
+              </a:rPr>
+              <a:t>            return;            /* no store in between: ours */</a:t>
+            </a:r>
+          </a:p>
+          <a:p>
+            <a:pPr>
+              <a:spcAft>
+                <a:spcPts val="0"/>
+              </a:spcAft>
+            </a:pPr>
+            <a:r>
+              <a:rPr sz="1150">
+                <a:latin typeface="Consolas"/>
+              </a:rPr>
+              <a:t>        /* else another thread won: try again */</a:t>
+            </a:r>
+          </a:p>
+          <a:p>
+            <a:pPr>
+              <a:spcAft>
+                <a:spcPts val="0"/>
+              </a:spcAft>
+            </a:pPr>
+            <a:r>
+              <a:rPr sz="1150">
+                <a:latin typeface="Consolas"/>
+              </a:rPr>
+              <a:t>    }</a:t>
+            </a:r>
+          </a:p>
+          <a:p>
+            <a:pPr>
+              <a:spcAft>
+                <a:spcPts val="0"/>
+              </a:spcAft>
+            </a:pPr>
+            <a:r>
+              <a:rPr sz="1150">
+                <a:latin typeface="Consolas"/>
+              </a:rPr>
+              <a:t>}</a:t>
+            </a:r>
+          </a:p>
+        </p:txBody>
+      </p:sp>
+    </p:spTree>
+  </p:cSld>
+  <p:clrMapOvr>
+    <a:masterClrMapping/>
+  </p:clrMapOvr>
+</p:sld>
+</file>
+
+<file path=ppt/slides/slide15.xml><?xml version="1.0" encoding="utf-8"?>
+<p:sld xmlns:a="http://schemas.openxmlformats.org/drawingml/2006/main" xmlns:p="http://schemas.openxmlformats.org/presentationml/2006/main" xmlns:r="http://schemas.openxmlformats.org/officeDocument/2006/relationships">
+  <p:cSld>
+    <p:spTree>
+      <p:nvGrpSpPr>
+        <p:cNvPr id="1" name=""/>
+        <p:cNvGrpSpPr/>
+        <p:nvPr/>
+      </p:nvGrpSpPr>
+      <p:grpSpPr/>
+      <p:sp>
+        <p:nvSpPr>
+          <p:cNvPr id="2" name="Title 1"/>
+          <p:cNvSpPr>
+            <a:spLocks noGrp="1"/>
+          </p:cNvSpPr>
+          <p:nvPr>
+            <p:ph type="title"/>
+          </p:nvPr>
+        </p:nvSpPr>
+        <p:spPr/>
+        <p:txBody>
+          <a:bodyPr/>
+          <a:lstStyle/>
+          <a:p>
+            <a:r>
+              <a:t>LL/SC: Mutual Exclusion and Deadlock</a:t>
+            </a:r>
+          </a:p>
+        </p:txBody>
+      </p:sp>
+      <p:sp>
+        <p:nvSpPr>
+          <p:cNvPr id="3" name="TextBox 2"/>
+          <p:cNvSpPr txBox="1"/>
+          <p:nvPr/>
+        </p:nvSpPr>
+        <p:spPr>
+          <a:xfrm>
+            <a:off x="11247120" y="6400800"/>
+            <a:ext cx="731520" cy="365760"/>
+          </a:xfrm>
+          <a:prstGeom prst="rect">
+            <a:avLst/>
+          </a:prstGeom>
+          <a:noFill/>
+        </p:spPr>
+        <p:txBody>
+          <a:bodyPr wrap="none">
+            <a:spAutoFit/>
+          </a:bodyPr>
+          <a:lstStyle/>
+          <a:p>
+            <a:pPr algn="r"/>
+            <a:r>
+              <a:rPr sz="1200">
+                <a:solidFill>
+                  <a:srgbClr val="808080"/>
+                </a:solidFill>
+              </a:rPr>
+              <a:t>15</a:t>
+            </a:r>
+          </a:p>
+        </p:txBody>
+      </p:sp>
+      <p:sp>
+        <p:nvSpPr>
+          <p:cNvPr id="4" name="TextBox 3"/>
+          <p:cNvSpPr txBox="1"/>
+          <p:nvPr/>
+        </p:nvSpPr>
+        <p:spPr>
+          <a:xfrm>
+            <a:off x="822960" y="1463040"/>
+            <a:ext cx="5760720" cy="5029200"/>
+          </a:xfrm>
+          <a:prstGeom prst="rect">
+            <a:avLst/>
+          </a:prstGeom>
+          <a:noFill/>
+        </p:spPr>
+        <p:txBody>
+          <a:bodyPr wrap="square">
+            <a:spAutoFit/>
+          </a:bodyPr>
+          <a:lstStyle/>
+          <a:p>
+            <a:pPr>
+              <a:spcAft>
+                <a:spcPts val="800"/>
+              </a:spcAft>
+            </a:pPr>
+            <a:r>
+              <a:rPr sz="1900"/>
+              <a:t>• Mutual exclusion: two threads may both LL a 0, but the first SC writes the flag, so the second SC fails</a:t>
+            </a:r>
+          </a:p>
+          <a:p>
+            <a:pPr>
+              <a:spcAft>
+                <a:spcPts val="800"/>
+              </a:spcAft>
+            </a:pPr>
+            <a:r>
+              <a:rPr sz="1900"/>
+              <a:t>• No deadlock: an SC fails only if another store got in (that thread now holds the lock) or spuriously (e.g. an interrupt) — the loop retries</a:t>
+            </a:r>
+          </a:p>
+          <a:p>
+            <a:pPr>
+              <a:spcAft>
+                <a:spcPts val="800"/>
+              </a:spcAft>
+            </a:pPr>
+            <a:r>
+              <a:rPr sz="1900"/>
+              <a:t>• AArch64 build under qemu-aarch64 10.2.1, 4 threads: lost = 0 in 3 / 3 runs (5,252,862+ acquisitions each)</a:t>
+            </a:r>
+          </a:p>
+        </p:txBody>
+      </p:sp>
+      <p:sp>
+        <p:nvSpPr>
+          <p:cNvPr id="5" name="TextBox 4"/>
+          <p:cNvSpPr txBox="1"/>
+          <p:nvPr/>
+        </p:nvSpPr>
+        <p:spPr>
+          <a:xfrm>
+            <a:off x="6858000" y="1554480"/>
+            <a:ext cx="4937760" cy="2865120"/>
+          </a:xfrm>
+          <a:prstGeom prst="rect">
+            <a:avLst/>
+          </a:prstGeom>
+          <a:solidFill>
+            <a:srgbClr val="F4F4F4"/>
+          </a:solidFill>
+        </p:spPr>
+        <p:txBody>
+          <a:bodyPr wrap="none">
+            <a:spAutoFit/>
+          </a:bodyPr>
+          <a:lstStyle/>
+          <a:p>
+            <a:pPr>
+              <a:spcAft>
+                <a:spcPts val="0"/>
+              </a:spcAft>
+            </a:pPr>
+            <a:r>
+              <a:rPr sz="1600">
+                <a:latin typeface="Consolas"/>
+              </a:rPr>
+              <a:t>0000000000400b8c &lt;lock_acquire&gt;:</a:t>
+            </a:r>
+          </a:p>
+          <a:p>
+            <a:pPr>
+              <a:spcAft>
+                <a:spcPts val="0"/>
+              </a:spcAft>
+            </a:pPr>
+            <a:r>
+              <a:rPr sz="1600">
+                <a:latin typeface="Consolas"/>
+              </a:rPr>
+              <a:t>adrp x1, 4b1000</a:t>
+            </a:r>
+          </a:p>
+          <a:p>
+            <a:pPr>
+              <a:spcAft>
+                <a:spcPts val="0"/>
+              </a:spcAft>
+            </a:pPr>
+            <a:r>
+              <a:rPr sz="1600">
+                <a:latin typeface="Consolas"/>
+              </a:rPr>
+              <a:t>add x1, x1, #0xb40</a:t>
+            </a:r>
+          </a:p>
+          <a:p>
+            <a:pPr>
+              <a:spcAft>
+                <a:spcPts val="0"/>
+              </a:spcAft>
+            </a:pPr>
+            <a:r>
+              <a:rPr sz="1600">
+                <a:latin typeface="Consolas"/>
+              </a:rPr>
+              <a:t>mov w2, #0x1</a:t>
+            </a:r>
+          </a:p>
+          <a:p>
+            <a:pPr>
+              <a:spcAft>
+                <a:spcPts val="0"/>
+              </a:spcAft>
+            </a:pPr>
+            <a:r>
+              <a:rPr sz="1600">
+                <a:latin typeface="Consolas"/>
+              </a:rPr>
+              <a:t>nop</a:t>
+            </a:r>
+          </a:p>
+          <a:p>
+            <a:pPr>
+              <a:spcAft>
+                <a:spcPts val="0"/>
+              </a:spcAft>
+            </a:pPr>
+            <a:r>
+              <a:rPr sz="1600">
+                <a:latin typeface="Consolas"/>
+              </a:rPr>
+              <a:t>nop</a:t>
+            </a:r>
+          </a:p>
+          <a:p>
+            <a:pPr>
+              <a:spcAft>
+                <a:spcPts val="0"/>
+              </a:spcAft>
+            </a:pPr>
+            <a:r>
+              <a:rPr sz="1600">
+                <a:latin typeface="Consolas"/>
+              </a:rPr>
+              <a:t>ldaxr w0, [x1]</a:t>
+            </a:r>
+          </a:p>
+          <a:p>
+            <a:pPr>
+              <a:spcAft>
+                <a:spcPts val="0"/>
+              </a:spcAft>
+            </a:pPr>
+            <a:r>
+              <a:rPr sz="1600">
+                <a:latin typeface="Consolas"/>
+              </a:rPr>
+              <a:t>cbnz w0, 400ba0 &lt;lock_acquire+0x14&gt;</a:t>
+            </a:r>
+          </a:p>
+          <a:p>
+            <a:pPr>
+              <a:spcAft>
+                <a:spcPts val="0"/>
+              </a:spcAft>
+            </a:pPr>
+            <a:r>
+              <a:rPr sz="1600">
+                <a:latin typeface="Consolas"/>
+              </a:rPr>
+              <a:t>stxr w0, w2, [x1]</a:t>
+            </a:r>
+          </a:p>
+          <a:p>
+            <a:pPr>
+              <a:spcAft>
+                <a:spcPts val="0"/>
+              </a:spcAft>
+            </a:pPr>
+            <a:r>
+              <a:rPr sz="1600">
+                <a:latin typeface="Consolas"/>
+              </a:rPr>
+              <a:t>cbnz w0, 400ba0 &lt;lock_acquire+0x14&gt;</a:t>
+            </a:r>
+          </a:p>
+          <a:p>
+            <a:pPr>
+              <a:spcAft>
+                <a:spcPts val="0"/>
+              </a:spcAft>
+            </a:pPr>
+            <a:r>
+              <a:rPr sz="1600">
+                <a:latin typeface="Consolas"/>
+              </a:rPr>
+              <a:t>ret</a:t>
+            </a:r>
+          </a:p>
+        </p:txBody>
+      </p:sp>
+      <p:sp>
+        <p:nvSpPr>
+          <p:cNvPr id="6" name="TextBox 5"/>
+          <p:cNvSpPr txBox="1"/>
+          <p:nvPr/>
+        </p:nvSpPr>
+        <p:spPr>
+          <a:xfrm>
+            <a:off x="6858000" y="4556760"/>
+            <a:ext cx="4937760" cy="914400"/>
+          </a:xfrm>
+          <a:prstGeom prst="rect">
+            <a:avLst/>
+          </a:prstGeom>
+          <a:noFill/>
+        </p:spPr>
+        <p:txBody>
+          <a:bodyPr wrap="square">
+            <a:spAutoFit/>
+          </a:bodyPr>
+          <a:lstStyle/>
+          <a:p>
+            <a:pPr>
+              <a:spcAft>
+                <a:spcPts val="800"/>
+              </a:spcAft>
+            </a:pPr>
+            <a:r>
+              <a:rPr sz="1500">
+                <a:solidFill>
+                  <a:srgbClr val="C0392B"/>
+                </a:solidFill>
+              </a:rPr>
+              <a:t>ldaxr = Load-Linked, stxr = Store-Conditional (writes 0 to w0 on success)</a:t>
+            </a:r>
+          </a:p>
+        </p:txBody>
+      </p:sp>
+    </p:spTree>
+  </p:cSld>
+  <p:clrMapOvr>
+    <a:masterClrMapping/>
+  </p:clrMapOvr>
+</p:sld>
+</file>
+
+<file path=ppt/slides/slide16.xml><?xml version="1.0" encoding="utf-8"?>
+<p:sld xmlns:a="http://schemas.openxmlformats.org/drawingml/2006/main" xmlns:p="http://schemas.openxmlformats.org/presentationml/2006/main" xmlns:r="http://schemas.openxmlformats.org/officeDocument/2006/relationships">
+  <p:cSld>
+    <p:spTree>
+      <p:nvGrpSpPr>
+        <p:cNvPr id="1" name=""/>
+        <p:cNvGrpSpPr/>
+        <p:nvPr/>
+      </p:nvGrpSpPr>
+      <p:grpSpPr/>
+      <p:sp>
+        <p:nvSpPr>
+          <p:cNvPr id="2" name="Title 1"/>
+          <p:cNvSpPr>
+            <a:spLocks noGrp="1"/>
+          </p:cNvSpPr>
+          <p:nvPr>
+            <p:ph type="title"/>
+          </p:nvPr>
+        </p:nvSpPr>
+        <p:spPr/>
+        <p:txBody>
+          <a:bodyPr/>
+          <a:lstStyle/>
+          <a:p>
+            <a:r>
+              <a:t>LL/SC: Performance</a:t>
+            </a:r>
+          </a:p>
+        </p:txBody>
+      </p:sp>
+      <p:sp>
+        <p:nvSpPr>
+          <p:cNvPr id="3" name="TextBox 2"/>
+          <p:cNvSpPr txBox="1"/>
+          <p:nvPr/>
+        </p:nvSpPr>
+        <p:spPr>
+          <a:xfrm>
+            <a:off x="11247120" y="6400800"/>
+            <a:ext cx="731520" cy="365760"/>
+          </a:xfrm>
+          <a:prstGeom prst="rect">
+            <a:avLst/>
+          </a:prstGeom>
+          <a:noFill/>
+        </p:spPr>
+        <p:txBody>
+          <a:bodyPr wrap="none">
+            <a:spAutoFit/>
+          </a:bodyPr>
+          <a:lstStyle/>
+          <a:p>
+            <a:pPr algn="r"/>
+            <a:r>
+              <a:rPr sz="1200">
+                <a:solidFill>
+                  <a:srgbClr val="808080"/>
+                </a:solidFill>
+              </a:rPr>
+              <a:t>16</a:t>
             </a:r>
           </a:p>
         </p:txBody>
@@ -8098,7 +9479,7 @@
 </p:sld>
 </file>
 
-<file path=ppt/slides/slide14.xml><?xml version="1.0" encoding="utf-8"?>
+<file path=ppt/slides/slide17.xml><?xml version="1.0" encoding="utf-8"?>
 <p:sld xmlns:a="http://schemas.openxmlformats.org/drawingml/2006/main" xmlns:p="http://schemas.openxmlformats.org/presentationml/2006/main" xmlns:r="http://schemas.openxmlformats.org/officeDocument/2006/relationships">
   <p:cSld>
     <p:spTree>
@@ -8158,7 +9539,7 @@
                   <a:srgbClr val="808080"/>
                 </a:solidFill>
               </a:rPr>
-              <a:t>14</a:t>
+              <a:t>17</a:t>
             </a:r>
           </a:p>
         </p:txBody>
@@ -8259,847 +9640,6 @@
             <a:r>
               <a:rPr sz="2000"/>
               <a:t>• Advantage over CAS: SC fails on any store, even one that writes back the same value (no ABA problem)</a:t>
-            </a:r>
-          </a:p>
-        </p:txBody>
-      </p:sp>
-    </p:spTree>
-  </p:cSld>
-  <p:clrMapOvr>
-    <a:masterClrMapping/>
-  </p:clrMapOvr>
-</p:sld>
-</file>
-
-<file path=ppt/slides/slide15.xml><?xml version="1.0" encoding="utf-8"?>
-<p:sld xmlns:a="http://schemas.openxmlformats.org/drawingml/2006/main" xmlns:p="http://schemas.openxmlformats.org/presentationml/2006/main" xmlns:r="http://schemas.openxmlformats.org/officeDocument/2006/relationships">
-  <p:cSld>
-    <p:spTree>
-      <p:nvGrpSpPr>
-        <p:cNvPr id="1" name=""/>
-        <p:cNvGrpSpPr/>
-        <p:nvPr/>
-      </p:nvGrpSpPr>
-      <p:grpSpPr/>
-      <p:sp>
-        <p:nvSpPr>
-          <p:cNvPr id="2" name="Title 1"/>
-          <p:cNvSpPr>
-            <a:spLocks noGrp="1"/>
-          </p:cNvSpPr>
-          <p:nvPr>
-            <p:ph type="title"/>
-          </p:nvPr>
-        </p:nvSpPr>
-        <p:spPr/>
-        <p:txBody>
-          <a:bodyPr/>
-          <a:lstStyle/>
-          <a:p>
-            <a:r>
-              <a:t>MCS Lock</a:t>
-            </a:r>
-          </a:p>
-        </p:txBody>
-      </p:sp>
-      <p:sp>
-        <p:nvSpPr>
-          <p:cNvPr id="3" name="Text Placeholder 2"/>
-          <p:cNvSpPr>
-            <a:spLocks noGrp="1"/>
-          </p:cNvSpPr>
-          <p:nvPr>
-            <p:ph type="body" idx="1"/>
-          </p:nvPr>
-        </p:nvSpPr>
-        <p:spPr/>
-        <p:txBody>
-          <a:bodyPr/>
-          <a:lstStyle/>
-          <a:p>
-            <a:r>
-              <a:t>67070501021</a:t>
-            </a:r>
-          </a:p>
-          <a:p>
-            <a:r>
-              <a:t>Thanaboon Tikaew</a:t>
-            </a:r>
-          </a:p>
-        </p:txBody>
-      </p:sp>
-      <p:sp>
-        <p:nvSpPr>
-          <p:cNvPr id="4" name="TextBox 3"/>
-          <p:cNvSpPr txBox="1"/>
-          <p:nvPr/>
-        </p:nvSpPr>
-        <p:spPr>
-          <a:xfrm>
-            <a:off x="11247120" y="6400800"/>
-            <a:ext cx="731520" cy="365760"/>
-          </a:xfrm>
-          <a:prstGeom prst="rect">
-            <a:avLst/>
-          </a:prstGeom>
-          <a:noFill/>
-        </p:spPr>
-        <p:txBody>
-          <a:bodyPr wrap="none">
-            <a:spAutoFit/>
-          </a:bodyPr>
-          <a:lstStyle/>
-          <a:p>
-            <a:pPr algn="r"/>
-            <a:r>
-              <a:rPr sz="1200">
-                <a:solidFill>
-                  <a:srgbClr val="808080"/>
-                </a:solidFill>
-              </a:rPr>
-              <a:t>15</a:t>
-            </a:r>
-          </a:p>
-        </p:txBody>
-      </p:sp>
-    </p:spTree>
-  </p:cSld>
-  <p:clrMapOvr>
-    <a:masterClrMapping/>
-  </p:clrMapOvr>
-</p:sld>
-</file>
-
-<file path=ppt/slides/slide16.xml><?xml version="1.0" encoding="utf-8"?>
-<p:sld xmlns:a="http://schemas.openxmlformats.org/drawingml/2006/main" xmlns:p="http://schemas.openxmlformats.org/presentationml/2006/main" xmlns:r="http://schemas.openxmlformats.org/officeDocument/2006/relationships">
-  <p:cSld>
-    <p:spTree>
-      <p:nvGrpSpPr>
-        <p:cNvPr id="1" name=""/>
-        <p:cNvGrpSpPr/>
-        <p:nvPr/>
-      </p:nvGrpSpPr>
-      <p:grpSpPr/>
-      <p:sp>
-        <p:nvSpPr>
-          <p:cNvPr id="2" name="Title 1"/>
-          <p:cNvSpPr>
-            <a:spLocks noGrp="1"/>
-          </p:cNvSpPr>
-          <p:nvPr>
-            <p:ph type="title"/>
-          </p:nvPr>
-        </p:nvSpPr>
-        <p:spPr/>
-        <p:txBody>
-          <a:bodyPr/>
-          <a:lstStyle/>
-          <a:p>
-            <a:r>
-              <a:t>MCS Lock: Idea</a:t>
-            </a:r>
-          </a:p>
-        </p:txBody>
-      </p:sp>
-      <p:sp>
-        <p:nvSpPr>
-          <p:cNvPr id="3" name="TextBox 2"/>
-          <p:cNvSpPr txBox="1"/>
-          <p:nvPr/>
-        </p:nvSpPr>
-        <p:spPr>
-          <a:xfrm>
-            <a:off x="11247120" y="6400800"/>
-            <a:ext cx="731520" cy="365760"/>
-          </a:xfrm>
-          <a:prstGeom prst="rect">
-            <a:avLst/>
-          </a:prstGeom>
-          <a:noFill/>
-        </p:spPr>
-        <p:txBody>
-          <a:bodyPr wrap="none">
-            <a:spAutoFit/>
-          </a:bodyPr>
-          <a:lstStyle/>
-          <a:p>
-            <a:pPr algn="r"/>
-            <a:r>
-              <a:rPr sz="1200">
-                <a:solidFill>
-                  <a:srgbClr val="808080"/>
-                </a:solidFill>
-              </a:rPr>
-              <a:t>16</a:t>
-            </a:r>
-          </a:p>
-        </p:txBody>
-      </p:sp>
-      <p:sp>
-        <p:nvSpPr>
-          <p:cNvPr id="4" name="TextBox 3"/>
-          <p:cNvSpPr txBox="1"/>
-          <p:nvPr/>
-        </p:nvSpPr>
-        <p:spPr>
-          <a:xfrm>
-            <a:off x="548640" y="1554480"/>
-            <a:ext cx="4389120" cy="4937760"/>
-          </a:xfrm>
-          <a:prstGeom prst="rect">
-            <a:avLst/>
-          </a:prstGeom>
-          <a:noFill/>
-        </p:spPr>
-        <p:txBody>
-          <a:bodyPr wrap="square">
-            <a:spAutoFit/>
-          </a:bodyPr>
-          <a:lstStyle/>
-          <a:p>
-            <a:pPr>
-              <a:spcAft>
-                <a:spcPts val="800"/>
-              </a:spcAft>
-            </a:pPr>
-            <a:r>
-              <a:rPr sz="1800"/>
-              <a:t>• Mellor-Crummey and Scott, 1991; Dijkstra Prize 2006</a:t>
-            </a:r>
-          </a:p>
-          <a:p>
-            <a:pPr>
-              <a:spcAft>
-                <a:spcPts val="800"/>
-              </a:spcAft>
-            </a:pPr>
-            <a:r>
-              <a:rPr sz="1800"/>
-              <a:t>• Waiters form a queue: a linked list of nodes, tail points to the last</a:t>
-            </a:r>
-          </a:p>
-          <a:p>
-            <a:pPr>
-              <a:spcAft>
-                <a:spcPts val="800"/>
-              </a:spcAft>
-            </a:pPr>
-            <a:r>
-              <a:rPr sz="1800"/>
-              <a:t>• Join: one atomic exchange on tail, then link in behind the previous node</a:t>
-            </a:r>
-          </a:p>
-          <a:p>
-            <a:pPr>
-              <a:spcAft>
-                <a:spcPts val="800"/>
-              </a:spcAft>
-            </a:pPr>
-            <a:r>
-              <a:rPr sz="1800"/>
-              <a:t>• Each thread spins on its OWN node; the one ahead clears it on release</a:t>
-            </a:r>
-          </a:p>
-          <a:p>
-            <a:pPr>
-              <a:spcAft>
-                <a:spcPts val="800"/>
-              </a:spcAft>
-            </a:pPr>
-            <a:r>
-              <a:rPr sz="1800">
-                <a:solidFill>
-                  <a:srgbClr val="C0392B"/>
-                </a:solidFill>
-              </a:rPr>
-              <a:t>• Linux's spinlock (qspinlock, since v4.2) is built on MCS</a:t>
-            </a:r>
-          </a:p>
-        </p:txBody>
-      </p:sp>
-      <p:sp>
-        <p:nvSpPr>
-          <p:cNvPr id="5" name="TextBox 4"/>
-          <p:cNvSpPr txBox="1"/>
-          <p:nvPr/>
-        </p:nvSpPr>
-        <p:spPr>
-          <a:xfrm>
-            <a:off x="5120640" y="1463040"/>
-            <a:ext cx="6675120" cy="3291840"/>
-          </a:xfrm>
-          <a:prstGeom prst="rect">
-            <a:avLst/>
-          </a:prstGeom>
-          <a:solidFill>
-            <a:srgbClr val="F4F4F4"/>
-          </a:solidFill>
-        </p:spPr>
-        <p:txBody>
-          <a:bodyPr wrap="none">
-            <a:spAutoFit/>
-          </a:bodyPr>
-          <a:lstStyle/>
-          <a:p>
-            <a:pPr>
-              <a:spcAft>
-                <a:spcPts val="0"/>
-              </a:spcAft>
-            </a:pPr>
-            <a:r>
-              <a:rPr sz="1200">
-                <a:latin typeface="Consolas"/>
-              </a:rPr>
-              <a:t>struct node {</a:t>
-            </a:r>
-          </a:p>
-          <a:p>
-            <a:pPr>
-              <a:spcAft>
-                <a:spcPts val="0"/>
-              </a:spcAft>
-            </a:pPr>
-            <a:r>
-              <a:rPr sz="1200">
-                <a:latin typeface="Consolas"/>
-              </a:rPr>
-              <a:t>    struct node *next;          /* the thread queued behind me */</a:t>
-            </a:r>
-          </a:p>
-          <a:p>
-            <a:pPr>
-              <a:spcAft>
-                <a:spcPts val="0"/>
-              </a:spcAft>
-            </a:pPr>
-            <a:r>
-              <a:rPr sz="1200">
-                <a:latin typeface="Consolas"/>
-              </a:rPr>
-              <a:t>    int locked;                 /* 1 = keep waiting */</a:t>
-            </a:r>
-          </a:p>
-          <a:p>
-            <a:pPr>
-              <a:spcAft>
-                <a:spcPts val="0"/>
-              </a:spcAft>
-            </a:pPr>
-            <a:r>
-              <a:rPr sz="1200">
-                <a:latin typeface="Consolas"/>
-              </a:rPr>
-              <a:t>} __attribute__((aligned(64)));  /* one cache line per node */</a:t>
-            </a:r>
-          </a:p>
-          <a:p>
-            <a:pPr>
-              <a:spcAft>
-                <a:spcPts val="0"/>
-              </a:spcAft>
-            </a:pPr>
-          </a:p>
-          <a:p>
-            <a:pPr>
-              <a:spcAft>
-                <a:spcPts val="0"/>
-              </a:spcAft>
-            </a:pPr>
-            <a:r>
-              <a:rPr sz="1200">
-                <a:latin typeface="Consolas"/>
-              </a:rPr>
-              <a:t>void lock_acquire(int id)</a:t>
-            </a:r>
-          </a:p>
-          <a:p>
-            <a:pPr>
-              <a:spcAft>
-                <a:spcPts val="0"/>
-              </a:spcAft>
-            </a:pPr>
-            <a:r>
-              <a:rPr sz="1200">
-                <a:latin typeface="Consolas"/>
-              </a:rPr>
-              <a:t>{</a:t>
-            </a:r>
-          </a:p>
-          <a:p>
-            <a:pPr>
-              <a:spcAft>
-                <a:spcPts val="0"/>
-              </a:spcAft>
-            </a:pPr>
-            <a:r>
-              <a:rPr sz="1200">
-                <a:latin typeface="Consolas"/>
-              </a:rPr>
-              <a:t>    struct node *me = &amp;qnode[id];</a:t>
-            </a:r>
-          </a:p>
-          <a:p>
-            <a:pPr>
-              <a:spcAft>
-                <a:spcPts val="0"/>
-              </a:spcAft>
-            </a:pPr>
-            <a:r>
-              <a:rPr sz="1200">
-                <a:latin typeface="Consolas"/>
-              </a:rPr>
-              <a:t>    me-&gt;next = NULL;</a:t>
-            </a:r>
-          </a:p>
-          <a:p>
-            <a:pPr>
-              <a:spcAft>
-                <a:spcPts val="0"/>
-              </a:spcAft>
-            </a:pPr>
-            <a:r>
-              <a:rPr sz="1200">
-                <a:latin typeface="Consolas"/>
-              </a:rPr>
-              <a:t>    me-&gt;locked = 1;</a:t>
-            </a:r>
-          </a:p>
-          <a:p>
-            <a:pPr>
-              <a:spcAft>
-                <a:spcPts val="0"/>
-              </a:spcAft>
-            </a:pPr>
-            <a:r>
-              <a:rPr sz="1200">
-                <a:latin typeface="Consolas"/>
-              </a:rPr>
-              <a:t>    struct node *prev = __atomic_exchange_n(&amp;tail, me, __ATOMIC_ACQ_REL);</a:t>
-            </a:r>
-          </a:p>
-          <a:p>
-            <a:pPr>
-              <a:spcAft>
-                <a:spcPts val="0"/>
-              </a:spcAft>
-            </a:pPr>
-            <a:r>
-              <a:rPr sz="1200">
-                <a:latin typeface="Consolas"/>
-              </a:rPr>
-              <a:t>    if (prev != NULL) {         /* queue not empty: */</a:t>
-            </a:r>
-          </a:p>
-          <a:p>
-            <a:pPr>
-              <a:spcAft>
-                <a:spcPts val="0"/>
-              </a:spcAft>
-            </a:pPr>
-            <a:r>
-              <a:rPr sz="1200">
-                <a:latin typeface="Consolas"/>
-              </a:rPr>
-              <a:t>        STORE(&amp;prev-&gt;next, me); /* link in behind prev */</a:t>
-            </a:r>
-          </a:p>
-          <a:p>
-            <a:pPr>
-              <a:spcAft>
-                <a:spcPts val="0"/>
-              </a:spcAft>
-            </a:pPr>
-            <a:r>
-              <a:rPr sz="1200">
-                <a:latin typeface="Consolas"/>
-              </a:rPr>
-              <a:t>        while (LOAD(&amp;me-&gt;locked))</a:t>
-            </a:r>
-          </a:p>
-          <a:p>
-            <a:pPr>
-              <a:spcAft>
-                <a:spcPts val="0"/>
-              </a:spcAft>
-            </a:pPr>
-            <a:r>
-              <a:rPr sz="1200">
-                <a:latin typeface="Consolas"/>
-              </a:rPr>
-              <a:t>            ;                   /* spin on MY node only */</a:t>
-            </a:r>
-          </a:p>
-          <a:p>
-            <a:pPr>
-              <a:spcAft>
-                <a:spcPts val="0"/>
-              </a:spcAft>
-            </a:pPr>
-            <a:r>
-              <a:rPr sz="1200">
-                <a:latin typeface="Consolas"/>
-              </a:rPr>
-              <a:t>    }</a:t>
-            </a:r>
-          </a:p>
-          <a:p>
-            <a:pPr>
-              <a:spcAft>
-                <a:spcPts val="0"/>
-              </a:spcAft>
-            </a:pPr>
-            <a:r>
-              <a:rPr sz="1200">
-                <a:latin typeface="Consolas"/>
-              </a:rPr>
-              <a:t>}</a:t>
-            </a:r>
-          </a:p>
-        </p:txBody>
-      </p:sp>
-    </p:spTree>
-  </p:cSld>
-  <p:clrMapOvr>
-    <a:masterClrMapping/>
-  </p:clrMapOvr>
-</p:sld>
-</file>
-
-<file path=ppt/slides/slide17.xml><?xml version="1.0" encoding="utf-8"?>
-<p:sld xmlns:a="http://schemas.openxmlformats.org/drawingml/2006/main" xmlns:p="http://schemas.openxmlformats.org/presentationml/2006/main" xmlns:r="http://schemas.openxmlformats.org/officeDocument/2006/relationships">
-  <p:cSld>
-    <p:spTree>
-      <p:nvGrpSpPr>
-        <p:cNvPr id="1" name=""/>
-        <p:cNvGrpSpPr/>
-        <p:nvPr/>
-      </p:nvGrpSpPr>
-      <p:grpSpPr/>
-      <p:sp>
-        <p:nvSpPr>
-          <p:cNvPr id="2" name="Title 1"/>
-          <p:cNvSpPr>
-            <a:spLocks noGrp="1"/>
-          </p:cNvSpPr>
-          <p:nvPr>
-            <p:ph type="title"/>
-          </p:nvPr>
-        </p:nvSpPr>
-        <p:spPr/>
-        <p:txBody>
-          <a:bodyPr/>
-          <a:lstStyle/>
-          <a:p>
-            <a:r>
-              <a:t>MCS: Mutual Exclusion and Deadlock</a:t>
-            </a:r>
-          </a:p>
-        </p:txBody>
-      </p:sp>
-      <p:sp>
-        <p:nvSpPr>
-          <p:cNvPr id="3" name="TextBox 2"/>
-          <p:cNvSpPr txBox="1"/>
-          <p:nvPr/>
-        </p:nvSpPr>
-        <p:spPr>
-          <a:xfrm>
-            <a:off x="11247120" y="6400800"/>
-            <a:ext cx="731520" cy="365760"/>
-          </a:xfrm>
-          <a:prstGeom prst="rect">
-            <a:avLst/>
-          </a:prstGeom>
-          <a:noFill/>
-        </p:spPr>
-        <p:txBody>
-          <a:bodyPr wrap="none">
-            <a:spAutoFit/>
-          </a:bodyPr>
-          <a:lstStyle/>
-          <a:p>
-            <a:pPr algn="r"/>
-            <a:r>
-              <a:rPr sz="1200">
-                <a:solidFill>
-                  <a:srgbClr val="808080"/>
-                </a:solidFill>
-              </a:rPr>
-              <a:t>17</a:t>
-            </a:r>
-          </a:p>
-        </p:txBody>
-      </p:sp>
-      <p:sp>
-        <p:nvSpPr>
-          <p:cNvPr id="4" name="TextBox 3"/>
-          <p:cNvSpPr txBox="1"/>
-          <p:nvPr/>
-        </p:nvSpPr>
-        <p:spPr>
-          <a:xfrm>
-            <a:off x="548640" y="1554480"/>
-            <a:ext cx="4389120" cy="4937760"/>
-          </a:xfrm>
-          <a:prstGeom prst="rect">
-            <a:avLst/>
-          </a:prstGeom>
-          <a:noFill/>
-        </p:spPr>
-        <p:txBody>
-          <a:bodyPr wrap="square">
-            <a:spAutoFit/>
-          </a:bodyPr>
-          <a:lstStyle/>
-          <a:p>
-            <a:pPr>
-              <a:spcAft>
-                <a:spcPts val="800"/>
-              </a:spcAft>
-            </a:pPr>
-            <a:r>
-              <a:rPr sz="1700"/>
-              <a:t>• Mutual exclusion: the exchange gives every thread one place in one queue; only the head is inside, and it wakes exactly one node</a:t>
-            </a:r>
-          </a:p>
-          <a:p>
-            <a:pPr>
-              <a:spcAft>
-                <a:spcPts val="800"/>
-              </a:spcAft>
-            </a:pPr>
-            <a:r>
-              <a:rPr sz="1700"/>
-              <a:t>• No deadlock: the holder always hands over — to the next node, or resets tail when nobody waits</a:t>
-            </a:r>
-          </a:p>
-          <a:p>
-            <a:pPr>
-              <a:spcAft>
-                <a:spcPts val="800"/>
-              </a:spcAft>
-            </a:pPr>
-            <a:r>
-              <a:rPr sz="1700"/>
-              <a:t>• release() waits for a waiter that has swapped tail but not linked in yet</a:t>
-            </a:r>
-          </a:p>
-          <a:p>
-            <a:pPr>
-              <a:spcAft>
-                <a:spcPts val="800"/>
-              </a:spcAft>
-            </a:pPr>
-            <a:r>
-              <a:rPr sz="1700"/>
-              <a:t>• Measured: all 24 runs (1–8 threads, all CPUs and one CPU) finished with lost = 0</a:t>
-            </a:r>
-          </a:p>
-        </p:txBody>
-      </p:sp>
-      <p:sp>
-        <p:nvSpPr>
-          <p:cNvPr id="5" name="TextBox 4"/>
-          <p:cNvSpPr txBox="1"/>
-          <p:nvPr/>
-        </p:nvSpPr>
-        <p:spPr>
-          <a:xfrm>
-            <a:off x="5120640" y="1463040"/>
-            <a:ext cx="6675120" cy="2636520"/>
-          </a:xfrm>
-          <a:prstGeom prst="rect">
-            <a:avLst/>
-          </a:prstGeom>
-          <a:solidFill>
-            <a:srgbClr val="F4F4F4"/>
-          </a:solidFill>
-        </p:spPr>
-        <p:txBody>
-          <a:bodyPr wrap="none">
-            <a:spAutoFit/>
-          </a:bodyPr>
-          <a:lstStyle/>
-          <a:p>
-            <a:pPr>
-              <a:spcAft>
-                <a:spcPts val="0"/>
-              </a:spcAft>
-            </a:pPr>
-            <a:r>
-              <a:rPr sz="1150">
-                <a:latin typeface="Consolas"/>
-              </a:rPr>
-              <a:t>void lock_release(int id)</a:t>
-            </a:r>
-          </a:p>
-          <a:p>
-            <a:pPr>
-              <a:spcAft>
-                <a:spcPts val="0"/>
-              </a:spcAft>
-            </a:pPr>
-            <a:r>
-              <a:rPr sz="1150">
-                <a:latin typeface="Consolas"/>
-              </a:rPr>
-              <a:t>{</a:t>
-            </a:r>
-          </a:p>
-          <a:p>
-            <a:pPr>
-              <a:spcAft>
-                <a:spcPts val="0"/>
-              </a:spcAft>
-            </a:pPr>
-            <a:r>
-              <a:rPr sz="1150">
-                <a:latin typeface="Consolas"/>
-              </a:rPr>
-              <a:t>    struct node *me = &amp;qnode[id];</a:t>
-            </a:r>
-          </a:p>
-          <a:p>
-            <a:pPr>
-              <a:spcAft>
-                <a:spcPts val="0"/>
-              </a:spcAft>
-            </a:pPr>
-            <a:r>
-              <a:rPr sz="1150">
-                <a:latin typeface="Consolas"/>
-              </a:rPr>
-              <a:t>    struct node *next = LOAD(&amp;me-&gt;next);</a:t>
-            </a:r>
-          </a:p>
-          <a:p>
-            <a:pPr>
-              <a:spcAft>
-                <a:spcPts val="0"/>
-              </a:spcAft>
-            </a:pPr>
-            <a:r>
-              <a:rPr sz="1150">
-                <a:latin typeface="Consolas"/>
-              </a:rPr>
-              <a:t>    if (next == NULL) {</a:t>
-            </a:r>
-          </a:p>
-          <a:p>
-            <a:pPr>
-              <a:spcAft>
-                <a:spcPts val="0"/>
-              </a:spcAft>
-            </a:pPr>
-            <a:r>
-              <a:rPr sz="1150">
-                <a:latin typeface="Consolas"/>
-              </a:rPr>
-              <a:t>        struct node *expect = me;</a:t>
-            </a:r>
-          </a:p>
-          <a:p>
-            <a:pPr>
-              <a:spcAft>
-                <a:spcPts val="0"/>
-              </a:spcAft>
-            </a:pPr>
-            <a:r>
-              <a:rPr sz="1150">
-                <a:latin typeface="Consolas"/>
-              </a:rPr>
-              <a:t>        if (__atomic_compare_exchange_n(&amp;tail, &amp;expect, NULL, 0,</a:t>
-            </a:r>
-          </a:p>
-          <a:p>
-            <a:pPr>
-              <a:spcAft>
-                <a:spcPts val="0"/>
-              </a:spcAft>
-            </a:pPr>
-            <a:r>
-              <a:rPr sz="1150">
-                <a:latin typeface="Consolas"/>
-              </a:rPr>
-              <a:t>                                        __ATOMIC_RELEASE, __ATOMIC_RELAXED))</a:t>
-            </a:r>
-          </a:p>
-          <a:p>
-            <a:pPr>
-              <a:spcAft>
-                <a:spcPts val="0"/>
-              </a:spcAft>
-            </a:pPr>
-            <a:r>
-              <a:rPr sz="1150">
-                <a:latin typeface="Consolas"/>
-              </a:rPr>
-              <a:t>            return;             /* nobody waiting: lock is free */</a:t>
-            </a:r>
-          </a:p>
-          <a:p>
-            <a:pPr>
-              <a:spcAft>
-                <a:spcPts val="0"/>
-              </a:spcAft>
-            </a:pPr>
-            <a:r>
-              <a:rPr sz="1150">
-                <a:latin typeface="Consolas"/>
-              </a:rPr>
-              <a:t>        while ((next = LOAD(&amp;me-&gt;next)) == NULL)</a:t>
-            </a:r>
-          </a:p>
-          <a:p>
-            <a:pPr>
-              <a:spcAft>
-                <a:spcPts val="0"/>
-              </a:spcAft>
-            </a:pPr>
-            <a:r>
-              <a:rPr sz="1150">
-                <a:latin typeface="Consolas"/>
-              </a:rPr>
-              <a:t>            ;                   /* a waiter is still linking in */</a:t>
-            </a:r>
-          </a:p>
-          <a:p>
-            <a:pPr>
-              <a:spcAft>
-                <a:spcPts val="0"/>
-              </a:spcAft>
-            </a:pPr>
-            <a:r>
-              <a:rPr sz="1150">
-                <a:latin typeface="Consolas"/>
-              </a:rPr>
-              <a:t>    }</a:t>
-            </a:r>
-          </a:p>
-          <a:p>
-            <a:pPr>
-              <a:spcAft>
-                <a:spcPts val="0"/>
-              </a:spcAft>
-            </a:pPr>
-            <a:r>
-              <a:rPr sz="1150">
-                <a:latin typeface="Consolas"/>
-              </a:rPr>
-              <a:t>    STORE(&amp;next-&gt;locked, 0);    /* hand the lock to the next thread */</a:t>
-            </a:r>
-          </a:p>
-          <a:p>
-            <a:pPr>
-              <a:spcAft>
-                <a:spcPts val="0"/>
-              </a:spcAft>
-            </a:pPr>
-            <a:r>
-              <a:rPr sz="1150">
-                <a:latin typeface="Consolas"/>
-              </a:rPr>
-              <a:t>}</a:t>
             </a:r>
           </a:p>
         </p:txBody>
@@ -9138,14 +9678,40 @@
           <a:lstStyle/>
           <a:p>
             <a:r>
-              <a:t>MCS: Performance</a:t>
-            </a:r>
-          </a:p>
-        </p:txBody>
-      </p:sp>
-      <p:sp>
-        <p:nvSpPr>
-          <p:cNvPr id="3" name="TextBox 2"/>
+              <a:t>MCS Lock</a:t>
+            </a:r>
+          </a:p>
+        </p:txBody>
+      </p:sp>
+      <p:sp>
+        <p:nvSpPr>
+          <p:cNvPr id="3" name="Text Placeholder 2"/>
+          <p:cNvSpPr>
+            <a:spLocks noGrp="1"/>
+          </p:cNvSpPr>
+          <p:nvPr>
+            <p:ph type="body" idx="1"/>
+          </p:nvPr>
+        </p:nvSpPr>
+        <p:spPr/>
+        <p:txBody>
+          <a:bodyPr/>
+          <a:lstStyle/>
+          <a:p>
+            <a:r>
+              <a:t>67070501021</a:t>
+            </a:r>
+          </a:p>
+          <a:p>
+            <a:r>
+              <a:t>Thanaboon Tikaew</a:t>
+            </a:r>
+          </a:p>
+        </p:txBody>
+      </p:sp>
+      <p:sp>
+        <p:nvSpPr>
+          <p:cNvPr id="4" name="TextBox 3"/>
           <p:cNvSpPr txBox="1"/>
           <p:nvPr/>
         </p:nvSpPr>
@@ -9173,6 +9739,1311 @@
                 </a:solidFill>
               </a:rPr>
               <a:t>18</a:t>
+            </a:r>
+          </a:p>
+        </p:txBody>
+      </p:sp>
+    </p:spTree>
+  </p:cSld>
+  <p:clrMapOvr>
+    <a:masterClrMapping/>
+  </p:clrMapOvr>
+</p:sld>
+</file>
+
+<file path=ppt/slides/slide19.xml><?xml version="1.0" encoding="utf-8"?>
+<p:sld xmlns:a="http://schemas.openxmlformats.org/drawingml/2006/main" xmlns:p="http://schemas.openxmlformats.org/presentationml/2006/main" xmlns:r="http://schemas.openxmlformats.org/officeDocument/2006/relationships">
+  <p:cSld>
+    <p:spTree>
+      <p:nvGrpSpPr>
+        <p:cNvPr id="1" name=""/>
+        <p:cNvGrpSpPr/>
+        <p:nvPr/>
+      </p:nvGrpSpPr>
+      <p:grpSpPr/>
+      <p:sp>
+        <p:nvSpPr>
+          <p:cNvPr id="2" name="Title 1"/>
+          <p:cNvSpPr>
+            <a:spLocks noGrp="1"/>
+          </p:cNvSpPr>
+          <p:nvPr>
+            <p:ph type="title"/>
+          </p:nvPr>
+        </p:nvSpPr>
+        <p:spPr/>
+        <p:txBody>
+          <a:bodyPr/>
+          <a:lstStyle/>
+          <a:p>
+            <a:r>
+              <a:t>MCS Lock: Idea</a:t>
+            </a:r>
+          </a:p>
+        </p:txBody>
+      </p:sp>
+      <p:sp>
+        <p:nvSpPr>
+          <p:cNvPr id="3" name="TextBox 2"/>
+          <p:cNvSpPr txBox="1"/>
+          <p:nvPr/>
+        </p:nvSpPr>
+        <p:spPr>
+          <a:xfrm>
+            <a:off x="11247120" y="6400800"/>
+            <a:ext cx="731520" cy="365760"/>
+          </a:xfrm>
+          <a:prstGeom prst="rect">
+            <a:avLst/>
+          </a:prstGeom>
+          <a:noFill/>
+        </p:spPr>
+        <p:txBody>
+          <a:bodyPr wrap="none">
+            <a:spAutoFit/>
+          </a:bodyPr>
+          <a:lstStyle/>
+          <a:p>
+            <a:pPr algn="r"/>
+            <a:r>
+              <a:rPr sz="1200">
+                <a:solidFill>
+                  <a:srgbClr val="808080"/>
+                </a:solidFill>
+              </a:rPr>
+              <a:t>19</a:t>
+            </a:r>
+          </a:p>
+        </p:txBody>
+      </p:sp>
+      <p:sp>
+        <p:nvSpPr>
+          <p:cNvPr id="4" name="TextBox 3"/>
+          <p:cNvSpPr txBox="1"/>
+          <p:nvPr/>
+        </p:nvSpPr>
+        <p:spPr>
+          <a:xfrm>
+            <a:off x="548640" y="1554480"/>
+            <a:ext cx="4389120" cy="4937760"/>
+          </a:xfrm>
+          <a:prstGeom prst="rect">
+            <a:avLst/>
+          </a:prstGeom>
+          <a:noFill/>
+        </p:spPr>
+        <p:txBody>
+          <a:bodyPr wrap="square">
+            <a:spAutoFit/>
+          </a:bodyPr>
+          <a:lstStyle/>
+          <a:p>
+            <a:pPr>
+              <a:spcAft>
+                <a:spcPts val="800"/>
+              </a:spcAft>
+            </a:pPr>
+            <a:r>
+              <a:rPr sz="1800"/>
+              <a:t>• Mellor-Crummey and Scott, 1991; Dijkstra Prize 2006</a:t>
+            </a:r>
+          </a:p>
+          <a:p>
+            <a:pPr>
+              <a:spcAft>
+                <a:spcPts val="800"/>
+              </a:spcAft>
+            </a:pPr>
+            <a:r>
+              <a:rPr sz="1800"/>
+              <a:t>• Waiters form a queue: a linked list of nodes, tail points to the last</a:t>
+            </a:r>
+          </a:p>
+          <a:p>
+            <a:pPr>
+              <a:spcAft>
+                <a:spcPts val="800"/>
+              </a:spcAft>
+            </a:pPr>
+            <a:r>
+              <a:rPr sz="1800"/>
+              <a:t>• Join: one atomic exchange on tail, then link in behind the previous node</a:t>
+            </a:r>
+          </a:p>
+          <a:p>
+            <a:pPr>
+              <a:spcAft>
+                <a:spcPts val="800"/>
+              </a:spcAft>
+            </a:pPr>
+            <a:r>
+              <a:rPr sz="1800"/>
+              <a:t>• Each thread spins on its OWN node; the one ahead clears it on release</a:t>
+            </a:r>
+          </a:p>
+          <a:p>
+            <a:pPr>
+              <a:spcAft>
+                <a:spcPts val="800"/>
+              </a:spcAft>
+            </a:pPr>
+            <a:r>
+              <a:rPr sz="1800">
+                <a:solidFill>
+                  <a:srgbClr val="C0392B"/>
+                </a:solidFill>
+              </a:rPr>
+              <a:t>• Linux's spinlock (qspinlock, since v4.2) is built on MCS</a:t>
+            </a:r>
+          </a:p>
+        </p:txBody>
+      </p:sp>
+      <p:sp>
+        <p:nvSpPr>
+          <p:cNvPr id="5" name="TextBox 4"/>
+          <p:cNvSpPr txBox="1"/>
+          <p:nvPr/>
+        </p:nvSpPr>
+        <p:spPr>
+          <a:xfrm>
+            <a:off x="5120640" y="1463040"/>
+            <a:ext cx="6675120" cy="3291840"/>
+          </a:xfrm>
+          <a:prstGeom prst="rect">
+            <a:avLst/>
+          </a:prstGeom>
+          <a:solidFill>
+            <a:srgbClr val="F4F4F4"/>
+          </a:solidFill>
+        </p:spPr>
+        <p:txBody>
+          <a:bodyPr wrap="none">
+            <a:spAutoFit/>
+          </a:bodyPr>
+          <a:lstStyle/>
+          <a:p>
+            <a:pPr>
+              <a:spcAft>
+                <a:spcPts val="0"/>
+              </a:spcAft>
+            </a:pPr>
+            <a:r>
+              <a:rPr sz="1200">
+                <a:latin typeface="Consolas"/>
+              </a:rPr>
+              <a:t>struct node {</a:t>
+            </a:r>
+          </a:p>
+          <a:p>
+            <a:pPr>
+              <a:spcAft>
+                <a:spcPts val="0"/>
+              </a:spcAft>
+            </a:pPr>
+            <a:r>
+              <a:rPr sz="1200">
+                <a:latin typeface="Consolas"/>
+              </a:rPr>
+              <a:t>    struct node *next;          /* the thread queued behind me */</a:t>
+            </a:r>
+          </a:p>
+          <a:p>
+            <a:pPr>
+              <a:spcAft>
+                <a:spcPts val="0"/>
+              </a:spcAft>
+            </a:pPr>
+            <a:r>
+              <a:rPr sz="1200">
+                <a:latin typeface="Consolas"/>
+              </a:rPr>
+              <a:t>    int locked;                 /* 1 = keep waiting */</a:t>
+            </a:r>
+          </a:p>
+          <a:p>
+            <a:pPr>
+              <a:spcAft>
+                <a:spcPts val="0"/>
+              </a:spcAft>
+            </a:pPr>
+            <a:r>
+              <a:rPr sz="1200">
+                <a:latin typeface="Consolas"/>
+              </a:rPr>
+              <a:t>} __attribute__((aligned(64)));  /* one cache line per node */</a:t>
+            </a:r>
+          </a:p>
+          <a:p>
+            <a:pPr>
+              <a:spcAft>
+                <a:spcPts val="0"/>
+              </a:spcAft>
+            </a:pPr>
+          </a:p>
+          <a:p>
+            <a:pPr>
+              <a:spcAft>
+                <a:spcPts val="0"/>
+              </a:spcAft>
+            </a:pPr>
+            <a:r>
+              <a:rPr sz="1200">
+                <a:latin typeface="Consolas"/>
+              </a:rPr>
+              <a:t>void lock_acquire(int id)</a:t>
+            </a:r>
+          </a:p>
+          <a:p>
+            <a:pPr>
+              <a:spcAft>
+                <a:spcPts val="0"/>
+              </a:spcAft>
+            </a:pPr>
+            <a:r>
+              <a:rPr sz="1200">
+                <a:latin typeface="Consolas"/>
+              </a:rPr>
+              <a:t>{</a:t>
+            </a:r>
+          </a:p>
+          <a:p>
+            <a:pPr>
+              <a:spcAft>
+                <a:spcPts val="0"/>
+              </a:spcAft>
+            </a:pPr>
+            <a:r>
+              <a:rPr sz="1200">
+                <a:latin typeface="Consolas"/>
+              </a:rPr>
+              <a:t>    struct node *me = &amp;qnode[id];</a:t>
+            </a:r>
+          </a:p>
+          <a:p>
+            <a:pPr>
+              <a:spcAft>
+                <a:spcPts val="0"/>
+              </a:spcAft>
+            </a:pPr>
+            <a:r>
+              <a:rPr sz="1200">
+                <a:latin typeface="Consolas"/>
+              </a:rPr>
+              <a:t>    me-&gt;next = NULL;</a:t>
+            </a:r>
+          </a:p>
+          <a:p>
+            <a:pPr>
+              <a:spcAft>
+                <a:spcPts val="0"/>
+              </a:spcAft>
+            </a:pPr>
+            <a:r>
+              <a:rPr sz="1200">
+                <a:latin typeface="Consolas"/>
+              </a:rPr>
+              <a:t>    me-&gt;locked = 1;</a:t>
+            </a:r>
+          </a:p>
+          <a:p>
+            <a:pPr>
+              <a:spcAft>
+                <a:spcPts val="0"/>
+              </a:spcAft>
+            </a:pPr>
+            <a:r>
+              <a:rPr sz="1200">
+                <a:latin typeface="Consolas"/>
+              </a:rPr>
+              <a:t>    struct node *prev = __atomic_exchange_n(&amp;tail, me, __ATOMIC_ACQ_REL);</a:t>
+            </a:r>
+          </a:p>
+          <a:p>
+            <a:pPr>
+              <a:spcAft>
+                <a:spcPts val="0"/>
+              </a:spcAft>
+            </a:pPr>
+            <a:r>
+              <a:rPr sz="1200">
+                <a:latin typeface="Consolas"/>
+              </a:rPr>
+              <a:t>    if (prev != NULL) {         /* queue not empty: */</a:t>
+            </a:r>
+          </a:p>
+          <a:p>
+            <a:pPr>
+              <a:spcAft>
+                <a:spcPts val="0"/>
+              </a:spcAft>
+            </a:pPr>
+            <a:r>
+              <a:rPr sz="1200">
+                <a:latin typeface="Consolas"/>
+              </a:rPr>
+              <a:t>        STORE(&amp;prev-&gt;next, me); /* link in behind prev */</a:t>
+            </a:r>
+          </a:p>
+          <a:p>
+            <a:pPr>
+              <a:spcAft>
+                <a:spcPts val="0"/>
+              </a:spcAft>
+            </a:pPr>
+            <a:r>
+              <a:rPr sz="1200">
+                <a:latin typeface="Consolas"/>
+              </a:rPr>
+              <a:t>        while (LOAD(&amp;me-&gt;locked))</a:t>
+            </a:r>
+          </a:p>
+          <a:p>
+            <a:pPr>
+              <a:spcAft>
+                <a:spcPts val="0"/>
+              </a:spcAft>
+            </a:pPr>
+            <a:r>
+              <a:rPr sz="1200">
+                <a:latin typeface="Consolas"/>
+              </a:rPr>
+              <a:t>            ;                   /* spin on MY node only */</a:t>
+            </a:r>
+          </a:p>
+          <a:p>
+            <a:pPr>
+              <a:spcAft>
+                <a:spcPts val="0"/>
+              </a:spcAft>
+            </a:pPr>
+            <a:r>
+              <a:rPr sz="1200">
+                <a:latin typeface="Consolas"/>
+              </a:rPr>
+              <a:t>    }</a:t>
+            </a:r>
+          </a:p>
+          <a:p>
+            <a:pPr>
+              <a:spcAft>
+                <a:spcPts val="0"/>
+              </a:spcAft>
+            </a:pPr>
+            <a:r>
+              <a:rPr sz="1200">
+                <a:latin typeface="Consolas"/>
+              </a:rPr>
+              <a:t>}</a:t>
+            </a:r>
+          </a:p>
+        </p:txBody>
+      </p:sp>
+    </p:spTree>
+  </p:cSld>
+  <p:clrMapOvr>
+    <a:masterClrMapping/>
+  </p:clrMapOvr>
+</p:sld>
+</file>
+
+<file path=ppt/slides/slide2.xml><?xml version="1.0" encoding="utf-8"?>
+<p:sld xmlns:a="http://schemas.openxmlformats.org/drawingml/2006/main" xmlns:p="http://schemas.openxmlformats.org/presentationml/2006/main" xmlns:r="http://schemas.openxmlformats.org/officeDocument/2006/relationships">
+  <p:cSld>
+    <p:spTree>
+      <p:nvGrpSpPr>
+        <p:cNvPr id="1" name=""/>
+        <p:cNvGrpSpPr/>
+        <p:nvPr/>
+      </p:nvGrpSpPr>
+      <p:grpSpPr/>
+      <p:sp>
+        <p:nvSpPr>
+          <p:cNvPr id="2" name="Title 1"/>
+          <p:cNvSpPr>
+            <a:spLocks noGrp="1"/>
+          </p:cNvSpPr>
+          <p:nvPr>
+            <p:ph type="title"/>
+          </p:nvPr>
+        </p:nvSpPr>
+        <p:spPr/>
+        <p:txBody>
+          <a:bodyPr/>
+          <a:lstStyle/>
+          <a:p>
+            <a:r>
+              <a:t>Group: OS InW</a:t>
+            </a:r>
+          </a:p>
+        </p:txBody>
+      </p:sp>
+      <p:sp>
+        <p:nvSpPr>
+          <p:cNvPr id="3" name="TextBox 2"/>
+          <p:cNvSpPr txBox="1"/>
+          <p:nvPr/>
+        </p:nvSpPr>
+        <p:spPr>
+          <a:xfrm>
+            <a:off x="11247120" y="6400800"/>
+            <a:ext cx="731520" cy="365760"/>
+          </a:xfrm>
+          <a:prstGeom prst="rect">
+            <a:avLst/>
+          </a:prstGeom>
+          <a:noFill/>
+        </p:spPr>
+        <p:txBody>
+          <a:bodyPr wrap="none">
+            <a:spAutoFit/>
+          </a:bodyPr>
+          <a:lstStyle/>
+          <a:p>
+            <a:pPr algn="r"/>
+            <a:r>
+              <a:rPr sz="1200">
+                <a:solidFill>
+                  <a:srgbClr val="808080"/>
+                </a:solidFill>
+              </a:rPr>
+              <a:t>2</a:t>
+            </a:r>
+          </a:p>
+        </p:txBody>
+      </p:sp>
+      <p:sp>
+        <p:nvSpPr>
+          <p:cNvPr id="4" name="TextBox 3"/>
+          <p:cNvSpPr txBox="1"/>
+          <p:nvPr/>
+        </p:nvSpPr>
+        <p:spPr>
+          <a:xfrm>
+            <a:off x="457200" y="1737360"/>
+            <a:ext cx="3657600" cy="2011680"/>
+          </a:xfrm>
+          <a:prstGeom prst="rect">
+            <a:avLst/>
+          </a:prstGeom>
+          <a:noFill/>
+        </p:spPr>
+        <p:txBody>
+          <a:bodyPr wrap="square">
+            <a:spAutoFit/>
+          </a:bodyPr>
+          <a:lstStyle/>
+          <a:p>
+            <a:pPr algn="ctr">
+              <a:spcAft>
+                <a:spcPts val="0"/>
+              </a:spcAft>
+            </a:pPr>
+            <a:r>
+              <a:rPr sz="2000"/>
+              <a:t>67070501075</a:t>
+            </a:r>
+          </a:p>
+          <a:p>
+            <a:pPr algn="ctr">
+              <a:spcAft>
+                <a:spcPts val="0"/>
+              </a:spcAft>
+            </a:pPr>
+            <a:r>
+              <a:rPr sz="2000"/>
+              <a:t>Siriwan Yindeephot</a:t>
+            </a:r>
+          </a:p>
+          <a:p>
+            <a:pPr algn="ctr">
+              <a:spcAft>
+                <a:spcPts val="0"/>
+              </a:spcAft>
+            </a:pPr>
+          </a:p>
+          <a:p>
+            <a:pPr algn="ctr">
+              <a:spcAft>
+                <a:spcPts val="0"/>
+              </a:spcAft>
+            </a:pPr>
+            <a:r>
+              <a:rPr sz="2000">
+                <a:solidFill>
+                  <a:srgbClr val="C0392B"/>
+                </a:solidFill>
+              </a:rPr>
+              <a:t>How We Evaluate</a:t>
+            </a:r>
+          </a:p>
+          <a:p>
+            <a:pPr algn="ctr">
+              <a:spcAft>
+                <a:spcPts val="0"/>
+              </a:spcAft>
+            </a:pPr>
+            <a:r>
+              <a:rPr sz="2000">
+                <a:solidFill>
+                  <a:srgbClr val="C0392B"/>
+                </a:solidFill>
+              </a:rPr>
+              <a:t>Conclusion</a:t>
+            </a:r>
+          </a:p>
+        </p:txBody>
+      </p:sp>
+      <p:sp>
+        <p:nvSpPr>
+          <p:cNvPr id="5" name="TextBox 4"/>
+          <p:cNvSpPr txBox="1"/>
+          <p:nvPr/>
+        </p:nvSpPr>
+        <p:spPr>
+          <a:xfrm>
+            <a:off x="4251960" y="1737360"/>
+            <a:ext cx="3657600" cy="2011680"/>
+          </a:xfrm>
+          <a:prstGeom prst="rect">
+            <a:avLst/>
+          </a:prstGeom>
+          <a:noFill/>
+        </p:spPr>
+        <p:txBody>
+          <a:bodyPr wrap="square">
+            <a:spAutoFit/>
+          </a:bodyPr>
+          <a:lstStyle/>
+          <a:p>
+            <a:pPr algn="ctr">
+              <a:spcAft>
+                <a:spcPts val="0"/>
+              </a:spcAft>
+            </a:pPr>
+            <a:r>
+              <a:rPr sz="2000"/>
+              <a:t>67070501018</a:t>
+            </a:r>
+          </a:p>
+          <a:p>
+            <a:pPr algn="ctr">
+              <a:spcAft>
+                <a:spcPts val="0"/>
+              </a:spcAft>
+            </a:pPr>
+            <a:r>
+              <a:rPr sz="2000"/>
+              <a:t>Tithinan Sobking</a:t>
+            </a:r>
+          </a:p>
+          <a:p>
+            <a:pPr algn="ctr">
+              <a:spcAft>
+                <a:spcPts val="0"/>
+              </a:spcAft>
+            </a:pPr>
+          </a:p>
+          <a:p>
+            <a:pPr algn="ctr">
+              <a:spcAft>
+                <a:spcPts val="0"/>
+              </a:spcAft>
+            </a:pPr>
+            <a:r>
+              <a:rPr sz="2000">
+                <a:solidFill>
+                  <a:srgbClr val="C0392B"/>
+                </a:solidFill>
+              </a:rPr>
+              <a:t>Peterson's Algorithm</a:t>
+            </a:r>
+          </a:p>
+        </p:txBody>
+      </p:sp>
+      <p:sp>
+        <p:nvSpPr>
+          <p:cNvPr id="6" name="TextBox 5"/>
+          <p:cNvSpPr txBox="1"/>
+          <p:nvPr/>
+        </p:nvSpPr>
+        <p:spPr>
+          <a:xfrm>
+            <a:off x="8046720" y="1737360"/>
+            <a:ext cx="3657600" cy="2011680"/>
+          </a:xfrm>
+          <a:prstGeom prst="rect">
+            <a:avLst/>
+          </a:prstGeom>
+          <a:noFill/>
+        </p:spPr>
+        <p:txBody>
+          <a:bodyPr wrap="square">
+            <a:spAutoFit/>
+          </a:bodyPr>
+          <a:lstStyle/>
+          <a:p>
+            <a:pPr algn="ctr">
+              <a:spcAft>
+                <a:spcPts val="0"/>
+              </a:spcAft>
+            </a:pPr>
+            <a:r>
+              <a:rPr sz="2000"/>
+              <a:t>67070501005</a:t>
+            </a:r>
+          </a:p>
+          <a:p>
+            <a:pPr algn="ctr">
+              <a:spcAft>
+                <a:spcPts val="0"/>
+              </a:spcAft>
+            </a:pPr>
+            <a:r>
+              <a:rPr sz="2000"/>
+              <a:t>Kiatisak Markmeeshap</a:t>
+            </a:r>
+          </a:p>
+          <a:p>
+            <a:pPr algn="ctr">
+              <a:spcAft>
+                <a:spcPts val="0"/>
+              </a:spcAft>
+            </a:pPr>
+          </a:p>
+          <a:p>
+            <a:pPr algn="ctr">
+              <a:spcAft>
+                <a:spcPts val="0"/>
+              </a:spcAft>
+            </a:pPr>
+            <a:r>
+              <a:rPr sz="2000">
+                <a:solidFill>
+                  <a:srgbClr val="C0392B"/>
+                </a:solidFill>
+              </a:rPr>
+              <a:t>Load-Linked / Store-Conditional</a:t>
+            </a:r>
+          </a:p>
+        </p:txBody>
+      </p:sp>
+      <p:sp>
+        <p:nvSpPr>
+          <p:cNvPr id="7" name="TextBox 6"/>
+          <p:cNvSpPr txBox="1"/>
+          <p:nvPr/>
+        </p:nvSpPr>
+        <p:spPr>
+          <a:xfrm>
+            <a:off x="457200" y="4023360"/>
+            <a:ext cx="3657600" cy="2011680"/>
+          </a:xfrm>
+          <a:prstGeom prst="rect">
+            <a:avLst/>
+          </a:prstGeom>
+          <a:noFill/>
+        </p:spPr>
+        <p:txBody>
+          <a:bodyPr wrap="square">
+            <a:spAutoFit/>
+          </a:bodyPr>
+          <a:lstStyle/>
+          <a:p>
+            <a:pPr algn="ctr">
+              <a:spcAft>
+                <a:spcPts val="0"/>
+              </a:spcAft>
+            </a:pPr>
+            <a:r>
+              <a:rPr sz="2000"/>
+              <a:t>67070501021</a:t>
+            </a:r>
+          </a:p>
+          <a:p>
+            <a:pPr algn="ctr">
+              <a:spcAft>
+                <a:spcPts val="0"/>
+              </a:spcAft>
+            </a:pPr>
+            <a:r>
+              <a:rPr sz="2000"/>
+              <a:t>Thanaboon Tikaew</a:t>
+            </a:r>
+          </a:p>
+          <a:p>
+            <a:pPr algn="ctr">
+              <a:spcAft>
+                <a:spcPts val="0"/>
+              </a:spcAft>
+            </a:pPr>
+          </a:p>
+          <a:p>
+            <a:pPr algn="ctr">
+              <a:spcAft>
+                <a:spcPts val="0"/>
+              </a:spcAft>
+            </a:pPr>
+            <a:r>
+              <a:rPr sz="2000">
+                <a:solidFill>
+                  <a:srgbClr val="C0392B"/>
+                </a:solidFill>
+              </a:rPr>
+              <a:t>MCS Lock</a:t>
+            </a:r>
+          </a:p>
+        </p:txBody>
+      </p:sp>
+      <p:sp>
+        <p:nvSpPr>
+          <p:cNvPr id="8" name="TextBox 7"/>
+          <p:cNvSpPr txBox="1"/>
+          <p:nvPr/>
+        </p:nvSpPr>
+        <p:spPr>
+          <a:xfrm>
+            <a:off x="4251960" y="4023360"/>
+            <a:ext cx="3657600" cy="2011680"/>
+          </a:xfrm>
+          <a:prstGeom prst="rect">
+            <a:avLst/>
+          </a:prstGeom>
+          <a:noFill/>
+        </p:spPr>
+        <p:txBody>
+          <a:bodyPr wrap="square">
+            <a:spAutoFit/>
+          </a:bodyPr>
+          <a:lstStyle/>
+          <a:p>
+            <a:pPr algn="ctr">
+              <a:spcAft>
+                <a:spcPts val="0"/>
+              </a:spcAft>
+            </a:pPr>
+            <a:r>
+              <a:rPr sz="2000"/>
+              <a:t>67070501040</a:t>
+            </a:r>
+          </a:p>
+          <a:p>
+            <a:pPr algn="ctr">
+              <a:spcAft>
+                <a:spcPts val="0"/>
+              </a:spcAft>
+            </a:pPr>
+            <a:r>
+              <a:rPr sz="2000"/>
+              <a:t>Worawut Sereethai</a:t>
+            </a:r>
+          </a:p>
+          <a:p>
+            <a:pPr algn="ctr">
+              <a:spcAft>
+                <a:spcPts val="0"/>
+              </a:spcAft>
+            </a:pPr>
+          </a:p>
+          <a:p>
+            <a:pPr algn="ctr">
+              <a:spcAft>
+                <a:spcPts val="0"/>
+              </a:spcAft>
+            </a:pPr>
+            <a:r>
+              <a:rPr sz="2000">
+                <a:solidFill>
+                  <a:srgbClr val="C0392B"/>
+                </a:solidFill>
+              </a:rPr>
+              <a:t>Comparison: Throughput</a:t>
+            </a:r>
+          </a:p>
+        </p:txBody>
+      </p:sp>
+      <p:sp>
+        <p:nvSpPr>
+          <p:cNvPr id="9" name="TextBox 8"/>
+          <p:cNvSpPr txBox="1"/>
+          <p:nvPr/>
+        </p:nvSpPr>
+        <p:spPr>
+          <a:xfrm>
+            <a:off x="8046720" y="4023360"/>
+            <a:ext cx="3657600" cy="2011680"/>
+          </a:xfrm>
+          <a:prstGeom prst="rect">
+            <a:avLst/>
+          </a:prstGeom>
+          <a:noFill/>
+        </p:spPr>
+        <p:txBody>
+          <a:bodyPr wrap="square">
+            <a:spAutoFit/>
+          </a:bodyPr>
+          <a:lstStyle/>
+          <a:p>
+            <a:pPr algn="ctr">
+              <a:spcAft>
+                <a:spcPts val="0"/>
+              </a:spcAft>
+            </a:pPr>
+            <a:r>
+              <a:rPr sz="2000"/>
+              <a:t>67070501059</a:t>
+            </a:r>
+          </a:p>
+          <a:p>
+            <a:pPr algn="ctr">
+              <a:spcAft>
+                <a:spcPts val="0"/>
+              </a:spcAft>
+            </a:pPr>
+            <a:r>
+              <a:rPr sz="2000"/>
+              <a:t>Chanon Lhumsa-ard</a:t>
+            </a:r>
+          </a:p>
+          <a:p>
+            <a:pPr algn="ctr">
+              <a:spcAft>
+                <a:spcPts val="0"/>
+              </a:spcAft>
+            </a:pPr>
+          </a:p>
+          <a:p>
+            <a:pPr algn="ctr">
+              <a:spcAft>
+                <a:spcPts val="0"/>
+              </a:spcAft>
+            </a:pPr>
+            <a:r>
+              <a:rPr sz="2000">
+                <a:solidFill>
+                  <a:srgbClr val="C0392B"/>
+                </a:solidFill>
+              </a:rPr>
+              <a:t>Comparison: Summary</a:t>
+            </a:r>
+          </a:p>
+        </p:txBody>
+      </p:sp>
+    </p:spTree>
+  </p:cSld>
+  <p:clrMapOvr>
+    <a:masterClrMapping/>
+  </p:clrMapOvr>
+</p:sld>
+</file>
+
+<file path=ppt/slides/slide20.xml><?xml version="1.0" encoding="utf-8"?>
+<p:sld xmlns:a="http://schemas.openxmlformats.org/drawingml/2006/main" xmlns:p="http://schemas.openxmlformats.org/presentationml/2006/main" xmlns:r="http://schemas.openxmlformats.org/officeDocument/2006/relationships">
+  <p:cSld>
+    <p:spTree>
+      <p:nvGrpSpPr>
+        <p:cNvPr id="1" name=""/>
+        <p:cNvGrpSpPr/>
+        <p:nvPr/>
+      </p:nvGrpSpPr>
+      <p:grpSpPr/>
+      <p:sp>
+        <p:nvSpPr>
+          <p:cNvPr id="2" name="Title 1"/>
+          <p:cNvSpPr>
+            <a:spLocks noGrp="1"/>
+          </p:cNvSpPr>
+          <p:nvPr>
+            <p:ph type="title"/>
+          </p:nvPr>
+        </p:nvSpPr>
+        <p:spPr/>
+        <p:txBody>
+          <a:bodyPr/>
+          <a:lstStyle/>
+          <a:p>
+            <a:r>
+              <a:t>MCS: Mutual Exclusion and Deadlock</a:t>
+            </a:r>
+          </a:p>
+        </p:txBody>
+      </p:sp>
+      <p:sp>
+        <p:nvSpPr>
+          <p:cNvPr id="3" name="TextBox 2"/>
+          <p:cNvSpPr txBox="1"/>
+          <p:nvPr/>
+        </p:nvSpPr>
+        <p:spPr>
+          <a:xfrm>
+            <a:off x="11247120" y="6400800"/>
+            <a:ext cx="731520" cy="365760"/>
+          </a:xfrm>
+          <a:prstGeom prst="rect">
+            <a:avLst/>
+          </a:prstGeom>
+          <a:noFill/>
+        </p:spPr>
+        <p:txBody>
+          <a:bodyPr wrap="none">
+            <a:spAutoFit/>
+          </a:bodyPr>
+          <a:lstStyle/>
+          <a:p>
+            <a:pPr algn="r"/>
+            <a:r>
+              <a:rPr sz="1200">
+                <a:solidFill>
+                  <a:srgbClr val="808080"/>
+                </a:solidFill>
+              </a:rPr>
+              <a:t>20</a:t>
+            </a:r>
+          </a:p>
+        </p:txBody>
+      </p:sp>
+      <p:sp>
+        <p:nvSpPr>
+          <p:cNvPr id="4" name="TextBox 3"/>
+          <p:cNvSpPr txBox="1"/>
+          <p:nvPr/>
+        </p:nvSpPr>
+        <p:spPr>
+          <a:xfrm>
+            <a:off x="548640" y="1554480"/>
+            <a:ext cx="4389120" cy="4937760"/>
+          </a:xfrm>
+          <a:prstGeom prst="rect">
+            <a:avLst/>
+          </a:prstGeom>
+          <a:noFill/>
+        </p:spPr>
+        <p:txBody>
+          <a:bodyPr wrap="square">
+            <a:spAutoFit/>
+          </a:bodyPr>
+          <a:lstStyle/>
+          <a:p>
+            <a:pPr>
+              <a:spcAft>
+                <a:spcPts val="800"/>
+              </a:spcAft>
+            </a:pPr>
+            <a:r>
+              <a:rPr sz="1700"/>
+              <a:t>• Mutual exclusion: the exchange gives every thread one place in one queue; only the head is inside, and it wakes exactly one node</a:t>
+            </a:r>
+          </a:p>
+          <a:p>
+            <a:pPr>
+              <a:spcAft>
+                <a:spcPts val="800"/>
+              </a:spcAft>
+            </a:pPr>
+            <a:r>
+              <a:rPr sz="1700"/>
+              <a:t>• No deadlock: the holder always hands over — to the next node, or resets tail when nobody waits</a:t>
+            </a:r>
+          </a:p>
+          <a:p>
+            <a:pPr>
+              <a:spcAft>
+                <a:spcPts val="800"/>
+              </a:spcAft>
+            </a:pPr>
+            <a:r>
+              <a:rPr sz="1700"/>
+              <a:t>• release() waits for a waiter that has swapped tail but not linked in yet</a:t>
+            </a:r>
+          </a:p>
+          <a:p>
+            <a:pPr>
+              <a:spcAft>
+                <a:spcPts val="800"/>
+              </a:spcAft>
+            </a:pPr>
+            <a:r>
+              <a:rPr sz="1700"/>
+              <a:t>• Measured: all 24 runs (1–8 threads, all CPUs and one CPU) finished with lost = 0</a:t>
+            </a:r>
+          </a:p>
+        </p:txBody>
+      </p:sp>
+      <p:sp>
+        <p:nvSpPr>
+          <p:cNvPr id="5" name="TextBox 4"/>
+          <p:cNvSpPr txBox="1"/>
+          <p:nvPr/>
+        </p:nvSpPr>
+        <p:spPr>
+          <a:xfrm>
+            <a:off x="5120640" y="1463040"/>
+            <a:ext cx="6675120" cy="2636520"/>
+          </a:xfrm>
+          <a:prstGeom prst="rect">
+            <a:avLst/>
+          </a:prstGeom>
+          <a:solidFill>
+            <a:srgbClr val="F4F4F4"/>
+          </a:solidFill>
+        </p:spPr>
+        <p:txBody>
+          <a:bodyPr wrap="none">
+            <a:spAutoFit/>
+          </a:bodyPr>
+          <a:lstStyle/>
+          <a:p>
+            <a:pPr>
+              <a:spcAft>
+                <a:spcPts val="0"/>
+              </a:spcAft>
+            </a:pPr>
+            <a:r>
+              <a:rPr sz="1150">
+                <a:latin typeface="Consolas"/>
+              </a:rPr>
+              <a:t>void lock_release(int id)</a:t>
+            </a:r>
+          </a:p>
+          <a:p>
+            <a:pPr>
+              <a:spcAft>
+                <a:spcPts val="0"/>
+              </a:spcAft>
+            </a:pPr>
+            <a:r>
+              <a:rPr sz="1150">
+                <a:latin typeface="Consolas"/>
+              </a:rPr>
+              <a:t>{</a:t>
+            </a:r>
+          </a:p>
+          <a:p>
+            <a:pPr>
+              <a:spcAft>
+                <a:spcPts val="0"/>
+              </a:spcAft>
+            </a:pPr>
+            <a:r>
+              <a:rPr sz="1150">
+                <a:latin typeface="Consolas"/>
+              </a:rPr>
+              <a:t>    struct node *me = &amp;qnode[id];</a:t>
+            </a:r>
+          </a:p>
+          <a:p>
+            <a:pPr>
+              <a:spcAft>
+                <a:spcPts val="0"/>
+              </a:spcAft>
+            </a:pPr>
+            <a:r>
+              <a:rPr sz="1150">
+                <a:latin typeface="Consolas"/>
+              </a:rPr>
+              <a:t>    struct node *next = LOAD(&amp;me-&gt;next);</a:t>
+            </a:r>
+          </a:p>
+          <a:p>
+            <a:pPr>
+              <a:spcAft>
+                <a:spcPts val="0"/>
+              </a:spcAft>
+            </a:pPr>
+            <a:r>
+              <a:rPr sz="1150">
+                <a:latin typeface="Consolas"/>
+              </a:rPr>
+              <a:t>    if (next == NULL) {</a:t>
+            </a:r>
+          </a:p>
+          <a:p>
+            <a:pPr>
+              <a:spcAft>
+                <a:spcPts val="0"/>
+              </a:spcAft>
+            </a:pPr>
+            <a:r>
+              <a:rPr sz="1150">
+                <a:latin typeface="Consolas"/>
+              </a:rPr>
+              <a:t>        struct node *expect = me;</a:t>
+            </a:r>
+          </a:p>
+          <a:p>
+            <a:pPr>
+              <a:spcAft>
+                <a:spcPts val="0"/>
+              </a:spcAft>
+            </a:pPr>
+            <a:r>
+              <a:rPr sz="1150">
+                <a:latin typeface="Consolas"/>
+              </a:rPr>
+              <a:t>        if (__atomic_compare_exchange_n(&amp;tail, &amp;expect, NULL, 0,</a:t>
+            </a:r>
+          </a:p>
+          <a:p>
+            <a:pPr>
+              <a:spcAft>
+                <a:spcPts val="0"/>
+              </a:spcAft>
+            </a:pPr>
+            <a:r>
+              <a:rPr sz="1150">
+                <a:latin typeface="Consolas"/>
+              </a:rPr>
+              <a:t>                                        __ATOMIC_RELEASE, __ATOMIC_RELAXED))</a:t>
+            </a:r>
+          </a:p>
+          <a:p>
+            <a:pPr>
+              <a:spcAft>
+                <a:spcPts val="0"/>
+              </a:spcAft>
+            </a:pPr>
+            <a:r>
+              <a:rPr sz="1150">
+                <a:latin typeface="Consolas"/>
+              </a:rPr>
+              <a:t>            return;             /* nobody waiting: lock is free */</a:t>
+            </a:r>
+          </a:p>
+          <a:p>
+            <a:pPr>
+              <a:spcAft>
+                <a:spcPts val="0"/>
+              </a:spcAft>
+            </a:pPr>
+            <a:r>
+              <a:rPr sz="1150">
+                <a:latin typeface="Consolas"/>
+              </a:rPr>
+              <a:t>        while ((next = LOAD(&amp;me-&gt;next)) == NULL)</a:t>
+            </a:r>
+          </a:p>
+          <a:p>
+            <a:pPr>
+              <a:spcAft>
+                <a:spcPts val="0"/>
+              </a:spcAft>
+            </a:pPr>
+            <a:r>
+              <a:rPr sz="1150">
+                <a:latin typeface="Consolas"/>
+              </a:rPr>
+              <a:t>            ;                   /* a waiter is still linking in */</a:t>
+            </a:r>
+          </a:p>
+          <a:p>
+            <a:pPr>
+              <a:spcAft>
+                <a:spcPts val="0"/>
+              </a:spcAft>
+            </a:pPr>
+            <a:r>
+              <a:rPr sz="1150">
+                <a:latin typeface="Consolas"/>
+              </a:rPr>
+              <a:t>    }</a:t>
+            </a:r>
+          </a:p>
+          <a:p>
+            <a:pPr>
+              <a:spcAft>
+                <a:spcPts val="0"/>
+              </a:spcAft>
+            </a:pPr>
+            <a:r>
+              <a:rPr sz="1150">
+                <a:latin typeface="Consolas"/>
+              </a:rPr>
+              <a:t>    STORE(&amp;next-&gt;locked, 0);    /* hand the lock to the next thread */</a:t>
+            </a:r>
+          </a:p>
+          <a:p>
+            <a:pPr>
+              <a:spcAft>
+                <a:spcPts val="0"/>
+              </a:spcAft>
+            </a:pPr>
+            <a:r>
+              <a:rPr sz="1150">
+                <a:latin typeface="Consolas"/>
+              </a:rPr>
+              <a:t>}</a:t>
+            </a:r>
+          </a:p>
+        </p:txBody>
+      </p:sp>
+    </p:spTree>
+  </p:cSld>
+  <p:clrMapOvr>
+    <a:masterClrMapping/>
+  </p:clrMapOvr>
+</p:sld>
+</file>
+
+<file path=ppt/slides/slide21.xml><?xml version="1.0" encoding="utf-8"?>
+<p:sld xmlns:a="http://schemas.openxmlformats.org/drawingml/2006/main" xmlns:p="http://schemas.openxmlformats.org/presentationml/2006/main" xmlns:r="http://schemas.openxmlformats.org/officeDocument/2006/relationships">
+  <p:cSld>
+    <p:spTree>
+      <p:nvGrpSpPr>
+        <p:cNvPr id="1" name=""/>
+        <p:cNvGrpSpPr/>
+        <p:nvPr/>
+      </p:nvGrpSpPr>
+      <p:grpSpPr/>
+      <p:sp>
+        <p:nvSpPr>
+          <p:cNvPr id="2" name="Title 1"/>
+          <p:cNvSpPr>
+            <a:spLocks noGrp="1"/>
+          </p:cNvSpPr>
+          <p:nvPr>
+            <p:ph type="title"/>
+          </p:nvPr>
+        </p:nvSpPr>
+        <p:spPr/>
+        <p:txBody>
+          <a:bodyPr/>
+          <a:lstStyle/>
+          <a:p>
+            <a:r>
+              <a:t>MCS: Performance</a:t>
+            </a:r>
+          </a:p>
+        </p:txBody>
+      </p:sp>
+      <p:sp>
+        <p:nvSpPr>
+          <p:cNvPr id="3" name="TextBox 2"/>
+          <p:cNvSpPr txBox="1"/>
+          <p:nvPr/>
+        </p:nvSpPr>
+        <p:spPr>
+          <a:xfrm>
+            <a:off x="11247120" y="6400800"/>
+            <a:ext cx="731520" cy="365760"/>
+          </a:xfrm>
+          <a:prstGeom prst="rect">
+            <a:avLst/>
+          </a:prstGeom>
+          <a:noFill/>
+        </p:spPr>
+        <p:txBody>
+          <a:bodyPr wrap="none">
+            <a:spAutoFit/>
+          </a:bodyPr>
+          <a:lstStyle/>
+          <a:p>
+            <a:pPr algn="r"/>
+            <a:r>
+              <a:rPr sz="1200">
+                <a:solidFill>
+                  <a:srgbClr val="808080"/>
+                </a:solidFill>
+              </a:rPr>
+              <a:t>21</a:t>
             </a:r>
           </a:p>
         </p:txBody>
@@ -9274,7 +11145,7 @@
 </p:sld>
 </file>
 
-<file path=ppt/slides/slide19.xml><?xml version="1.0" encoding="utf-8"?>
+<file path=ppt/slides/slide22.xml><?xml version="1.0" encoding="utf-8"?>
 <p:sld xmlns:a="http://schemas.openxmlformats.org/drawingml/2006/main" xmlns:p="http://schemas.openxmlformats.org/presentationml/2006/main" xmlns:r="http://schemas.openxmlformats.org/officeDocument/2006/relationships">
   <p:cSld>
     <p:spTree>
@@ -9334,7 +11205,7 @@
                   <a:srgbClr val="808080"/>
                 </a:solidFill>
               </a:rPr>
-              <a:t>19</a:t>
+              <a:t>22</a:t>
             </a:r>
           </a:p>
         </p:txBody>
@@ -9424,803 +11295,6 @@
             <a:r>
               <a:rPr sz="1800"/>
               <a:t>– On one CPU here: 511 k acq/s at 8 threads, fairness 0.00</a:t>
-            </a:r>
-          </a:p>
-        </p:txBody>
-      </p:sp>
-    </p:spTree>
-  </p:cSld>
-  <p:clrMapOvr>
-    <a:masterClrMapping/>
-  </p:clrMapOvr>
-</p:sld>
-</file>
-
-<file path=ppt/slides/slide2.xml><?xml version="1.0" encoding="utf-8"?>
-<p:sld xmlns:a="http://schemas.openxmlformats.org/drawingml/2006/main" xmlns:p="http://schemas.openxmlformats.org/presentationml/2006/main" xmlns:r="http://schemas.openxmlformats.org/officeDocument/2006/relationships">
-  <p:cSld>
-    <p:spTree>
-      <p:nvGrpSpPr>
-        <p:cNvPr id="1" name=""/>
-        <p:cNvGrpSpPr/>
-        <p:nvPr/>
-      </p:nvGrpSpPr>
-      <p:grpSpPr/>
-      <p:sp>
-        <p:nvSpPr>
-          <p:cNvPr id="2" name="Title 1"/>
-          <p:cNvSpPr>
-            <a:spLocks noGrp="1"/>
-          </p:cNvSpPr>
-          <p:nvPr>
-            <p:ph type="title"/>
-          </p:nvPr>
-        </p:nvSpPr>
-        <p:spPr/>
-        <p:txBody>
-          <a:bodyPr/>
-          <a:lstStyle/>
-          <a:p>
-            <a:r>
-              <a:t>Group: OS InW</a:t>
-            </a:r>
-          </a:p>
-        </p:txBody>
-      </p:sp>
-      <p:sp>
-        <p:nvSpPr>
-          <p:cNvPr id="3" name="TextBox 2"/>
-          <p:cNvSpPr txBox="1"/>
-          <p:nvPr/>
-        </p:nvSpPr>
-        <p:spPr>
-          <a:xfrm>
-            <a:off x="11247120" y="6400800"/>
-            <a:ext cx="731520" cy="365760"/>
-          </a:xfrm>
-          <a:prstGeom prst="rect">
-            <a:avLst/>
-          </a:prstGeom>
-          <a:noFill/>
-        </p:spPr>
-        <p:txBody>
-          <a:bodyPr wrap="none">
-            <a:spAutoFit/>
-          </a:bodyPr>
-          <a:lstStyle/>
-          <a:p>
-            <a:pPr algn="r"/>
-            <a:r>
-              <a:rPr sz="1200">
-                <a:solidFill>
-                  <a:srgbClr val="808080"/>
-                </a:solidFill>
-              </a:rPr>
-              <a:t>2</a:t>
-            </a:r>
-          </a:p>
-        </p:txBody>
-      </p:sp>
-      <p:sp>
-        <p:nvSpPr>
-          <p:cNvPr id="4" name="TextBox 3"/>
-          <p:cNvSpPr txBox="1"/>
-          <p:nvPr/>
-        </p:nvSpPr>
-        <p:spPr>
-          <a:xfrm>
-            <a:off x="457200" y="1737360"/>
-            <a:ext cx="3657600" cy="2011680"/>
-          </a:xfrm>
-          <a:prstGeom prst="rect">
-            <a:avLst/>
-          </a:prstGeom>
-          <a:noFill/>
-        </p:spPr>
-        <p:txBody>
-          <a:bodyPr wrap="square">
-            <a:spAutoFit/>
-          </a:bodyPr>
-          <a:lstStyle/>
-          <a:p>
-            <a:pPr algn="ctr">
-              <a:spcAft>
-                <a:spcPts val="0"/>
-              </a:spcAft>
-            </a:pPr>
-            <a:r>
-              <a:rPr sz="2000"/>
-              <a:t>67070501075</a:t>
-            </a:r>
-          </a:p>
-          <a:p>
-            <a:pPr algn="ctr">
-              <a:spcAft>
-                <a:spcPts val="0"/>
-              </a:spcAft>
-            </a:pPr>
-            <a:r>
-              <a:rPr sz="2000"/>
-              <a:t>Siriwan Yindeephot</a:t>
-            </a:r>
-          </a:p>
-          <a:p>
-            <a:pPr algn="ctr">
-              <a:spcAft>
-                <a:spcPts val="0"/>
-              </a:spcAft>
-            </a:pPr>
-          </a:p>
-          <a:p>
-            <a:pPr algn="ctr">
-              <a:spcAft>
-                <a:spcPts val="0"/>
-              </a:spcAft>
-            </a:pPr>
-            <a:r>
-              <a:rPr sz="2000">
-                <a:solidFill>
-                  <a:srgbClr val="C0392B"/>
-                </a:solidFill>
-              </a:rPr>
-              <a:t>How We Evaluate</a:t>
-            </a:r>
-          </a:p>
-          <a:p>
-            <a:pPr algn="ctr">
-              <a:spcAft>
-                <a:spcPts val="0"/>
-              </a:spcAft>
-            </a:pPr>
-            <a:r>
-              <a:rPr sz="2000">
-                <a:solidFill>
-                  <a:srgbClr val="C0392B"/>
-                </a:solidFill>
-              </a:rPr>
-              <a:t>Conclusion</a:t>
-            </a:r>
-          </a:p>
-        </p:txBody>
-      </p:sp>
-      <p:sp>
-        <p:nvSpPr>
-          <p:cNvPr id="5" name="TextBox 4"/>
-          <p:cNvSpPr txBox="1"/>
-          <p:nvPr/>
-        </p:nvSpPr>
-        <p:spPr>
-          <a:xfrm>
-            <a:off x="4251960" y="1737360"/>
-            <a:ext cx="3657600" cy="2011680"/>
-          </a:xfrm>
-          <a:prstGeom prst="rect">
-            <a:avLst/>
-          </a:prstGeom>
-          <a:noFill/>
-        </p:spPr>
-        <p:txBody>
-          <a:bodyPr wrap="square">
-            <a:spAutoFit/>
-          </a:bodyPr>
-          <a:lstStyle/>
-          <a:p>
-            <a:pPr algn="ctr">
-              <a:spcAft>
-                <a:spcPts val="0"/>
-              </a:spcAft>
-            </a:pPr>
-            <a:r>
-              <a:rPr sz="2000"/>
-              <a:t>67070501018</a:t>
-            </a:r>
-          </a:p>
-          <a:p>
-            <a:pPr algn="ctr">
-              <a:spcAft>
-                <a:spcPts val="0"/>
-              </a:spcAft>
-            </a:pPr>
-            <a:r>
-              <a:rPr sz="2000"/>
-              <a:t>Tithinan Sobking</a:t>
-            </a:r>
-          </a:p>
-          <a:p>
-            <a:pPr algn="ctr">
-              <a:spcAft>
-                <a:spcPts val="0"/>
-              </a:spcAft>
-            </a:pPr>
-          </a:p>
-          <a:p>
-            <a:pPr algn="ctr">
-              <a:spcAft>
-                <a:spcPts val="0"/>
-              </a:spcAft>
-            </a:pPr>
-            <a:r>
-              <a:rPr sz="2000">
-                <a:solidFill>
-                  <a:srgbClr val="C0392B"/>
-                </a:solidFill>
-              </a:rPr>
-              <a:t>Peterson's Algorithm</a:t>
-            </a:r>
-          </a:p>
-        </p:txBody>
-      </p:sp>
-      <p:sp>
-        <p:nvSpPr>
-          <p:cNvPr id="6" name="TextBox 5"/>
-          <p:cNvSpPr txBox="1"/>
-          <p:nvPr/>
-        </p:nvSpPr>
-        <p:spPr>
-          <a:xfrm>
-            <a:off x="8046720" y="1737360"/>
-            <a:ext cx="3657600" cy="2011680"/>
-          </a:xfrm>
-          <a:prstGeom prst="rect">
-            <a:avLst/>
-          </a:prstGeom>
-          <a:noFill/>
-        </p:spPr>
-        <p:txBody>
-          <a:bodyPr wrap="square">
-            <a:spAutoFit/>
-          </a:bodyPr>
-          <a:lstStyle/>
-          <a:p>
-            <a:pPr algn="ctr">
-              <a:spcAft>
-                <a:spcPts val="0"/>
-              </a:spcAft>
-            </a:pPr>
-            <a:r>
-              <a:rPr sz="2000"/>
-              <a:t>67070501005</a:t>
-            </a:r>
-          </a:p>
-          <a:p>
-            <a:pPr algn="ctr">
-              <a:spcAft>
-                <a:spcPts val="0"/>
-              </a:spcAft>
-            </a:pPr>
-            <a:r>
-              <a:rPr sz="2000"/>
-              <a:t>Kiatisak Markmeeshap</a:t>
-            </a:r>
-          </a:p>
-          <a:p>
-            <a:pPr algn="ctr">
-              <a:spcAft>
-                <a:spcPts val="0"/>
-              </a:spcAft>
-            </a:pPr>
-          </a:p>
-          <a:p>
-            <a:pPr algn="ctr">
-              <a:spcAft>
-                <a:spcPts val="0"/>
-              </a:spcAft>
-            </a:pPr>
-            <a:r>
-              <a:rPr sz="2000">
-                <a:solidFill>
-                  <a:srgbClr val="C0392B"/>
-                </a:solidFill>
-              </a:rPr>
-              <a:t>Load-Linked / Store-Conditional</a:t>
-            </a:r>
-          </a:p>
-        </p:txBody>
-      </p:sp>
-      <p:sp>
-        <p:nvSpPr>
-          <p:cNvPr id="7" name="TextBox 6"/>
-          <p:cNvSpPr txBox="1"/>
-          <p:nvPr/>
-        </p:nvSpPr>
-        <p:spPr>
-          <a:xfrm>
-            <a:off x="457200" y="4023360"/>
-            <a:ext cx="3657600" cy="2011680"/>
-          </a:xfrm>
-          <a:prstGeom prst="rect">
-            <a:avLst/>
-          </a:prstGeom>
-          <a:noFill/>
-        </p:spPr>
-        <p:txBody>
-          <a:bodyPr wrap="square">
-            <a:spAutoFit/>
-          </a:bodyPr>
-          <a:lstStyle/>
-          <a:p>
-            <a:pPr algn="ctr">
-              <a:spcAft>
-                <a:spcPts val="0"/>
-              </a:spcAft>
-            </a:pPr>
-            <a:r>
-              <a:rPr sz="2000"/>
-              <a:t>67070501021</a:t>
-            </a:r>
-          </a:p>
-          <a:p>
-            <a:pPr algn="ctr">
-              <a:spcAft>
-                <a:spcPts val="0"/>
-              </a:spcAft>
-            </a:pPr>
-            <a:r>
-              <a:rPr sz="2000"/>
-              <a:t>Thanaboon Tikaew</a:t>
-            </a:r>
-          </a:p>
-          <a:p>
-            <a:pPr algn="ctr">
-              <a:spcAft>
-                <a:spcPts val="0"/>
-              </a:spcAft>
-            </a:pPr>
-          </a:p>
-          <a:p>
-            <a:pPr algn="ctr">
-              <a:spcAft>
-                <a:spcPts val="0"/>
-              </a:spcAft>
-            </a:pPr>
-            <a:r>
-              <a:rPr sz="2000">
-                <a:solidFill>
-                  <a:srgbClr val="C0392B"/>
-                </a:solidFill>
-              </a:rPr>
-              <a:t>MCS Lock</a:t>
-            </a:r>
-          </a:p>
-        </p:txBody>
-      </p:sp>
-      <p:sp>
-        <p:nvSpPr>
-          <p:cNvPr id="8" name="TextBox 7"/>
-          <p:cNvSpPr txBox="1"/>
-          <p:nvPr/>
-        </p:nvSpPr>
-        <p:spPr>
-          <a:xfrm>
-            <a:off x="4251960" y="4023360"/>
-            <a:ext cx="3657600" cy="2011680"/>
-          </a:xfrm>
-          <a:prstGeom prst="rect">
-            <a:avLst/>
-          </a:prstGeom>
-          <a:noFill/>
-        </p:spPr>
-        <p:txBody>
-          <a:bodyPr wrap="square">
-            <a:spAutoFit/>
-          </a:bodyPr>
-          <a:lstStyle/>
-          <a:p>
-            <a:pPr algn="ctr">
-              <a:spcAft>
-                <a:spcPts val="0"/>
-              </a:spcAft>
-            </a:pPr>
-            <a:r>
-              <a:rPr sz="2000"/>
-              <a:t>67070501040</a:t>
-            </a:r>
-          </a:p>
-          <a:p>
-            <a:pPr algn="ctr">
-              <a:spcAft>
-                <a:spcPts val="0"/>
-              </a:spcAft>
-            </a:pPr>
-            <a:r>
-              <a:rPr sz="2000"/>
-              <a:t>Worawut Sereethai</a:t>
-            </a:r>
-          </a:p>
-          <a:p>
-            <a:pPr algn="ctr">
-              <a:spcAft>
-                <a:spcPts val="0"/>
-              </a:spcAft>
-            </a:pPr>
-          </a:p>
-          <a:p>
-            <a:pPr algn="ctr">
-              <a:spcAft>
-                <a:spcPts val="0"/>
-              </a:spcAft>
-            </a:pPr>
-            <a:r>
-              <a:rPr sz="2000">
-                <a:solidFill>
-                  <a:srgbClr val="C0392B"/>
-                </a:solidFill>
-              </a:rPr>
-              <a:t>Comparison: Throughput</a:t>
-            </a:r>
-          </a:p>
-        </p:txBody>
-      </p:sp>
-      <p:sp>
-        <p:nvSpPr>
-          <p:cNvPr id="9" name="TextBox 8"/>
-          <p:cNvSpPr txBox="1"/>
-          <p:nvPr/>
-        </p:nvSpPr>
-        <p:spPr>
-          <a:xfrm>
-            <a:off x="8046720" y="4023360"/>
-            <a:ext cx="3657600" cy="2011680"/>
-          </a:xfrm>
-          <a:prstGeom prst="rect">
-            <a:avLst/>
-          </a:prstGeom>
-          <a:noFill/>
-        </p:spPr>
-        <p:txBody>
-          <a:bodyPr wrap="square">
-            <a:spAutoFit/>
-          </a:bodyPr>
-          <a:lstStyle/>
-          <a:p>
-            <a:pPr algn="ctr">
-              <a:spcAft>
-                <a:spcPts val="0"/>
-              </a:spcAft>
-            </a:pPr>
-            <a:r>
-              <a:rPr sz="2000"/>
-              <a:t>67070501059</a:t>
-            </a:r>
-          </a:p>
-          <a:p>
-            <a:pPr algn="ctr">
-              <a:spcAft>
-                <a:spcPts val="0"/>
-              </a:spcAft>
-            </a:pPr>
-            <a:r>
-              <a:rPr sz="2000"/>
-              <a:t>Chanon Lhumsa-ard</a:t>
-            </a:r>
-          </a:p>
-          <a:p>
-            <a:pPr algn="ctr">
-              <a:spcAft>
-                <a:spcPts val="0"/>
-              </a:spcAft>
-            </a:pPr>
-          </a:p>
-          <a:p>
-            <a:pPr algn="ctr">
-              <a:spcAft>
-                <a:spcPts val="0"/>
-              </a:spcAft>
-            </a:pPr>
-            <a:r>
-              <a:rPr sz="2000">
-                <a:solidFill>
-                  <a:srgbClr val="C0392B"/>
-                </a:solidFill>
-              </a:rPr>
-              <a:t>Comparison: Summary</a:t>
-            </a:r>
-          </a:p>
-        </p:txBody>
-      </p:sp>
-    </p:spTree>
-  </p:cSld>
-  <p:clrMapOvr>
-    <a:masterClrMapping/>
-  </p:clrMapOvr>
-</p:sld>
-</file>
-
-<file path=ppt/slides/slide20.xml><?xml version="1.0" encoding="utf-8"?>
-<p:sld xmlns:a="http://schemas.openxmlformats.org/drawingml/2006/main" xmlns:p="http://schemas.openxmlformats.org/presentationml/2006/main" xmlns:r="http://schemas.openxmlformats.org/officeDocument/2006/relationships">
-  <p:cSld>
-    <p:spTree>
-      <p:nvGrpSpPr>
-        <p:cNvPr id="1" name=""/>
-        <p:cNvGrpSpPr/>
-        <p:nvPr/>
-      </p:nvGrpSpPr>
-      <p:grpSpPr/>
-      <p:sp>
-        <p:nvSpPr>
-          <p:cNvPr id="2" name="Title 1"/>
-          <p:cNvSpPr>
-            <a:spLocks noGrp="1"/>
-          </p:cNvSpPr>
-          <p:nvPr>
-            <p:ph type="title"/>
-          </p:nvPr>
-        </p:nvSpPr>
-        <p:spPr/>
-        <p:txBody>
-          <a:bodyPr/>
-          <a:lstStyle/>
-          <a:p>
-            <a:r>
-              <a:t>Comparison: Throughput</a:t>
-            </a:r>
-          </a:p>
-        </p:txBody>
-      </p:sp>
-      <p:sp>
-        <p:nvSpPr>
-          <p:cNvPr id="3" name="Text Placeholder 2"/>
-          <p:cNvSpPr>
-            <a:spLocks noGrp="1"/>
-          </p:cNvSpPr>
-          <p:nvPr>
-            <p:ph type="body" idx="1"/>
-          </p:nvPr>
-        </p:nvSpPr>
-        <p:spPr/>
-        <p:txBody>
-          <a:bodyPr/>
-          <a:lstStyle/>
-          <a:p>
-            <a:r>
-              <a:t>67070501040</a:t>
-            </a:r>
-          </a:p>
-          <a:p>
-            <a:r>
-              <a:t>Worawut Sereethai</a:t>
-            </a:r>
-          </a:p>
-        </p:txBody>
-      </p:sp>
-      <p:sp>
-        <p:nvSpPr>
-          <p:cNvPr id="4" name="TextBox 3"/>
-          <p:cNvSpPr txBox="1"/>
-          <p:nvPr/>
-        </p:nvSpPr>
-        <p:spPr>
-          <a:xfrm>
-            <a:off x="11247120" y="6400800"/>
-            <a:ext cx="731520" cy="365760"/>
-          </a:xfrm>
-          <a:prstGeom prst="rect">
-            <a:avLst/>
-          </a:prstGeom>
-          <a:noFill/>
-        </p:spPr>
-        <p:txBody>
-          <a:bodyPr wrap="none">
-            <a:spAutoFit/>
-          </a:bodyPr>
-          <a:lstStyle/>
-          <a:p>
-            <a:pPr algn="r"/>
-            <a:r>
-              <a:rPr sz="1200">
-                <a:solidFill>
-                  <a:srgbClr val="808080"/>
-                </a:solidFill>
-              </a:rPr>
-              <a:t>20</a:t>
-            </a:r>
-          </a:p>
-        </p:txBody>
-      </p:sp>
-    </p:spTree>
-  </p:cSld>
-  <p:clrMapOvr>
-    <a:masterClrMapping/>
-  </p:clrMapOvr>
-</p:sld>
-</file>
-
-<file path=ppt/slides/slide21.xml><?xml version="1.0" encoding="utf-8"?>
-<p:sld xmlns:a="http://schemas.openxmlformats.org/drawingml/2006/main" xmlns:p="http://schemas.openxmlformats.org/presentationml/2006/main" xmlns:r="http://schemas.openxmlformats.org/officeDocument/2006/relationships">
-  <p:cSld>
-    <p:spTree>
-      <p:nvGrpSpPr>
-        <p:cNvPr id="1" name=""/>
-        <p:cNvGrpSpPr/>
-        <p:nvPr/>
-      </p:nvGrpSpPr>
-      <p:grpSpPr/>
-      <p:sp>
-        <p:nvSpPr>
-          <p:cNvPr id="2" name="Title 1"/>
-          <p:cNvSpPr>
-            <a:spLocks noGrp="1"/>
-          </p:cNvSpPr>
-          <p:nvPr>
-            <p:ph type="title"/>
-          </p:nvPr>
-        </p:nvSpPr>
-        <p:spPr/>
-        <p:txBody>
-          <a:bodyPr/>
-          <a:lstStyle/>
-          <a:p>
-            <a:r>
-              <a:t>Throughput: All CPUs vs One CPU</a:t>
-            </a:r>
-          </a:p>
-        </p:txBody>
-      </p:sp>
-      <p:sp>
-        <p:nvSpPr>
-          <p:cNvPr id="3" name="TextBox 2"/>
-          <p:cNvSpPr txBox="1"/>
-          <p:nvPr/>
-        </p:nvSpPr>
-        <p:spPr>
-          <a:xfrm>
-            <a:off x="11247120" y="6400800"/>
-            <a:ext cx="731520" cy="365760"/>
-          </a:xfrm>
-          <a:prstGeom prst="rect">
-            <a:avLst/>
-          </a:prstGeom>
-          <a:noFill/>
-        </p:spPr>
-        <p:txBody>
-          <a:bodyPr wrap="none">
-            <a:spAutoFit/>
-          </a:bodyPr>
-          <a:lstStyle/>
-          <a:p>
-            <a:pPr algn="r"/>
-            <a:r>
-              <a:rPr sz="1200">
-                <a:solidFill>
-                  <a:srgbClr val="808080"/>
-                </a:solidFill>
-              </a:rPr>
-              <a:t>21</a:t>
-            </a:r>
-          </a:p>
-        </p:txBody>
-      </p:sp>
-      <p:graphicFrame>
-        <p:nvGraphicFramePr>
-          <p:cNvPr id="4" name="Chart 3"/>
-          <p:cNvGraphicFramePr>
-            <a:graphicFrameLocks noGrp="1"/>
-          </p:cNvGraphicFramePr>
-          <p:nvPr/>
-        </p:nvGraphicFramePr>
-        <p:xfrm>
-          <a:off x="365760" y="1371600"/>
-          <a:ext cx="5760720" cy="5120640"/>
-        </p:xfrm>
-        <a:graphic>
-          <a:graphicData uri="http://schemas.openxmlformats.org/drawingml/2006/chart">
-            <c:chart xmlns:c="http://schemas.openxmlformats.org/drawingml/2006/chart" r:id="rId3"/>
-          </a:graphicData>
-        </a:graphic>
-      </p:graphicFrame>
-      <p:graphicFrame>
-        <p:nvGraphicFramePr>
-          <p:cNvPr id="5" name="Chart 4"/>
-          <p:cNvGraphicFramePr>
-            <a:graphicFrameLocks noGrp="1"/>
-          </p:cNvGraphicFramePr>
-          <p:nvPr/>
-        </p:nvGraphicFramePr>
-        <p:xfrm>
-          <a:off x="6217920" y="1371600"/>
-          <a:ext cx="5760720" cy="5120640"/>
-        </p:xfrm>
-        <a:graphic>
-          <a:graphicData uri="http://schemas.openxmlformats.org/drawingml/2006/chart">
-            <c:chart xmlns:c="http://schemas.openxmlformats.org/drawingml/2006/chart" r:id="rId4"/>
-          </a:graphicData>
-        </a:graphic>
-      </p:graphicFrame>
-    </p:spTree>
-  </p:cSld>
-  <p:clrMapOvr>
-    <a:masterClrMapping/>
-  </p:clrMapOvr>
-</p:sld>
-</file>
-
-<file path=ppt/slides/slide22.xml><?xml version="1.0" encoding="utf-8"?>
-<p:sld xmlns:a="http://schemas.openxmlformats.org/drawingml/2006/main" xmlns:p="http://schemas.openxmlformats.org/presentationml/2006/main" xmlns:r="http://schemas.openxmlformats.org/officeDocument/2006/relationships">
-  <p:cSld>
-    <p:spTree>
-      <p:nvGrpSpPr>
-        <p:cNvPr id="1" name=""/>
-        <p:cNvGrpSpPr/>
-        <p:nvPr/>
-      </p:nvGrpSpPr>
-      <p:grpSpPr/>
-      <p:sp>
-        <p:nvSpPr>
-          <p:cNvPr id="2" name="Title 1"/>
-          <p:cNvSpPr>
-            <a:spLocks noGrp="1"/>
-          </p:cNvSpPr>
-          <p:nvPr>
-            <p:ph type="title"/>
-          </p:nvPr>
-        </p:nvSpPr>
-        <p:spPr/>
-        <p:txBody>
-          <a:bodyPr/>
-          <a:lstStyle/>
-          <a:p>
-            <a:r>
-              <a:t>Comparison: Summary</a:t>
-            </a:r>
-          </a:p>
-        </p:txBody>
-      </p:sp>
-      <p:sp>
-        <p:nvSpPr>
-          <p:cNvPr id="3" name="Text Placeholder 2"/>
-          <p:cNvSpPr>
-            <a:spLocks noGrp="1"/>
-          </p:cNvSpPr>
-          <p:nvPr>
-            <p:ph type="body" idx="1"/>
-          </p:nvPr>
-        </p:nvSpPr>
-        <p:spPr/>
-        <p:txBody>
-          <a:bodyPr/>
-          <a:lstStyle/>
-          <a:p>
-            <a:r>
-              <a:t>67070501059</a:t>
-            </a:r>
-          </a:p>
-          <a:p>
-            <a:r>
-              <a:t>Chanon Lhumsa-ard</a:t>
-            </a:r>
-          </a:p>
-        </p:txBody>
-      </p:sp>
-      <p:sp>
-        <p:nvSpPr>
-          <p:cNvPr id="4" name="TextBox 3"/>
-          <p:cNvSpPr txBox="1"/>
-          <p:nvPr/>
-        </p:nvSpPr>
-        <p:spPr>
-          <a:xfrm>
-            <a:off x="11247120" y="6400800"/>
-            <a:ext cx="731520" cy="365760"/>
-          </a:xfrm>
-          <a:prstGeom prst="rect">
-            <a:avLst/>
-          </a:prstGeom>
-          <a:noFill/>
-        </p:spPr>
-        <p:txBody>
-          <a:bodyPr wrap="none">
-            <a:spAutoFit/>
-          </a:bodyPr>
-          <a:lstStyle/>
-          <a:p>
-            <a:pPr algn="r"/>
-            <a:r>
-              <a:rPr sz="1200">
-                <a:solidFill>
-                  <a:srgbClr val="808080"/>
-                </a:solidFill>
-              </a:rPr>
-              <a:t>22</a:t>
             </a:r>
           </a:p>
         </p:txBody>
@@ -10259,14 +11333,40 @@
           <a:lstStyle/>
           <a:p>
             <a:r>
-              <a:t>Summary</a:t>
-            </a:r>
-          </a:p>
-        </p:txBody>
-      </p:sp>
-      <p:sp>
-        <p:nvSpPr>
-          <p:cNvPr id="3" name="TextBox 2"/>
+              <a:t>Comparison: Throughput</a:t>
+            </a:r>
+          </a:p>
+        </p:txBody>
+      </p:sp>
+      <p:sp>
+        <p:nvSpPr>
+          <p:cNvPr id="3" name="Text Placeholder 2"/>
+          <p:cNvSpPr>
+            <a:spLocks noGrp="1"/>
+          </p:cNvSpPr>
+          <p:nvPr>
+            <p:ph type="body" idx="1"/>
+          </p:nvPr>
+        </p:nvSpPr>
+        <p:spPr/>
+        <p:txBody>
+          <a:bodyPr/>
+          <a:lstStyle/>
+          <a:p>
+            <a:r>
+              <a:t>67070501040</a:t>
+            </a:r>
+          </a:p>
+          <a:p>
+            <a:r>
+              <a:t>Worawut Sereethai</a:t>
+            </a:r>
+          </a:p>
+        </p:txBody>
+      </p:sp>
+      <p:sp>
+        <p:nvSpPr>
+          <p:cNvPr id="4" name="TextBox 3"/>
           <p:cNvSpPr txBox="1"/>
           <p:nvPr/>
         </p:nvSpPr>
@@ -10294,6 +11394,1191 @@
                 </a:solidFill>
               </a:rPr>
               <a:t>23</a:t>
+            </a:r>
+          </a:p>
+        </p:txBody>
+      </p:sp>
+    </p:spTree>
+  </p:cSld>
+  <p:clrMapOvr>
+    <a:masterClrMapping/>
+  </p:clrMapOvr>
+</p:sld>
+</file>
+
+<file path=ppt/slides/slide24.xml><?xml version="1.0" encoding="utf-8"?>
+<p:sld xmlns:a="http://schemas.openxmlformats.org/drawingml/2006/main" xmlns:p="http://schemas.openxmlformats.org/presentationml/2006/main" xmlns:r="http://schemas.openxmlformats.org/officeDocument/2006/relationships">
+  <p:cSld>
+    <p:spTree>
+      <p:nvGrpSpPr>
+        <p:cNvPr id="1" name=""/>
+        <p:cNvGrpSpPr/>
+        <p:nvPr/>
+      </p:nvGrpSpPr>
+      <p:grpSpPr/>
+      <p:sp>
+        <p:nvSpPr>
+          <p:cNvPr id="2" name="Title 1"/>
+          <p:cNvSpPr>
+            <a:spLocks noGrp="1"/>
+          </p:cNvSpPr>
+          <p:nvPr>
+            <p:ph type="title"/>
+          </p:nvPr>
+        </p:nvSpPr>
+        <p:spPr/>
+        <p:txBody>
+          <a:bodyPr/>
+          <a:lstStyle/>
+          <a:p>
+            <a:r>
+              <a:t>Throughput on All 8 CPUs</a:t>
+            </a:r>
+          </a:p>
+        </p:txBody>
+      </p:sp>
+      <p:sp>
+        <p:nvSpPr>
+          <p:cNvPr id="3" name="TextBox 2"/>
+          <p:cNvSpPr txBox="1"/>
+          <p:nvPr/>
+        </p:nvSpPr>
+        <p:spPr>
+          <a:xfrm>
+            <a:off x="11247120" y="6400800"/>
+            <a:ext cx="731520" cy="365760"/>
+          </a:xfrm>
+          <a:prstGeom prst="rect">
+            <a:avLst/>
+          </a:prstGeom>
+          <a:noFill/>
+        </p:spPr>
+        <p:txBody>
+          <a:bodyPr wrap="none">
+            <a:spAutoFit/>
+          </a:bodyPr>
+          <a:lstStyle/>
+          <a:p>
+            <a:pPr algn="r"/>
+            <a:r>
+              <a:rPr sz="1200">
+                <a:solidFill>
+                  <a:srgbClr val="808080"/>
+                </a:solidFill>
+              </a:rPr>
+              <a:t>24</a:t>
+            </a:r>
+          </a:p>
+        </p:txBody>
+      </p:sp>
+      <p:graphicFrame>
+        <p:nvGraphicFramePr>
+          <p:cNvPr id="4" name="Chart 3"/>
+          <p:cNvGraphicFramePr>
+            <a:graphicFrameLocks noGrp="1"/>
+          </p:cNvGraphicFramePr>
+          <p:nvPr/>
+        </p:nvGraphicFramePr>
+        <p:xfrm>
+          <a:off x="457200" y="1371600"/>
+          <a:ext cx="6949440" cy="5120640"/>
+        </p:xfrm>
+        <a:graphic>
+          <a:graphicData uri="http://schemas.openxmlformats.org/drawingml/2006/chart">
+            <c:chart xmlns:c="http://schemas.openxmlformats.org/drawingml/2006/chart" r:id="rId3"/>
+          </a:graphicData>
+        </a:graphic>
+      </p:graphicFrame>
+      <p:sp>
+        <p:nvSpPr>
+          <p:cNvPr id="5" name="TextBox 4"/>
+          <p:cNvSpPr txBox="1"/>
+          <p:nvPr/>
+        </p:nvSpPr>
+        <p:spPr>
+          <a:xfrm>
+            <a:off x="7680960" y="1554480"/>
+            <a:ext cx="4114800" cy="4846320"/>
+          </a:xfrm>
+          <a:prstGeom prst="rect">
+            <a:avLst/>
+          </a:prstGeom>
+          <a:noFill/>
+        </p:spPr>
+        <p:txBody>
+          <a:bodyPr wrap="square">
+            <a:spAutoFit/>
+          </a:bodyPr>
+          <a:lstStyle/>
+          <a:p>
+            <a:pPr>
+              <a:spcAft>
+                <a:spcPts val="800"/>
+              </a:spcAft>
+            </a:pPr>
+            <a:r>
+              <a:rPr sz="1700"/>
+              <a:t>• 1 thread, no contention: LL/SC 107 M and TAS 101 M acq/s are fastest</a:t>
+            </a:r>
+          </a:p>
+          <a:p>
+            <a:pPr>
+              <a:spcAft>
+                <a:spcPts val="800"/>
+              </a:spcAft>
+            </a:pPr>
+            <a:r>
+              <a:rPr sz="1700"/>
+              <a:t>• More threads: every spin lock slows down as threads fight over cache lines</a:t>
+            </a:r>
+          </a:p>
+          <a:p>
+            <a:pPr>
+              <a:spcAft>
+                <a:spcPts val="800"/>
+              </a:spcAft>
+            </a:pPr>
+            <a:r>
+              <a:rPr sz="1700"/>
+              <a:t>• 8 threads: MCS 6.9 M, LL/SC 6.1 M, TAS 5.7 M acq/s</a:t>
+            </a:r>
+          </a:p>
+          <a:p>
+            <a:pPr>
+              <a:spcAft>
+                <a:spcPts val="800"/>
+              </a:spcAft>
+            </a:pPr>
+            <a:r>
+              <a:rPr sz="1700">
+                <a:solidFill>
+                  <a:srgbClr val="C0392B"/>
+                </a:solidFill>
+              </a:rPr>
+              <a:t>• Fastest at 8 threads: pthread_mutex, 20 M acq/s</a:t>
+            </a:r>
+          </a:p>
+        </p:txBody>
+      </p:sp>
+    </p:spTree>
+  </p:cSld>
+  <p:clrMapOvr>
+    <a:masterClrMapping/>
+  </p:clrMapOvr>
+</p:sld>
+</file>
+
+<file path=ppt/slides/slide25.xml><?xml version="1.0" encoding="utf-8"?>
+<p:sld xmlns:a="http://schemas.openxmlformats.org/drawingml/2006/main" xmlns:p="http://schemas.openxmlformats.org/presentationml/2006/main" xmlns:r="http://schemas.openxmlformats.org/officeDocument/2006/relationships">
+  <p:cSld>
+    <p:spTree>
+      <p:nvGrpSpPr>
+        <p:cNvPr id="1" name=""/>
+        <p:cNvGrpSpPr/>
+        <p:nvPr/>
+      </p:nvGrpSpPr>
+      <p:grpSpPr/>
+      <p:sp>
+        <p:nvSpPr>
+          <p:cNvPr id="2" name="Title 1"/>
+          <p:cNvSpPr>
+            <a:spLocks noGrp="1"/>
+          </p:cNvSpPr>
+          <p:nvPr>
+            <p:ph type="title"/>
+          </p:nvPr>
+        </p:nvSpPr>
+        <p:spPr/>
+        <p:txBody>
+          <a:bodyPr/>
+          <a:lstStyle/>
+          <a:p>
+            <a:r>
+              <a:t>Throughput on One CPU</a:t>
+            </a:r>
+          </a:p>
+        </p:txBody>
+      </p:sp>
+      <p:sp>
+        <p:nvSpPr>
+          <p:cNvPr id="3" name="TextBox 2"/>
+          <p:cNvSpPr txBox="1"/>
+          <p:nvPr/>
+        </p:nvSpPr>
+        <p:spPr>
+          <a:xfrm>
+            <a:off x="11247120" y="6400800"/>
+            <a:ext cx="731520" cy="365760"/>
+          </a:xfrm>
+          <a:prstGeom prst="rect">
+            <a:avLst/>
+          </a:prstGeom>
+          <a:noFill/>
+        </p:spPr>
+        <p:txBody>
+          <a:bodyPr wrap="none">
+            <a:spAutoFit/>
+          </a:bodyPr>
+          <a:lstStyle/>
+          <a:p>
+            <a:pPr algn="r"/>
+            <a:r>
+              <a:rPr sz="1200">
+                <a:solidFill>
+                  <a:srgbClr val="808080"/>
+                </a:solidFill>
+              </a:rPr>
+              <a:t>25</a:t>
+            </a:r>
+          </a:p>
+        </p:txBody>
+      </p:sp>
+      <p:graphicFrame>
+        <p:nvGraphicFramePr>
+          <p:cNvPr id="4" name="Chart 3"/>
+          <p:cNvGraphicFramePr>
+            <a:graphicFrameLocks noGrp="1"/>
+          </p:cNvGraphicFramePr>
+          <p:nvPr/>
+        </p:nvGraphicFramePr>
+        <p:xfrm>
+          <a:off x="457200" y="1371600"/>
+          <a:ext cx="6949440" cy="5120640"/>
+        </p:xfrm>
+        <a:graphic>
+          <a:graphicData uri="http://schemas.openxmlformats.org/drawingml/2006/chart">
+            <c:chart xmlns:c="http://schemas.openxmlformats.org/drawingml/2006/chart" r:id="rId3"/>
+          </a:graphicData>
+        </a:graphic>
+      </p:graphicFrame>
+      <p:sp>
+        <p:nvSpPr>
+          <p:cNvPr id="5" name="TextBox 4"/>
+          <p:cNvSpPr txBox="1"/>
+          <p:nvPr/>
+        </p:nvSpPr>
+        <p:spPr>
+          <a:xfrm>
+            <a:off x="7680960" y="1554480"/>
+            <a:ext cx="4114800" cy="4846320"/>
+          </a:xfrm>
+          <a:prstGeom prst="rect">
+            <a:avLst/>
+          </a:prstGeom>
+          <a:noFill/>
+        </p:spPr>
+        <p:txBody>
+          <a:bodyPr wrap="square">
+            <a:spAutoFit/>
+          </a:bodyPr>
+          <a:lstStyle/>
+          <a:p>
+            <a:pPr>
+              <a:spcAft>
+                <a:spcPts val="800"/>
+              </a:spcAft>
+            </a:pPr>
+            <a:r>
+              <a:rPr sz="1700"/>
+              <a:t>• TAS / LL/SC stay fast (14 M / 14 M at 8 threads), but one thread holds on while the others starve</a:t>
+            </a:r>
+          </a:p>
+          <a:p>
+            <a:pPr>
+              <a:spcAft>
+                <a:spcPts val="800"/>
+              </a:spcAft>
+            </a:pPr>
+            <a:r>
+              <a:rPr sz="1700"/>
+              <a:t>• Peterson and MCS hand the lock to a thread that is not running: 165 k (Peterson, 2 thr), 511 k (MCS, 8 thr)</a:t>
+            </a:r>
+          </a:p>
+          <a:p>
+            <a:pPr>
+              <a:spcAft>
+                <a:spcPts val="800"/>
+              </a:spcAft>
+            </a:pPr>
+            <a:r>
+              <a:rPr sz="1700">
+                <a:solidFill>
+                  <a:srgbClr val="C0392B"/>
+                </a:solidFill>
+              </a:rPr>
+              <a:t>• pthread_mutex sleeps instead of spinning: 53 M → 54 M acq/s from 1 to 8 threads</a:t>
+            </a:r>
+          </a:p>
+        </p:txBody>
+      </p:sp>
+    </p:spTree>
+  </p:cSld>
+  <p:clrMapOvr>
+    <a:masterClrMapping/>
+  </p:clrMapOvr>
+</p:sld>
+</file>
+
+<file path=ppt/slides/slide26.xml><?xml version="1.0" encoding="utf-8"?>
+<p:sld xmlns:a="http://schemas.openxmlformats.org/drawingml/2006/main" xmlns:p="http://schemas.openxmlformats.org/presentationml/2006/main" xmlns:r="http://schemas.openxmlformats.org/officeDocument/2006/relationships">
+  <p:cSld>
+    <p:spTree>
+      <p:nvGrpSpPr>
+        <p:cNvPr id="1" name=""/>
+        <p:cNvGrpSpPr/>
+        <p:nvPr/>
+      </p:nvGrpSpPr>
+      <p:grpSpPr/>
+      <p:sp>
+        <p:nvSpPr>
+          <p:cNvPr id="2" name="Title 1"/>
+          <p:cNvSpPr>
+            <a:spLocks noGrp="1"/>
+          </p:cNvSpPr>
+          <p:nvPr>
+            <p:ph type="title"/>
+          </p:nvPr>
+        </p:nvSpPr>
+        <p:spPr/>
+        <p:txBody>
+          <a:bodyPr/>
+          <a:lstStyle/>
+          <a:p>
+            <a:r>
+              <a:t>Comparison: Summary</a:t>
+            </a:r>
+          </a:p>
+        </p:txBody>
+      </p:sp>
+      <p:sp>
+        <p:nvSpPr>
+          <p:cNvPr id="3" name="Text Placeholder 2"/>
+          <p:cNvSpPr>
+            <a:spLocks noGrp="1"/>
+          </p:cNvSpPr>
+          <p:nvPr>
+            <p:ph type="body" idx="1"/>
+          </p:nvPr>
+        </p:nvSpPr>
+        <p:spPr/>
+        <p:txBody>
+          <a:bodyPr/>
+          <a:lstStyle/>
+          <a:p>
+            <a:r>
+              <a:t>67070501059</a:t>
+            </a:r>
+          </a:p>
+          <a:p>
+            <a:r>
+              <a:t>Chanon Lhumsa-ard</a:t>
+            </a:r>
+          </a:p>
+        </p:txBody>
+      </p:sp>
+      <p:sp>
+        <p:nvSpPr>
+          <p:cNvPr id="4" name="TextBox 3"/>
+          <p:cNvSpPr txBox="1"/>
+          <p:nvPr/>
+        </p:nvSpPr>
+        <p:spPr>
+          <a:xfrm>
+            <a:off x="11247120" y="6400800"/>
+            <a:ext cx="731520" cy="365760"/>
+          </a:xfrm>
+          <a:prstGeom prst="rect">
+            <a:avLst/>
+          </a:prstGeom>
+          <a:noFill/>
+        </p:spPr>
+        <p:txBody>
+          <a:bodyPr wrap="none">
+            <a:spAutoFit/>
+          </a:bodyPr>
+          <a:lstStyle/>
+          <a:p>
+            <a:pPr algn="r"/>
+            <a:r>
+              <a:rPr sz="1200">
+                <a:solidFill>
+                  <a:srgbClr val="808080"/>
+                </a:solidFill>
+              </a:rPr>
+              <a:t>26</a:t>
+            </a:r>
+          </a:p>
+        </p:txBody>
+      </p:sp>
+    </p:spTree>
+  </p:cSld>
+  <p:clrMapOvr>
+    <a:masterClrMapping/>
+  </p:clrMapOvr>
+</p:sld>
+</file>
+
+<file path=ppt/slides/slide27.xml><?xml version="1.0" encoding="utf-8"?>
+<p:sld xmlns:a="http://schemas.openxmlformats.org/drawingml/2006/main" xmlns:p="http://schemas.openxmlformats.org/presentationml/2006/main" xmlns:r="http://schemas.openxmlformats.org/officeDocument/2006/relationships">
+  <p:cSld>
+    <p:spTree>
+      <p:nvGrpSpPr>
+        <p:cNvPr id="1" name=""/>
+        <p:cNvGrpSpPr/>
+        <p:nvPr/>
+      </p:nvGrpSpPr>
+      <p:grpSpPr/>
+      <p:sp>
+        <p:nvSpPr>
+          <p:cNvPr id="2" name="Title 1"/>
+          <p:cNvSpPr>
+            <a:spLocks noGrp="1"/>
+          </p:cNvSpPr>
+          <p:nvPr>
+            <p:ph type="title"/>
+          </p:nvPr>
+        </p:nvSpPr>
+        <p:spPr/>
+        <p:txBody>
+          <a:bodyPr/>
+          <a:lstStyle/>
+          <a:p>
+            <a:r>
+              <a:t>Correctness: Mutual Exclusion and Deadlock</a:t>
+            </a:r>
+          </a:p>
+        </p:txBody>
+      </p:sp>
+      <p:sp>
+        <p:nvSpPr>
+          <p:cNvPr id="3" name="TextBox 2"/>
+          <p:cNvSpPr txBox="1"/>
+          <p:nvPr/>
+        </p:nvSpPr>
+        <p:spPr>
+          <a:xfrm>
+            <a:off x="11247120" y="6400800"/>
+            <a:ext cx="731520" cy="365760"/>
+          </a:xfrm>
+          <a:prstGeom prst="rect">
+            <a:avLst/>
+          </a:prstGeom>
+          <a:noFill/>
+        </p:spPr>
+        <p:txBody>
+          <a:bodyPr wrap="none">
+            <a:spAutoFit/>
+          </a:bodyPr>
+          <a:lstStyle/>
+          <a:p>
+            <a:pPr algn="r"/>
+            <a:r>
+              <a:rPr sz="1200">
+                <a:solidFill>
+                  <a:srgbClr val="808080"/>
+                </a:solidFill>
+              </a:rPr>
+              <a:t>27</a:t>
+            </a:r>
+          </a:p>
+        </p:txBody>
+      </p:sp>
+      <p:graphicFrame>
+        <p:nvGraphicFramePr>
+          <p:cNvPr id="4" name="Table 3"/>
+          <p:cNvGraphicFramePr>
+            <a:graphicFrameLocks noGrp="1"/>
+          </p:cNvGraphicFramePr>
+          <p:nvPr/>
+        </p:nvGraphicFramePr>
+        <p:xfrm>
+          <a:off x="457200" y="1554480"/>
+          <a:ext cx="11247120" cy="3017520"/>
+        </p:xfrm>
+        <a:graphic>
+          <a:graphicData uri="http://schemas.openxmlformats.org/drawingml/2006/table">
+            <a:tbl>
+              <a:tblPr firstRow="1" bandRow="1">
+                <a:tableStyleId>{5C22544A-7EE6-4342-B048-85BDC9FD1C3A}</a:tableStyleId>
+              </a:tblPr>
+              <a:tblGrid>
+                <a:gridCol w="2011680"/>
+                <a:gridCol w="914400"/>
+                <a:gridCol w="1554480"/>
+                <a:gridCol w="1645920"/>
+                <a:gridCol w="5120640"/>
+              </a:tblGrid>
+              <a:tr h="502920">
+                <a:tc>
+                  <a:txBody>
+                    <a:bodyPr/>
+                    <a:lstStyle/>
+                    <a:p>
+                      <a:r>
+                        <a:rPr sz="1500"/>
+                        <a:t>Lock</a:t>
+                      </a:r>
+                    </a:p>
+                  </a:txBody>
+                  <a:tcPr/>
+                </a:tc>
+                <a:tc>
+                  <a:txBody>
+                    <a:bodyPr/>
+                    <a:lstStyle/>
+                    <a:p>
+                      <a:r>
+                        <a:rPr sz="1500"/>
+                        <a:t>Runs</a:t>
+                      </a:r>
+                    </a:p>
+                  </a:txBody>
+                  <a:tcPr/>
+                </a:tc>
+                <a:tc>
+                  <a:txBody>
+                    <a:bodyPr/>
+                    <a:lstStyle/>
+                    <a:p>
+                      <a:r>
+                        <a:rPr sz="1500"/>
+                        <a:t>Lost updates</a:t>
+                      </a:r>
+                    </a:p>
+                  </a:txBody>
+                  <a:tcPr/>
+                </a:tc>
+                <a:tc>
+                  <a:txBody>
+                    <a:bodyPr/>
+                    <a:lstStyle/>
+                    <a:p>
+                      <a:r>
+                        <a:rPr sz="1500"/>
+                        <a:t>Runs finished</a:t>
+                      </a:r>
+                    </a:p>
+                  </a:txBody>
+                  <a:tcPr/>
+                </a:tc>
+                <a:tc>
+                  <a:txBody>
+                    <a:bodyPr/>
+                    <a:lstStyle/>
+                    <a:p>
+                      <a:r>
+                        <a:rPr sz="1500"/>
+                        <a:t>Also tested</a:t>
+                      </a:r>
+                    </a:p>
+                  </a:txBody>
+                  <a:tcPr/>
+                </a:tc>
+              </a:tr>
+              <a:tr h="502920">
+                <a:tc>
+                  <a:txBody>
+                    <a:bodyPr/>
+                    <a:lstStyle/>
+                    <a:p>
+                      <a:r>
+                        <a:rPr sz="1500"/>
+                        <a:t>Peterson</a:t>
+                      </a:r>
+                    </a:p>
+                  </a:txBody>
+                  <a:tcPr/>
+                </a:tc>
+                <a:tc>
+                  <a:txBody>
+                    <a:bodyPr/>
+                    <a:lstStyle/>
+                    <a:p>
+                      <a:r>
+                        <a:rPr sz="1500"/>
+                        <a:t>17</a:t>
+                      </a:r>
+                    </a:p>
+                  </a:txBody>
+                  <a:tcPr/>
+                </a:tc>
+                <a:tc>
+                  <a:txBody>
+                    <a:bodyPr/>
+                    <a:lstStyle/>
+                    <a:p>
+                      <a:r>
+                        <a:rPr sz="1500"/>
+                        <a:t>0</a:t>
+                      </a:r>
+                    </a:p>
+                  </a:txBody>
+                  <a:tcPr/>
+                </a:tc>
+                <a:tc>
+                  <a:txBody>
+                    <a:bodyPr/>
+                    <a:lstStyle/>
+                    <a:p>
+                      <a:r>
+                        <a:rPr sz="1500"/>
+                        <a:t>17 / 17</a:t>
+                      </a:r>
+                    </a:p>
+                  </a:txBody>
+                  <a:tcPr/>
+                </a:tc>
+                <a:tc>
+                  <a:txBody>
+                    <a:bodyPr/>
+                    <a:lstStyle/>
+                    <a:p>
+                      <a:r>
+                        <a:rPr sz="1500"/>
+                        <a:t>no fence: lost updates in 5 / 5 runs</a:t>
+                      </a:r>
+                    </a:p>
+                  </a:txBody>
+                  <a:tcPr/>
+                </a:tc>
+              </a:tr>
+              <a:tr h="502920">
+                <a:tc>
+                  <a:txBody>
+                    <a:bodyPr/>
+                    <a:lstStyle/>
+                    <a:p>
+                      <a:r>
+                        <a:rPr sz="1500"/>
+                        <a:t>LL/SC</a:t>
+                      </a:r>
+                    </a:p>
+                  </a:txBody>
+                  <a:tcPr/>
+                </a:tc>
+                <a:tc>
+                  <a:txBody>
+                    <a:bodyPr/>
+                    <a:lstStyle/>
+                    <a:p>
+                      <a:r>
+                        <a:rPr sz="1500"/>
+                        <a:t>24</a:t>
+                      </a:r>
+                    </a:p>
+                  </a:txBody>
+                  <a:tcPr/>
+                </a:tc>
+                <a:tc>
+                  <a:txBody>
+                    <a:bodyPr/>
+                    <a:lstStyle/>
+                    <a:p>
+                      <a:r>
+                        <a:rPr sz="1500"/>
+                        <a:t>0</a:t>
+                      </a:r>
+                    </a:p>
+                  </a:txBody>
+                  <a:tcPr/>
+                </a:tc>
+                <a:tc>
+                  <a:txBody>
+                    <a:bodyPr/>
+                    <a:lstStyle/>
+                    <a:p>
+                      <a:r>
+                        <a:rPr sz="1500"/>
+                        <a:t>24 / 24</a:t>
+                      </a:r>
+                    </a:p>
+                  </a:txBody>
+                  <a:tcPr/>
+                </a:tc>
+                <a:tc>
+                  <a:txBody>
+                    <a:bodyPr/>
+                    <a:lstStyle/>
+                    <a:p>
+                      <a:r>
+                        <a:rPr sz="1500"/>
+                        <a:t>real ldaxr/stxr under qemu: lost = 0 in 3 / 3 runs</a:t>
+                      </a:r>
+                    </a:p>
+                  </a:txBody>
+                  <a:tcPr/>
+                </a:tc>
+              </a:tr>
+              <a:tr h="502920">
+                <a:tc>
+                  <a:txBody>
+                    <a:bodyPr/>
+                    <a:lstStyle/>
+                    <a:p>
+                      <a:r>
+                        <a:rPr sz="1500"/>
+                        <a:t>MCS</a:t>
+                      </a:r>
+                    </a:p>
+                  </a:txBody>
+                  <a:tcPr/>
+                </a:tc>
+                <a:tc>
+                  <a:txBody>
+                    <a:bodyPr/>
+                    <a:lstStyle/>
+                    <a:p>
+                      <a:r>
+                        <a:rPr sz="1500"/>
+                        <a:t>24</a:t>
+                      </a:r>
+                    </a:p>
+                  </a:txBody>
+                  <a:tcPr/>
+                </a:tc>
+                <a:tc>
+                  <a:txBody>
+                    <a:bodyPr/>
+                    <a:lstStyle/>
+                    <a:p>
+                      <a:r>
+                        <a:rPr sz="1500"/>
+                        <a:t>0</a:t>
+                      </a:r>
+                    </a:p>
+                  </a:txBody>
+                  <a:tcPr/>
+                </a:tc>
+                <a:tc>
+                  <a:txBody>
+                    <a:bodyPr/>
+                    <a:lstStyle/>
+                    <a:p>
+                      <a:r>
+                        <a:rPr sz="1500"/>
+                        <a:t>24 / 24</a:t>
+                      </a:r>
+                    </a:p>
+                  </a:txBody>
+                  <a:tcPr/>
+                </a:tc>
+                <a:tc>
+                  <a:txBody>
+                    <a:bodyPr/>
+                    <a:lstStyle/>
+                    <a:p/>
+                  </a:txBody>
+                  <a:tcPr/>
+                </a:tc>
+              </a:tr>
+              <a:tr h="502920">
+                <a:tc>
+                  <a:txBody>
+                    <a:bodyPr/>
+                    <a:lstStyle/>
+                    <a:p>
+                      <a:r>
+                        <a:rPr sz="1500"/>
+                        <a:t>TAS</a:t>
+                      </a:r>
+                    </a:p>
+                  </a:txBody>
+                  <a:tcPr/>
+                </a:tc>
+                <a:tc>
+                  <a:txBody>
+                    <a:bodyPr/>
+                    <a:lstStyle/>
+                    <a:p>
+                      <a:r>
+                        <a:rPr sz="1500"/>
+                        <a:t>24</a:t>
+                      </a:r>
+                    </a:p>
+                  </a:txBody>
+                  <a:tcPr/>
+                </a:tc>
+                <a:tc>
+                  <a:txBody>
+                    <a:bodyPr/>
+                    <a:lstStyle/>
+                    <a:p>
+                      <a:r>
+                        <a:rPr sz="1500"/>
+                        <a:t>0</a:t>
+                      </a:r>
+                    </a:p>
+                  </a:txBody>
+                  <a:tcPr/>
+                </a:tc>
+                <a:tc>
+                  <a:txBody>
+                    <a:bodyPr/>
+                    <a:lstStyle/>
+                    <a:p>
+                      <a:r>
+                        <a:rPr sz="1500"/>
+                        <a:t>24 / 24</a:t>
+                      </a:r>
+                    </a:p>
+                  </a:txBody>
+                  <a:tcPr/>
+                </a:tc>
+                <a:tc>
+                  <a:txBody>
+                    <a:bodyPr/>
+                    <a:lstStyle/>
+                    <a:p/>
+                  </a:txBody>
+                  <a:tcPr/>
+                </a:tc>
+              </a:tr>
+              <a:tr h="502920">
+                <a:tc>
+                  <a:txBody>
+                    <a:bodyPr/>
+                    <a:lstStyle/>
+                    <a:p>
+                      <a:r>
+                        <a:rPr sz="1500"/>
+                        <a:t>pthread_mutex</a:t>
+                      </a:r>
+                    </a:p>
+                  </a:txBody>
+                  <a:tcPr/>
+                </a:tc>
+                <a:tc>
+                  <a:txBody>
+                    <a:bodyPr/>
+                    <a:lstStyle/>
+                    <a:p>
+                      <a:r>
+                        <a:rPr sz="1500"/>
+                        <a:t>24</a:t>
+                      </a:r>
+                    </a:p>
+                  </a:txBody>
+                  <a:tcPr/>
+                </a:tc>
+                <a:tc>
+                  <a:txBody>
+                    <a:bodyPr/>
+                    <a:lstStyle/>
+                    <a:p>
+                      <a:r>
+                        <a:rPr sz="1500"/>
+                        <a:t>0</a:t>
+                      </a:r>
+                    </a:p>
+                  </a:txBody>
+                  <a:tcPr/>
+                </a:tc>
+                <a:tc>
+                  <a:txBody>
+                    <a:bodyPr/>
+                    <a:lstStyle/>
+                    <a:p>
+                      <a:r>
+                        <a:rPr sz="1500"/>
+                        <a:t>24 / 24</a:t>
+                      </a:r>
+                    </a:p>
+                  </a:txBody>
+                  <a:tcPr/>
+                </a:tc>
+                <a:tc>
+                  <a:txBody>
+                    <a:bodyPr/>
+                    <a:lstStyle/>
+                    <a:p/>
+                  </a:txBody>
+                  <a:tcPr/>
+                </a:tc>
+              </a:tr>
+            </a:tbl>
+          </a:graphicData>
+        </a:graphic>
+      </p:graphicFrame>
+      <p:sp>
+        <p:nvSpPr>
+          <p:cNvPr id="5" name="TextBox 4"/>
+          <p:cNvSpPr txBox="1"/>
+          <p:nvPr/>
+        </p:nvSpPr>
+        <p:spPr>
+          <a:xfrm>
+            <a:off x="457200" y="4937760"/>
+            <a:ext cx="11247120" cy="1371600"/>
+          </a:xfrm>
+          <a:prstGeom prst="rect">
+            <a:avLst/>
+          </a:prstGeom>
+          <a:noFill/>
+        </p:spPr>
+        <p:txBody>
+          <a:bodyPr wrap="square">
+            <a:spAutoFit/>
+          </a:bodyPr>
+          <a:lstStyle/>
+          <a:p>
+            <a:pPr>
+              <a:spcAft>
+                <a:spcPts val="800"/>
+              </a:spcAft>
+            </a:pPr>
+            <a:r>
+              <a:rPr sz="1600"/>
+              <a:t>• Mutual exclusion: lost = total acquisitions − counter, summed over all runs</a:t>
+            </a:r>
+          </a:p>
+          <a:p>
+            <a:pPr>
+              <a:spcAft>
+                <a:spcPts val="800"/>
+              </a:spcAft>
+            </a:pPr>
+            <a:r>
+              <a:rPr sz="1600">
+                <a:solidFill>
+                  <a:srgbClr val="C0392B"/>
+                </a:solidFill>
+              </a:rPr>
+              <a:t>• Peterson is correct on x86 only with the fence</a:t>
+            </a:r>
+          </a:p>
+        </p:txBody>
+      </p:sp>
+    </p:spTree>
+  </p:cSld>
+  <p:clrMapOvr>
+    <a:masterClrMapping/>
+  </p:clrMapOvr>
+</p:sld>
+</file>
+
+<file path=ppt/slides/slide28.xml><?xml version="1.0" encoding="utf-8"?>
+<p:sld xmlns:a="http://schemas.openxmlformats.org/drawingml/2006/main" xmlns:p="http://schemas.openxmlformats.org/presentationml/2006/main" xmlns:r="http://schemas.openxmlformats.org/officeDocument/2006/relationships">
+  <p:cSld>
+    <p:spTree>
+      <p:nvGrpSpPr>
+        <p:cNvPr id="1" name=""/>
+        <p:cNvGrpSpPr/>
+        <p:nvPr/>
+      </p:nvGrpSpPr>
+      <p:grpSpPr/>
+      <p:sp>
+        <p:nvSpPr>
+          <p:cNvPr id="2" name="Title 1"/>
+          <p:cNvSpPr>
+            <a:spLocks noGrp="1"/>
+          </p:cNvSpPr>
+          <p:nvPr>
+            <p:ph type="title"/>
+          </p:nvPr>
+        </p:nvSpPr>
+        <p:spPr/>
+        <p:txBody>
+          <a:bodyPr/>
+          <a:lstStyle/>
+          <a:p>
+            <a:r>
+              <a:t>Fairness</a:t>
+            </a:r>
+          </a:p>
+        </p:txBody>
+      </p:sp>
+      <p:sp>
+        <p:nvSpPr>
+          <p:cNvPr id="3" name="TextBox 2"/>
+          <p:cNvSpPr txBox="1"/>
+          <p:nvPr/>
+        </p:nvSpPr>
+        <p:spPr>
+          <a:xfrm>
+            <a:off x="11247120" y="6400800"/>
+            <a:ext cx="731520" cy="365760"/>
+          </a:xfrm>
+          <a:prstGeom prst="rect">
+            <a:avLst/>
+          </a:prstGeom>
+          <a:noFill/>
+        </p:spPr>
+        <p:txBody>
+          <a:bodyPr wrap="none">
+            <a:spAutoFit/>
+          </a:bodyPr>
+          <a:lstStyle/>
+          <a:p>
+            <a:pPr algn="r"/>
+            <a:r>
+              <a:rPr sz="1200">
+                <a:solidFill>
+                  <a:srgbClr val="808080"/>
+                </a:solidFill>
+              </a:rPr>
+              <a:t>28</a:t>
+            </a:r>
+          </a:p>
+        </p:txBody>
+      </p:sp>
+      <p:graphicFrame>
+        <p:nvGraphicFramePr>
+          <p:cNvPr id="4" name="Chart 3"/>
+          <p:cNvGraphicFramePr>
+            <a:graphicFrameLocks noGrp="1"/>
+          </p:cNvGraphicFramePr>
+          <p:nvPr/>
+        </p:nvGraphicFramePr>
+        <p:xfrm>
+          <a:off x="457200" y="1371600"/>
+          <a:ext cx="6949440" cy="5120640"/>
+        </p:xfrm>
+        <a:graphic>
+          <a:graphicData uri="http://schemas.openxmlformats.org/drawingml/2006/chart">
+            <c:chart xmlns:c="http://schemas.openxmlformats.org/drawingml/2006/chart" r:id="rId3"/>
+          </a:graphicData>
+        </a:graphic>
+      </p:graphicFrame>
+      <p:sp>
+        <p:nvSpPr>
+          <p:cNvPr id="5" name="TextBox 4"/>
+          <p:cNvSpPr txBox="1"/>
+          <p:nvPr/>
+        </p:nvSpPr>
+        <p:spPr>
+          <a:xfrm>
+            <a:off x="7680960" y="1554480"/>
+            <a:ext cx="4114800" cy="4846320"/>
+          </a:xfrm>
+          <a:prstGeom prst="rect">
+            <a:avLst/>
+          </a:prstGeom>
+          <a:noFill/>
+        </p:spPr>
+        <p:txBody>
+          <a:bodyPr wrap="square">
+            <a:spAutoFit/>
+          </a:bodyPr>
+          <a:lstStyle/>
+          <a:p>
+            <a:pPr>
+              <a:spcAft>
+                <a:spcPts val="800"/>
+              </a:spcAft>
+            </a:pPr>
+            <a:r>
+              <a:rPr sz="1700"/>
+              <a:t>• All CPUs: MCS 1.00 is the fairest at 8 threads — its queue is first-come, first-served</a:t>
+            </a:r>
+          </a:p>
+          <a:p>
+            <a:pPr>
+              <a:spcAft>
+                <a:spcPts val="800"/>
+              </a:spcAft>
+            </a:pPr>
+            <a:r>
+              <a:rPr sz="1700"/>
+              <a:t>• TAS 0.82, LL/SC 0.75: whoever wins the race gets in</a:t>
+            </a:r>
+          </a:p>
+          <a:p>
+            <a:pPr>
+              <a:spcAft>
+                <a:spcPts val="800"/>
+              </a:spcAft>
+            </a:pPr>
+            <a:r>
+              <a:rPr sz="1700">
+                <a:solidFill>
+                  <a:srgbClr val="C0392B"/>
+                </a:solidFill>
+              </a:rPr>
+              <a:t>• One CPU: every spin lock lets a thread starve (the bars near 0) — the scheduler decides who gets in</a:t>
+            </a:r>
+          </a:p>
+          <a:p>
+            <a:pPr>
+              <a:spcAft>
+                <a:spcPts val="800"/>
+              </a:spcAft>
+            </a:pPr>
+            <a:r>
+              <a:rPr sz="1700"/>
+              <a:t>• Only pthread_mutex stays fair on one CPU: 0.78</a:t>
+            </a:r>
+          </a:p>
+        </p:txBody>
+      </p:sp>
+    </p:spTree>
+  </p:cSld>
+  <p:clrMapOvr>
+    <a:masterClrMapping/>
+  </p:clrMapOvr>
+</p:sld>
+</file>
+
+<file path=ppt/slides/slide29.xml><?xml version="1.0" encoding="utf-8"?>
+<p:sld xmlns:a="http://schemas.openxmlformats.org/drawingml/2006/main" xmlns:p="http://schemas.openxmlformats.org/presentationml/2006/main" xmlns:r="http://schemas.openxmlformats.org/officeDocument/2006/relationships">
+  <p:cSld>
+    <p:spTree>
+      <p:nvGrpSpPr>
+        <p:cNvPr id="1" name=""/>
+        <p:cNvGrpSpPr/>
+        <p:nvPr/>
+      </p:nvGrpSpPr>
+      <p:grpSpPr/>
+      <p:sp>
+        <p:nvSpPr>
+          <p:cNvPr id="2" name="Title 1"/>
+          <p:cNvSpPr>
+            <a:spLocks noGrp="1"/>
+          </p:cNvSpPr>
+          <p:nvPr>
+            <p:ph type="title"/>
+          </p:nvPr>
+        </p:nvSpPr>
+        <p:spPr/>
+        <p:txBody>
+          <a:bodyPr/>
+          <a:lstStyle/>
+          <a:p>
+            <a:r>
+              <a:t>Summary</a:t>
+            </a:r>
+          </a:p>
+        </p:txBody>
+      </p:sp>
+      <p:sp>
+        <p:nvSpPr>
+          <p:cNvPr id="3" name="TextBox 2"/>
+          <p:cNvSpPr txBox="1"/>
+          <p:nvPr/>
+        </p:nvSpPr>
+        <p:spPr>
+          <a:xfrm>
+            <a:off x="11247120" y="6400800"/>
+            <a:ext cx="731520" cy="365760"/>
+          </a:xfrm>
+          <a:prstGeom prst="rect">
+            <a:avLst/>
+          </a:prstGeom>
+          <a:noFill/>
+        </p:spPr>
+        <p:txBody>
+          <a:bodyPr wrap="none">
+            <a:spAutoFit/>
+          </a:bodyPr>
+          <a:lstStyle/>
+          <a:p>
+            <a:pPr algn="r"/>
+            <a:r>
+              <a:rPr sz="1200">
+                <a:solidFill>
+                  <a:srgbClr val="808080"/>
+                </a:solidFill>
+              </a:rPr>
+              <a:t>29</a:t>
             </a:r>
           </a:p>
         </p:txBody>
@@ -10944,7 +13229,7 @@
 </p:sld>
 </file>
 
-<file path=ppt/slides/slide24.xml><?xml version="1.0" encoding="utf-8"?>
+<file path=ppt/slides/slide3.xml><?xml version="1.0" encoding="utf-8"?>
 <p:sld xmlns:a="http://schemas.openxmlformats.org/drawingml/2006/main" xmlns:p="http://schemas.openxmlformats.org/presentationml/2006/main" xmlns:r="http://schemas.openxmlformats.org/officeDocument/2006/relationships">
   <p:cSld>
     <p:spTree>
@@ -10970,7 +13255,7 @@
           <a:lstStyle/>
           <a:p>
             <a:r>
-              <a:t>Conclusion</a:t>
+              <a:t>How We Evaluate</a:t>
             </a:r>
           </a:p>
         </p:txBody>
@@ -11030,7 +13315,7 @@
                   <a:srgbClr val="808080"/>
                 </a:solidFill>
               </a:rPr>
-              <a:t>24</a:t>
+              <a:t>3</a:t>
             </a:r>
           </a:p>
         </p:txBody>
@@ -11043,7 +13328,7 @@
 </p:sld>
 </file>
 
-<file path=ppt/slides/slide25.xml><?xml version="1.0" encoding="utf-8"?>
+<file path=ppt/slides/slide30.xml><?xml version="1.0" encoding="utf-8"?>
 <p:sld xmlns:a="http://schemas.openxmlformats.org/drawingml/2006/main" xmlns:p="http://schemas.openxmlformats.org/presentationml/2006/main" xmlns:r="http://schemas.openxmlformats.org/officeDocument/2006/relationships">
   <p:cSld>
     <p:spTree>
@@ -11076,7 +13361,33 @@
       </p:sp>
       <p:sp>
         <p:nvSpPr>
-          <p:cNvPr id="3" name="TextBox 2"/>
+          <p:cNvPr id="3" name="Text Placeholder 2"/>
+          <p:cNvSpPr>
+            <a:spLocks noGrp="1"/>
+          </p:cNvSpPr>
+          <p:nvPr>
+            <p:ph type="body" idx="1"/>
+          </p:nvPr>
+        </p:nvSpPr>
+        <p:spPr/>
+        <p:txBody>
+          <a:bodyPr/>
+          <a:lstStyle/>
+          <a:p>
+            <a:r>
+              <a:t>67070501075</a:t>
+            </a:r>
+          </a:p>
+          <a:p>
+            <a:r>
+              <a:t>Siriwan Yindeephot</a:t>
+            </a:r>
+          </a:p>
+        </p:txBody>
+      </p:sp>
+      <p:sp>
+        <p:nvSpPr>
+          <p:cNvPr id="4" name="TextBox 3"/>
           <p:cNvSpPr txBox="1"/>
           <p:nvPr/>
         </p:nvSpPr>
@@ -11103,7 +13414,80 @@
                   <a:srgbClr val="808080"/>
                 </a:solidFill>
               </a:rPr>
-              <a:t>25</a:t>
+              <a:t>30</a:t>
+            </a:r>
+          </a:p>
+        </p:txBody>
+      </p:sp>
+    </p:spTree>
+  </p:cSld>
+  <p:clrMapOvr>
+    <a:masterClrMapping/>
+  </p:clrMapOvr>
+</p:sld>
+</file>
+
+<file path=ppt/slides/slide31.xml><?xml version="1.0" encoding="utf-8"?>
+<p:sld xmlns:a="http://schemas.openxmlformats.org/drawingml/2006/main" xmlns:p="http://schemas.openxmlformats.org/presentationml/2006/main" xmlns:r="http://schemas.openxmlformats.org/officeDocument/2006/relationships">
+  <p:cSld>
+    <p:spTree>
+      <p:nvGrpSpPr>
+        <p:cNvPr id="1" name=""/>
+        <p:cNvGrpSpPr/>
+        <p:nvPr/>
+      </p:nvGrpSpPr>
+      <p:grpSpPr/>
+      <p:sp>
+        <p:nvSpPr>
+          <p:cNvPr id="2" name="Title 1"/>
+          <p:cNvSpPr>
+            <a:spLocks noGrp="1"/>
+          </p:cNvSpPr>
+          <p:nvPr>
+            <p:ph type="title"/>
+          </p:nvPr>
+        </p:nvSpPr>
+        <p:spPr/>
+        <p:txBody>
+          <a:bodyPr/>
+          <a:lstStyle/>
+          <a:p>
+            <a:r>
+              <a:t>Conclusion</a:t>
+            </a:r>
+          </a:p>
+        </p:txBody>
+      </p:sp>
+      <p:sp>
+        <p:nvSpPr>
+          <p:cNvPr id="3" name="TextBox 2"/>
+          <p:cNvSpPr txBox="1"/>
+          <p:nvPr/>
+        </p:nvSpPr>
+        <p:spPr>
+          <a:xfrm>
+            <a:off x="11247120" y="6400800"/>
+            <a:ext cx="731520" cy="365760"/>
+          </a:xfrm>
+          <a:prstGeom prst="rect">
+            <a:avLst/>
+          </a:prstGeom>
+          <a:noFill/>
+        </p:spPr>
+        <p:txBody>
+          <a:bodyPr wrap="none">
+            <a:spAutoFit/>
+          </a:bodyPr>
+          <a:lstStyle/>
+          <a:p>
+            <a:pPr algn="r"/>
+            <a:r>
+              <a:rPr sz="1200">
+                <a:solidFill>
+                  <a:srgbClr val="808080"/>
+                </a:solidFill>
+              </a:rPr>
+              <a:t>31</a:t>
             </a:r>
           </a:p>
         </p:txBody>
@@ -11194,7 +13578,7 @@
 </p:sld>
 </file>
 
-<file path=ppt/slides/slide26.xml><?xml version="1.0" encoding="utf-8"?>
+<file path=ppt/slides/slide32.xml><?xml version="1.0" encoding="utf-8"?>
 <p:sld xmlns:a="http://schemas.openxmlformats.org/drawingml/2006/main" xmlns:p="http://schemas.openxmlformats.org/presentationml/2006/main" xmlns:r="http://schemas.openxmlformats.org/officeDocument/2006/relationships">
   <p:cSld>
     <p:spTree>
@@ -11254,7 +13638,7 @@
                   <a:srgbClr val="808080"/>
                 </a:solidFill>
               </a:rPr>
-              <a:t>26</a:t>
+              <a:t>32</a:t>
             </a:r>
           </a:p>
         </p:txBody>
@@ -11355,105 +13739,6 @@
             <a:r>
               <a:rPr sz="1800"/>
               <a:t>• Code and raw results: PS08/src, PS08/results</a:t>
-            </a:r>
-          </a:p>
-        </p:txBody>
-      </p:sp>
-    </p:spTree>
-  </p:cSld>
-  <p:clrMapOvr>
-    <a:masterClrMapping/>
-  </p:clrMapOvr>
-</p:sld>
-</file>
-
-<file path=ppt/slides/slide3.xml><?xml version="1.0" encoding="utf-8"?>
-<p:sld xmlns:a="http://schemas.openxmlformats.org/drawingml/2006/main" xmlns:p="http://schemas.openxmlformats.org/presentationml/2006/main" xmlns:r="http://schemas.openxmlformats.org/officeDocument/2006/relationships">
-  <p:cSld>
-    <p:spTree>
-      <p:nvGrpSpPr>
-        <p:cNvPr id="1" name=""/>
-        <p:cNvGrpSpPr/>
-        <p:nvPr/>
-      </p:nvGrpSpPr>
-      <p:grpSpPr/>
-      <p:sp>
-        <p:nvSpPr>
-          <p:cNvPr id="2" name="Title 1"/>
-          <p:cNvSpPr>
-            <a:spLocks noGrp="1"/>
-          </p:cNvSpPr>
-          <p:nvPr>
-            <p:ph type="title"/>
-          </p:nvPr>
-        </p:nvSpPr>
-        <p:spPr/>
-        <p:txBody>
-          <a:bodyPr/>
-          <a:lstStyle/>
-          <a:p>
-            <a:r>
-              <a:t>How We Evaluate</a:t>
-            </a:r>
-          </a:p>
-        </p:txBody>
-      </p:sp>
-      <p:sp>
-        <p:nvSpPr>
-          <p:cNvPr id="3" name="Text Placeholder 2"/>
-          <p:cNvSpPr>
-            <a:spLocks noGrp="1"/>
-          </p:cNvSpPr>
-          <p:nvPr>
-            <p:ph type="body" idx="1"/>
-          </p:nvPr>
-        </p:nvSpPr>
-        <p:spPr/>
-        <p:txBody>
-          <a:bodyPr/>
-          <a:lstStyle/>
-          <a:p>
-            <a:r>
-              <a:t>67070501075</a:t>
-            </a:r>
-          </a:p>
-          <a:p>
-            <a:r>
-              <a:t>Siriwan Yindeephot</a:t>
-            </a:r>
-          </a:p>
-        </p:txBody>
-      </p:sp>
-      <p:sp>
-        <p:nvSpPr>
-          <p:cNvPr id="4" name="TextBox 3"/>
-          <p:cNvSpPr txBox="1"/>
-          <p:nvPr/>
-        </p:nvSpPr>
-        <p:spPr>
-          <a:xfrm>
-            <a:off x="11247120" y="6400800"/>
-            <a:ext cx="731520" cy="365760"/>
-          </a:xfrm>
-          <a:prstGeom prst="rect">
-            <a:avLst/>
-          </a:prstGeom>
-          <a:noFill/>
-        </p:spPr>
-        <p:txBody>
-          <a:bodyPr wrap="none">
-            <a:spAutoFit/>
-          </a:bodyPr>
-          <a:lstStyle/>
-          <a:p>
-            <a:pPr algn="r"/>
-            <a:r>
-              <a:rPr sz="1200">
-                <a:solidFill>
-                  <a:srgbClr val="808080"/>
-                </a:solidFill>
-              </a:rPr>
-              <a:t>3</a:t>
             </a:r>
           </a:p>
         </p:txBody>
@@ -11492,7 +13777,7 @@
           <a:lstStyle/>
           <a:p>
             <a:r>
-              <a:t>How We Evaluate Each Lock</a:t>
+              <a:t>Metrics from Lecture 8</a:t>
             </a:r>
           </a:p>
         </p:txBody>
@@ -11531,220 +13816,238 @@
           </a:p>
         </p:txBody>
       </p:sp>
-      <p:sp>
-        <p:nvSpPr>
-          <p:cNvPr id="4" name="TextBox 3"/>
-          <p:cNvSpPr txBox="1"/>
+      <p:graphicFrame>
+        <p:nvGraphicFramePr>
+          <p:cNvPr id="4" name="Table 3"/>
+          <p:cNvGraphicFramePr>
+            <a:graphicFrameLocks noGrp="1"/>
+          </p:cNvGraphicFramePr>
           <p:nvPr/>
-        </p:nvSpPr>
-        <p:spPr>
-          <a:xfrm>
-            <a:off x="822960" y="1554480"/>
-            <a:ext cx="6035040" cy="4937760"/>
-          </a:xfrm>
-          <a:prstGeom prst="rect">
-            <a:avLst/>
-          </a:prstGeom>
-          <a:noFill/>
-        </p:spPr>
-        <p:txBody>
-          <a:bodyPr wrap="square">
-            <a:spAutoFit/>
-          </a:bodyPr>
-          <a:lstStyle/>
-          <a:p>
-            <a:pPr>
-              <a:spcAft>
-                <a:spcPts val="800"/>
-              </a:spcAft>
-            </a:pPr>
-            <a:r>
-              <a:rPr sz="2000"/>
-              <a:t>• Metrics from Lecture 8:</a:t>
-            </a:r>
-          </a:p>
-          <a:p>
-            <a:pPr lvl="1">
-              <a:spcAft>
-                <a:spcPts val="800"/>
-              </a:spcAft>
-            </a:pPr>
-            <a:r>
-              <a:rPr sz="1800"/>
-              <a:t>– Mutual exclusion: counter must equal total acquisitions (lost = total − counter)</a:t>
-            </a:r>
-          </a:p>
-          <a:p>
-            <a:pPr lvl="1">
-              <a:spcAft>
-                <a:spcPts val="800"/>
-              </a:spcAft>
-            </a:pPr>
-            <a:r>
-              <a:rPr sz="1800"/>
-              <a:t>– Absence of deadlock: every run must finish</a:t>
-            </a:r>
-          </a:p>
-          <a:p>
-            <a:pPr lvl="1">
-              <a:spcAft>
-                <a:spcPts val="800"/>
-              </a:spcAft>
-            </a:pPr>
-            <a:r>
-              <a:rPr sz="1800"/>
-              <a:t>– Fairness: fewest ÷ most acquisitions per thread (1.0 = equal)</a:t>
-            </a:r>
-          </a:p>
-          <a:p>
-            <a:pPr lvl="1">
-              <a:spcAft>
-                <a:spcPts val="800"/>
-              </a:spcAft>
-            </a:pPr>
-            <a:r>
-              <a:rPr sz="1800"/>
-              <a:t>– Performance: acquisitions per second</a:t>
-            </a:r>
-          </a:p>
-          <a:p>
-            <a:pPr>
-              <a:spcAft>
-                <a:spcPts val="800"/>
-              </a:spcAft>
-            </a:pPr>
-            <a:r>
-              <a:rPr sz="2000"/>
-              <a:t>• 1 s per run, median of 3 runs, 1/2/4/8 threads, on all 8 CPUs and on one CPU (taskset -c 0)</a:t>
-            </a:r>
-          </a:p>
-          <a:p>
-            <a:pPr>
-              <a:spcAft>
-                <a:spcPts val="800"/>
-              </a:spcAft>
-            </a:pPr>
-            <a:r>
-              <a:rPr sz="2000"/>
-              <a:t>• WSL2 Ubuntu, 8 CPUs, gcc 15.2.0 -O2</a:t>
-            </a:r>
-          </a:p>
-          <a:p>
-            <a:pPr>
-              <a:spcAft>
-                <a:spcPts val="800"/>
-              </a:spcAft>
-            </a:pPr>
-            <a:r>
-              <a:rPr sz="2000"/>
-              <a:t>• Reference locks from the lecture: TAS spin lock, pthread_mutex</a:t>
-            </a:r>
-          </a:p>
-        </p:txBody>
-      </p:sp>
-      <p:sp>
-        <p:nvSpPr>
-          <p:cNvPr id="5" name="TextBox 4"/>
-          <p:cNvSpPr txBox="1"/>
-          <p:nvPr/>
-        </p:nvSpPr>
-        <p:spPr>
-          <a:xfrm>
-            <a:off x="7132320" y="1828800"/>
-            <a:ext cx="4663440" cy="1142999"/>
-          </a:xfrm>
-          <a:prstGeom prst="rect">
-            <a:avLst/>
-          </a:prstGeom>
-          <a:solidFill>
-            <a:srgbClr val="F4F4F4"/>
-          </a:solidFill>
-        </p:spPr>
-        <p:txBody>
-          <a:bodyPr wrap="none">
-            <a:spAutoFit/>
-          </a:bodyPr>
-          <a:lstStyle/>
-          <a:p>
-            <a:pPr>
-              <a:spcAft>
-                <a:spcPts val="0"/>
-              </a:spcAft>
-            </a:pPr>
-            <a:r>
-              <a:rPr sz="1050">
-                <a:latin typeface="Consolas"/>
-              </a:rPr>
-              <a:t>while (!stop) {</a:t>
-            </a:r>
-          </a:p>
-          <a:p>
-            <a:pPr>
-              <a:spcAft>
-                <a:spcPts val="0"/>
-              </a:spcAft>
-            </a:pPr>
-            <a:r>
-              <a:rPr sz="1050">
-                <a:latin typeface="Consolas"/>
-              </a:rPr>
-              <a:t>    lock_acquire(id);</a:t>
-            </a:r>
-          </a:p>
-          <a:p>
-            <a:pPr>
-              <a:spcAft>
-                <a:spcPts val="0"/>
-              </a:spcAft>
-            </a:pPr>
-            <a:r>
-              <a:rPr sz="1050">
-                <a:latin typeface="Consolas"/>
-              </a:rPr>
-              <a:t>    counter = counter + 1;          /* critical section */</a:t>
-            </a:r>
-          </a:p>
-          <a:p>
-            <a:pPr>
-              <a:spcAft>
-                <a:spcPts val="0"/>
-              </a:spcAft>
-            </a:pPr>
-            <a:r>
-              <a:rPr sz="1050">
-                <a:latin typeface="Consolas"/>
-              </a:rPr>
-              <a:t>    lock_release(id);</a:t>
-            </a:r>
-          </a:p>
-          <a:p>
-            <a:pPr>
-              <a:spcAft>
-                <a:spcPts val="0"/>
-              </a:spcAft>
-            </a:pPr>
-            <a:r>
-              <a:rPr sz="1050">
-                <a:latin typeface="Consolas"/>
-              </a:rPr>
-              <a:t>    n++;</a:t>
-            </a:r>
-          </a:p>
-          <a:p>
-            <a:pPr>
-              <a:spcAft>
-                <a:spcPts val="0"/>
-              </a:spcAft>
-            </a:pPr>
-            <a:r>
-              <a:rPr sz="1050">
-                <a:latin typeface="Consolas"/>
-              </a:rPr>
-              <a:t>}</a:t>
-            </a:r>
-          </a:p>
-        </p:txBody>
-      </p:sp>
+        </p:nvGraphicFramePr>
+        <p:xfrm>
+          <a:off x="548640" y="1554480"/>
+          <a:ext cx="11064240" cy="4114800"/>
+        </p:xfrm>
+        <a:graphic>
+          <a:graphicData uri="http://schemas.openxmlformats.org/drawingml/2006/table">
+            <a:tbl>
+              <a:tblPr firstRow="1" bandRow="1">
+                <a:tableStyleId>{5C22544A-7EE6-4342-B048-85BDC9FD1C3A}</a:tableStyleId>
+              </a:tblPr>
+              <a:tblGrid>
+                <a:gridCol w="2377440"/>
+                <a:gridCol w="3657600"/>
+                <a:gridCol w="5029200"/>
+              </a:tblGrid>
+              <a:tr h="822960">
+                <a:tc>
+                  <a:txBody>
+                    <a:bodyPr/>
+                    <a:lstStyle/>
+                    <a:p>
+                      <a:r>
+                        <a:rPr sz="1600"/>
+                        <a:t>Metric (Lecture 8)</a:t>
+                      </a:r>
+                    </a:p>
+                  </a:txBody>
+                  <a:tcPr/>
+                </a:tc>
+                <a:tc>
+                  <a:txBody>
+                    <a:bodyPr/>
+                    <a:lstStyle/>
+                    <a:p>
+                      <a:r>
+                        <a:rPr sz="1600"/>
+                        <a:t>Question</a:t>
+                      </a:r>
+                    </a:p>
+                  </a:txBody>
+                  <a:tcPr/>
+                </a:tc>
+                <a:tc>
+                  <a:txBody>
+                    <a:bodyPr/>
+                    <a:lstStyle/>
+                    <a:p>
+                      <a:r>
+                        <a:rPr sz="1600"/>
+                        <a:t>What we measure</a:t>
+                      </a:r>
+                    </a:p>
+                  </a:txBody>
+                  <a:tcPr/>
+                </a:tc>
+              </a:tr>
+              <a:tr h="822960">
+                <a:tc>
+                  <a:txBody>
+                    <a:bodyPr/>
+                    <a:lstStyle/>
+                    <a:p>
+                      <a:r>
+                        <a:rPr sz="1600"/>
+                        <a:t>Mutual exclusion</a:t>
+                      </a:r>
+                    </a:p>
+                  </a:txBody>
+                  <a:tcPr/>
+                </a:tc>
+                <a:tc>
+                  <a:txBody>
+                    <a:bodyPr/>
+                    <a:lstStyle/>
+                    <a:p>
+                      <a:r>
+                        <a:rPr sz="1600"/>
+                        <a:t>Is only one thread inside at a time?</a:t>
+                      </a:r>
+                    </a:p>
+                  </a:txBody>
+                  <a:tcPr/>
+                </a:tc>
+                <a:tc>
+                  <a:txBody>
+                    <a:bodyPr/>
+                    <a:lstStyle/>
+                    <a:p>
+                      <a:r>
+                        <a:rPr sz="1600"/>
+                        <a:t>Shared counter must equal total acquisitions: lost = total − counter = 0</a:t>
+                      </a:r>
+                    </a:p>
+                  </a:txBody>
+                  <a:tcPr/>
+                </a:tc>
+              </a:tr>
+              <a:tr h="822960">
+                <a:tc>
+                  <a:txBody>
+                    <a:bodyPr/>
+                    <a:lstStyle/>
+                    <a:p>
+                      <a:r>
+                        <a:rPr sz="1600"/>
+                        <a:t>Absence of deadlock</a:t>
+                      </a:r>
+                    </a:p>
+                  </a:txBody>
+                  <a:tcPr/>
+                </a:tc>
+                <a:tc>
+                  <a:txBody>
+                    <a:bodyPr/>
+                    <a:lstStyle/>
+                    <a:p>
+                      <a:r>
+                        <a:rPr sz="1600"/>
+                        <a:t>Does some waiting thread always get in?</a:t>
+                      </a:r>
+                    </a:p>
+                  </a:txBody>
+                  <a:tcPr/>
+                </a:tc>
+                <a:tc>
+                  <a:txBody>
+                    <a:bodyPr/>
+                    <a:lstStyle/>
+                    <a:p>
+                      <a:r>
+                        <a:rPr sz="1600"/>
+                        <a:t>Every run must finish when the time is up</a:t>
+                      </a:r>
+                    </a:p>
+                  </a:txBody>
+                  <a:tcPr/>
+                </a:tc>
+              </a:tr>
+              <a:tr h="822960">
+                <a:tc>
+                  <a:txBody>
+                    <a:bodyPr/>
+                    <a:lstStyle/>
+                    <a:p>
+                      <a:r>
+                        <a:rPr sz="1600"/>
+                        <a:t>Fairness</a:t>
+                      </a:r>
+                    </a:p>
+                  </a:txBody>
+                  <a:tcPr/>
+                </a:tc>
+                <a:tc>
+                  <a:txBody>
+                    <a:bodyPr/>
+                    <a:lstStyle/>
+                    <a:p>
+                      <a:r>
+                        <a:rPr sz="1600"/>
+                        <a:t>Does every thread get a fair chance?</a:t>
+                      </a:r>
+                    </a:p>
+                  </a:txBody>
+                  <a:tcPr/>
+                </a:tc>
+                <a:tc>
+                  <a:txBody>
+                    <a:bodyPr/>
+                    <a:lstStyle/>
+                    <a:p>
+                      <a:r>
+                        <a:rPr sz="1600"/>
+                        <a:t>Fewest ÷ most acquisitions per thread (1.0 = equal, 0 = starved)</a:t>
+                      </a:r>
+                    </a:p>
+                  </a:txBody>
+                  <a:tcPr/>
+                </a:tc>
+              </a:tr>
+              <a:tr h="822960">
+                <a:tc>
+                  <a:txBody>
+                    <a:bodyPr/>
+                    <a:lstStyle/>
+                    <a:p>
+                      <a:r>
+                        <a:rPr sz="1600"/>
+                        <a:t>Performance</a:t>
+                      </a:r>
+                    </a:p>
+                  </a:txBody>
+                  <a:tcPr/>
+                </a:tc>
+                <a:tc>
+                  <a:txBody>
+                    <a:bodyPr/>
+                    <a:lstStyle/>
+                    <a:p>
+                      <a:r>
+                        <a:rPr sz="1600"/>
+                        <a:t>How much time does the lock cost?</a:t>
+                      </a:r>
+                    </a:p>
+                  </a:txBody>
+                  <a:tcPr/>
+                </a:tc>
+                <a:tc>
+                  <a:txBody>
+                    <a:bodyPr/>
+                    <a:lstStyle/>
+                    <a:p>
+                      <a:r>
+                        <a:rPr sz="1600"/>
+                        <a:t>Acquisitions per second, with 1 to 8 threads</a:t>
+                      </a:r>
+                    </a:p>
+                  </a:txBody>
+                  <a:tcPr/>
+                </a:tc>
+              </a:tr>
+            </a:tbl>
+          </a:graphicData>
+        </a:graphic>
+      </p:graphicFrame>
     </p:spTree>
   </p:cSld>
   <p:clrMapOvr>
@@ -11779,40 +14082,14 @@
           <a:lstStyle/>
           <a:p>
             <a:r>
-              <a:t>Peterson's Algorithm</a:t>
-            </a:r>
-          </a:p>
-        </p:txBody>
-      </p:sp>
-      <p:sp>
-        <p:nvSpPr>
-          <p:cNvPr id="3" name="Text Placeholder 2"/>
-          <p:cNvSpPr>
-            <a:spLocks noGrp="1"/>
-          </p:cNvSpPr>
-          <p:nvPr>
-            <p:ph type="body" idx="1"/>
-          </p:nvPr>
-        </p:nvSpPr>
-        <p:spPr/>
-        <p:txBody>
-          <a:bodyPr/>
-          <a:lstStyle/>
-          <a:p>
-            <a:r>
-              <a:t>67070501018</a:t>
-            </a:r>
-          </a:p>
-          <a:p>
-            <a:r>
-              <a:t>Tithinan Sobking</a:t>
-            </a:r>
-          </a:p>
-        </p:txBody>
-      </p:sp>
-      <p:sp>
-        <p:nvSpPr>
-          <p:cNvPr id="4" name="TextBox 3"/>
+              <a:t>The Benchmark Loop</a:t>
+            </a:r>
+          </a:p>
+        </p:txBody>
+      </p:sp>
+      <p:sp>
+        <p:nvSpPr>
+          <p:cNvPr id="3" name="TextBox 2"/>
           <p:cNvSpPr txBox="1"/>
           <p:nvPr/>
         </p:nvSpPr>
@@ -11840,6 +14117,298 @@
                 </a:solidFill>
               </a:rPr>
               <a:t>5</a:t>
+            </a:r>
+          </a:p>
+        </p:txBody>
+      </p:sp>
+      <p:sp>
+        <p:nvSpPr>
+          <p:cNvPr id="4" name="TextBox 3"/>
+          <p:cNvSpPr txBox="1"/>
+          <p:nvPr/>
+        </p:nvSpPr>
+        <p:spPr>
+          <a:xfrm>
+            <a:off x="548640" y="1554480"/>
+            <a:ext cx="4937760" cy="4937760"/>
+          </a:xfrm>
+          <a:prstGeom prst="rect">
+            <a:avLst/>
+          </a:prstGeom>
+          <a:noFill/>
+        </p:spPr>
+        <p:txBody>
+          <a:bodyPr wrap="square">
+            <a:spAutoFit/>
+          </a:bodyPr>
+          <a:lstStyle/>
+          <a:p>
+            <a:pPr>
+              <a:spcAft>
+                <a:spcPts val="800"/>
+              </a:spcAft>
+            </a:pPr>
+            <a:r>
+              <a:rPr sz="1900"/>
+              <a:t>• All threads start together at a barrier</a:t>
+            </a:r>
+          </a:p>
+          <a:p>
+            <a:pPr>
+              <a:spcAft>
+                <a:spcPts val="800"/>
+              </a:spcAft>
+            </a:pPr>
+            <a:r>
+              <a:rPr sz="1900"/>
+              <a:t>• Loop until main raises stop after 1 s</a:t>
+            </a:r>
+          </a:p>
+          <a:p>
+            <a:pPr>
+              <a:spcAft>
+                <a:spcPts val="800"/>
+              </a:spcAft>
+            </a:pPr>
+            <a:r>
+              <a:rPr sz="1900"/>
+              <a:t>• counter is a plain variable: two threads inside together lose an update</a:t>
+            </a:r>
+          </a:p>
+          <a:p>
+            <a:pPr>
+              <a:spcAft>
+                <a:spcPts val="800"/>
+              </a:spcAft>
+            </a:pPr>
+            <a:r>
+              <a:rPr sz="1900"/>
+              <a:t>• Each thread counts its own acquisitions (n)</a:t>
+            </a:r>
+          </a:p>
+          <a:p>
+            <a:pPr>
+              <a:spcAft>
+                <a:spcPts val="800"/>
+              </a:spcAft>
+            </a:pPr>
+            <a:r>
+              <a:rPr sz="1900"/>
+              <a:t>• Same loop for every lock: only lock_acquire / lock_release change</a:t>
+            </a:r>
+          </a:p>
+        </p:txBody>
+      </p:sp>
+      <p:sp>
+        <p:nvSpPr>
+          <p:cNvPr id="5" name="TextBox 4"/>
+          <p:cNvSpPr txBox="1"/>
+          <p:nvPr/>
+        </p:nvSpPr>
+        <p:spPr>
+          <a:xfrm>
+            <a:off x="5760720" y="1554480"/>
+            <a:ext cx="6035040" cy="3154680"/>
+          </a:xfrm>
+          <a:prstGeom prst="rect">
+            <a:avLst/>
+          </a:prstGeom>
+          <a:solidFill>
+            <a:srgbClr val="F4F4F4"/>
+          </a:solidFill>
+        </p:spPr>
+        <p:txBody>
+          <a:bodyPr wrap="none">
+            <a:spAutoFit/>
+          </a:bodyPr>
+          <a:lstStyle/>
+          <a:p>
+            <a:pPr>
+              <a:spcAft>
+                <a:spcPts val="0"/>
+              </a:spcAft>
+            </a:pPr>
+            <a:r>
+              <a:rPr sz="1300">
+                <a:latin typeface="Consolas"/>
+              </a:rPr>
+              <a:t>static void *worker(void *arg)</a:t>
+            </a:r>
+          </a:p>
+          <a:p>
+            <a:pPr>
+              <a:spcAft>
+                <a:spcPts val="0"/>
+              </a:spcAft>
+            </a:pPr>
+            <a:r>
+              <a:rPr sz="1300">
+                <a:latin typeface="Consolas"/>
+              </a:rPr>
+              <a:t>{</a:t>
+            </a:r>
+          </a:p>
+          <a:p>
+            <a:pPr>
+              <a:spcAft>
+                <a:spcPts val="0"/>
+              </a:spcAft>
+            </a:pPr>
+            <a:r>
+              <a:rPr sz="1300">
+                <a:latin typeface="Consolas"/>
+              </a:rPr>
+              <a:t>    int id = (int)(long)arg;</a:t>
+            </a:r>
+          </a:p>
+          <a:p>
+            <a:pPr>
+              <a:spcAft>
+                <a:spcPts val="0"/>
+              </a:spcAft>
+            </a:pPr>
+            <a:r>
+              <a:rPr sz="1300">
+                <a:latin typeface="Consolas"/>
+              </a:rPr>
+              <a:t>    long n = 0;</a:t>
+            </a:r>
+          </a:p>
+          <a:p>
+            <a:pPr>
+              <a:spcAft>
+                <a:spcPts val="0"/>
+              </a:spcAft>
+            </a:pPr>
+          </a:p>
+          <a:p>
+            <a:pPr>
+              <a:spcAft>
+                <a:spcPts val="0"/>
+              </a:spcAft>
+            </a:pPr>
+            <a:r>
+              <a:rPr sz="1300">
+                <a:latin typeface="Consolas"/>
+              </a:rPr>
+              <a:t>    pthread_barrier_wait(&amp;start);</a:t>
+            </a:r>
+          </a:p>
+          <a:p>
+            <a:pPr>
+              <a:spcAft>
+                <a:spcPts val="0"/>
+              </a:spcAft>
+            </a:pPr>
+            <a:r>
+              <a:rPr sz="1300">
+                <a:latin typeface="Consolas"/>
+              </a:rPr>
+              <a:t>    while (!stop) {</a:t>
+            </a:r>
+          </a:p>
+          <a:p>
+            <a:pPr>
+              <a:spcAft>
+                <a:spcPts val="0"/>
+              </a:spcAft>
+            </a:pPr>
+            <a:r>
+              <a:rPr sz="1300">
+                <a:latin typeface="Consolas"/>
+              </a:rPr>
+              <a:t>        lock_acquire(id);</a:t>
+            </a:r>
+          </a:p>
+          <a:p>
+            <a:pPr>
+              <a:spcAft>
+                <a:spcPts val="0"/>
+              </a:spcAft>
+            </a:pPr>
+            <a:r>
+              <a:rPr sz="1300">
+                <a:latin typeface="Consolas"/>
+              </a:rPr>
+              <a:t>        counter = counter + 1;          /* critical section */</a:t>
+            </a:r>
+          </a:p>
+          <a:p>
+            <a:pPr>
+              <a:spcAft>
+                <a:spcPts val="0"/>
+              </a:spcAft>
+            </a:pPr>
+            <a:r>
+              <a:rPr sz="1300">
+                <a:latin typeface="Consolas"/>
+              </a:rPr>
+              <a:t>        lock_release(id);</a:t>
+            </a:r>
+          </a:p>
+          <a:p>
+            <a:pPr>
+              <a:spcAft>
+                <a:spcPts val="0"/>
+              </a:spcAft>
+            </a:pPr>
+            <a:r>
+              <a:rPr sz="1300">
+                <a:latin typeface="Consolas"/>
+              </a:rPr>
+              <a:t>        n++;</a:t>
+            </a:r>
+          </a:p>
+          <a:p>
+            <a:pPr>
+              <a:spcAft>
+                <a:spcPts val="0"/>
+              </a:spcAft>
+            </a:pPr>
+            <a:r>
+              <a:rPr sz="1300">
+                <a:latin typeface="Consolas"/>
+              </a:rPr>
+              <a:t>    }</a:t>
+            </a:r>
+          </a:p>
+          <a:p>
+            <a:pPr>
+              <a:spcAft>
+                <a:spcPts val="0"/>
+              </a:spcAft>
+            </a:pPr>
+            <a:r>
+              <a:rPr sz="1300">
+                <a:latin typeface="Consolas"/>
+              </a:rPr>
+              <a:t>    acquired[id] = n;</a:t>
+            </a:r>
+          </a:p>
+          <a:p>
+            <a:pPr>
+              <a:spcAft>
+                <a:spcPts val="0"/>
+              </a:spcAft>
+            </a:pPr>
+            <a:r>
+              <a:rPr sz="1300">
+                <a:latin typeface="Consolas"/>
+              </a:rPr>
+              <a:t>    return NULL;</a:t>
+            </a:r>
+          </a:p>
+          <a:p>
+            <a:pPr>
+              <a:spcAft>
+                <a:spcPts val="0"/>
+              </a:spcAft>
+            </a:pPr>
+            <a:r>
+              <a:rPr sz="1300">
+                <a:latin typeface="Consolas"/>
+              </a:rPr>
+              <a:t>}</a:t>
             </a:r>
           </a:p>
         </p:txBody>
@@ -11878,7 +14447,7 @@
           <a:lstStyle/>
           <a:p>
             <a:r>
-              <a:t>Peterson's Algorithm: Idea</a:t>
+              <a:t>Reading One Run</a:t>
             </a:r>
           </a:p>
         </p:txBody>
@@ -11926,85 +14495,7 @@
         <p:spPr>
           <a:xfrm>
             <a:off x="548640" y="1554480"/>
-            <a:ext cx="4389120" cy="4937760"/>
-          </a:xfrm>
-          <a:prstGeom prst="rect">
-            <a:avLst/>
-          </a:prstGeom>
-          <a:noFill/>
-        </p:spPr>
-        <p:txBody>
-          <a:bodyPr wrap="square">
-            <a:spAutoFit/>
-          </a:bodyPr>
-          <a:lstStyle/>
-          <a:p>
-            <a:pPr>
-              <a:spcAft>
-                <a:spcPts val="800"/>
-              </a:spcAft>
-            </a:pPr>
-            <a:r>
-              <a:rPr sz="2000"/>
-              <a:t>• Pure software lock for two threads: only loads and stores</a:t>
-            </a:r>
-          </a:p>
-          <a:p>
-            <a:pPr>
-              <a:spcAft>
-                <a:spcPts val="800"/>
-              </a:spcAft>
-            </a:pPr>
-            <a:r>
-              <a:rPr sz="2000"/>
-              <a:t>• flag[i] = 1 — “thread i wants to enter”</a:t>
-            </a:r>
-          </a:p>
-          <a:p>
-            <a:pPr>
-              <a:spcAft>
-                <a:spcPts val="800"/>
-              </a:spcAft>
-            </a:pPr>
-            <a:r>
-              <a:rPr sz="2000"/>
-              <a:t>• turn = other — “you go first”</a:t>
-            </a:r>
-          </a:p>
-          <a:p>
-            <a:pPr>
-              <a:spcAft>
-                <a:spcPts val="800"/>
-              </a:spcAft>
-            </a:pPr>
-            <a:r>
-              <a:rPr sz="2000"/>
-              <a:t>• Wait while the other wants in and it is the other's turn</a:t>
-            </a:r>
-          </a:p>
-          <a:p>
-            <a:pPr>
-              <a:spcAft>
-                <a:spcPts val="800"/>
-              </a:spcAft>
-            </a:pPr>
-            <a:r>
-              <a:rPr sz="2000"/>
-              <a:t>• The thread that wrote turn last waits</a:t>
-            </a:r>
-          </a:p>
-        </p:txBody>
-      </p:sp>
-      <p:sp>
-        <p:nvSpPr>
-          <p:cNvPr id="5" name="TextBox 4"/>
-          <p:cNvSpPr txBox="1"/>
-          <p:nvPr/>
-        </p:nvSpPr>
-        <p:spPr>
-          <a:xfrm>
-            <a:off x="5120640" y="1463040"/>
-            <a:ext cx="6675120" cy="3886200"/>
+            <a:ext cx="6035040" cy="1828799"/>
           </a:xfrm>
           <a:prstGeom prst="rect">
             <a:avLst/>
@@ -12025,10 +14516,10 @@
               </a:spcAft>
             </a:pPr>
             <a:r>
-              <a:rPr sz="1350">
+              <a:rPr sz="1200">
                 <a:latin typeface="Consolas"/>
               </a:rPr>
-              <a:t>static volatile int flag[2];   /* flag[i] = 1: thread i wants in */</a:t>
+              <a:t>--- tas threads=4 all-cpus run 1 ---</a:t>
             </a:r>
           </a:p>
           <a:p>
@@ -12038,10 +14529,10 @@
               </a:spcAft>
             </a:pPr>
             <a:r>
-              <a:rPr sz="1350">
+              <a:rPr sz="1200">
                 <a:latin typeface="Consolas"/>
               </a:rPr>
-              <a:t>static volatile int turn;      /* whose turn it is to wait */</a:t>
+              <a:t>$ bin/tas 4 1</a:t>
             </a:r>
           </a:p>
           <a:p>
@@ -12050,18 +14541,11 @@
                 <a:spcPts val="0"/>
               </a:spcAft>
             </a:pPr>
-          </a:p>
-          <a:p>
-            <a:pPr>
-              <a:spcAft>
-                <a:spcPts val="0"/>
-              </a:spcAft>
-            </a:pPr>
-            <a:r>
-              <a:rPr sz="1350">
+            <a:r>
+              <a:rPr sz="1200">
                 <a:latin typeface="Consolas"/>
               </a:rPr>
-              <a:t>void lock_acquire(int self)</a:t>
+              <a:t>lock=tas threads=4 cpus=8</a:t>
             </a:r>
           </a:p>
           <a:p>
@@ -12071,10 +14555,10 @@
               </a:spcAft>
             </a:pPr>
             <a:r>
-              <a:rPr sz="1350">
+              <a:rPr sz="1200">
                 <a:latin typeface="Consolas"/>
               </a:rPr>
-              <a:t>{</a:t>
+              <a:t>  thread 0: 2246794 acquisitions</a:t>
             </a:r>
           </a:p>
           <a:p>
@@ -12084,10 +14568,10 @@
               </a:spcAft>
             </a:pPr>
             <a:r>
-              <a:rPr sz="1350">
+              <a:rPr sz="1200">
                 <a:latin typeface="Consolas"/>
               </a:rPr>
-              <a:t>    int other = 1 - self;</a:t>
+              <a:t>  thread 1: 2607290 acquisitions</a:t>
             </a:r>
           </a:p>
           <a:p>
@@ -12097,10 +14581,10 @@
               </a:spcAft>
             </a:pPr>
             <a:r>
-              <a:rPr sz="1350">
+              <a:rPr sz="1200">
                 <a:latin typeface="Consolas"/>
               </a:rPr>
-              <a:t>    flag[self] = 1;            /* I want to enter ...        */</a:t>
+              <a:t>  thread 2: 2315883 acquisitions</a:t>
             </a:r>
           </a:p>
           <a:p>
@@ -12110,10 +14594,10 @@
               </a:spcAft>
             </a:pPr>
             <a:r>
-              <a:rPr sz="1350">
+              <a:rPr sz="1200">
                 <a:latin typeface="Consolas"/>
               </a:rPr>
-              <a:t>    turn = other;              /* ... but you go first       */</a:t>
+              <a:t>  thread 3: 2362529 acquisitions</a:t>
             </a:r>
           </a:p>
           <a:p>
@@ -12123,10 +14607,10 @@
               </a:spcAft>
             </a:pPr>
             <a:r>
-              <a:rPr sz="1350">
+              <a:rPr sz="1200">
                 <a:latin typeface="Consolas"/>
               </a:rPr>
-              <a:t>    FENCE();                   /* stores done before the loads */</a:t>
+              <a:t>total=9532496 counter=9532496 lost=0</a:t>
             </a:r>
           </a:p>
           <a:p>
@@ -12136,108 +14620,77 @@
               </a:spcAft>
             </a:pPr>
             <a:r>
-              <a:rPr sz="1350">
+              <a:rPr sz="1200">
                 <a:latin typeface="Consolas"/>
               </a:rPr>
-              <a:t>    while (flag[other] == 1 &amp;&amp; turn == other)</a:t>
-            </a:r>
-          </a:p>
-          <a:p>
-            <a:pPr>
-              <a:spcAft>
-                <a:spcPts val="0"/>
-              </a:spcAft>
-            </a:pPr>
-            <a:r>
-              <a:rPr sz="1350">
-                <a:latin typeface="Consolas"/>
-              </a:rPr>
-              <a:t>        ;                      /* spin: you want in, your turn */</a:t>
-            </a:r>
-          </a:p>
-          <a:p>
-            <a:pPr>
-              <a:spcAft>
-                <a:spcPts val="0"/>
-              </a:spcAft>
-            </a:pPr>
-            <a:r>
-              <a:rPr sz="1350">
-                <a:latin typeface="Consolas"/>
-              </a:rPr>
-              <a:t>}</a:t>
-            </a:r>
-          </a:p>
-          <a:p>
-            <a:pPr>
-              <a:spcAft>
-                <a:spcPts val="0"/>
-              </a:spcAft>
-            </a:pPr>
-          </a:p>
-          <a:p>
-            <a:pPr>
-              <a:spcAft>
-                <a:spcPts val="0"/>
-              </a:spcAft>
-            </a:pPr>
-            <a:r>
-              <a:rPr sz="1350">
-                <a:latin typeface="Consolas"/>
-              </a:rPr>
-              <a:t>void lock_release(int self)</a:t>
-            </a:r>
-          </a:p>
-          <a:p>
-            <a:pPr>
-              <a:spcAft>
-                <a:spcPts val="0"/>
-              </a:spcAft>
-            </a:pPr>
-            <a:r>
-              <a:rPr sz="1350">
-                <a:latin typeface="Consolas"/>
-              </a:rPr>
-              <a:t>{</a:t>
-            </a:r>
-          </a:p>
-          <a:p>
-            <a:pPr>
-              <a:spcAft>
-                <a:spcPts val="0"/>
-              </a:spcAft>
-            </a:pPr>
-            <a:r>
-              <a:rPr sz="1350">
-                <a:latin typeface="Consolas"/>
-              </a:rPr>
-              <a:t>    FENCE();</a:t>
-            </a:r>
-          </a:p>
-          <a:p>
-            <a:pPr>
-              <a:spcAft>
-                <a:spcPts val="0"/>
-              </a:spcAft>
-            </a:pPr>
-            <a:r>
-              <a:rPr sz="1350">
-                <a:latin typeface="Consolas"/>
-              </a:rPr>
-              <a:t>    flag[self] = 0;</a:t>
-            </a:r>
-          </a:p>
-          <a:p>
-            <a:pPr>
-              <a:spcAft>
-                <a:spcPts val="0"/>
-              </a:spcAft>
-            </a:pPr>
-            <a:r>
-              <a:rPr sz="1350">
-                <a:latin typeface="Consolas"/>
-              </a:rPr>
-              <a:t>}</a:t>
+              <a:t>elapsed=1.000 s  throughput=9528568 acq/s  fairness(min/max)=0.862</a:t>
+            </a:r>
+          </a:p>
+        </p:txBody>
+      </p:sp>
+      <p:sp>
+        <p:nvSpPr>
+          <p:cNvPr id="5" name="TextBox 4"/>
+          <p:cNvSpPr txBox="1"/>
+          <p:nvPr/>
+        </p:nvSpPr>
+        <p:spPr>
+          <a:xfrm>
+            <a:off x="6858000" y="1554480"/>
+            <a:ext cx="4937760" cy="4937760"/>
+          </a:xfrm>
+          <a:prstGeom prst="rect">
+            <a:avLst/>
+          </a:prstGeom>
+          <a:noFill/>
+        </p:spPr>
+        <p:txBody>
+          <a:bodyPr wrap="square">
+            <a:spAutoFit/>
+          </a:bodyPr>
+          <a:lstStyle/>
+          <a:p>
+            <a:pPr>
+              <a:spcAft>
+                <a:spcPts val="800"/>
+              </a:spcAft>
+            </a:pPr>
+            <a:r>
+              <a:rPr sz="1800"/>
+              <a:t>• Mutual exclusion: total 9,532,496 = counter 9,532,496 → lost = 0</a:t>
+            </a:r>
+          </a:p>
+          <a:p>
+            <a:pPr>
+              <a:spcAft>
+                <a:spcPts val="800"/>
+              </a:spcAft>
+            </a:pPr>
+            <a:r>
+              <a:rPr sz="1800"/>
+              <a:t>• Absence of deadlock: the run finished</a:t>
+            </a:r>
+          </a:p>
+          <a:p>
+            <a:pPr>
+              <a:spcAft>
+                <a:spcPts val="800"/>
+              </a:spcAft>
+            </a:pPr>
+            <a:r>
+              <a:rPr sz="1800"/>
+              <a:t>• Fairness: 2,246,794 ÷ 2,607,290 = 0.862</a:t>
+            </a:r>
+          </a:p>
+          <a:p>
+            <a:pPr>
+              <a:spcAft>
+                <a:spcPts val="800"/>
+              </a:spcAft>
+            </a:pPr>
+            <a:r>
+              <a:rPr sz="1800"/>
+              <a:t>• Performance: 9.5 M acquisitions per second</a:t>
             </a:r>
           </a:p>
         </p:txBody>
@@ -12276,7 +14729,7 @@
           <a:lstStyle/>
           <a:p>
             <a:r>
-              <a:t>Peterson: Mutual Exclusion and Deadlock</a:t>
+              <a:t>Experiment Setup</a:t>
             </a:r>
           </a:p>
         </p:txBody>
@@ -12315,77 +14768,17 @@
           </a:p>
         </p:txBody>
       </p:sp>
-      <p:sp>
-        <p:nvSpPr>
-          <p:cNvPr id="4" name="TextBox 3"/>
-          <p:cNvSpPr txBox="1"/>
-          <p:nvPr/>
-        </p:nvSpPr>
-        <p:spPr>
-          <a:xfrm>
-            <a:off x="822960" y="1463040"/>
-            <a:ext cx="10789920" cy="2103120"/>
-          </a:xfrm>
-          <a:prstGeom prst="rect">
-            <a:avLst/>
-          </a:prstGeom>
-          <a:noFill/>
-        </p:spPr>
-        <p:txBody>
-          <a:bodyPr wrap="square">
-            <a:spAutoFit/>
-          </a:bodyPr>
-          <a:lstStyle/>
-          <a:p>
-            <a:pPr>
-              <a:spcAft>
-                <a:spcPts val="800"/>
-              </a:spcAft>
-            </a:pPr>
-            <a:r>
-              <a:rPr sz="1900"/>
-              <a:t>• Mutual exclusion: if both were inside, each saw turn == itself — impossible, turn holds one value</a:t>
-            </a:r>
-          </a:p>
-          <a:p>
-            <a:pPr>
-              <a:spcAft>
-                <a:spcPts val="800"/>
-              </a:spcAft>
-            </a:pPr>
-            <a:r>
-              <a:rPr sz="1900"/>
-              <a:t>• No deadlock: turn is 0 or 1, so one waiting thread always passes</a:t>
-            </a:r>
-          </a:p>
-          <a:p>
-            <a:pPr>
-              <a:spcAft>
-                <a:spcPts val="800"/>
-              </a:spcAft>
-            </a:pPr>
-            <a:r>
-              <a:rPr sz="1900">
-                <a:solidFill>
-                  <a:srgbClr val="C0392B"/>
-                </a:solidFill>
-              </a:rPr>
-              <a:t>• But x86 lets a load pass an earlier store (store buffer): both read flag[other] == 0 and both enter</a:t>
-            </a:r>
-          </a:p>
-        </p:txBody>
-      </p:sp>
       <p:graphicFrame>
         <p:nvGraphicFramePr>
-          <p:cNvPr id="5" name="Table 4"/>
+          <p:cNvPr id="4" name="Table 3"/>
           <p:cNvGraphicFramePr>
             <a:graphicFrameLocks noGrp="1"/>
           </p:cNvGraphicFramePr>
           <p:nvPr/>
         </p:nvGraphicFramePr>
         <p:xfrm>
-          <a:off x="822960" y="3566160"/>
-          <a:ext cx="10515600" cy="1463040"/>
+          <a:off x="548640" y="1554480"/>
+          <a:ext cx="6583680" cy="3291839"/>
         </p:xfrm>
         <a:graphic>
           <a:graphicData uri="http://schemas.openxmlformats.org/drawingml/2006/table">
@@ -12394,12 +14787,10 @@
                 <a:tableStyleId>{5C22544A-7EE6-4342-B048-85BDC9FD1C3A}</a:tableStyleId>
               </a:tblPr>
               <a:tblGrid>
-                <a:gridCol w="2926080"/>
-                <a:gridCol w="1463040"/>
-                <a:gridCol w="2926080"/>
-                <a:gridCol w="3200400"/>
+                <a:gridCol w="2743200"/>
+                <a:gridCol w="3840480"/>
               </a:tblGrid>
-              <a:tr h="365760">
+              <a:tr h="548639">
                 <a:tc>
                   <a:txBody>
                     <a:bodyPr/>
@@ -12407,12 +14798,111 @@
                     <a:p>
                       <a:r>
                         <a:rPr sz="1600"/>
-                        <a:t>Build (2 threads)</a:t>
+                        <a:t>Setting</a:t>
                       </a:r>
                     </a:p>
                   </a:txBody>
                   <a:tcPr/>
                 </a:tc>
+                <a:tc>
+                  <a:txBody>
+                    <a:bodyPr/>
+                    <a:lstStyle/>
+                    <a:p>
+                      <a:r>
+                        <a:rPr sz="1600"/>
+                        <a:t>Values</a:t>
+                      </a:r>
+                    </a:p>
+                  </a:txBody>
+                  <a:tcPr/>
+                </a:tc>
+              </a:tr>
+              <a:tr h="548639">
+                <a:tc>
+                  <a:txBody>
+                    <a:bodyPr/>
+                    <a:lstStyle/>
+                    <a:p>
+                      <a:r>
+                        <a:rPr sz="1600"/>
+                        <a:t>Locks</a:t>
+                      </a:r>
+                    </a:p>
+                  </a:txBody>
+                  <a:tcPr/>
+                </a:tc>
+                <a:tc>
+                  <a:txBody>
+                    <a:bodyPr/>
+                    <a:lstStyle/>
+                    <a:p>
+                      <a:r>
+                        <a:rPr sz="1600"/>
+                        <a:t>Peterson, LL/SC, MCS</a:t>
+                      </a:r>
+                    </a:p>
+                  </a:txBody>
+                  <a:tcPr/>
+                </a:tc>
+              </a:tr>
+              <a:tr h="548639">
+                <a:tc>
+                  <a:txBody>
+                    <a:bodyPr/>
+                    <a:lstStyle/>
+                    <a:p>
+                      <a:r>
+                        <a:rPr sz="1600"/>
+                        <a:t>References (Lecture 8)</a:t>
+                      </a:r>
+                    </a:p>
+                  </a:txBody>
+                  <a:tcPr/>
+                </a:tc>
+                <a:tc>
+                  <a:txBody>
+                    <a:bodyPr/>
+                    <a:lstStyle/>
+                    <a:p>
+                      <a:r>
+                        <a:rPr sz="1600"/>
+                        <a:t>TAS spin lock, pthread_mutex</a:t>
+                      </a:r>
+                    </a:p>
+                  </a:txBody>
+                  <a:tcPr/>
+                </a:tc>
+              </a:tr>
+              <a:tr h="548639">
+                <a:tc>
+                  <a:txBody>
+                    <a:bodyPr/>
+                    <a:lstStyle/>
+                    <a:p>
+                      <a:r>
+                        <a:rPr sz="1600"/>
+                        <a:t>Threads</a:t>
+                      </a:r>
+                    </a:p>
+                  </a:txBody>
+                  <a:tcPr/>
+                </a:tc>
+                <a:tc>
+                  <a:txBody>
+                    <a:bodyPr/>
+                    <a:lstStyle/>
+                    <a:p>
+                      <a:r>
+                        <a:rPr sz="1600"/>
+                        <a:t>1, 2, 4, 8 (Peterson: 1, 2)</a:t>
+                      </a:r>
+                    </a:p>
+                  </a:txBody>
+                  <a:tcPr/>
+                </a:tc>
+              </a:tr>
+              <a:tr h="548639">
                 <a:tc>
                   <a:txBody>
                     <a:bodyPr/>
@@ -12433,7 +14923,22 @@
                     <a:p>
                       <a:r>
                         <a:rPr sz="1600"/>
-                        <a:t>Runs with lost updates</a:t>
+                        <a:t>all 8, and one (taskset -c 0)</a:t>
+                      </a:r>
+                    </a:p>
+                  </a:txBody>
+                  <a:tcPr/>
+                </a:tc>
+              </a:tr>
+              <a:tr h="548644">
+                <a:tc>
+                  <a:txBody>
+                    <a:bodyPr/>
+                    <a:lstStyle/>
+                    <a:p>
+                      <a:r>
+                        <a:rPr sz="1600"/>
+                        <a:t>Runs</a:t>
                       </a:r>
                     </a:p>
                   </a:txBody>
@@ -12446,169 +14951,7 @@
                     <a:p>
                       <a:r>
                         <a:rPr sz="1600"/>
-                        <a:t>Lost updates per run</a:t>
-                      </a:r>
-                    </a:p>
-                  </a:txBody>
-                  <a:tcPr/>
-                </a:tc>
-              </a:tr>
-              <a:tr h="365760">
-                <a:tc>
-                  <a:txBody>
-                    <a:bodyPr/>
-                    <a:lstStyle/>
-                    <a:p>
-                      <a:r>
-                        <a:rPr sz="1600"/>
-                        <a:t>no fence</a:t>
-                      </a:r>
-                    </a:p>
-                  </a:txBody>
-                  <a:tcPr/>
-                </a:tc>
-                <a:tc>
-                  <a:txBody>
-                    <a:bodyPr/>
-                    <a:lstStyle/>
-                    <a:p>
-                      <a:r>
-                        <a:rPr sz="1600"/>
-                        <a:t>all 8</a:t>
-                      </a:r>
-                    </a:p>
-                  </a:txBody>
-                  <a:tcPr/>
-                </a:tc>
-                <a:tc>
-                  <a:txBody>
-                    <a:bodyPr/>
-                    <a:lstStyle/>
-                    <a:p>
-                      <a:r>
-                        <a:rPr sz="1600"/>
-                        <a:t>5 / 5</a:t>
-                      </a:r>
-                    </a:p>
-                  </a:txBody>
-                  <a:tcPr/>
-                </a:tc>
-                <a:tc>
-                  <a:txBody>
-                    <a:bodyPr/>
-                    <a:lstStyle/>
-                    <a:p>
-                      <a:r>
-                        <a:rPr sz="1600"/>
-                        <a:t>233,108 – 813,401</a:t>
-                      </a:r>
-                    </a:p>
-                  </a:txBody>
-                  <a:tcPr/>
-                </a:tc>
-              </a:tr>
-              <a:tr h="365760">
-                <a:tc>
-                  <a:txBody>
-                    <a:bodyPr/>
-                    <a:lstStyle/>
-                    <a:p>
-                      <a:r>
-                        <a:rPr sz="1600"/>
-                        <a:t>no fence</a:t>
-                      </a:r>
-                    </a:p>
-                  </a:txBody>
-                  <a:tcPr/>
-                </a:tc>
-                <a:tc>
-                  <a:txBody>
-                    <a:bodyPr/>
-                    <a:lstStyle/>
-                    <a:p>
-                      <a:r>
-                        <a:rPr sz="1600"/>
-                        <a:t>one</a:t>
-                      </a:r>
-                    </a:p>
-                  </a:txBody>
-                  <a:tcPr/>
-                </a:tc>
-                <a:tc>
-                  <a:txBody>
-                    <a:bodyPr/>
-                    <a:lstStyle/>
-                    <a:p>
-                      <a:r>
-                        <a:rPr sz="1600"/>
-                        <a:t>0 / 3</a:t>
-                      </a:r>
-                    </a:p>
-                  </a:txBody>
-                  <a:tcPr/>
-                </a:tc>
-                <a:tc>
-                  <a:txBody>
-                    <a:bodyPr/>
-                    <a:lstStyle/>
-                    <a:p>
-                      <a:r>
-                        <a:rPr sz="1600"/>
-                        <a:t>0</a:t>
-                      </a:r>
-                    </a:p>
-                  </a:txBody>
-                  <a:tcPr/>
-                </a:tc>
-              </a:tr>
-              <a:tr h="365760">
-                <a:tc>
-                  <a:txBody>
-                    <a:bodyPr/>
-                    <a:lstStyle/>
-                    <a:p>
-                      <a:r>
-                        <a:rPr sz="1600"/>
-                        <a:t>with FENCE()</a:t>
-                      </a:r>
-                    </a:p>
-                  </a:txBody>
-                  <a:tcPr/>
-                </a:tc>
-                <a:tc>
-                  <a:txBody>
-                    <a:bodyPr/>
-                    <a:lstStyle/>
-                    <a:p>
-                      <a:r>
-                        <a:rPr sz="1600"/>
-                        <a:t>all 8</a:t>
-                      </a:r>
-                    </a:p>
-                  </a:txBody>
-                  <a:tcPr/>
-                </a:tc>
-                <a:tc>
-                  <a:txBody>
-                    <a:bodyPr/>
-                    <a:lstStyle/>
-                    <a:p>
-                      <a:r>
-                        <a:rPr sz="1600"/>
-                        <a:t>0 / 5</a:t>
-                      </a:r>
-                    </a:p>
-                  </a:txBody>
-                  <a:tcPr/>
-                </a:tc>
-                <a:tc>
-                  <a:txBody>
-                    <a:bodyPr/>
-                    <a:lstStyle/>
-                    <a:p>
-                      <a:r>
-                        <a:rPr sz="1600"/>
-                        <a:t>0</a:t>
+                        <a:t>3 × 1 s per setting, median shown</a:t>
                       </a:r>
                     </a:p>
                   </a:txBody>
@@ -12621,14 +14964,14 @@
       </p:graphicFrame>
       <p:sp>
         <p:nvSpPr>
-          <p:cNvPr id="6" name="TextBox 5"/>
+          <p:cNvPr id="5" name="TextBox 4"/>
           <p:cNvSpPr txBox="1"/>
           <p:nvPr/>
         </p:nvSpPr>
         <p:spPr>
           <a:xfrm>
-            <a:off x="822960" y="5394960"/>
-            <a:ext cx="10789920" cy="914400"/>
+            <a:off x="7498079" y="1554480"/>
+            <a:ext cx="4297680" cy="4937760"/>
           </a:xfrm>
           <a:prstGeom prst="rect">
             <a:avLst/>
@@ -12648,7 +14991,55 @@
             </a:pPr>
             <a:r>
               <a:rPr sz="1700"/>
-              <a:t>• FENCE() compiles to  lock orq $0x0,(%rsp)  — a full barrier: the stores drain before the loads</a:t>
+              <a:t>• WSL2 Ubuntu, kernel 6.18.33.2-microsoft-standard-WSL2</a:t>
+            </a:r>
+          </a:p>
+          <a:p>
+            <a:pPr>
+              <a:spcAft>
+                <a:spcPts val="800"/>
+              </a:spcAft>
+            </a:pPr>
+            <a:r>
+              <a:rPr sz="1700"/>
+              <a:t>• 8 CPUs</a:t>
+            </a:r>
+          </a:p>
+          <a:p>
+            <a:pPr>
+              <a:spcAft>
+                <a:spcPts val="800"/>
+              </a:spcAft>
+            </a:pPr>
+            <a:r>
+              <a:rPr sz="1700"/>
+              <a:t>• gcc 15.2.0 -O2</a:t>
+            </a:r>
+          </a:p>
+          <a:p>
+            <a:pPr>
+              <a:spcAft>
+                <a:spcPts val="800"/>
+              </a:spcAft>
+            </a:pPr>
+            <a:r>
+              <a:rPr sz="1700"/>
+              <a:t>• LL/SC on AArch64: qemu-aarch64 10.2.1</a:t>
+            </a:r>
+          </a:p>
+          <a:p>
+            <a:pPr>
+              <a:spcAft>
+                <a:spcPts val="800"/>
+              </a:spcAft>
+            </a:pPr>
+            <a:r>
+              <a:rPr sz="1700">
+                <a:solidFill>
+                  <a:srgbClr val="C0392B"/>
+                </a:solidFill>
+              </a:rPr>
+              <a:t>• One CPU shows what spinning costs when the lock holder cannot run</a:t>
             </a:r>
           </a:p>
         </p:txBody>
@@ -12687,14 +15078,40 @@
           <a:lstStyle/>
           <a:p>
             <a:r>
-              <a:t>Peterson: Performance</a:t>
-            </a:r>
-          </a:p>
-        </p:txBody>
-      </p:sp>
-      <p:sp>
-        <p:nvSpPr>
-          <p:cNvPr id="3" name="TextBox 2"/>
+              <a:t>Peterson's Algorithm</a:t>
+            </a:r>
+          </a:p>
+        </p:txBody>
+      </p:sp>
+      <p:sp>
+        <p:nvSpPr>
+          <p:cNvPr id="3" name="Text Placeholder 2"/>
+          <p:cNvSpPr>
+            <a:spLocks noGrp="1"/>
+          </p:cNvSpPr>
+          <p:nvPr>
+            <p:ph type="body" idx="1"/>
+          </p:nvPr>
+        </p:nvSpPr>
+        <p:spPr/>
+        <p:txBody>
+          <a:bodyPr/>
+          <a:lstStyle/>
+          <a:p>
+            <a:r>
+              <a:t>67070501018</a:t>
+            </a:r>
+          </a:p>
+          <a:p>
+            <a:r>
+              <a:t>Tithinan Sobking</a:t>
+            </a:r>
+          </a:p>
+        </p:txBody>
+      </p:sp>
+      <p:sp>
+        <p:nvSpPr>
+          <p:cNvPr id="4" name="TextBox 3"/>
           <p:cNvSpPr txBox="1"/>
           <p:nvPr/>
         </p:nvSpPr>
@@ -12722,95 +15139,6 @@
                 </a:solidFill>
               </a:rPr>
               <a:t>8</a:t>
-            </a:r>
-          </a:p>
-        </p:txBody>
-      </p:sp>
-      <p:graphicFrame>
-        <p:nvGraphicFramePr>
-          <p:cNvPr id="4" name="Chart 3"/>
-          <p:cNvGraphicFramePr>
-            <a:graphicFrameLocks noGrp="1"/>
-          </p:cNvGraphicFramePr>
-          <p:nvPr/>
-        </p:nvGraphicFramePr>
-        <p:xfrm>
-          <a:off x="548640" y="1463040"/>
-          <a:ext cx="6035040" cy="4937760"/>
-        </p:xfrm>
-        <a:graphic>
-          <a:graphicData uri="http://schemas.openxmlformats.org/drawingml/2006/chart">
-            <c:chart xmlns:c="http://schemas.openxmlformats.org/drawingml/2006/chart" r:id="rId3"/>
-          </a:graphicData>
-        </a:graphic>
-      </p:graphicFrame>
-      <p:sp>
-        <p:nvSpPr>
-          <p:cNvPr id="5" name="TextBox 4"/>
-          <p:cNvSpPr txBox="1"/>
-          <p:nvPr/>
-        </p:nvSpPr>
-        <p:spPr>
-          <a:xfrm>
-            <a:off x="6858000" y="1645920"/>
-            <a:ext cx="4937760" cy="4572000"/>
-          </a:xfrm>
-          <a:prstGeom prst="rect">
-            <a:avLst/>
-          </a:prstGeom>
-          <a:noFill/>
-        </p:spPr>
-        <p:txBody>
-          <a:bodyPr wrap="square">
-            <a:spAutoFit/>
-          </a:bodyPr>
-          <a:lstStyle/>
-          <a:p>
-            <a:pPr>
-              <a:spcAft>
-                <a:spcPts val="800"/>
-              </a:spcAft>
-            </a:pPr>
-            <a:r>
-              <a:rPr sz="1900"/>
-              <a:t>• 1 thread: 63 M acq/s — no contention</a:t>
-            </a:r>
-          </a:p>
-          <a:p>
-            <a:pPr>
-              <a:spcAft>
-                <a:spcPts val="800"/>
-              </a:spcAft>
-            </a:pPr>
-            <a:r>
-              <a:rPr sz="1900"/>
-              <a:t>• 2 threads, all CPUs: 15 M acq/s — flag and turn move between cores</a:t>
-            </a:r>
-          </a:p>
-          <a:p>
-            <a:pPr>
-              <a:spcAft>
-                <a:spcPts val="800"/>
-              </a:spcAft>
-            </a:pPr>
-            <a:r>
-              <a:rPr sz="1900">
-                <a:solidFill>
-                  <a:srgbClr val="C0392B"/>
-                </a:solidFill>
-              </a:rPr>
-              <a:t>• 2 threads, one CPU: 165 k acq/s — the waiter spins until the scheduler switches</a:t>
-            </a:r>
-          </a:p>
-          <a:p>
-            <a:pPr>
-              <a:spcAft>
-                <a:spcPts val="800"/>
-              </a:spcAft>
-            </a:pPr>
-            <a:r>
-              <a:rPr sz="1900"/>
-              <a:t>• Busy-waiting costs a whole time slice when the other thread is not running</a:t>
             </a:r>
           </a:p>
         </p:txBody>
@@ -12849,7 +15177,7 @@
           <a:lstStyle/>
           <a:p>
             <a:r>
-              <a:t>Peterson: Fairness and Limitations</a:t>
+              <a:t>Peterson's Algorithm: Idea</a:t>
             </a:r>
           </a:p>
         </p:txBody>
@@ -12896,8 +15224,8 @@
         </p:nvSpPr>
         <p:spPr>
           <a:xfrm>
-            <a:off x="822960" y="1554480"/>
-            <a:ext cx="10789920" cy="4937760"/>
+            <a:off x="548640" y="1554480"/>
+            <a:ext cx="4389120" cy="4937760"/>
           </a:xfrm>
           <a:prstGeom prst="rect">
             <a:avLst/>
@@ -12917,7 +15245,7 @@
             </a:pPr>
             <a:r>
               <a:rPr sz="2000"/>
-              <a:t>• All CPUs, 2 threads: fairness 0.99 — turn gives way to the other thread, so a waiter enters after at most one entry by the other (bounded waiting)</a:t>
+              <a:t>• Pure software lock for two threads: only loads and stores</a:t>
             </a:r>
           </a:p>
           <a:p>
@@ -12928,7 +15256,7 @@
             </a:pPr>
             <a:r>
               <a:rPr sz="2000"/>
-              <a:t>• One CPU, 2 threads: fairness 0.001 (run 1: 126 vs 93,264) — with spinning, the scheduler decides</a:t>
+              <a:t>• flag[i] = 1 — “thread i wants to enter”</a:t>
             </a:r>
           </a:p>
           <a:p>
@@ -12939,40 +15267,276 @@
             </a:pPr>
             <a:r>
               <a:rPr sz="2000"/>
-              <a:t>• Limitations:</a:t>
-            </a:r>
-          </a:p>
-          <a:p>
-            <a:pPr lvl="1">
+              <a:t>• turn = other — “you go first”</a:t>
+            </a:r>
+          </a:p>
+          <a:p>
+            <a:pPr>
               <a:spcAft>
                 <a:spcPts val="800"/>
               </a:spcAft>
             </a:pPr>
             <a:r>
-              <a:rPr sz="1800"/>
-              <a:t>– Two threads only (N threads need a tournament of Peterson locks or the filter lock)</a:t>
-            </a:r>
-          </a:p>
-          <a:p>
-            <a:pPr lvl="1">
+              <a:rPr sz="2000"/>
+              <a:t>• Wait while the other wants in and it is the other's turn</a:t>
+            </a:r>
+          </a:p>
+          <a:p>
+            <a:pPr>
               <a:spcAft>
                 <a:spcPts val="800"/>
               </a:spcAft>
             </a:pPr>
             <a:r>
-              <a:rPr sz="1800"/>
-              <a:t>– Needs a memory fence on modern CPUs — the textbook version is broken on x86</a:t>
-            </a:r>
-          </a:p>
-          <a:p>
-            <a:pPr lvl="1">
-              <a:spcAft>
-                <a:spcPts val="800"/>
-              </a:spcAft>
-            </a:pPr>
-            <a:r>
-              <a:rPr sz="1800"/>
-              <a:t>– Spins instead of sleeping</a:t>
+              <a:rPr sz="2000"/>
+              <a:t>• The thread that wrote turn last waits</a:t>
+            </a:r>
+          </a:p>
+        </p:txBody>
+      </p:sp>
+      <p:sp>
+        <p:nvSpPr>
+          <p:cNvPr id="5" name="TextBox 4"/>
+          <p:cNvSpPr txBox="1"/>
+          <p:nvPr/>
+        </p:nvSpPr>
+        <p:spPr>
+          <a:xfrm>
+            <a:off x="5120640" y="1463040"/>
+            <a:ext cx="6675120" cy="3886200"/>
+          </a:xfrm>
+          <a:prstGeom prst="rect">
+            <a:avLst/>
+          </a:prstGeom>
+          <a:solidFill>
+            <a:srgbClr val="F4F4F4"/>
+          </a:solidFill>
+        </p:spPr>
+        <p:txBody>
+          <a:bodyPr wrap="none">
+            <a:spAutoFit/>
+          </a:bodyPr>
+          <a:lstStyle/>
+          <a:p>
+            <a:pPr>
+              <a:spcAft>
+                <a:spcPts val="0"/>
+              </a:spcAft>
+            </a:pPr>
+            <a:r>
+              <a:rPr sz="1350">
+                <a:latin typeface="Consolas"/>
+              </a:rPr>
+              <a:t>static volatile int flag[2];   /* flag[i] = 1: thread i wants in */</a:t>
+            </a:r>
+          </a:p>
+          <a:p>
+            <a:pPr>
+              <a:spcAft>
+                <a:spcPts val="0"/>
+              </a:spcAft>
+            </a:pPr>
+            <a:r>
+              <a:rPr sz="1350">
+                <a:latin typeface="Consolas"/>
+              </a:rPr>
+              <a:t>static volatile int turn;      /* whose turn it is to wait */</a:t>
+            </a:r>
+          </a:p>
+          <a:p>
+            <a:pPr>
+              <a:spcAft>
+                <a:spcPts val="0"/>
+              </a:spcAft>
+            </a:pPr>
+          </a:p>
+          <a:p>
+            <a:pPr>
+              <a:spcAft>
+                <a:spcPts val="0"/>
+              </a:spcAft>
+            </a:pPr>
+            <a:r>
+              <a:rPr sz="1350">
+                <a:latin typeface="Consolas"/>
+              </a:rPr>
+              <a:t>void lock_acquire(int self)</a:t>
+            </a:r>
+          </a:p>
+          <a:p>
+            <a:pPr>
+              <a:spcAft>
+                <a:spcPts val="0"/>
+              </a:spcAft>
+            </a:pPr>
+            <a:r>
+              <a:rPr sz="1350">
+                <a:latin typeface="Consolas"/>
+              </a:rPr>
+              <a:t>{</a:t>
+            </a:r>
+          </a:p>
+          <a:p>
+            <a:pPr>
+              <a:spcAft>
+                <a:spcPts val="0"/>
+              </a:spcAft>
+            </a:pPr>
+            <a:r>
+              <a:rPr sz="1350">
+                <a:latin typeface="Consolas"/>
+              </a:rPr>
+              <a:t>    int other = 1 - self;</a:t>
+            </a:r>
+          </a:p>
+          <a:p>
+            <a:pPr>
+              <a:spcAft>
+                <a:spcPts val="0"/>
+              </a:spcAft>
+            </a:pPr>
+            <a:r>
+              <a:rPr sz="1350">
+                <a:latin typeface="Consolas"/>
+              </a:rPr>
+              <a:t>    flag[self] = 1;            /* I want to enter ...        */</a:t>
+            </a:r>
+          </a:p>
+          <a:p>
+            <a:pPr>
+              <a:spcAft>
+                <a:spcPts val="0"/>
+              </a:spcAft>
+            </a:pPr>
+            <a:r>
+              <a:rPr sz="1350">
+                <a:latin typeface="Consolas"/>
+              </a:rPr>
+              <a:t>    turn = other;              /* ... but you go first       */</a:t>
+            </a:r>
+          </a:p>
+          <a:p>
+            <a:pPr>
+              <a:spcAft>
+                <a:spcPts val="0"/>
+              </a:spcAft>
+            </a:pPr>
+            <a:r>
+              <a:rPr sz="1350">
+                <a:latin typeface="Consolas"/>
+              </a:rPr>
+              <a:t>    FENCE();                   /* stores done before the loads */</a:t>
+            </a:r>
+          </a:p>
+          <a:p>
+            <a:pPr>
+              <a:spcAft>
+                <a:spcPts val="0"/>
+              </a:spcAft>
+            </a:pPr>
+            <a:r>
+              <a:rPr sz="1350">
+                <a:latin typeface="Consolas"/>
+              </a:rPr>
+              <a:t>    while (flag[other] == 1 &amp;&amp; turn == other)</a:t>
+            </a:r>
+          </a:p>
+          <a:p>
+            <a:pPr>
+              <a:spcAft>
+                <a:spcPts val="0"/>
+              </a:spcAft>
+            </a:pPr>
+            <a:r>
+              <a:rPr sz="1350">
+                <a:latin typeface="Consolas"/>
+              </a:rPr>
+              <a:t>        ;                      /* spin: you want in, your turn */</a:t>
+            </a:r>
+          </a:p>
+          <a:p>
+            <a:pPr>
+              <a:spcAft>
+                <a:spcPts val="0"/>
+              </a:spcAft>
+            </a:pPr>
+            <a:r>
+              <a:rPr sz="1350">
+                <a:latin typeface="Consolas"/>
+              </a:rPr>
+              <a:t>}</a:t>
+            </a:r>
+          </a:p>
+          <a:p>
+            <a:pPr>
+              <a:spcAft>
+                <a:spcPts val="0"/>
+              </a:spcAft>
+            </a:pPr>
+          </a:p>
+          <a:p>
+            <a:pPr>
+              <a:spcAft>
+                <a:spcPts val="0"/>
+              </a:spcAft>
+            </a:pPr>
+            <a:r>
+              <a:rPr sz="1350">
+                <a:latin typeface="Consolas"/>
+              </a:rPr>
+              <a:t>void lock_release(int self)</a:t>
+            </a:r>
+          </a:p>
+          <a:p>
+            <a:pPr>
+              <a:spcAft>
+                <a:spcPts val="0"/>
+              </a:spcAft>
+            </a:pPr>
+            <a:r>
+              <a:rPr sz="1350">
+                <a:latin typeface="Consolas"/>
+              </a:rPr>
+              <a:t>{</a:t>
+            </a:r>
+          </a:p>
+          <a:p>
+            <a:pPr>
+              <a:spcAft>
+                <a:spcPts val="0"/>
+              </a:spcAft>
+            </a:pPr>
+            <a:r>
+              <a:rPr sz="1350">
+                <a:latin typeface="Consolas"/>
+              </a:rPr>
+              <a:t>    FENCE();</a:t>
+            </a:r>
+          </a:p>
+          <a:p>
+            <a:pPr>
+              <a:spcAft>
+                <a:spcPts val="0"/>
+              </a:spcAft>
+            </a:pPr>
+            <a:r>
+              <a:rPr sz="1350">
+                <a:latin typeface="Consolas"/>
+              </a:rPr>
+              <a:t>    flag[self] = 0;</a:t>
+            </a:r>
+          </a:p>
+          <a:p>
+            <a:pPr>
+              <a:spcAft>
+                <a:spcPts val="0"/>
+              </a:spcAft>
+            </a:pPr>
+            <a:r>
+              <a:rPr sz="1350">
+                <a:latin typeface="Consolas"/>
+              </a:rPr>
+              <a:t>}</a:t>
             </a:r>
           </a:p>
         </p:txBody>
